--- a/reports/midterm_slides_ru.pptx
+++ b/reports/midterm_slides_ru.pptx
@@ -12,9 +12,11 @@
     <p:sldId id="260" r:id="rId6"/>
     <p:sldId id="261" r:id="rId7"/>
     <p:sldId id="262" r:id="rId8"/>
+    <p:sldId id="263" r:id="rId9"/>
+    <p:sldId id="264" r:id="rId10"/>
   </p:sldIdLst>
   <p:notesMasterIdLst>
-    <p:notesMasterId r:id="rId9"/>
+    <p:notesMasterId r:id="rId11"/>
   </p:notesMasterIdLst>
   <p:sldSz cx="12192000" cy="6858000"/>
   <p:notesSz cx="6858000" cy="12192000"/>
@@ -113,27 +115,29 @@
   <p:extLst>
     <p:ext uri="{521415D9-36F7-43E2-AB2F-B90AF26B5E84}">
       <p14:sectionLst xmlns:p14="http://schemas.microsoft.com/office/powerpoint/2010/main">
-        <p14:section name="Задача и данные" id="{7a298be7-0a39-6b92-88dd-7dba0197b590}">
+        <p14:section name="Задача и данные" id="{b48d26bb-93d7-ac67-33d1-9d01d773ee4d}">
           <p14:sldIdLst>
             <p14:sldId id="256"/>
             <p14:sldId id="257"/>
-          </p14:sldIdLst>
-        </p14:section>
-        <p14:section name="Базовая модель и метрики" id="{4aef710b-18dd-cee1-67c6-605d218422cd}">
-          <p14:sldIdLst>
             <p14:sldId id="258"/>
             <p14:sldId id="259"/>
           </p14:sldIdLst>
         </p14:section>
-        <p14:section name="Результаты" id="{568b0a06-8f07-a8c1-dd72-51fa8436d6ed}">
+        <p14:section name="Базовая модель и метрики" id="{af40720f-ae4a-a9f8-42d7-a31365e27776}">
           <p14:sldIdLst>
             <p14:sldId id="260"/>
             <p14:sldId id="261"/>
           </p14:sldIdLst>
         </p14:section>
-        <p14:section name="Выводы" id="{6c8a3702-4ab3-b84f-c2a3-25c791c0a298}">
+        <p14:section name="Результаты" id="{081b6443-1efe-73d3-7b2b-e17144a4dbb2}">
           <p14:sldIdLst>
             <p14:sldId id="262"/>
+            <p14:sldId id="263"/>
+          </p14:sldIdLst>
+        </p14:section>
+        <p14:section name="Выводы" id="{844fe2f7-9aa2-eb9c-0534-493d8775c8e1}">
+          <p14:sldIdLst>
+            <p14:sldId id="264"/>
           </p14:sldIdLst>
         </p14:section>
       </p14:sectionLst>
@@ -716,7 +720,7 @@
           <a:p>
             <a:r>
               <a:rPr lang="en-US" dirty="0"/>
-              <a:t>BASELINE И ПОЧЕМУ ОН. Модель: логистическая регрессия с весами классов. Схема слева: сначала подготовка (пропуски заполняем медианой, числа приводим к одному масштабу, категории превращаем в столбцы из 0 и 1), потом сама модель, на выходе оценка риска от 0 до 1. Подготовка обучается только на train, чтобы не подглядывать в тест. Почему именно она: 1) выдаёт вероятность, значит закупки можно отсортировать по риску; 2) у каждого признака понятный коэффициент, можно проверить модель здравым смыслом; 3) веса классов решают проблему редких срывов: один срыв весит как 14 обычных договоров; 4) обучается за секунду. Почему не другие: бустинг и нейросеть сильнее, но их надо с чем-то сравнивать, это тема третьего задания. SVM и kNN слишком медленные на 266 тысячах строк. Наивный Байес предполагает независимые признаки, а у нас они сильно связаны.</a:t>
+              <a:t>ИЗ ЧЕГО СОСТОЯЛ ДАТАСЕТ. Датасет состоит из пяти связанных таблиц, как в реляционной базе данных. Главная таблица trd_buy: 630 762 закупки, то есть объявления; в ней сумма, способ закупки, даты и организатор. Lots: 1,29 млн лотов, то есть что именно закупают. Trd_app: 1,07 млн заявок участников, кто пришёл и какую цену предложил. Contracts: 556 тысяч записей договоров со статусом, отсюда берётся target. Rnu: реестр недобросовестных участников, 17 тысяч записей. Таблицы связаны по id закупки и по БИН поставщика. Как получилась одна таблица для модели. Шаг 1: один договор мог быть записан несколько раз из-за допсоглашений, 13,6% строк были такими версиями; я оставил последнюю версию каждого договора, получилось 480 тысяч договоров. Шаг 2: оставил только закупки, по которым есть договор, 358 789 штук; если договора нет, то и предсказывать нечего. Шаг 3: собрал признаки, одна строка это одна закупка, 20 признаков и target. Ещё при очистке убрал полностью пустые столбцы, привёл даты к нормальному типу, а сумму взял в логарифме, потому что разброс от тысяч до миллиардов тенге.</a:t>
             </a:r>
             <a:endParaRPr lang="en-US" dirty="0"/>
           </a:p>
@@ -804,7 +808,7 @@
           <a:p>
             <a:r>
               <a:rPr lang="en-US" dirty="0"/>
-              <a:t>МЕТРИКИ. Сначала почему не accuracy, то есть не доля правильных ответов. Если всегда отвечать «не сорвётся», получится 93,4% правильных ответов, и при этом ни одного найденного срыва. Поэтому accuracy здесь бесполезна. Мы берём четыре метрики. ROC-AUC: вероятность, что сорванному договору модель поставит оценку выше, чем нормальному; 0,5 это случайность, 1 это идеал; у нас 0,79. PR-AUC: средняя точность по всем уровням полноты; случайный уровень равен доле срывов 0,066, у нас 0,26, то есть в 4 раза лучше; это самая честная метрика при редком классе. F1: баланс между точностью (сколько из помеченных действительно сорвались) и полнотой (сколько срывов мы нашли) при одном пороге; порог подбирали на валидации. Precision@1%: качество самой верхушки списка, потому что аудитор может проверить только малую часть. Числа справа это результат baseline на тесте.</a:t>
+              <a:t>ЧТО МЫ ВЫЯСНИЛИ ИЗ ДАННЫХ. Это результаты разведочного анализа, EDA. Первое, левый график: чем дороже закупка, тем чаще срывается договор. В самых дешёвых закупках срывается 1,5%, в самых дорогих 16,5%, разница в десять раз. Крупные договоры длиннее и сложнее. Второе: важен способ закупки. Запрос ценовых предложений срывается в 9% случаев, закупка из одного источника в 3%, по рамочным соглашениям в 1%. В запросе ценовых предложений автоматически побеждает самая низкая цена, поставщики занижают цену и потом не справляются. Третье, правый график: парадокс Симпсона. Если смотреть на все закупки, один участник выглядит самым безопасным, 4,4%. Но половина таких закупок идёт из одного источника, где риск низкий сам по себе. Внутри одного способа, запроса ценовых предложений, один участник даёт 9,8% срывов, а два участника 5,8%. А при шести и более участниках риск снова растёт, до 11%: победитель слишком сбивает цену. Четвёртое: товары срываются вдвое чаще услуг, а в Астане, Шымкенте и Алматы доля срывов примерно вдвое выше, чем в регионах. Вывод для модели: нужны и сумма, и способ, и число участников вместе, одного признака недостаточно.</a:t>
             </a:r>
             <a:endParaRPr lang="en-US" dirty="0"/>
           </a:p>
@@ -892,7 +896,7 @@
           <a:p>
             <a:r>
               <a:rPr lang="en-US" dirty="0"/>
-              <a:t>РЕЗУЛЬТАТЫ. Все цифры посчитаны на тесте, это вторая половина марта, модель этих закупок не видела. Строка Prior это отсутствие модели, уровень случайности. Baseline, логистическая регрессия: ROC-AUC 0,79, PR-AUC 0,26. Три вывода слева. Первое: результат устойчив, на валидации и на тесте почти одинаковые цифры, значит это не случайность одного периода. Второе: случайный лес на тех же признаках лучше, значит в данных есть нелинейные зависимости, которые линейная модель не ловит. Третье: текст названий лотов даёт небольшой прирост. График справа самый практичный: если аудитор проверит 5% закупок с самым высоким риском, он найдёт 26% всех срывов, а если 20%, то 60%. При случайном выборе было бы 5% и 20%. P@1% это точность в верхнем 1% списка, R@5% это доля срывов, найденных в верхних 5%.</a:t>
+              <a:t>BASELINE И ПОЧЕМУ ОН. Модель: логистическая регрессия с весами классов. Схема слева: сначала подготовка (пропуски заполняем медианой, числа приводим к одному масштабу, категории превращаем в столбцы из 0 и 1), потом сама модель, на выходе оценка риска от 0 до 1. Подготовка обучается только на train, чтобы не подглядывать в тест. Почему именно она: 1) выдаёт вероятность, значит закупки можно отсортировать по риску; 2) у каждого признака понятный коэффициент, можно проверить модель здравым смыслом; 3) веса классов решают проблему редких срывов: один срыв весит как 14 обычных договоров; 4) обучается за секунду. Почему не другие: бустинг и нейросеть сильнее, но их надо с чем-то сравнивать, это тема третьего задания. SVM и kNN слишком медленные на 266 тысячах строк. Наивный Байес предполагает независимые признаки, а у нас они сильно связаны.</a:t>
             </a:r>
             <a:endParaRPr lang="en-US" dirty="0"/>
           </a:p>
@@ -980,7 +984,7 @@
           <a:p>
             <a:r>
               <a:rPr lang="en-US" dirty="0"/>
-              <a:t>ГДЕ МОДЕЛЬ ОШИБАЕТСЯ. Это честный разбор слабых мест. Левый график: качество ранжирования внутри каждого способа закупки. Внутри запроса ценовых предложений модель работает хорошо, 0,80. Внутри остальных способов почти случайно, около 0,5. То есть модель в основном научилась отличать один способ от другого и большие суммы от маленьких. Правый график: доля найденных срывов по сумме закупки. В самой дешёвой четверти модель не находит ничего, 0%, а в самой дорогой 64%. Линейная модель умеет говорить только «чем дороже, тем рискованнее» и не видит рискованные дешёвые закупки. Третье: оценки модели нельзя читать как вероятности. Из-за весов классов они завышены: средняя оценка 0,42 при реальной доле срывов 0,07. Для сортировки это не мешает, но показывать человеку «риск 70%» нельзя, нужна калибровка.</a:t>
+              <a:t>МЕТРИКИ. Сначала почему не accuracy, то есть не доля правильных ответов. Если всегда отвечать «не сорвётся», получится 93,4% правильных ответов, и при этом ни одного найденного срыва. Поэтому accuracy здесь бесполезна. Мы берём четыре метрики. ROC-AUC: вероятность, что сорванному договору модель поставит оценку выше, чем нормальному; 0,5 это случайность, 1 это идеал; у нас 0,79. PR-AUC: средняя точность по всем уровням полноты; случайный уровень равен доле срывов 0,066, у нас 0,26, то есть в 4 раза лучше; это самая честная метрика при редком классе. F1: баланс между точностью (сколько из помеченных действительно сорвались) и полнотой (сколько срывов мы нашли) при одном пороге; порог подбирали на валидации. Precision@1%: качество самой верхушки списка, потому что аудитор может проверить только малую часть. Числа справа это результат baseline на тесте.</a:t>
             </a:r>
             <a:endParaRPr lang="en-US" dirty="0"/>
           </a:p>
@@ -1068,7 +1072,7 @@
           <a:p>
             <a:r>
               <a:rPr lang="en-US" dirty="0"/>
-              <a:t>ВЫВОДЫ И СЛЕДУЮЩИЙ ЭТАП. Что показал первый эксперимент. Первое: информация, известная в момент выбора победителя, действительно предсказывает срыв договора; даже простая модель даёт ROC-AUC 0,79 на новых данных. Второе: это уже полезно на практике, список модели в 5 раз лучше случайной проверки. Третье: если считать срывом только однозначные случаи (одностороннее расторжение или незаключение), качество даже выше, 0,83, значит модель ловит настоящий сигнал, а не шум в разметке. Ограничения: модель линейная, данные только за один квартал, нет истории поставщика (её нельзя добавить без утечки данных), оценки не откалиброваны. Следующий этап, третье задание: 1) градиентный бустинг с подбором гиперпараметров; 2) калибровка вероятностей; 3) дообучение нейросети-трансформера на текстах лотов и объединение с табличной моделью; 4) проверка по сегментам, улучшилось ли качество именно там, где baseline слаб.</a:t>
+              <a:t>РЕЗУЛЬТАТЫ. Все цифры посчитаны на тесте, это вторая половина марта, модель этих закупок не видела. Строка Prior это отсутствие модели, уровень случайности. Baseline, логистическая регрессия: ROC-AUC 0,79, PR-AUC 0,26. Три вывода слева. Первое: результат устойчив, на валидации и на тесте почти одинаковые цифры, значит это не случайность одного периода. Второе: случайный лес на тех же признаках лучше, значит в данных есть нелинейные зависимости, которые линейная модель не ловит. Третье: текст названий лотов даёт небольшой прирост. График справа самый практичный: если аудитор проверит 5% закупок с самым высоким риском, он найдёт 26% всех срывов, а если 20%, то 60%. При случайном выборе было бы 5% и 20%. P@1% это точность в верхнем 1% списка, R@5% это доля срывов, найденных в верхних 5%.</a:t>
             </a:r>
             <a:endParaRPr lang="en-US" dirty="0"/>
           </a:p>
@@ -1092,6 +1096,182 @@
             <a:fld id="{F7021451-1387-4CA6-816F-3879F97B5CBC}" type="slidenum">
               <a:rPr lang="en-US"/>
               <a:t>7</a:t>
+            </a:fld>
+            <a:endParaRPr lang="en-US"/>
+          </a:p>
+        </p:txBody>
+      </p:sp>
+    </p:spTree>
+    <p:extLst>
+      <p:ext uri="{BB962C8B-B14F-4D97-AF65-F5344CB8AC3E}">
+        <p14:creationId xmlns:p14="http://schemas.microsoft.com/office/powerpoint/2010/main" val="1024086991"/>
+      </p:ext>
+    </p:extLst>
+  </p:cSld>
+  <p:clrMapOvr>
+    <a:masterClrMapping/>
+  </p:clrMapOvr>
+</p:notes>
+</file>
+
+<file path=ppt/notesSlides/notesSlide8.xml><?xml version="1.0" encoding="utf-8"?>
+<p:notes xmlns:a="http://schemas.openxmlformats.org/drawingml/2006/main" xmlns:r="http://schemas.openxmlformats.org/officeDocument/2006/relationships" xmlns:p="http://schemas.openxmlformats.org/presentationml/2006/main">
+  <p:cSld>
+    <p:spTree>
+      <p:nvGrpSpPr>
+        <p:cNvPr id="1" name=""/>
+        <p:cNvGrpSpPr/>
+        <p:nvPr/>
+      </p:nvGrpSpPr>
+      <p:grpSpPr>
+        <a:xfrm>
+          <a:off x="0" y="0"/>
+          <a:ext cx="0" cy="0"/>
+          <a:chOff x="0" y="0"/>
+          <a:chExt cx="0" cy="0"/>
+        </a:xfrm>
+      </p:grpSpPr>
+      <p:sp>
+        <p:nvSpPr>
+          <p:cNvPr id="2" name="Slide Image Placeholder 1"/>
+          <p:cNvSpPr>
+            <a:spLocks noGrp="1" noRot="1" noChangeAspect="1"/>
+          </p:cNvSpPr>
+          <p:nvPr>
+            <p:ph type="sldImg"/>
+          </p:nvPr>
+        </p:nvSpPr>
+        <p:spPr/>
+      </p:sp>
+      <p:sp>
+        <p:nvSpPr>
+          <p:cNvPr id="3" name="Notes Placeholder 2"/>
+          <p:cNvSpPr>
+            <a:spLocks noGrp="1"/>
+          </p:cNvSpPr>
+          <p:nvPr>
+            <p:ph type="body" idx="1"/>
+          </p:nvPr>
+        </p:nvSpPr>
+        <p:spPr/>
+        <p:txBody>
+          <a:bodyPr/>
+          <a:lstStyle/>
+          <a:p>
+            <a:r>
+              <a:rPr lang="en-US" dirty="0"/>
+              <a:t>ГДЕ МОДЕЛЬ ОШИБАЕТСЯ. Это честный разбор слабых мест. Левый график: качество ранжирования внутри каждого способа закупки. Внутри запроса ценовых предложений модель работает хорошо, 0,80. Внутри остальных способов почти случайно, около 0,5. То есть модель в основном научилась отличать один способ от другого и большие суммы от маленьких. Правый график: доля найденных срывов по сумме закупки. В самой дешёвой четверти модель не находит ничего, 0%, а в самой дорогой 64%. Линейная модель умеет говорить только «чем дороже, тем рискованнее» и не видит рискованные дешёвые закупки. Третье: оценки модели нельзя читать как вероятности. Из-за весов классов они завышены: средняя оценка 0,42 при реальной доле срывов 0,07. Для сортировки это не мешает, но показывать человеку «риск 70%» нельзя, нужна калибровка.</a:t>
+            </a:r>
+            <a:endParaRPr lang="en-US" dirty="0"/>
+          </a:p>
+        </p:txBody>
+      </p:sp>
+      <p:sp>
+        <p:nvSpPr>
+          <p:cNvPr id="4" name="Slide Number Placeholder 3"/>
+          <p:cNvSpPr>
+            <a:spLocks noGrp="1"/>
+          </p:cNvSpPr>
+          <p:nvPr>
+            <p:ph type="sldNum" sz="quarter" idx="10"/>
+          </p:nvPr>
+        </p:nvSpPr>
+        <p:spPr/>
+        <p:txBody>
+          <a:bodyPr/>
+          <a:lstStyle/>
+          <a:p>
+            <a:fld id="{F7021451-1387-4CA6-816F-3879F97B5CBC}" type="slidenum">
+              <a:rPr lang="en-US"/>
+              <a:t>8</a:t>
+            </a:fld>
+            <a:endParaRPr lang="en-US"/>
+          </a:p>
+        </p:txBody>
+      </p:sp>
+    </p:spTree>
+    <p:extLst>
+      <p:ext uri="{BB962C8B-B14F-4D97-AF65-F5344CB8AC3E}">
+        <p14:creationId xmlns:p14="http://schemas.microsoft.com/office/powerpoint/2010/main" val="1024086991"/>
+      </p:ext>
+    </p:extLst>
+  </p:cSld>
+  <p:clrMapOvr>
+    <a:masterClrMapping/>
+  </p:clrMapOvr>
+</p:notes>
+</file>
+
+<file path=ppt/notesSlides/notesSlide9.xml><?xml version="1.0" encoding="utf-8"?>
+<p:notes xmlns:a="http://schemas.openxmlformats.org/drawingml/2006/main" xmlns:r="http://schemas.openxmlformats.org/officeDocument/2006/relationships" xmlns:p="http://schemas.openxmlformats.org/presentationml/2006/main">
+  <p:cSld>
+    <p:spTree>
+      <p:nvGrpSpPr>
+        <p:cNvPr id="1" name=""/>
+        <p:cNvGrpSpPr/>
+        <p:nvPr/>
+      </p:nvGrpSpPr>
+      <p:grpSpPr>
+        <a:xfrm>
+          <a:off x="0" y="0"/>
+          <a:ext cx="0" cy="0"/>
+          <a:chOff x="0" y="0"/>
+          <a:chExt cx="0" cy="0"/>
+        </a:xfrm>
+      </p:grpSpPr>
+      <p:sp>
+        <p:nvSpPr>
+          <p:cNvPr id="2" name="Slide Image Placeholder 1"/>
+          <p:cNvSpPr>
+            <a:spLocks noGrp="1" noRot="1" noChangeAspect="1"/>
+          </p:cNvSpPr>
+          <p:nvPr>
+            <p:ph type="sldImg"/>
+          </p:nvPr>
+        </p:nvSpPr>
+        <p:spPr/>
+      </p:sp>
+      <p:sp>
+        <p:nvSpPr>
+          <p:cNvPr id="3" name="Notes Placeholder 2"/>
+          <p:cNvSpPr>
+            <a:spLocks noGrp="1"/>
+          </p:cNvSpPr>
+          <p:nvPr>
+            <p:ph type="body" idx="1"/>
+          </p:nvPr>
+        </p:nvSpPr>
+        <p:spPr/>
+        <p:txBody>
+          <a:bodyPr/>
+          <a:lstStyle/>
+          <a:p>
+            <a:r>
+              <a:rPr lang="en-US" dirty="0"/>
+              <a:t>ВЫВОДЫ И СЛЕДУЮЩИЙ ЭТАП. Что показал первый эксперимент. Первое: информация, известная в момент выбора победителя, действительно предсказывает срыв договора; даже простая модель даёт ROC-AUC 0,79 на новых данных. Второе: это уже полезно на практике, список модели в 5 раз лучше случайной проверки. Третье: если считать срывом только однозначные случаи (одностороннее расторжение или незаключение), качество даже выше, 0,83, значит модель ловит настоящий сигнал, а не шум в разметке. Ограничения: модель линейная, данные только за один квартал, нет истории поставщика (её нельзя добавить без утечки данных), оценки не откалиброваны. Следующий этап, третье задание: 1) градиентный бустинг с подбором гиперпараметров; 2) калибровка вероятностей; 3) дообучение нейросети-трансформера на текстах лотов и объединение с табличной моделью; 4) проверка по сегментам, улучшилось ли качество именно там, где baseline слаб.</a:t>
+            </a:r>
+            <a:endParaRPr lang="en-US" dirty="0"/>
+          </a:p>
+        </p:txBody>
+      </p:sp>
+      <p:sp>
+        <p:nvSpPr>
+          <p:cNvPr id="4" name="Slide Number Placeholder 3"/>
+          <p:cNvSpPr>
+            <a:spLocks noGrp="1"/>
+          </p:cNvSpPr>
+          <p:nvPr>
+            <p:ph type="sldNum" sz="quarter" idx="10"/>
+          </p:nvPr>
+        </p:nvSpPr>
+        <p:spPr/>
+        <p:txBody>
+          <a:bodyPr/>
+          <a:lstStyle/>
+          <a:p>
+            <a:fld id="{F7021451-1387-4CA6-816F-3879F97B5CBC}" type="slidenum">
+              <a:rPr lang="en-US"/>
+              <a:t>9</a:t>
             </a:fld>
             <a:endParaRPr lang="en-US"/>
           </a:p>
@@ -3367,7 +3547,7 @@
                   <a:schemeClr val="accent1"/>
                 </a:solidFill>
               </a:rPr>
-              <a:t>×10</a:t>
+              <a:t>2+ года</a:t>
             </a:r>
             <a:endParaRPr lang="en-US" sz="2200" dirty="0"/>
           </a:p>
@@ -3403,7 +3583,7 @@
                   <a:schemeClr val="tx2"/>
                 </a:solidFill>
               </a:rPr>
-              <a:t>рост доли срывов от самого дешёвого дециля суммы к самому дорогому (1,5 % → 16,5 %)</a:t>
+              <a:t>прошло после закупок, поэтому исход каждого договора уже известен</a:t>
             </a:r>
             <a:endParaRPr lang="en-US" sz="1200" dirty="0"/>
           </a:p>
@@ -3461,7 +3641,7 @@
                   <a:schemeClr val="accent1"/>
                 </a:solidFill>
               </a:rPr>
-              <a:t>9 % и 3 %</a:t>
+              <a:t>Без утечек</a:t>
             </a:r>
             <a:endParaRPr lang="en-US" sz="2200" dirty="0"/>
           </a:p>
@@ -3497,7 +3677,7 @@
                   <a:schemeClr val="tx2"/>
                 </a:solidFill>
               </a:rPr>
-              <a:t>запросы ценовых предложений и закупки из одного источника</a:t>
+              <a:t>в признаках только то, что известно в момент выбора победителя</a:t>
             </a:r>
             <a:endParaRPr lang="en-US" sz="1200" dirty="0"/>
           </a:p>
@@ -3605,7 +3785,7 @@
                   <a:schemeClr val="tx1"/>
                 </a:solidFill>
               </a:rPr>
-              <a:t>Baseline: логистическая регрессия</a:t>
+              <a:t>Из чего состоял датасет</a:t>
             </a:r>
             <a:endParaRPr lang="en-US" sz="3200" dirty="0"/>
           </a:p>
@@ -3619,12 +3799,178 @@
         </p:nvSpPr>
         <p:spPr>
           <a:xfrm>
-            <a:off x="548640" y="1463040"/>
-            <a:ext cx="5486400" cy="1042416"/>
+            <a:off x="548640" y="1417320"/>
+            <a:ext cx="2103120" cy="2103120"/>
           </a:xfrm>
           <a:prstGeom prst="roundRect">
             <a:avLst>
-              <a:gd name="adj" fmla="val 7018"/>
+              <a:gd name="adj" fmla="val 3478"/>
+            </a:avLst>
+          </a:prstGeom>
+          <a:solidFill>
+            <a:schemeClr val="accent6"/>
+          </a:solidFill>
+          <a:ln/>
+        </p:spPr>
+      </p:sp>
+      <p:sp>
+        <p:nvSpPr>
+          <p:cNvPr id="4" name="Text 46"/>
+          <p:cNvSpPr txBox="1"/>
+          <p:nvPr/>
+        </p:nvSpPr>
+        <p:spPr>
+          <a:xfrm>
+            <a:off x="731520" y="1536192"/>
+            <a:ext cx="1737360" cy="274320"/>
+          </a:xfrm>
+          <a:prstGeom prst="rect">
+            <a:avLst/>
+          </a:prstGeom>
+          <a:noFill/>
+          <a:ln/>
+        </p:spPr>
+        <p:txBody>
+          <a:bodyPr wrap="square" lIns="0" tIns="0" rIns="0" bIns="0" rtlCol="0" anchor="t"/>
+          <a:lstStyle/>
+          <a:p>
+            <a:pPr indent="0" marL="0">
+              <a:buNone/>
+            </a:pPr>
+            <a:r>
+              <a:rPr lang="en-US" sz="1200" b="1" dirty="0">
+                <a:solidFill>
+                  <a:schemeClr val="bg2"/>
+                </a:solidFill>
+              </a:rPr>
+              <a:t>trd_buy</a:t>
+            </a:r>
+            <a:endParaRPr lang="en-US" sz="1200" dirty="0"/>
+          </a:p>
+        </p:txBody>
+      </p:sp>
+      <p:sp>
+        <p:nvSpPr>
+          <p:cNvPr id="5" name="Text 47"/>
+          <p:cNvSpPr txBox="1"/>
+          <p:nvPr/>
+        </p:nvSpPr>
+        <p:spPr>
+          <a:xfrm>
+            <a:off x="731520" y="1828800"/>
+            <a:ext cx="1737360" cy="457200"/>
+          </a:xfrm>
+          <a:prstGeom prst="rect">
+            <a:avLst/>
+          </a:prstGeom>
+          <a:noFill/>
+          <a:ln/>
+        </p:spPr>
+        <p:txBody>
+          <a:bodyPr wrap="square" lIns="0" tIns="0" rIns="0" bIns="0" rtlCol="0" anchor="t"/>
+          <a:lstStyle/>
+          <a:p>
+            <a:pPr indent="0" marL="0">
+              <a:buNone/>
+            </a:pPr>
+            <a:r>
+              <a:rPr lang="en-US" sz="2200" b="1" dirty="0">
+                <a:solidFill>
+                  <a:schemeClr val="bg1"/>
+                </a:solidFill>
+              </a:rPr>
+              <a:t>630 762</a:t>
+            </a:r>
+            <a:endParaRPr lang="en-US" sz="2200" dirty="0"/>
+          </a:p>
+        </p:txBody>
+      </p:sp>
+      <p:sp>
+        <p:nvSpPr>
+          <p:cNvPr id="6" name="Text 48"/>
+          <p:cNvSpPr txBox="1"/>
+          <p:nvPr/>
+        </p:nvSpPr>
+        <p:spPr>
+          <a:xfrm>
+            <a:off x="731520" y="2331720"/>
+            <a:ext cx="1737360" cy="457200"/>
+          </a:xfrm>
+          <a:prstGeom prst="rect">
+            <a:avLst/>
+          </a:prstGeom>
+          <a:noFill/>
+          <a:ln/>
+        </p:spPr>
+        <p:txBody>
+          <a:bodyPr wrap="square" lIns="0" tIns="0" rIns="0" bIns="0" rtlCol="0" anchor="t"/>
+          <a:lstStyle/>
+          <a:p>
+            <a:pPr indent="0" marL="0">
+              <a:buNone/>
+            </a:pPr>
+            <a:r>
+              <a:rPr lang="en-US" sz="1400" b="1" dirty="0">
+                <a:solidFill>
+                  <a:schemeClr val="bg1"/>
+                </a:solidFill>
+              </a:rPr>
+              <a:t>закупки (объявления)</a:t>
+            </a:r>
+            <a:endParaRPr lang="en-US" sz="1400" dirty="0"/>
+          </a:p>
+        </p:txBody>
+      </p:sp>
+      <p:sp>
+        <p:nvSpPr>
+          <p:cNvPr id="7" name="Text 49"/>
+          <p:cNvSpPr txBox="1"/>
+          <p:nvPr/>
+        </p:nvSpPr>
+        <p:spPr>
+          <a:xfrm>
+            <a:off x="731520" y="2816352"/>
+            <a:ext cx="1737360" cy="640080"/>
+          </a:xfrm>
+          <a:prstGeom prst="rect">
+            <a:avLst/>
+          </a:prstGeom>
+          <a:noFill/>
+          <a:ln/>
+        </p:spPr>
+        <p:txBody>
+          <a:bodyPr wrap="square" lIns="0" tIns="0" rIns="0" bIns="0" rtlCol="0" anchor="t"/>
+          <a:lstStyle/>
+          <a:p>
+            <a:pPr indent="0" marL="0">
+              <a:buNone/>
+            </a:pPr>
+            <a:r>
+              <a:rPr lang="en-US" sz="1200" dirty="0">
+                <a:solidFill>
+                  <a:schemeClr val="bg2"/>
+                </a:solidFill>
+              </a:rPr>
+              <a:t>сумма, способ закупки, даты, организатор</a:t>
+            </a:r>
+            <a:endParaRPr lang="en-US" sz="1200" dirty="0"/>
+          </a:p>
+        </p:txBody>
+      </p:sp>
+      <p:sp>
+        <p:nvSpPr>
+          <p:cNvPr id="8" name="Card 50"/>
+          <p:cNvSpPr/>
+          <p:nvPr/>
+        </p:nvSpPr>
+        <p:spPr>
+          <a:xfrm>
+            <a:off x="2788920" y="1417320"/>
+            <a:ext cx="2103120" cy="2103120"/>
+          </a:xfrm>
+          <a:prstGeom prst="roundRect">
+            <a:avLst>
+              <a:gd name="adj" fmla="val 3478"/>
             </a:avLst>
           </a:prstGeom>
           <a:solidFill>
@@ -3635,14 +3981,14 @@
       </p:sp>
       <p:sp>
         <p:nvSpPr>
-          <p:cNvPr id="4" name="Text 46"/>
-          <p:cNvSpPr txBox="1"/>
-          <p:nvPr/>
-        </p:nvSpPr>
-        <p:spPr>
-          <a:xfrm>
-            <a:off x="777240" y="1572768"/>
-            <a:ext cx="5029200" cy="320040"/>
+          <p:cNvPr id="9" name="Text 51"/>
+          <p:cNvSpPr txBox="1"/>
+          <p:nvPr/>
+        </p:nvSpPr>
+        <p:spPr>
+          <a:xfrm>
+            <a:off x="2971800" y="1536192"/>
+            <a:ext cx="1737360" cy="274320"/>
           </a:xfrm>
           <a:prstGeom prst="rect">
             <a:avLst/>
@@ -3658,27 +4004,63 @@
               <a:buNone/>
             </a:pPr>
             <a:r>
-              <a:rPr lang="en-US" sz="1600" b="1" dirty="0">
+              <a:rPr lang="en-US" sz="1200" b="1" dirty="0">
+                <a:solidFill>
+                  <a:schemeClr val="accent5"/>
+                </a:solidFill>
+              </a:rPr>
+              <a:t>lots</a:t>
+            </a:r>
+            <a:endParaRPr lang="en-US" sz="1200" dirty="0"/>
+          </a:p>
+        </p:txBody>
+      </p:sp>
+      <p:sp>
+        <p:nvSpPr>
+          <p:cNvPr id="10" name="Text 52"/>
+          <p:cNvSpPr txBox="1"/>
+          <p:nvPr/>
+        </p:nvSpPr>
+        <p:spPr>
+          <a:xfrm>
+            <a:off x="2971800" y="1828800"/>
+            <a:ext cx="1737360" cy="457200"/>
+          </a:xfrm>
+          <a:prstGeom prst="rect">
+            <a:avLst/>
+          </a:prstGeom>
+          <a:noFill/>
+          <a:ln/>
+        </p:spPr>
+        <p:txBody>
+          <a:bodyPr wrap="square" lIns="0" tIns="0" rIns="0" bIns="0" rtlCol="0" anchor="t"/>
+          <a:lstStyle/>
+          <a:p>
+            <a:pPr indent="0" marL="0">
+              <a:buNone/>
+            </a:pPr>
+            <a:r>
+              <a:rPr lang="en-US" sz="2200" b="1" dirty="0">
                 <a:solidFill>
                   <a:schemeClr val="tx1"/>
                 </a:solidFill>
               </a:rPr>
-              <a:t>Предобработка</a:t>
-            </a:r>
-            <a:endParaRPr lang="en-US" sz="1600" dirty="0"/>
-          </a:p>
-        </p:txBody>
-      </p:sp>
-      <p:sp>
-        <p:nvSpPr>
-          <p:cNvPr id="5" name="Text 47"/>
-          <p:cNvSpPr txBox="1"/>
-          <p:nvPr/>
-        </p:nvSpPr>
-        <p:spPr>
-          <a:xfrm>
-            <a:off x="777240" y="1920240"/>
-            <a:ext cx="5029200" cy="512064"/>
+              <a:t>1 286 364</a:t>
+            </a:r>
+            <a:endParaRPr lang="en-US" sz="2200" dirty="0"/>
+          </a:p>
+        </p:txBody>
+      </p:sp>
+      <p:sp>
+        <p:nvSpPr>
+          <p:cNvPr id="11" name="Text 53"/>
+          <p:cNvSpPr txBox="1"/>
+          <p:nvPr/>
+        </p:nvSpPr>
+        <p:spPr>
+          <a:xfrm>
+            <a:off x="2971800" y="2331720"/>
+            <a:ext cx="1737360" cy="457200"/>
           </a:xfrm>
           <a:prstGeom prst="rect">
             <a:avLst/>
@@ -3694,52 +4076,661 @@
               <a:buNone/>
             </a:pPr>
             <a:r>
-              <a:rPr lang="en-US" sz="1400" dirty="0">
+              <a:rPr lang="en-US" sz="1400" b="1" dirty="0">
+                <a:solidFill>
+                  <a:schemeClr val="tx1"/>
+                </a:solidFill>
+              </a:rPr>
+              <a:t>лоты</a:t>
+            </a:r>
+            <a:endParaRPr lang="en-US" sz="1400" dirty="0"/>
+          </a:p>
+        </p:txBody>
+      </p:sp>
+      <p:sp>
+        <p:nvSpPr>
+          <p:cNvPr id="12" name="Text 54"/>
+          <p:cNvSpPr txBox="1"/>
+          <p:nvPr/>
+        </p:nvSpPr>
+        <p:spPr>
+          <a:xfrm>
+            <a:off x="2971800" y="2816352"/>
+            <a:ext cx="1737360" cy="640080"/>
+          </a:xfrm>
+          <a:prstGeom prst="rect">
+            <a:avLst/>
+          </a:prstGeom>
+          <a:noFill/>
+          <a:ln/>
+        </p:spPr>
+        <p:txBody>
+          <a:bodyPr wrap="square" lIns="0" tIns="0" rIns="0" bIns="0" rtlCol="0" anchor="t"/>
+          <a:lstStyle/>
+          <a:p>
+            <a:pPr indent="0" marL="0">
+              <a:buNone/>
+            </a:pPr>
+            <a:r>
+              <a:rPr lang="en-US" sz="1200" dirty="0">
                 <a:solidFill>
                   <a:schemeClr val="tx2"/>
                 </a:solidFill>
               </a:rPr>
-              <a:t>Медиана вместо пропусков + флаги пропуска, масштабирование, one-hot; обучается только на train</a:t>
-            </a:r>
-            <a:endParaRPr lang="en-US" sz="1400" dirty="0"/>
-          </a:p>
-        </p:txBody>
-      </p:sp>
-      <p:sp>
-        <p:nvSpPr>
-          <p:cNvPr id="6" name="Arrow 48"/>
+              <a:t>что закупают: название и сумма</a:t>
+            </a:r>
+            <a:endParaRPr lang="en-US" sz="1200" dirty="0"/>
+          </a:p>
+        </p:txBody>
+      </p:sp>
+      <p:sp>
+        <p:nvSpPr>
+          <p:cNvPr id="13" name="Card 55"/>
           <p:cNvSpPr/>
           <p:nvPr/>
         </p:nvSpPr>
         <p:spPr>
           <a:xfrm>
-            <a:off x="3154680" y="2532888"/>
-            <a:ext cx="274320" cy="201168"/>
-          </a:xfrm>
-          <a:prstGeom prst="downArrow">
-            <a:avLst/>
-          </a:prstGeom>
-          <a:solidFill>
-            <a:schemeClr val="accent5"/>
-          </a:solidFill>
-          <a:ln/>
-        </p:spPr>
-      </p:sp>
-      <p:sp>
-        <p:nvSpPr>
-          <p:cNvPr id="7" name="Card 49"/>
-          <p:cNvSpPr/>
-          <p:nvPr/>
-        </p:nvSpPr>
-        <p:spPr>
-          <a:xfrm>
-            <a:off x="548640" y="2761488"/>
-            <a:ext cx="5486400" cy="1042416"/>
+            <a:off x="5029200" y="1417320"/>
+            <a:ext cx="2103120" cy="2103120"/>
           </a:xfrm>
           <a:prstGeom prst="roundRect">
             <a:avLst>
-              <a:gd name="adj" fmla="val 7018"/>
+              <a:gd name="adj" fmla="val 3478"/>
             </a:avLst>
+          </a:prstGeom>
+          <a:solidFill>
+            <a:schemeClr val="bg2"/>
+          </a:solidFill>
+          <a:ln/>
+        </p:spPr>
+      </p:sp>
+      <p:sp>
+        <p:nvSpPr>
+          <p:cNvPr id="14" name="Text 56"/>
+          <p:cNvSpPr txBox="1"/>
+          <p:nvPr/>
+        </p:nvSpPr>
+        <p:spPr>
+          <a:xfrm>
+            <a:off x="5212080" y="1536192"/>
+            <a:ext cx="1737360" cy="274320"/>
+          </a:xfrm>
+          <a:prstGeom prst="rect">
+            <a:avLst/>
+          </a:prstGeom>
+          <a:noFill/>
+          <a:ln/>
+        </p:spPr>
+        <p:txBody>
+          <a:bodyPr wrap="square" lIns="0" tIns="0" rIns="0" bIns="0" rtlCol="0" anchor="t"/>
+          <a:lstStyle/>
+          <a:p>
+            <a:pPr indent="0" marL="0">
+              <a:buNone/>
+            </a:pPr>
+            <a:r>
+              <a:rPr lang="en-US" sz="1200" b="1" dirty="0">
+                <a:solidFill>
+                  <a:schemeClr val="accent5"/>
+                </a:solidFill>
+              </a:rPr>
+              <a:t>trd_app</a:t>
+            </a:r>
+            <a:endParaRPr lang="en-US" sz="1200" dirty="0"/>
+          </a:p>
+        </p:txBody>
+      </p:sp>
+      <p:sp>
+        <p:nvSpPr>
+          <p:cNvPr id="15" name="Text 57"/>
+          <p:cNvSpPr txBox="1"/>
+          <p:nvPr/>
+        </p:nvSpPr>
+        <p:spPr>
+          <a:xfrm>
+            <a:off x="5212080" y="1828800"/>
+            <a:ext cx="1737360" cy="457200"/>
+          </a:xfrm>
+          <a:prstGeom prst="rect">
+            <a:avLst/>
+          </a:prstGeom>
+          <a:noFill/>
+          <a:ln/>
+        </p:spPr>
+        <p:txBody>
+          <a:bodyPr wrap="square" lIns="0" tIns="0" rIns="0" bIns="0" rtlCol="0" anchor="t"/>
+          <a:lstStyle/>
+          <a:p>
+            <a:pPr indent="0" marL="0">
+              <a:buNone/>
+            </a:pPr>
+            <a:r>
+              <a:rPr lang="en-US" sz="2200" b="1" dirty="0">
+                <a:solidFill>
+                  <a:schemeClr val="tx1"/>
+                </a:solidFill>
+              </a:rPr>
+              <a:t>1 066 963</a:t>
+            </a:r>
+            <a:endParaRPr lang="en-US" sz="2200" dirty="0"/>
+          </a:p>
+        </p:txBody>
+      </p:sp>
+      <p:sp>
+        <p:nvSpPr>
+          <p:cNvPr id="16" name="Text 58"/>
+          <p:cNvSpPr txBox="1"/>
+          <p:nvPr/>
+        </p:nvSpPr>
+        <p:spPr>
+          <a:xfrm>
+            <a:off x="5212080" y="2331720"/>
+            <a:ext cx="1737360" cy="457200"/>
+          </a:xfrm>
+          <a:prstGeom prst="rect">
+            <a:avLst/>
+          </a:prstGeom>
+          <a:noFill/>
+          <a:ln/>
+        </p:spPr>
+        <p:txBody>
+          <a:bodyPr wrap="square" lIns="0" tIns="0" rIns="0" bIns="0" rtlCol="0" anchor="t"/>
+          <a:lstStyle/>
+          <a:p>
+            <a:pPr indent="0" marL="0">
+              <a:buNone/>
+            </a:pPr>
+            <a:r>
+              <a:rPr lang="en-US" sz="1400" b="1" dirty="0">
+                <a:solidFill>
+                  <a:schemeClr val="tx1"/>
+                </a:solidFill>
+              </a:rPr>
+              <a:t>заявки участников</a:t>
+            </a:r>
+            <a:endParaRPr lang="en-US" sz="1400" dirty="0"/>
+          </a:p>
+        </p:txBody>
+      </p:sp>
+      <p:sp>
+        <p:nvSpPr>
+          <p:cNvPr id="17" name="Text 59"/>
+          <p:cNvSpPr txBox="1"/>
+          <p:nvPr/>
+        </p:nvSpPr>
+        <p:spPr>
+          <a:xfrm>
+            <a:off x="5212080" y="2816352"/>
+            <a:ext cx="1737360" cy="640080"/>
+          </a:xfrm>
+          <a:prstGeom prst="rect">
+            <a:avLst/>
+          </a:prstGeom>
+          <a:noFill/>
+          <a:ln/>
+        </p:spPr>
+        <p:txBody>
+          <a:bodyPr wrap="square" lIns="0" tIns="0" rIns="0" bIns="0" rtlCol="0" anchor="t"/>
+          <a:lstStyle/>
+          <a:p>
+            <a:pPr indent="0" marL="0">
+              <a:buNone/>
+            </a:pPr>
+            <a:r>
+              <a:rPr lang="en-US" sz="1200" dirty="0">
+                <a:solidFill>
+                  <a:schemeClr val="tx2"/>
+                </a:solidFill>
+              </a:rPr>
+              <a:t>кто участвовал и по какой цене</a:t>
+            </a:r>
+            <a:endParaRPr lang="en-US" sz="1200" dirty="0"/>
+          </a:p>
+        </p:txBody>
+      </p:sp>
+      <p:sp>
+        <p:nvSpPr>
+          <p:cNvPr id="18" name="Card 60"/>
+          <p:cNvSpPr/>
+          <p:nvPr/>
+        </p:nvSpPr>
+        <p:spPr>
+          <a:xfrm>
+            <a:off x="7269480" y="1417320"/>
+            <a:ext cx="2103120" cy="2103120"/>
+          </a:xfrm>
+          <a:prstGeom prst="roundRect">
+            <a:avLst>
+              <a:gd name="adj" fmla="val 3478"/>
+            </a:avLst>
+          </a:prstGeom>
+          <a:solidFill>
+            <a:schemeClr val="bg2"/>
+          </a:solidFill>
+          <a:ln/>
+        </p:spPr>
+      </p:sp>
+      <p:sp>
+        <p:nvSpPr>
+          <p:cNvPr id="19" name="Text 61"/>
+          <p:cNvSpPr txBox="1"/>
+          <p:nvPr/>
+        </p:nvSpPr>
+        <p:spPr>
+          <a:xfrm>
+            <a:off x="7452360" y="1536192"/>
+            <a:ext cx="1737360" cy="274320"/>
+          </a:xfrm>
+          <a:prstGeom prst="rect">
+            <a:avLst/>
+          </a:prstGeom>
+          <a:noFill/>
+          <a:ln/>
+        </p:spPr>
+        <p:txBody>
+          <a:bodyPr wrap="square" lIns="0" tIns="0" rIns="0" bIns="0" rtlCol="0" anchor="t"/>
+          <a:lstStyle/>
+          <a:p>
+            <a:pPr indent="0" marL="0">
+              <a:buNone/>
+            </a:pPr>
+            <a:r>
+              <a:rPr lang="en-US" sz="1200" b="1" dirty="0">
+                <a:solidFill>
+                  <a:schemeClr val="accent5"/>
+                </a:solidFill>
+              </a:rPr>
+              <a:t>contracts</a:t>
+            </a:r>
+            <a:endParaRPr lang="en-US" sz="1200" dirty="0"/>
+          </a:p>
+        </p:txBody>
+      </p:sp>
+      <p:sp>
+        <p:nvSpPr>
+          <p:cNvPr id="20" name="Text 62"/>
+          <p:cNvSpPr txBox="1"/>
+          <p:nvPr/>
+        </p:nvSpPr>
+        <p:spPr>
+          <a:xfrm>
+            <a:off x="7452360" y="1828800"/>
+            <a:ext cx="1737360" cy="457200"/>
+          </a:xfrm>
+          <a:prstGeom prst="rect">
+            <a:avLst/>
+          </a:prstGeom>
+          <a:noFill/>
+          <a:ln/>
+        </p:spPr>
+        <p:txBody>
+          <a:bodyPr wrap="square" lIns="0" tIns="0" rIns="0" bIns="0" rtlCol="0" anchor="t"/>
+          <a:lstStyle/>
+          <a:p>
+            <a:pPr indent="0" marL="0">
+              <a:buNone/>
+            </a:pPr>
+            <a:r>
+              <a:rPr lang="en-US" sz="2200" b="1" dirty="0">
+                <a:solidFill>
+                  <a:schemeClr val="accent1"/>
+                </a:solidFill>
+              </a:rPr>
+              <a:t>555 723</a:t>
+            </a:r>
+            <a:endParaRPr lang="en-US" sz="2200" dirty="0"/>
+          </a:p>
+        </p:txBody>
+      </p:sp>
+      <p:sp>
+        <p:nvSpPr>
+          <p:cNvPr id="21" name="Text 63"/>
+          <p:cNvSpPr txBox="1"/>
+          <p:nvPr/>
+        </p:nvSpPr>
+        <p:spPr>
+          <a:xfrm>
+            <a:off x="7452360" y="2331720"/>
+            <a:ext cx="1737360" cy="457200"/>
+          </a:xfrm>
+          <a:prstGeom prst="rect">
+            <a:avLst/>
+          </a:prstGeom>
+          <a:noFill/>
+          <a:ln/>
+        </p:spPr>
+        <p:txBody>
+          <a:bodyPr wrap="square" lIns="0" tIns="0" rIns="0" bIns="0" rtlCol="0" anchor="t"/>
+          <a:lstStyle/>
+          <a:p>
+            <a:pPr indent="0" marL="0">
+              <a:buNone/>
+            </a:pPr>
+            <a:r>
+              <a:rPr lang="en-US" sz="1400" b="1" dirty="0">
+                <a:solidFill>
+                  <a:schemeClr val="tx1"/>
+                </a:solidFill>
+              </a:rPr>
+              <a:t>записи договоров</a:t>
+            </a:r>
+            <a:endParaRPr lang="en-US" sz="1400" dirty="0"/>
+          </a:p>
+        </p:txBody>
+      </p:sp>
+      <p:sp>
+        <p:nvSpPr>
+          <p:cNvPr id="22" name="Text 64"/>
+          <p:cNvSpPr txBox="1"/>
+          <p:nvPr/>
+        </p:nvSpPr>
+        <p:spPr>
+          <a:xfrm>
+            <a:off x="7452360" y="2816352"/>
+            <a:ext cx="1737360" cy="640080"/>
+          </a:xfrm>
+          <a:prstGeom prst="rect">
+            <a:avLst/>
+          </a:prstGeom>
+          <a:noFill/>
+          <a:ln/>
+        </p:spPr>
+        <p:txBody>
+          <a:bodyPr wrap="square" lIns="0" tIns="0" rIns="0" bIns="0" rtlCol="0" anchor="t"/>
+          <a:lstStyle/>
+          <a:p>
+            <a:pPr indent="0" marL="0">
+              <a:buNone/>
+            </a:pPr>
+            <a:r>
+              <a:rPr lang="en-US" sz="1200" dirty="0">
+                <a:solidFill>
+                  <a:schemeClr val="tx2"/>
+                </a:solidFill>
+              </a:rPr>
+              <a:t>статус: исполнен или сорван. Отсюда target</a:t>
+            </a:r>
+            <a:endParaRPr lang="en-US" sz="1200" dirty="0"/>
+          </a:p>
+        </p:txBody>
+      </p:sp>
+      <p:sp>
+        <p:nvSpPr>
+          <p:cNvPr id="23" name="Card 65"/>
+          <p:cNvSpPr/>
+          <p:nvPr/>
+        </p:nvSpPr>
+        <p:spPr>
+          <a:xfrm>
+            <a:off x="9509760" y="1417320"/>
+            <a:ext cx="2103120" cy="2103120"/>
+          </a:xfrm>
+          <a:prstGeom prst="roundRect">
+            <a:avLst>
+              <a:gd name="adj" fmla="val 3478"/>
+            </a:avLst>
+          </a:prstGeom>
+          <a:solidFill>
+            <a:schemeClr val="bg2"/>
+          </a:solidFill>
+          <a:ln/>
+        </p:spPr>
+      </p:sp>
+      <p:sp>
+        <p:nvSpPr>
+          <p:cNvPr id="24" name="Text 66"/>
+          <p:cNvSpPr txBox="1"/>
+          <p:nvPr/>
+        </p:nvSpPr>
+        <p:spPr>
+          <a:xfrm>
+            <a:off x="9692640" y="1536192"/>
+            <a:ext cx="1737360" cy="274320"/>
+          </a:xfrm>
+          <a:prstGeom prst="rect">
+            <a:avLst/>
+          </a:prstGeom>
+          <a:noFill/>
+          <a:ln/>
+        </p:spPr>
+        <p:txBody>
+          <a:bodyPr wrap="square" lIns="0" tIns="0" rIns="0" bIns="0" rtlCol="0" anchor="t"/>
+          <a:lstStyle/>
+          <a:p>
+            <a:pPr indent="0" marL="0">
+              <a:buNone/>
+            </a:pPr>
+            <a:r>
+              <a:rPr lang="en-US" sz="1200" b="1" dirty="0">
+                <a:solidFill>
+                  <a:schemeClr val="accent5"/>
+                </a:solidFill>
+              </a:rPr>
+              <a:t>rnu</a:t>
+            </a:r>
+            <a:endParaRPr lang="en-US" sz="1200" dirty="0"/>
+          </a:p>
+        </p:txBody>
+      </p:sp>
+      <p:sp>
+        <p:nvSpPr>
+          <p:cNvPr id="25" name="Text 67"/>
+          <p:cNvSpPr txBox="1"/>
+          <p:nvPr/>
+        </p:nvSpPr>
+        <p:spPr>
+          <a:xfrm>
+            <a:off x="9692640" y="1828800"/>
+            <a:ext cx="1737360" cy="457200"/>
+          </a:xfrm>
+          <a:prstGeom prst="rect">
+            <a:avLst/>
+          </a:prstGeom>
+          <a:noFill/>
+          <a:ln/>
+        </p:spPr>
+        <p:txBody>
+          <a:bodyPr wrap="square" lIns="0" tIns="0" rIns="0" bIns="0" rtlCol="0" anchor="t"/>
+          <a:lstStyle/>
+          <a:p>
+            <a:pPr indent="0" marL="0">
+              <a:buNone/>
+            </a:pPr>
+            <a:r>
+              <a:rPr lang="en-US" sz="2200" b="1" dirty="0">
+                <a:solidFill>
+                  <a:schemeClr val="tx1"/>
+                </a:solidFill>
+              </a:rPr>
+              <a:t>17 343</a:t>
+            </a:r>
+            <a:endParaRPr lang="en-US" sz="2200" dirty="0"/>
+          </a:p>
+        </p:txBody>
+      </p:sp>
+      <p:sp>
+        <p:nvSpPr>
+          <p:cNvPr id="26" name="Text 68"/>
+          <p:cNvSpPr txBox="1"/>
+          <p:nvPr/>
+        </p:nvSpPr>
+        <p:spPr>
+          <a:xfrm>
+            <a:off x="9692640" y="2331720"/>
+            <a:ext cx="1737360" cy="457200"/>
+          </a:xfrm>
+          <a:prstGeom prst="rect">
+            <a:avLst/>
+          </a:prstGeom>
+          <a:noFill/>
+          <a:ln/>
+        </p:spPr>
+        <p:txBody>
+          <a:bodyPr wrap="square" lIns="0" tIns="0" rIns="0" bIns="0" rtlCol="0" anchor="t"/>
+          <a:lstStyle/>
+          <a:p>
+            <a:pPr indent="0" marL="0">
+              <a:buNone/>
+            </a:pPr>
+            <a:r>
+              <a:rPr lang="en-US" sz="1400" b="1" dirty="0">
+                <a:solidFill>
+                  <a:schemeClr val="tx1"/>
+                </a:solidFill>
+              </a:rPr>
+              <a:t>реестр недобросовестных</a:t>
+            </a:r>
+            <a:endParaRPr lang="en-US" sz="1400" dirty="0"/>
+          </a:p>
+        </p:txBody>
+      </p:sp>
+      <p:sp>
+        <p:nvSpPr>
+          <p:cNvPr id="27" name="Text 69"/>
+          <p:cNvSpPr txBox="1"/>
+          <p:nvPr/>
+        </p:nvSpPr>
+        <p:spPr>
+          <a:xfrm>
+            <a:off x="9692640" y="2816352"/>
+            <a:ext cx="1737360" cy="640080"/>
+          </a:xfrm>
+          <a:prstGeom prst="rect">
+            <a:avLst/>
+          </a:prstGeom>
+          <a:noFill/>
+          <a:ln/>
+        </p:spPr>
+        <p:txBody>
+          <a:bodyPr wrap="square" lIns="0" tIns="0" rIns="0" bIns="0" rtlCol="0" anchor="t"/>
+          <a:lstStyle/>
+          <a:p>
+            <a:pPr indent="0" marL="0">
+              <a:buNone/>
+            </a:pPr>
+            <a:r>
+              <a:rPr lang="en-US" sz="1200" dirty="0">
+                <a:solidFill>
+                  <a:schemeClr val="tx2"/>
+                </a:solidFill>
+              </a:rPr>
+              <a:t>чёрный список поставщиков</a:t>
+            </a:r>
+            <a:endParaRPr lang="en-US" sz="1200" dirty="0"/>
+          </a:p>
+        </p:txBody>
+      </p:sp>
+      <p:sp>
+        <p:nvSpPr>
+          <p:cNvPr id="28" name="Text 70"/>
+          <p:cNvSpPr txBox="1"/>
+          <p:nvPr/>
+        </p:nvSpPr>
+        <p:spPr>
+          <a:xfrm>
+            <a:off x="548640" y="3675888"/>
+            <a:ext cx="11064240" cy="320040"/>
+          </a:xfrm>
+          <a:prstGeom prst="rect">
+            <a:avLst/>
+          </a:prstGeom>
+          <a:noFill/>
+          <a:ln/>
+        </p:spPr>
+        <p:txBody>
+          <a:bodyPr wrap="square" lIns="0" tIns="0" rIns="0" bIns="0" rtlCol="0" anchor="t"/>
+          <a:lstStyle/>
+          <a:p>
+            <a:pPr indent="0" marL="0">
+              <a:buNone/>
+            </a:pPr>
+            <a:r>
+              <a:rPr lang="en-US" sz="1400" dirty="0">
+                <a:solidFill>
+                  <a:schemeClr val="tx2"/>
+                </a:solidFill>
+              </a:rPr>
+              <a:t>Таблицы связаны по id закупки и БИН поставщика. Всего 3,6 млн строк; закупки опубликованы с 1 января по 31 марта 2024.</a:t>
+            </a:r>
+            <a:endParaRPr lang="en-US" sz="1400" dirty="0"/>
+          </a:p>
+        </p:txBody>
+      </p:sp>
+      <p:sp>
+        <p:nvSpPr>
+          <p:cNvPr id="29" name="Text 71"/>
+          <p:cNvSpPr txBox="1"/>
+          <p:nvPr/>
+        </p:nvSpPr>
+        <p:spPr>
+          <a:xfrm>
+            <a:off x="548640" y="4114800"/>
+            <a:ext cx="11064240" cy="411480"/>
+          </a:xfrm>
+          <a:prstGeom prst="rect">
+            <a:avLst/>
+          </a:prstGeom>
+          <a:noFill/>
+          <a:ln/>
+        </p:spPr>
+        <p:txBody>
+          <a:bodyPr wrap="square" lIns="0" tIns="0" rIns="0" bIns="0" rtlCol="0" anchor="t"/>
+          <a:lstStyle/>
+          <a:p>
+            <a:pPr indent="0" marL="0">
+              <a:buNone/>
+            </a:pPr>
+            <a:r>
+              <a:rPr lang="en-US" sz="2000" b="1" dirty="0">
+                <a:solidFill>
+                  <a:schemeClr val="tx1"/>
+                </a:solidFill>
+                <a:latin typeface="Georgia" pitchFamily="34" charset="0"/>
+                <a:ea typeface="Georgia" pitchFamily="34" charset="-122"/>
+                <a:cs typeface="Georgia" pitchFamily="34" charset="-120"/>
+              </a:rPr>
+              <a:t>Как из пяти таблиц получилась одна</a:t>
+            </a:r>
+            <a:endParaRPr lang="en-US" sz="2000" dirty="0"/>
+          </a:p>
+        </p:txBody>
+      </p:sp>
+      <p:sp>
+        <p:nvSpPr>
+          <p:cNvPr id="30" name="Card 72"/>
+          <p:cNvSpPr/>
+          <p:nvPr/>
+        </p:nvSpPr>
+        <p:spPr>
+          <a:xfrm>
+            <a:off x="548640" y="4663440"/>
+            <a:ext cx="3611880" cy="1508760"/>
+          </a:xfrm>
+          <a:prstGeom prst="roundRect">
+            <a:avLst>
+              <a:gd name="adj" fmla="val 4848"/>
+            </a:avLst>
+          </a:prstGeom>
+          <a:solidFill>
+            <a:schemeClr val="bg2"/>
+          </a:solidFill>
+          <a:ln/>
+        </p:spPr>
+      </p:sp>
+      <p:sp>
+        <p:nvSpPr>
+          <p:cNvPr id="31" name="Badge 73"/>
+          <p:cNvSpPr/>
+          <p:nvPr/>
+        </p:nvSpPr>
+        <p:spPr>
+          <a:xfrm>
+            <a:off x="731520" y="4791456"/>
+            <a:ext cx="384048" cy="384048"/>
+          </a:xfrm>
+          <a:prstGeom prst="ellipse">
+            <a:avLst/>
           </a:prstGeom>
           <a:solidFill>
             <a:schemeClr val="accent2"/>
@@ -3749,14 +4740,86 @@
       </p:sp>
       <p:sp>
         <p:nvSpPr>
-          <p:cNvPr id="8" name="Text 50"/>
-          <p:cNvSpPr txBox="1"/>
-          <p:nvPr/>
-        </p:nvSpPr>
-        <p:spPr>
-          <a:xfrm>
-            <a:off x="777240" y="2871216"/>
-            <a:ext cx="5029200" cy="320040"/>
+          <p:cNvPr id="32" name="Text 74"/>
+          <p:cNvSpPr txBox="1"/>
+          <p:nvPr/>
+        </p:nvSpPr>
+        <p:spPr>
+          <a:xfrm>
+            <a:off x="731520" y="4791456"/>
+            <a:ext cx="384048" cy="384048"/>
+          </a:xfrm>
+          <a:prstGeom prst="rect">
+            <a:avLst/>
+          </a:prstGeom>
+          <a:noFill/>
+          <a:ln/>
+        </p:spPr>
+        <p:txBody>
+          <a:bodyPr wrap="square" lIns="0" tIns="0" rIns="0" bIns="0" rtlCol="0" anchor="ctr"/>
+          <a:lstStyle/>
+          <a:p>
+            <a:pPr algn="ctr" indent="0" marL="0">
+              <a:buNone/>
+            </a:pPr>
+            <a:r>
+              <a:rPr lang="en-US" sz="1400" b="1" dirty="0">
+                <a:solidFill>
+                  <a:schemeClr val="bg1"/>
+                </a:solidFill>
+              </a:rPr>
+              <a:t>1</a:t>
+            </a:r>
+            <a:endParaRPr lang="en-US" sz="1400" dirty="0"/>
+          </a:p>
+        </p:txBody>
+      </p:sp>
+      <p:sp>
+        <p:nvSpPr>
+          <p:cNvPr id="33" name="Text 75"/>
+          <p:cNvSpPr txBox="1"/>
+          <p:nvPr/>
+        </p:nvSpPr>
+        <p:spPr>
+          <a:xfrm>
+            <a:off x="1234440" y="4791456"/>
+            <a:ext cx="2788920" cy="384048"/>
+          </a:xfrm>
+          <a:prstGeom prst="rect">
+            <a:avLst/>
+          </a:prstGeom>
+          <a:noFill/>
+          <a:ln/>
+        </p:spPr>
+        <p:txBody>
+          <a:bodyPr wrap="square" lIns="0" tIns="0" rIns="0" bIns="0" rtlCol="0" anchor="ctr"/>
+          <a:lstStyle/>
+          <a:p>
+            <a:pPr indent="0" marL="0">
+              <a:buNone/>
+            </a:pPr>
+            <a:r>
+              <a:rPr lang="en-US" sz="1600" b="1" dirty="0">
+                <a:solidFill>
+                  <a:schemeClr val="tx1"/>
+                </a:solidFill>
+              </a:rPr>
+              <a:t>Свернули допсоглашения</a:t>
+            </a:r>
+            <a:endParaRPr lang="en-US" sz="1600" dirty="0"/>
+          </a:p>
+        </p:txBody>
+      </p:sp>
+      <p:sp>
+        <p:nvSpPr>
+          <p:cNvPr id="34" name="Text 76"/>
+          <p:cNvSpPr txBox="1"/>
+          <p:nvPr/>
+        </p:nvSpPr>
+        <p:spPr>
+          <a:xfrm>
+            <a:off x="731520" y="5303520"/>
+            <a:ext cx="3246120" cy="777240"/>
           </a:xfrm>
           <a:prstGeom prst="rect">
             <a:avLst/>
@@ -3772,48 +4835,12 @@
               <a:buNone/>
             </a:pPr>
             <a:r>
-              <a:rPr lang="en-US" sz="1600" b="1" dirty="0">
-                <a:solidFill>
-                  <a:schemeClr val="bg1"/>
-                </a:solidFill>
-              </a:rPr>
-              <a:t>Логистическая регрессия</a:t>
-            </a:r>
-            <a:endParaRPr lang="en-US" sz="1600" dirty="0"/>
-          </a:p>
-        </p:txBody>
-      </p:sp>
-      <p:sp>
-        <p:nvSpPr>
-          <p:cNvPr id="9" name="Text 51"/>
-          <p:cNvSpPr txBox="1"/>
-          <p:nvPr/>
-        </p:nvSpPr>
-        <p:spPr>
-          <a:xfrm>
-            <a:off x="777240" y="3218688"/>
-            <a:ext cx="5029200" cy="512064"/>
-          </a:xfrm>
-          <a:prstGeom prst="rect">
-            <a:avLst/>
-          </a:prstGeom>
-          <a:noFill/>
-          <a:ln/>
-        </p:spPr>
-        <p:txBody>
-          <a:bodyPr wrap="square" lIns="0" tIns="0" rIns="0" bIns="0" rtlCol="0" anchor="t"/>
-          <a:lstStyle/>
-          <a:p>
-            <a:pPr indent="0" marL="0">
-              <a:buNone/>
-            </a:pPr>
-            <a:r>
               <a:rPr lang="en-US" sz="1400" dirty="0">
                 <a:solidFill>
-                  <a:schemeClr val="bg1"/>
-                </a:solidFill>
-              </a:rPr>
-              <a:t>L2-штраф, C = 1, class_weight = balanced, solver lbfgs</a:t>
+                  <a:schemeClr val="tx2"/>
+                </a:solidFill>
+              </a:rPr>
+              <a:t>555 723 строки → 480 269 договоров: 13,6 % строк были допсоглашениями</a:t>
             </a:r>
             <a:endParaRPr lang="en-US" sz="1400" dirty="0"/>
           </a:p>
@@ -3821,38 +4848,18 @@
       </p:sp>
       <p:sp>
         <p:nvSpPr>
-          <p:cNvPr id="10" name="Arrow 52"/>
+          <p:cNvPr id="35" name="Card 77"/>
           <p:cNvSpPr/>
           <p:nvPr/>
         </p:nvSpPr>
         <p:spPr>
           <a:xfrm>
-            <a:off x="3154680" y="3831336"/>
-            <a:ext cx="274320" cy="201168"/>
-          </a:xfrm>
-          <a:prstGeom prst="downArrow">
-            <a:avLst/>
-          </a:prstGeom>
-          <a:solidFill>
-            <a:schemeClr val="accent5"/>
-          </a:solidFill>
-          <a:ln/>
-        </p:spPr>
-      </p:sp>
-      <p:sp>
-        <p:nvSpPr>
-          <p:cNvPr id="11" name="Card 53"/>
-          <p:cNvSpPr/>
-          <p:nvPr/>
-        </p:nvSpPr>
-        <p:spPr>
-          <a:xfrm>
-            <a:off x="548640" y="4059936"/>
-            <a:ext cx="5486400" cy="1042416"/>
+            <a:off x="4297680" y="4663440"/>
+            <a:ext cx="3611880" cy="1508760"/>
           </a:xfrm>
           <a:prstGeom prst="roundRect">
             <a:avLst>
-              <a:gd name="adj" fmla="val 7018"/>
+              <a:gd name="adj" fmla="val 4848"/>
             </a:avLst>
           </a:prstGeom>
           <a:solidFill>
@@ -3863,14 +4870,106 @@
       </p:sp>
       <p:sp>
         <p:nvSpPr>
-          <p:cNvPr id="12" name="Text 54"/>
-          <p:cNvSpPr txBox="1"/>
-          <p:nvPr/>
-        </p:nvSpPr>
-        <p:spPr>
-          <a:xfrm>
-            <a:off x="777240" y="4169664"/>
-            <a:ext cx="5029200" cy="320040"/>
+          <p:cNvPr id="36" name="Badge 78"/>
+          <p:cNvSpPr/>
+          <p:nvPr/>
+        </p:nvSpPr>
+        <p:spPr>
+          <a:xfrm>
+            <a:off x="4480560" y="4791456"/>
+            <a:ext cx="384048" cy="384048"/>
+          </a:xfrm>
+          <a:prstGeom prst="ellipse">
+            <a:avLst/>
+          </a:prstGeom>
+          <a:solidFill>
+            <a:schemeClr val="accent2"/>
+          </a:solidFill>
+          <a:ln/>
+        </p:spPr>
+      </p:sp>
+      <p:sp>
+        <p:nvSpPr>
+          <p:cNvPr id="37" name="Text 79"/>
+          <p:cNvSpPr txBox="1"/>
+          <p:nvPr/>
+        </p:nvSpPr>
+        <p:spPr>
+          <a:xfrm>
+            <a:off x="4480560" y="4791456"/>
+            <a:ext cx="384048" cy="384048"/>
+          </a:xfrm>
+          <a:prstGeom prst="rect">
+            <a:avLst/>
+          </a:prstGeom>
+          <a:noFill/>
+          <a:ln/>
+        </p:spPr>
+        <p:txBody>
+          <a:bodyPr wrap="square" lIns="0" tIns="0" rIns="0" bIns="0" rtlCol="0" anchor="ctr"/>
+          <a:lstStyle/>
+          <a:p>
+            <a:pPr algn="ctr" indent="0" marL="0">
+              <a:buNone/>
+            </a:pPr>
+            <a:r>
+              <a:rPr lang="en-US" sz="1400" b="1" dirty="0">
+                <a:solidFill>
+                  <a:schemeClr val="bg1"/>
+                </a:solidFill>
+              </a:rPr>
+              <a:t>2</a:t>
+            </a:r>
+            <a:endParaRPr lang="en-US" sz="1400" dirty="0"/>
+          </a:p>
+        </p:txBody>
+      </p:sp>
+      <p:sp>
+        <p:nvSpPr>
+          <p:cNvPr id="38" name="Text 80"/>
+          <p:cNvSpPr txBox="1"/>
+          <p:nvPr/>
+        </p:nvSpPr>
+        <p:spPr>
+          <a:xfrm>
+            <a:off x="4983480" y="4791456"/>
+            <a:ext cx="2788920" cy="384048"/>
+          </a:xfrm>
+          <a:prstGeom prst="rect">
+            <a:avLst/>
+          </a:prstGeom>
+          <a:noFill/>
+          <a:ln/>
+        </p:spPr>
+        <p:txBody>
+          <a:bodyPr wrap="square" lIns="0" tIns="0" rIns="0" bIns="0" rtlCol="0" anchor="ctr"/>
+          <a:lstStyle/>
+          <a:p>
+            <a:pPr indent="0" marL="0">
+              <a:buNone/>
+            </a:pPr>
+            <a:r>
+              <a:rPr lang="en-US" sz="1600" b="1" dirty="0">
+                <a:solidFill>
+                  <a:schemeClr val="tx1"/>
+                </a:solidFill>
+              </a:rPr>
+              <a:t>Взяли закупки с договором</a:t>
+            </a:r>
+            <a:endParaRPr lang="en-US" sz="1600" dirty="0"/>
+          </a:p>
+        </p:txBody>
+      </p:sp>
+      <p:sp>
+        <p:nvSpPr>
+          <p:cNvPr id="39" name="Text 81"/>
+          <p:cNvSpPr txBox="1"/>
+          <p:nvPr/>
+        </p:nvSpPr>
+        <p:spPr>
+          <a:xfrm>
+            <a:off x="4480560" y="5303520"/>
+            <a:ext cx="3246120" cy="777240"/>
           </a:xfrm>
           <a:prstGeom prst="rect">
             <a:avLst/>
@@ -3886,12 +4985,126 @@
               <a:buNone/>
             </a:pPr>
             <a:r>
+              <a:rPr lang="en-US" sz="1400" dirty="0">
+                <a:solidFill>
+                  <a:schemeClr val="tx2"/>
+                </a:solidFill>
+              </a:rPr>
+              <a:t>630 762 → 358 789: без договора нет исхода, который можно предсказать</a:t>
+            </a:r>
+            <a:endParaRPr lang="en-US" sz="1400" dirty="0"/>
+          </a:p>
+        </p:txBody>
+      </p:sp>
+      <p:sp>
+        <p:nvSpPr>
+          <p:cNvPr id="40" name="Card 82"/>
+          <p:cNvSpPr/>
+          <p:nvPr/>
+        </p:nvSpPr>
+        <p:spPr>
+          <a:xfrm>
+            <a:off x="8046720" y="4663440"/>
+            <a:ext cx="3611880" cy="1508760"/>
+          </a:xfrm>
+          <a:prstGeom prst="roundRect">
+            <a:avLst>
+              <a:gd name="adj" fmla="val 4848"/>
+            </a:avLst>
+          </a:prstGeom>
+          <a:solidFill>
+            <a:schemeClr val="bg2"/>
+          </a:solidFill>
+          <a:ln/>
+        </p:spPr>
+      </p:sp>
+      <p:sp>
+        <p:nvSpPr>
+          <p:cNvPr id="41" name="Badge 83"/>
+          <p:cNvSpPr/>
+          <p:nvPr/>
+        </p:nvSpPr>
+        <p:spPr>
+          <a:xfrm>
+            <a:off x="8229600" y="4791456"/>
+            <a:ext cx="384048" cy="384048"/>
+          </a:xfrm>
+          <a:prstGeom prst="ellipse">
+            <a:avLst/>
+          </a:prstGeom>
+          <a:solidFill>
+            <a:schemeClr val="accent2"/>
+          </a:solidFill>
+          <a:ln/>
+        </p:spPr>
+      </p:sp>
+      <p:sp>
+        <p:nvSpPr>
+          <p:cNvPr id="42" name="Text 84"/>
+          <p:cNvSpPr txBox="1"/>
+          <p:nvPr/>
+        </p:nvSpPr>
+        <p:spPr>
+          <a:xfrm>
+            <a:off x="8229600" y="4791456"/>
+            <a:ext cx="384048" cy="384048"/>
+          </a:xfrm>
+          <a:prstGeom prst="rect">
+            <a:avLst/>
+          </a:prstGeom>
+          <a:noFill/>
+          <a:ln/>
+        </p:spPr>
+        <p:txBody>
+          <a:bodyPr wrap="square" lIns="0" tIns="0" rIns="0" bIns="0" rtlCol="0" anchor="ctr"/>
+          <a:lstStyle/>
+          <a:p>
+            <a:pPr algn="ctr" indent="0" marL="0">
+              <a:buNone/>
+            </a:pPr>
+            <a:r>
+              <a:rPr lang="en-US" sz="1400" b="1" dirty="0">
+                <a:solidFill>
+                  <a:schemeClr val="bg1"/>
+                </a:solidFill>
+              </a:rPr>
+              <a:t>3</a:t>
+            </a:r>
+            <a:endParaRPr lang="en-US" sz="1400" dirty="0"/>
+          </a:p>
+        </p:txBody>
+      </p:sp>
+      <p:sp>
+        <p:nvSpPr>
+          <p:cNvPr id="43" name="Text 85"/>
+          <p:cNvSpPr txBox="1"/>
+          <p:nvPr/>
+        </p:nvSpPr>
+        <p:spPr>
+          <a:xfrm>
+            <a:off x="8732520" y="4791456"/>
+            <a:ext cx="2788920" cy="384048"/>
+          </a:xfrm>
+          <a:prstGeom prst="rect">
+            <a:avLst/>
+          </a:prstGeom>
+          <a:noFill/>
+          <a:ln/>
+        </p:spPr>
+        <p:txBody>
+          <a:bodyPr wrap="square" lIns="0" tIns="0" rIns="0" bIns="0" rtlCol="0" anchor="ctr"/>
+          <a:lstStyle/>
+          <a:p>
+            <a:pPr indent="0" marL="0">
+              <a:buNone/>
+            </a:pPr>
+            <a:r>
               <a:rPr lang="en-US" sz="1600" b="1" dirty="0">
                 <a:solidFill>
                   <a:schemeClr val="tx1"/>
                 </a:solidFill>
               </a:rPr>
-              <a:t>Оценка риска 0–1</a:t>
+              <a:t>Собрали признаки</a:t>
             </a:r>
             <a:endParaRPr lang="en-US" sz="1600" dirty="0"/>
           </a:p>
@@ -3899,14 +5112,14 @@
       </p:sp>
       <p:sp>
         <p:nvSpPr>
-          <p:cNvPr id="13" name="Text 55"/>
-          <p:cNvSpPr txBox="1"/>
-          <p:nvPr/>
-        </p:nvSpPr>
-        <p:spPr>
-          <a:xfrm>
-            <a:off x="777240" y="4517136"/>
-            <a:ext cx="5029200" cy="512064"/>
+          <p:cNvPr id="44" name="Text 86"/>
+          <p:cNvSpPr txBox="1"/>
+          <p:nvPr/>
+        </p:nvSpPr>
+        <p:spPr>
+          <a:xfrm>
+            <a:off x="8229600" y="5303520"/>
+            <a:ext cx="3246120" cy="777240"/>
           </a:xfrm>
           <a:prstGeom prst="rect">
             <a:avLst/>
@@ -3927,533 +5140,7 @@
                   <a:schemeClr val="tx2"/>
                 </a:solidFill>
               </a:rPr>
-              <a:t>Ранжирует закупки; порог решения подобран на validation</a:t>
-            </a:r>
-            <a:endParaRPr lang="en-US" sz="1400" dirty="0"/>
-          </a:p>
-        </p:txBody>
-      </p:sp>
-      <p:sp>
-        <p:nvSpPr>
-          <p:cNvPr id="14" name="Text 56"/>
-          <p:cNvSpPr txBox="1"/>
-          <p:nvPr/>
-        </p:nvSpPr>
-        <p:spPr>
-          <a:xfrm>
-            <a:off x="548640" y="5349240"/>
-            <a:ext cx="5486400" cy="731520"/>
-          </a:xfrm>
-          <a:prstGeom prst="rect">
-            <a:avLst/>
-          </a:prstGeom>
-          <a:noFill/>
-          <a:ln/>
-        </p:spPr>
-        <p:txBody>
-          <a:bodyPr wrap="square" lIns="0" tIns="0" rIns="0" bIns="0" rtlCol="0" anchor="t"/>
-          <a:lstStyle/>
-          <a:p>
-            <a:pPr indent="0" marL="0">
-              <a:buNone/>
-            </a:pPr>
-            <a:r>
-              <a:rPr lang="en-US" sz="1400" b="1" dirty="0">
-                <a:solidFill>
-                  <a:schemeClr val="tx1"/>
-                </a:solidFill>
-              </a:rPr>
-              <a:t>Обучение: </a:t>
-            </a:r>
-            <a:pPr indent="0" marL="0">
-              <a:buNone/>
-            </a:pPr>
-            <a:r>
-              <a:rPr lang="en-US" sz="1400" dirty="0">
-                <a:solidFill>
-                  <a:schemeClr val="tx1"/>
-                </a:solidFill>
-              </a:rPr>
-              <a:t>266 294 закупки (январь–февраль) · 20 признаков → 52 входа · сошлась за 75 итераций · 1 секунда</a:t>
-            </a:r>
-            <a:endParaRPr lang="en-US" sz="1400" dirty="0"/>
-          </a:p>
-        </p:txBody>
-      </p:sp>
-      <p:sp>
-        <p:nvSpPr>
-          <p:cNvPr id="15" name="Text 57"/>
-          <p:cNvSpPr txBox="1"/>
-          <p:nvPr/>
-        </p:nvSpPr>
-        <p:spPr>
-          <a:xfrm>
-            <a:off x="6492240" y="1417320"/>
-            <a:ext cx="5120640" cy="365760"/>
-          </a:xfrm>
-          <a:prstGeom prst="rect">
-            <a:avLst/>
-          </a:prstGeom>
-          <a:noFill/>
-          <a:ln/>
-        </p:spPr>
-        <p:txBody>
-          <a:bodyPr wrap="square" lIns="0" tIns="0" rIns="0" bIns="0" rtlCol="0" anchor="t"/>
-          <a:lstStyle/>
-          <a:p>
-            <a:pPr indent="0" marL="0">
-              <a:buNone/>
-            </a:pPr>
-            <a:r>
-              <a:rPr lang="en-US" sz="2000" b="1" dirty="0">
-                <a:solidFill>
-                  <a:schemeClr val="tx1"/>
-                </a:solidFill>
-                <a:latin typeface="Georgia" pitchFamily="34" charset="0"/>
-                <a:ea typeface="Georgia" pitchFamily="34" charset="-122"/>
-                <a:cs typeface="Georgia" pitchFamily="34" charset="-120"/>
-              </a:rPr>
-              <a:t>Почему эта модель</a:t>
-            </a:r>
-            <a:endParaRPr lang="en-US" sz="2000" dirty="0"/>
-          </a:p>
-        </p:txBody>
-      </p:sp>
-      <p:sp>
-        <p:nvSpPr>
-          <p:cNvPr id="16" name="Badge 58"/>
-          <p:cNvSpPr/>
-          <p:nvPr/>
-        </p:nvSpPr>
-        <p:spPr>
-          <a:xfrm>
-            <a:off x="6492240" y="1965960"/>
-            <a:ext cx="384048" cy="384048"/>
-          </a:xfrm>
-          <a:prstGeom prst="ellipse">
-            <a:avLst/>
-          </a:prstGeom>
-          <a:solidFill>
-            <a:schemeClr val="accent1"/>
-          </a:solidFill>
-          <a:ln/>
-        </p:spPr>
-      </p:sp>
-      <p:sp>
-        <p:nvSpPr>
-          <p:cNvPr id="17" name="Text 59"/>
-          <p:cNvSpPr txBox="1"/>
-          <p:nvPr/>
-        </p:nvSpPr>
-        <p:spPr>
-          <a:xfrm>
-            <a:off x="6492240" y="1965960"/>
-            <a:ext cx="384048" cy="384048"/>
-          </a:xfrm>
-          <a:prstGeom prst="rect">
-            <a:avLst/>
-          </a:prstGeom>
-          <a:noFill/>
-          <a:ln/>
-        </p:spPr>
-        <p:txBody>
-          <a:bodyPr wrap="square" lIns="0" tIns="0" rIns="0" bIns="0" rtlCol="0" anchor="ctr"/>
-          <a:lstStyle/>
-          <a:p>
-            <a:pPr algn="ctr" indent="0" marL="0">
-              <a:buNone/>
-            </a:pPr>
-            <a:r>
-              <a:rPr lang="en-US" sz="1400" b="1" dirty="0">
-                <a:solidFill>
-                  <a:schemeClr val="bg1"/>
-                </a:solidFill>
-              </a:rPr>
-              <a:t>1</a:t>
-            </a:r>
-            <a:endParaRPr lang="en-US" sz="1400" dirty="0"/>
-          </a:p>
-        </p:txBody>
-      </p:sp>
-      <p:sp>
-        <p:nvSpPr>
-          <p:cNvPr id="18" name="Text 60"/>
-          <p:cNvSpPr txBox="1"/>
-          <p:nvPr/>
-        </p:nvSpPr>
-        <p:spPr>
-          <a:xfrm>
-            <a:off x="7040880" y="1938528"/>
-            <a:ext cx="4572000" cy="548640"/>
-          </a:xfrm>
-          <a:prstGeom prst="rect">
-            <a:avLst/>
-          </a:prstGeom>
-          <a:noFill/>
-          <a:ln/>
-        </p:spPr>
-        <p:txBody>
-          <a:bodyPr wrap="square" lIns="0" tIns="0" rIns="0" bIns="0" rtlCol="0" anchor="ctr"/>
-          <a:lstStyle/>
-          <a:p>
-            <a:pPr indent="0" marL="0">
-              <a:buNone/>
-            </a:pPr>
-            <a:r>
-              <a:rPr lang="en-US" sz="1400" dirty="0">
-                <a:solidFill>
-                  <a:schemeClr val="tx1"/>
-                </a:solidFill>
-              </a:rPr>
-              <a:t>Выдаёт вероятность, поэтому закупки можно ранжировать для проверки</a:t>
-            </a:r>
-            <a:endParaRPr lang="en-US" sz="1400" dirty="0"/>
-          </a:p>
-        </p:txBody>
-      </p:sp>
-      <p:sp>
-        <p:nvSpPr>
-          <p:cNvPr id="19" name="Badge 61"/>
-          <p:cNvSpPr/>
-          <p:nvPr/>
-        </p:nvSpPr>
-        <p:spPr>
-          <a:xfrm>
-            <a:off x="6492240" y="2679192"/>
-            <a:ext cx="384048" cy="384048"/>
-          </a:xfrm>
-          <a:prstGeom prst="ellipse">
-            <a:avLst/>
-          </a:prstGeom>
-          <a:solidFill>
-            <a:schemeClr val="accent1"/>
-          </a:solidFill>
-          <a:ln/>
-        </p:spPr>
-      </p:sp>
-      <p:sp>
-        <p:nvSpPr>
-          <p:cNvPr id="20" name="Text 62"/>
-          <p:cNvSpPr txBox="1"/>
-          <p:nvPr/>
-        </p:nvSpPr>
-        <p:spPr>
-          <a:xfrm>
-            <a:off x="6492240" y="2679192"/>
-            <a:ext cx="384048" cy="384048"/>
-          </a:xfrm>
-          <a:prstGeom prst="rect">
-            <a:avLst/>
-          </a:prstGeom>
-          <a:noFill/>
-          <a:ln/>
-        </p:spPr>
-        <p:txBody>
-          <a:bodyPr wrap="square" lIns="0" tIns="0" rIns="0" bIns="0" rtlCol="0" anchor="ctr"/>
-          <a:lstStyle/>
-          <a:p>
-            <a:pPr algn="ctr" indent="0" marL="0">
-              <a:buNone/>
-            </a:pPr>
-            <a:r>
-              <a:rPr lang="en-US" sz="1400" b="1" dirty="0">
-                <a:solidFill>
-                  <a:schemeClr val="bg1"/>
-                </a:solidFill>
-              </a:rPr>
-              <a:t>2</a:t>
-            </a:r>
-            <a:endParaRPr lang="en-US" sz="1400" dirty="0"/>
-          </a:p>
-        </p:txBody>
-      </p:sp>
-      <p:sp>
-        <p:nvSpPr>
-          <p:cNvPr id="21" name="Text 63"/>
-          <p:cNvSpPr txBox="1"/>
-          <p:nvPr/>
-        </p:nvSpPr>
-        <p:spPr>
-          <a:xfrm>
-            <a:off x="7040880" y="2651760"/>
-            <a:ext cx="4572000" cy="548640"/>
-          </a:xfrm>
-          <a:prstGeom prst="rect">
-            <a:avLst/>
-          </a:prstGeom>
-          <a:noFill/>
-          <a:ln/>
-        </p:spPr>
-        <p:txBody>
-          <a:bodyPr wrap="square" lIns="0" tIns="0" rIns="0" bIns="0" rtlCol="0" anchor="ctr"/>
-          <a:lstStyle/>
-          <a:p>
-            <a:pPr indent="0" marL="0">
-              <a:buNone/>
-            </a:pPr>
-            <a:r>
-              <a:rPr lang="en-US" sz="1400" dirty="0">
-                <a:solidFill>
-                  <a:schemeClr val="tx1"/>
-                </a:solidFill>
-              </a:rPr>
-              <a:t>Понятные коэффициенты: модель можно сверить с результатами EDA</a:t>
-            </a:r>
-            <a:endParaRPr lang="en-US" sz="1400" dirty="0"/>
-          </a:p>
-        </p:txBody>
-      </p:sp>
-      <p:sp>
-        <p:nvSpPr>
-          <p:cNvPr id="22" name="Badge 64"/>
-          <p:cNvSpPr/>
-          <p:nvPr/>
-        </p:nvSpPr>
-        <p:spPr>
-          <a:xfrm>
-            <a:off x="6492240" y="3392424"/>
-            <a:ext cx="384048" cy="384048"/>
-          </a:xfrm>
-          <a:prstGeom prst="ellipse">
-            <a:avLst/>
-          </a:prstGeom>
-          <a:solidFill>
-            <a:schemeClr val="accent1"/>
-          </a:solidFill>
-          <a:ln/>
-        </p:spPr>
-      </p:sp>
-      <p:sp>
-        <p:nvSpPr>
-          <p:cNvPr id="23" name="Text 65"/>
-          <p:cNvSpPr txBox="1"/>
-          <p:nvPr/>
-        </p:nvSpPr>
-        <p:spPr>
-          <a:xfrm>
-            <a:off x="6492240" y="3392424"/>
-            <a:ext cx="384048" cy="384048"/>
-          </a:xfrm>
-          <a:prstGeom prst="rect">
-            <a:avLst/>
-          </a:prstGeom>
-          <a:noFill/>
-          <a:ln/>
-        </p:spPr>
-        <p:txBody>
-          <a:bodyPr wrap="square" lIns="0" tIns="0" rIns="0" bIns="0" rtlCol="0" anchor="ctr"/>
-          <a:lstStyle/>
-          <a:p>
-            <a:pPr algn="ctr" indent="0" marL="0">
-              <a:buNone/>
-            </a:pPr>
-            <a:r>
-              <a:rPr lang="en-US" sz="1400" b="1" dirty="0">
-                <a:solidFill>
-                  <a:schemeClr val="bg1"/>
-                </a:solidFill>
-              </a:rPr>
-              <a:t>3</a:t>
-            </a:r>
-            <a:endParaRPr lang="en-US" sz="1400" dirty="0"/>
-          </a:p>
-        </p:txBody>
-      </p:sp>
-      <p:sp>
-        <p:nvSpPr>
-          <p:cNvPr id="24" name="Text 66"/>
-          <p:cNvSpPr txBox="1"/>
-          <p:nvPr/>
-        </p:nvSpPr>
-        <p:spPr>
-          <a:xfrm>
-            <a:off x="7040880" y="3364992"/>
-            <a:ext cx="4572000" cy="548640"/>
-          </a:xfrm>
-          <a:prstGeom prst="rect">
-            <a:avLst/>
-          </a:prstGeom>
-          <a:noFill/>
-          <a:ln/>
-        </p:spPr>
-        <p:txBody>
-          <a:bodyPr wrap="square" lIns="0" tIns="0" rIns="0" bIns="0" rtlCol="0" anchor="ctr"/>
-          <a:lstStyle/>
-          <a:p>
-            <a:pPr indent="0" marL="0">
-              <a:buNone/>
-            </a:pPr>
-            <a:r>
-              <a:rPr lang="en-US" sz="1400" dirty="0">
-                <a:solidFill>
-                  <a:schemeClr val="tx1"/>
-                </a:solidFill>
-              </a:rPr>
-              <a:t>Веса классов решают проблему дисбаланса 1 : 14 без ресэмплинга</a:t>
-            </a:r>
-            <a:endParaRPr lang="en-US" sz="1400" dirty="0"/>
-          </a:p>
-        </p:txBody>
-      </p:sp>
-      <p:sp>
-        <p:nvSpPr>
-          <p:cNvPr id="25" name="Badge 67"/>
-          <p:cNvSpPr/>
-          <p:nvPr/>
-        </p:nvSpPr>
-        <p:spPr>
-          <a:xfrm>
-            <a:off x="6492240" y="4105656"/>
-            <a:ext cx="384048" cy="384048"/>
-          </a:xfrm>
-          <a:prstGeom prst="ellipse">
-            <a:avLst/>
-          </a:prstGeom>
-          <a:solidFill>
-            <a:schemeClr val="accent1"/>
-          </a:solidFill>
-          <a:ln/>
-        </p:spPr>
-      </p:sp>
-      <p:sp>
-        <p:nvSpPr>
-          <p:cNvPr id="26" name="Text 68"/>
-          <p:cNvSpPr txBox="1"/>
-          <p:nvPr/>
-        </p:nvSpPr>
-        <p:spPr>
-          <a:xfrm>
-            <a:off x="6492240" y="4105656"/>
-            <a:ext cx="384048" cy="384048"/>
-          </a:xfrm>
-          <a:prstGeom prst="rect">
-            <a:avLst/>
-          </a:prstGeom>
-          <a:noFill/>
-          <a:ln/>
-        </p:spPr>
-        <p:txBody>
-          <a:bodyPr wrap="square" lIns="0" tIns="0" rIns="0" bIns="0" rtlCol="0" anchor="ctr"/>
-          <a:lstStyle/>
-          <a:p>
-            <a:pPr algn="ctr" indent="0" marL="0">
-              <a:buNone/>
-            </a:pPr>
-            <a:r>
-              <a:rPr lang="en-US" sz="1400" b="1" dirty="0">
-                <a:solidFill>
-                  <a:schemeClr val="bg1"/>
-                </a:solidFill>
-              </a:rPr>
-              <a:t>4</a:t>
-            </a:r>
-            <a:endParaRPr lang="en-US" sz="1400" dirty="0"/>
-          </a:p>
-        </p:txBody>
-      </p:sp>
-      <p:sp>
-        <p:nvSpPr>
-          <p:cNvPr id="27" name="Text 69"/>
-          <p:cNvSpPr txBox="1"/>
-          <p:nvPr/>
-        </p:nvSpPr>
-        <p:spPr>
-          <a:xfrm>
-            <a:off x="7040880" y="4078224"/>
-            <a:ext cx="4572000" cy="548640"/>
-          </a:xfrm>
-          <a:prstGeom prst="rect">
-            <a:avLst/>
-          </a:prstGeom>
-          <a:noFill/>
-          <a:ln/>
-        </p:spPr>
-        <p:txBody>
-          <a:bodyPr wrap="square" lIns="0" tIns="0" rIns="0" bIns="0" rtlCol="0" anchor="ctr"/>
-          <a:lstStyle/>
-          <a:p>
-            <a:pPr indent="0" marL="0">
-              <a:buNone/>
-            </a:pPr>
-            <a:r>
-              <a:rPr lang="en-US" sz="1400" dirty="0">
-                <a:solidFill>
-                  <a:schemeClr val="tx1"/>
-                </a:solidFill>
-              </a:rPr>
-              <a:t>Обучается за 1 с на 266 тыс. строк и работает с разреженным текстом</a:t>
-            </a:r>
-            <a:endParaRPr lang="en-US" sz="1400" dirty="0"/>
-          </a:p>
-        </p:txBody>
-      </p:sp>
-      <p:sp>
-        <p:nvSpPr>
-          <p:cNvPr id="28" name="Text 70"/>
-          <p:cNvSpPr txBox="1"/>
-          <p:nvPr/>
-        </p:nvSpPr>
-        <p:spPr>
-          <a:xfrm>
-            <a:off x="6492240" y="4892040"/>
-            <a:ext cx="5120640" cy="320040"/>
-          </a:xfrm>
-          <a:prstGeom prst="rect">
-            <a:avLst/>
-          </a:prstGeom>
-          <a:noFill/>
-          <a:ln/>
-        </p:spPr>
-        <p:txBody>
-          <a:bodyPr wrap="square" lIns="0" tIns="0" rIns="0" bIns="0" rtlCol="0" anchor="t"/>
-          <a:lstStyle/>
-          <a:p>
-            <a:pPr indent="0" marL="0">
-              <a:buNone/>
-            </a:pPr>
-            <a:r>
-              <a:rPr lang="en-US" sz="1600" b="1" dirty="0">
-                <a:solidFill>
-                  <a:schemeClr val="accent5"/>
-                </a:solidFill>
-              </a:rPr>
-              <a:t>Пока не базовая модель</a:t>
-            </a:r>
-            <a:endParaRPr lang="en-US" sz="1600" dirty="0"/>
-          </a:p>
-        </p:txBody>
-      </p:sp>
-      <p:sp>
-        <p:nvSpPr>
-          <p:cNvPr id="29" name="Text 71"/>
-          <p:cNvSpPr txBox="1"/>
-          <p:nvPr/>
-        </p:nvSpPr>
-        <p:spPr>
-          <a:xfrm>
-            <a:off x="6492240" y="5257800"/>
-            <a:ext cx="5120640" cy="914400"/>
-          </a:xfrm>
-          <a:prstGeom prst="rect">
-            <a:avLst/>
-          </a:prstGeom>
-          <a:noFill/>
-          <a:ln/>
-        </p:spPr>
-        <p:txBody>
-          <a:bodyPr wrap="square" lIns="0" tIns="0" rIns="0" bIns="0" rtlCol="0" anchor="t"/>
-          <a:lstStyle/>
-          <a:p>
-            <a:pPr indent="0" marL="0">
-              <a:buNone/>
-            </a:pPr>
-            <a:r>
-              <a:rPr lang="en-US" sz="1400" dirty="0">
-                <a:solidFill>
-                  <a:schemeClr val="tx2"/>
-                </a:solidFill>
-              </a:rPr>
-              <a:t>Градиентный бустинг и трансформер запланированы на A3: им нужна модель для сравнения. SVM и kNN не масштабируются на 266 тыс. строк. Наивный Байес: признаки коррелируют.</a:t>
+              <a:t>1 строка = 1 закупка: 20 признаков и target; сумма взята в логарифме</a:t>
             </a:r>
             <a:endParaRPr lang="en-US" sz="1400" dirty="0"/>
           </a:p>
@@ -4561,26 +5248,74 @@
                   <a:schemeClr val="tx1"/>
                 </a:solidFill>
               </a:rPr>
-              <a:t>Метрики: почему accuracy не подходит</a:t>
+              <a:t>Что мы выяснили из данных</a:t>
             </a:r>
             <a:endParaRPr lang="en-US" sz="3200" dirty="0"/>
           </a:p>
         </p:txBody>
       </p:sp>
-      <p:sp>
-        <p:nvSpPr>
-          <p:cNvPr id="3" name="Card 72"/>
+      <p:pic>
+        <p:nvPicPr>
+          <p:cNvPr id="3" name="EDA value chart" descr="Доля сорванных договоров по сумме закупки: от 1,5 % в самых дешёвых до 16,5 % в самых дорогих">    </p:cNvPr>
+          <p:cNvPicPr>
+            <a:picLocks noChangeAspect="1"/>
+          </p:cNvPicPr>
+          <p:nvPr/>
+        </p:nvPicPr>
+        <p:blipFill>
+          <a:blip r:embed="rId1"/>
+          <a:stretch>
+            <a:fillRect/>
+          </a:stretch>
+        </p:blipFill>
+        <p:spPr>
+          <a:xfrm>
+            <a:off x="548640" y="1325880"/>
+            <a:ext cx="5669280" cy="3017520"/>
+          </a:xfrm>
+          <a:prstGeom prst="rect">
+            <a:avLst/>
+          </a:prstGeom>
+        </p:spPr>
+      </p:pic>
+      <p:pic>
+        <p:nvPicPr>
+          <p:cNvPr id="4" name="EDA bidders chart" descr="Доля сорванных договоров по числу участников: все закупки и только запрос ценовых предложений">    </p:cNvPr>
+          <p:cNvPicPr>
+            <a:picLocks noChangeAspect="1"/>
+          </p:cNvPicPr>
+          <p:nvPr/>
+        </p:nvPicPr>
+        <p:blipFill>
+          <a:blip r:embed="rId2"/>
+          <a:stretch>
+            <a:fillRect/>
+          </a:stretch>
+        </p:blipFill>
+        <p:spPr>
+          <a:xfrm>
+            <a:off x="6400800" y="1325880"/>
+            <a:ext cx="5257800" cy="3017520"/>
+          </a:xfrm>
+          <a:prstGeom prst="rect">
+            <a:avLst/>
+          </a:prstGeom>
+        </p:spPr>
+      </p:pic>
+      <p:sp>
+        <p:nvSpPr>
+          <p:cNvPr id="5" name="Card 87"/>
           <p:cNvSpPr/>
           <p:nvPr/>
         </p:nvSpPr>
         <p:spPr>
           <a:xfrm>
-            <a:off x="548640" y="1463040"/>
-            <a:ext cx="3931920" cy="4663440"/>
+            <a:off x="548640" y="4526280"/>
+            <a:ext cx="2670048" cy="1691640"/>
           </a:xfrm>
           <a:prstGeom prst="roundRect">
             <a:avLst>
-              <a:gd name="adj" fmla="val 1860"/>
+              <a:gd name="adj" fmla="val 4324"/>
             </a:avLst>
           </a:prstGeom>
           <a:solidFill>
@@ -4591,14 +5326,14 @@
       </p:sp>
       <p:sp>
         <p:nvSpPr>
-          <p:cNvPr id="4" name="Text 73"/>
-          <p:cNvSpPr txBox="1"/>
-          <p:nvPr/>
-        </p:nvSpPr>
-        <p:spPr>
-          <a:xfrm>
-            <a:off x="822960" y="1737360"/>
-            <a:ext cx="3383280" cy="914400"/>
+          <p:cNvPr id="6" name="Text 88"/>
+          <p:cNvSpPr txBox="1"/>
+          <p:nvPr/>
+        </p:nvSpPr>
+        <p:spPr>
+          <a:xfrm>
+            <a:off x="713232" y="4636008"/>
+            <a:ext cx="2340864" cy="320040"/>
           </a:xfrm>
           <a:prstGeom prst="rect">
             <a:avLst/>
@@ -4614,27 +5349,27 @@
               <a:buNone/>
             </a:pPr>
             <a:r>
-              <a:rPr lang="en-US" sz="5400" b="1" dirty="0">
+              <a:rPr lang="en-US" sz="1400" b="1" dirty="0">
                 <a:solidFill>
                   <a:schemeClr val="accent1"/>
                 </a:solidFill>
               </a:rPr>
-              <a:t>93,4 %</a:t>
-            </a:r>
-            <a:endParaRPr lang="en-US" sz="5400" dirty="0"/>
-          </a:p>
-        </p:txBody>
-      </p:sp>
-      <p:sp>
-        <p:nvSpPr>
-          <p:cNvPr id="5" name="Text 74"/>
-          <p:cNvSpPr txBox="1"/>
-          <p:nvPr/>
-        </p:nvSpPr>
-        <p:spPr>
-          <a:xfrm>
-            <a:off x="822960" y="2743200"/>
-            <a:ext cx="3383280" cy="640080"/>
+              <a:t>Сумма закупки</a:t>
+            </a:r>
+            <a:endParaRPr lang="en-US" sz="1400" dirty="0"/>
+          </a:p>
+        </p:txBody>
+      </p:sp>
+      <p:sp>
+        <p:nvSpPr>
+          <p:cNvPr id="7" name="Text 89"/>
+          <p:cNvSpPr txBox="1"/>
+          <p:nvPr/>
+        </p:nvSpPr>
+        <p:spPr>
+          <a:xfrm>
+            <a:off x="713232" y="5001768"/>
+            <a:ext cx="2340864" cy="1143000"/>
           </a:xfrm>
           <a:prstGeom prst="rect">
             <a:avLst/>
@@ -4650,103 +5385,31 @@
               <a:buNone/>
             </a:pPr>
             <a:r>
-              <a:rPr lang="en-US" sz="1600" dirty="0">
-                <a:solidFill>
-                  <a:schemeClr val="tx1"/>
-                </a:solidFill>
-              </a:rPr>
-              <a:t>accuracy у «модели», которая никого не помечает</a:t>
-            </a:r>
-            <a:endParaRPr lang="en-US" sz="1600" dirty="0"/>
-          </a:p>
-        </p:txBody>
-      </p:sp>
-      <p:sp>
-        <p:nvSpPr>
-          <p:cNvPr id="6" name="Text 75"/>
-          <p:cNvSpPr txBox="1"/>
-          <p:nvPr/>
-        </p:nvSpPr>
-        <p:spPr>
-          <a:xfrm>
-            <a:off x="822960" y="3520440"/>
-            <a:ext cx="3383280" cy="365760"/>
-          </a:xfrm>
-          <a:prstGeom prst="rect">
-            <a:avLst/>
-          </a:prstGeom>
-          <a:noFill/>
-          <a:ln/>
-        </p:spPr>
-        <p:txBody>
-          <a:bodyPr wrap="square" lIns="0" tIns="0" rIns="0" bIns="0" rtlCol="0" anchor="t"/>
-          <a:lstStyle/>
-          <a:p>
-            <a:pPr indent="0" marL="0">
-              <a:buNone/>
-            </a:pPr>
-            <a:r>
-              <a:rPr lang="en-US" sz="1600" b="1" dirty="0">
-                <a:solidFill>
-                  <a:schemeClr val="tx1"/>
-                </a:solidFill>
-              </a:rPr>
-              <a:t>…и не находит ни одного срыва</a:t>
-            </a:r>
-            <a:endParaRPr lang="en-US" sz="1600" dirty="0"/>
-          </a:p>
-        </p:txBody>
-      </p:sp>
-      <p:sp>
-        <p:nvSpPr>
-          <p:cNvPr id="7" name="Text 76"/>
-          <p:cNvSpPr txBox="1"/>
-          <p:nvPr/>
-        </p:nvSpPr>
-        <p:spPr>
-          <a:xfrm>
-            <a:off x="822960" y="4206240"/>
-            <a:ext cx="3383280" cy="1737360"/>
-          </a:xfrm>
-          <a:prstGeom prst="rect">
-            <a:avLst/>
-          </a:prstGeom>
-          <a:noFill/>
-          <a:ln/>
-        </p:spPr>
-        <p:txBody>
-          <a:bodyPr wrap="square" lIns="0" tIns="0" rIns="0" bIns="0" rtlCol="0" anchor="t"/>
-          <a:lstStyle/>
-          <a:p>
-            <a:pPr indent="0" marL="0">
-              <a:buNone/>
-            </a:pPr>
-            <a:r>
-              <a:rPr lang="en-US" sz="1600" dirty="0">
+              <a:rPr lang="en-US" sz="1400" dirty="0">
                 <a:solidFill>
                   <a:schemeClr val="tx2"/>
                 </a:solidFill>
               </a:rPr>
-              <a:t>При 6,6 % срывов accuracy поощряет бездействие. У полезных моделей она ниже, около 0,89, потому что они решаются помечать закупки.</a:t>
-            </a:r>
-            <a:endParaRPr lang="en-US" sz="1600" dirty="0"/>
-          </a:p>
-        </p:txBody>
-      </p:sp>
-      <p:sp>
-        <p:nvSpPr>
-          <p:cNvPr id="8" name="Card 77"/>
+              <a:t>В самых дешёвых закупках срывается 1,5 %, в самых дорогих 16,5 %</a:t>
+            </a:r>
+            <a:endParaRPr lang="en-US" sz="1400" dirty="0"/>
+          </a:p>
+        </p:txBody>
+      </p:sp>
+      <p:sp>
+        <p:nvSpPr>
+          <p:cNvPr id="8" name="Card 90"/>
           <p:cNvSpPr/>
           <p:nvPr/>
         </p:nvSpPr>
         <p:spPr>
           <a:xfrm>
-            <a:off x="4800600" y="1463040"/>
-            <a:ext cx="3310128" cy="2240280"/>
+            <a:off x="3346704" y="4526280"/>
+            <a:ext cx="2670048" cy="1691640"/>
           </a:xfrm>
           <a:prstGeom prst="roundRect">
             <a:avLst>
-              <a:gd name="adj" fmla="val 3265"/>
+              <a:gd name="adj" fmla="val 4324"/>
             </a:avLst>
           </a:prstGeom>
           <a:solidFill>
@@ -4757,86 +5420,14 @@
       </p:sp>
       <p:sp>
         <p:nvSpPr>
-          <p:cNvPr id="9" name="Text 78"/>
-          <p:cNvSpPr txBox="1"/>
-          <p:nvPr/>
-        </p:nvSpPr>
-        <p:spPr>
-          <a:xfrm>
-            <a:off x="5029200" y="1645920"/>
-            <a:ext cx="2011680" cy="411480"/>
-          </a:xfrm>
-          <a:prstGeom prst="rect">
-            <a:avLst/>
-          </a:prstGeom>
-          <a:noFill/>
-          <a:ln/>
-        </p:spPr>
-        <p:txBody>
-          <a:bodyPr wrap="square" lIns="0" tIns="0" rIns="0" bIns="0" rtlCol="0" anchor="ctr"/>
-          <a:lstStyle/>
-          <a:p>
-            <a:pPr indent="0" marL="0">
-              <a:buNone/>
-            </a:pPr>
-            <a:r>
-              <a:rPr lang="en-US" sz="1800" b="1" dirty="0">
-                <a:solidFill>
-                  <a:schemeClr val="tx1"/>
-                </a:solidFill>
-              </a:rPr>
-              <a:t>ROC-AUC</a:t>
-            </a:r>
-            <a:endParaRPr lang="en-US" sz="1800" dirty="0"/>
-          </a:p>
-        </p:txBody>
-      </p:sp>
-      <p:sp>
-        <p:nvSpPr>
-          <p:cNvPr id="10" name="Text 79"/>
-          <p:cNvSpPr txBox="1"/>
-          <p:nvPr/>
-        </p:nvSpPr>
-        <p:spPr>
-          <a:xfrm>
-            <a:off x="6903720" y="1645920"/>
-            <a:ext cx="978408" cy="411480"/>
-          </a:xfrm>
-          <a:prstGeom prst="rect">
-            <a:avLst/>
-          </a:prstGeom>
-          <a:noFill/>
-          <a:ln/>
-        </p:spPr>
-        <p:txBody>
-          <a:bodyPr wrap="square" lIns="0" tIns="0" rIns="0" bIns="0" rtlCol="0" anchor="ctr"/>
-          <a:lstStyle/>
-          <a:p>
-            <a:pPr algn="r" indent="0" marL="0">
-              <a:buNone/>
-            </a:pPr>
-            <a:r>
-              <a:rPr lang="en-US" sz="2200" b="1" dirty="0">
-                <a:solidFill>
-                  <a:schemeClr val="accent2"/>
-                </a:solidFill>
-              </a:rPr>
-              <a:t>0,79</a:t>
-            </a:r>
-            <a:endParaRPr lang="en-US" sz="2200" dirty="0"/>
-          </a:p>
-        </p:txBody>
-      </p:sp>
-      <p:sp>
-        <p:nvSpPr>
-          <p:cNvPr id="11" name="Text 80"/>
-          <p:cNvSpPr txBox="1"/>
-          <p:nvPr/>
-        </p:nvSpPr>
-        <p:spPr>
-          <a:xfrm>
-            <a:off x="5029200" y="2194560"/>
-            <a:ext cx="2852928" cy="1371600"/>
+          <p:cNvPr id="9" name="Text 91"/>
+          <p:cNvSpPr txBox="1"/>
+          <p:nvPr/>
+        </p:nvSpPr>
+        <p:spPr>
+          <a:xfrm>
+            <a:off x="3511296" y="4636008"/>
+            <a:ext cx="2340864" cy="320040"/>
           </a:xfrm>
           <a:prstGeom prst="rect">
             <a:avLst/>
@@ -4852,31 +5443,67 @@
               <a:buNone/>
             </a:pPr>
             <a:r>
-              <a:rPr lang="en-US" sz="1600" dirty="0">
+              <a:rPr lang="en-US" sz="1400" b="1" dirty="0">
+                <a:solidFill>
+                  <a:schemeClr val="accent1"/>
+                </a:solidFill>
+              </a:rPr>
+              <a:t>Способ закупки</a:t>
+            </a:r>
+            <a:endParaRPr lang="en-US" sz="1400" dirty="0"/>
+          </a:p>
+        </p:txBody>
+      </p:sp>
+      <p:sp>
+        <p:nvSpPr>
+          <p:cNvPr id="10" name="Text 92"/>
+          <p:cNvSpPr txBox="1"/>
+          <p:nvPr/>
+        </p:nvSpPr>
+        <p:spPr>
+          <a:xfrm>
+            <a:off x="3511296" y="5001768"/>
+            <a:ext cx="2340864" cy="1143000"/>
+          </a:xfrm>
+          <a:prstGeom prst="rect">
+            <a:avLst/>
+          </a:prstGeom>
+          <a:noFill/>
+          <a:ln/>
+        </p:spPr>
+        <p:txBody>
+          <a:bodyPr wrap="square" lIns="0" tIns="0" rIns="0" bIns="0" rtlCol="0" anchor="t"/>
+          <a:lstStyle/>
+          <a:p>
+            <a:pPr indent="0" marL="0">
+              <a:buNone/>
+            </a:pPr>
+            <a:r>
+              <a:rPr lang="en-US" sz="1400" dirty="0">
                 <a:solidFill>
                   <a:schemeClr val="tx2"/>
                 </a:solidFill>
               </a:rPr>
-              <a:t>Вероятность, что сорванный договор получит оценку выше успешного. Не зависит от порога и соотношения классов.</a:t>
-            </a:r>
-            <a:endParaRPr lang="en-US" sz="1600" dirty="0"/>
-          </a:p>
-        </p:txBody>
-      </p:sp>
-      <p:sp>
-        <p:nvSpPr>
-          <p:cNvPr id="12" name="Card 81"/>
+              <a:t>Запрос ценовых предложений 9 %, из одного источника 3 %, рамочные 1 %</a:t>
+            </a:r>
+            <a:endParaRPr lang="en-US" sz="1400" dirty="0"/>
+          </a:p>
+        </p:txBody>
+      </p:sp>
+      <p:sp>
+        <p:nvSpPr>
+          <p:cNvPr id="11" name="Card 93"/>
           <p:cNvSpPr/>
           <p:nvPr/>
         </p:nvSpPr>
         <p:spPr>
           <a:xfrm>
-            <a:off x="8275320" y="1463040"/>
-            <a:ext cx="3310128" cy="2240280"/>
+            <a:off x="6144768" y="4526280"/>
+            <a:ext cx="2670048" cy="1691640"/>
           </a:xfrm>
           <a:prstGeom prst="roundRect">
             <a:avLst>
-              <a:gd name="adj" fmla="val 3265"/>
+              <a:gd name="adj" fmla="val 4324"/>
             </a:avLst>
           </a:prstGeom>
           <a:solidFill>
@@ -4887,86 +5514,14 @@
       </p:sp>
       <p:sp>
         <p:nvSpPr>
-          <p:cNvPr id="13" name="Text 82"/>
-          <p:cNvSpPr txBox="1"/>
-          <p:nvPr/>
-        </p:nvSpPr>
-        <p:spPr>
-          <a:xfrm>
-            <a:off x="8503920" y="1645920"/>
-            <a:ext cx="2011680" cy="411480"/>
-          </a:xfrm>
-          <a:prstGeom prst="rect">
-            <a:avLst/>
-          </a:prstGeom>
-          <a:noFill/>
-          <a:ln/>
-        </p:spPr>
-        <p:txBody>
-          <a:bodyPr wrap="square" lIns="0" tIns="0" rIns="0" bIns="0" rtlCol="0" anchor="ctr"/>
-          <a:lstStyle/>
-          <a:p>
-            <a:pPr indent="0" marL="0">
-              <a:buNone/>
-            </a:pPr>
-            <a:r>
-              <a:rPr lang="en-US" sz="1800" b="1" dirty="0">
-                <a:solidFill>
-                  <a:schemeClr val="tx1"/>
-                </a:solidFill>
-              </a:rPr>
-              <a:t>PR-AUC</a:t>
-            </a:r>
-            <a:endParaRPr lang="en-US" sz="1800" dirty="0"/>
-          </a:p>
-        </p:txBody>
-      </p:sp>
-      <p:sp>
-        <p:nvSpPr>
-          <p:cNvPr id="14" name="Text 83"/>
-          <p:cNvSpPr txBox="1"/>
-          <p:nvPr/>
-        </p:nvSpPr>
-        <p:spPr>
-          <a:xfrm>
-            <a:off x="10378440" y="1645920"/>
-            <a:ext cx="978408" cy="411480"/>
-          </a:xfrm>
-          <a:prstGeom prst="rect">
-            <a:avLst/>
-          </a:prstGeom>
-          <a:noFill/>
-          <a:ln/>
-        </p:spPr>
-        <p:txBody>
-          <a:bodyPr wrap="square" lIns="0" tIns="0" rIns="0" bIns="0" rtlCol="0" anchor="ctr"/>
-          <a:lstStyle/>
-          <a:p>
-            <a:pPr algn="r" indent="0" marL="0">
-              <a:buNone/>
-            </a:pPr>
-            <a:r>
-              <a:rPr lang="en-US" sz="2200" b="1" dirty="0">
-                <a:solidFill>
-                  <a:schemeClr val="accent2"/>
-                </a:solidFill>
-              </a:rPr>
-              <a:t>0,26</a:t>
-            </a:r>
-            <a:endParaRPr lang="en-US" sz="2200" dirty="0"/>
-          </a:p>
-        </p:txBody>
-      </p:sp>
-      <p:sp>
-        <p:nvSpPr>
-          <p:cNvPr id="15" name="Text 84"/>
-          <p:cNvSpPr txBox="1"/>
-          <p:nvPr/>
-        </p:nvSpPr>
-        <p:spPr>
-          <a:xfrm>
-            <a:off x="8503920" y="2194560"/>
-            <a:ext cx="2852928" cy="1371600"/>
+          <p:cNvPr id="12" name="Text 94"/>
+          <p:cNvSpPr txBox="1"/>
+          <p:nvPr/>
+        </p:nvSpPr>
+        <p:spPr>
+          <a:xfrm>
+            <a:off x="6309360" y="4636008"/>
+            <a:ext cx="2340864" cy="320040"/>
           </a:xfrm>
           <a:prstGeom prst="rect">
             <a:avLst/>
@@ -4982,31 +5537,67 @@
               <a:buNone/>
             </a:pPr>
             <a:r>
-              <a:rPr lang="en-US" sz="1600" dirty="0">
+              <a:rPr lang="en-US" sz="1400" b="1" dirty="0">
+                <a:solidFill>
+                  <a:schemeClr val="accent1"/>
+                </a:solidFill>
+              </a:rPr>
+              <a:t>Парадокс Симпсона</a:t>
+            </a:r>
+            <a:endParaRPr lang="en-US" sz="1400" dirty="0"/>
+          </a:p>
+        </p:txBody>
+      </p:sp>
+      <p:sp>
+        <p:nvSpPr>
+          <p:cNvPr id="13" name="Text 95"/>
+          <p:cNvSpPr txBox="1"/>
+          <p:nvPr/>
+        </p:nvSpPr>
+        <p:spPr>
+          <a:xfrm>
+            <a:off x="6309360" y="5001768"/>
+            <a:ext cx="2340864" cy="1143000"/>
+          </a:xfrm>
+          <a:prstGeom prst="rect">
+            <a:avLst/>
+          </a:prstGeom>
+          <a:noFill/>
+          <a:ln/>
+        </p:spPr>
+        <p:txBody>
+          <a:bodyPr wrap="square" lIns="0" tIns="0" rIns="0" bIns="0" rtlCol="0" anchor="t"/>
+          <a:lstStyle/>
+          <a:p>
+            <a:pPr indent="0" marL="0">
+              <a:buNone/>
+            </a:pPr>
+            <a:r>
+              <a:rPr lang="en-US" sz="1400" dirty="0">
                 <a:solidFill>
                   <a:schemeClr val="tx2"/>
                 </a:solidFill>
               </a:rPr>
-              <a:t>Средняя точность по всем уровням полноты. Случайный уровень 0,066, у нас в 4 раза выше. Самая честная при дисбалансе.</a:t>
-            </a:r>
-            <a:endParaRPr lang="en-US" sz="1600" dirty="0"/>
-          </a:p>
-        </p:txBody>
-      </p:sp>
-      <p:sp>
-        <p:nvSpPr>
-          <p:cNvPr id="16" name="Card 85"/>
+              <a:t>Один участник кажется безопасным, но внутри одного способа он рискованнее двух</a:t>
+            </a:r>
+            <a:endParaRPr lang="en-US" sz="1400" dirty="0"/>
+          </a:p>
+        </p:txBody>
+      </p:sp>
+      <p:sp>
+        <p:nvSpPr>
+          <p:cNvPr id="14" name="Card 96"/>
           <p:cNvSpPr/>
           <p:nvPr/>
         </p:nvSpPr>
         <p:spPr>
           <a:xfrm>
-            <a:off x="4800600" y="3886200"/>
-            <a:ext cx="3310128" cy="2240280"/>
+            <a:off x="8942832" y="4526280"/>
+            <a:ext cx="2670048" cy="1691640"/>
           </a:xfrm>
           <a:prstGeom prst="roundRect">
             <a:avLst>
-              <a:gd name="adj" fmla="val 3265"/>
+              <a:gd name="adj" fmla="val 4324"/>
             </a:avLst>
           </a:prstGeom>
           <a:solidFill>
@@ -5017,86 +5608,14 @@
       </p:sp>
       <p:sp>
         <p:nvSpPr>
-          <p:cNvPr id="17" name="Text 86"/>
-          <p:cNvSpPr txBox="1"/>
-          <p:nvPr/>
-        </p:nvSpPr>
-        <p:spPr>
-          <a:xfrm>
-            <a:off x="5029200" y="4069080"/>
-            <a:ext cx="2011680" cy="411480"/>
-          </a:xfrm>
-          <a:prstGeom prst="rect">
-            <a:avLst/>
-          </a:prstGeom>
-          <a:noFill/>
-          <a:ln/>
-        </p:spPr>
-        <p:txBody>
-          <a:bodyPr wrap="square" lIns="0" tIns="0" rIns="0" bIns="0" rtlCol="0" anchor="ctr"/>
-          <a:lstStyle/>
-          <a:p>
-            <a:pPr indent="0" marL="0">
-              <a:buNone/>
-            </a:pPr>
-            <a:r>
-              <a:rPr lang="en-US" sz="1800" b="1" dirty="0">
-                <a:solidFill>
-                  <a:schemeClr val="tx1"/>
-                </a:solidFill>
-              </a:rPr>
-              <a:t>F1</a:t>
-            </a:r>
-            <a:endParaRPr lang="en-US" sz="1800" dirty="0"/>
-          </a:p>
-        </p:txBody>
-      </p:sp>
-      <p:sp>
-        <p:nvSpPr>
-          <p:cNvPr id="18" name="Text 87"/>
-          <p:cNvSpPr txBox="1"/>
-          <p:nvPr/>
-        </p:nvSpPr>
-        <p:spPr>
-          <a:xfrm>
-            <a:off x="6903720" y="4069080"/>
-            <a:ext cx="978408" cy="411480"/>
-          </a:xfrm>
-          <a:prstGeom prst="rect">
-            <a:avLst/>
-          </a:prstGeom>
-          <a:noFill/>
-          <a:ln/>
-        </p:spPr>
-        <p:txBody>
-          <a:bodyPr wrap="square" lIns="0" tIns="0" rIns="0" bIns="0" rtlCol="0" anchor="ctr"/>
-          <a:lstStyle/>
-          <a:p>
-            <a:pPr algn="r" indent="0" marL="0">
-              <a:buNone/>
-            </a:pPr>
-            <a:r>
-              <a:rPr lang="en-US" sz="2200" b="1" dirty="0">
-                <a:solidFill>
-                  <a:schemeClr val="accent2"/>
-                </a:solidFill>
-              </a:rPr>
-              <a:t>0,32</a:t>
-            </a:r>
-            <a:endParaRPr lang="en-US" sz="2200" dirty="0"/>
-          </a:p>
-        </p:txBody>
-      </p:sp>
-      <p:sp>
-        <p:nvSpPr>
-          <p:cNvPr id="19" name="Text 88"/>
-          <p:cNvSpPr txBox="1"/>
-          <p:nvPr/>
-        </p:nvSpPr>
-        <p:spPr>
-          <a:xfrm>
-            <a:off x="5029200" y="4617720"/>
-            <a:ext cx="2852928" cy="1371600"/>
+          <p:cNvPr id="15" name="Text 97"/>
+          <p:cNvSpPr txBox="1"/>
+          <p:nvPr/>
+        </p:nvSpPr>
+        <p:spPr>
+          <a:xfrm>
+            <a:off x="9107424" y="4636008"/>
+            <a:ext cx="2340864" cy="320040"/>
           </a:xfrm>
           <a:prstGeom prst="rect">
             <a:avLst/>
@@ -5112,144 +5631,50 @@
               <a:buNone/>
             </a:pPr>
             <a:r>
-              <a:rPr lang="en-US" sz="1600" dirty="0">
+              <a:rPr lang="en-US" sz="1400" b="1" dirty="0">
+                <a:solidFill>
+                  <a:schemeClr val="accent1"/>
+                </a:solidFill>
+              </a:rPr>
+              <a:t>Предмет и регион</a:t>
+            </a:r>
+            <a:endParaRPr lang="en-US" sz="1400" dirty="0"/>
+          </a:p>
+        </p:txBody>
+      </p:sp>
+      <p:sp>
+        <p:nvSpPr>
+          <p:cNvPr id="16" name="Text 98"/>
+          <p:cNvSpPr txBox="1"/>
+          <p:nvPr/>
+        </p:nvSpPr>
+        <p:spPr>
+          <a:xfrm>
+            <a:off x="9107424" y="5001768"/>
+            <a:ext cx="2340864" cy="1143000"/>
+          </a:xfrm>
+          <a:prstGeom prst="rect">
+            <a:avLst/>
+          </a:prstGeom>
+          <a:noFill/>
+          <a:ln/>
+        </p:spPr>
+        <p:txBody>
+          <a:bodyPr wrap="square" lIns="0" tIns="0" rIns="0" bIns="0" rtlCol="0" anchor="t"/>
+          <a:lstStyle/>
+          <a:p>
+            <a:pPr indent="0" marL="0">
+              <a:buNone/>
+            </a:pPr>
+            <a:r>
+              <a:rPr lang="en-US" sz="1400" dirty="0">
                 <a:solidFill>
                   <a:schemeClr val="tx2"/>
                 </a:solidFill>
               </a:rPr>
-              <a:t>Баланс точности (0,26) и полноты (0,42) при одном пороге, подобранном только на validation.</a:t>
-            </a:r>
-            <a:endParaRPr lang="en-US" sz="1600" dirty="0"/>
-          </a:p>
-        </p:txBody>
-      </p:sp>
-      <p:sp>
-        <p:nvSpPr>
-          <p:cNvPr id="20" name="Card 89"/>
-          <p:cNvSpPr/>
-          <p:nvPr/>
-        </p:nvSpPr>
-        <p:spPr>
-          <a:xfrm>
-            <a:off x="8275320" y="3886200"/>
-            <a:ext cx="3310128" cy="2240280"/>
-          </a:xfrm>
-          <a:prstGeom prst="roundRect">
-            <a:avLst>
-              <a:gd name="adj" fmla="val 3265"/>
-            </a:avLst>
-          </a:prstGeom>
-          <a:solidFill>
-            <a:schemeClr val="bg2"/>
-          </a:solidFill>
-          <a:ln/>
-        </p:spPr>
-      </p:sp>
-      <p:sp>
-        <p:nvSpPr>
-          <p:cNvPr id="21" name="Text 90"/>
-          <p:cNvSpPr txBox="1"/>
-          <p:nvPr/>
-        </p:nvSpPr>
-        <p:spPr>
-          <a:xfrm>
-            <a:off x="8503920" y="4069080"/>
-            <a:ext cx="2011680" cy="411480"/>
-          </a:xfrm>
-          <a:prstGeom prst="rect">
-            <a:avLst/>
-          </a:prstGeom>
-          <a:noFill/>
-          <a:ln/>
-        </p:spPr>
-        <p:txBody>
-          <a:bodyPr wrap="square" lIns="0" tIns="0" rIns="0" bIns="0" rtlCol="0" anchor="ctr"/>
-          <a:lstStyle/>
-          <a:p>
-            <a:pPr indent="0" marL="0">
-              <a:buNone/>
-            </a:pPr>
-            <a:r>
-              <a:rPr lang="en-US" sz="1800" b="1" dirty="0">
-                <a:solidFill>
-                  <a:schemeClr val="tx1"/>
-                </a:solidFill>
-              </a:rPr>
-              <a:t>Precision@1 %</a:t>
-            </a:r>
-            <a:endParaRPr lang="en-US" sz="1800" dirty="0"/>
-          </a:p>
-        </p:txBody>
-      </p:sp>
-      <p:sp>
-        <p:nvSpPr>
-          <p:cNvPr id="22" name="Text 91"/>
-          <p:cNvSpPr txBox="1"/>
-          <p:nvPr/>
-        </p:nvSpPr>
-        <p:spPr>
-          <a:xfrm>
-            <a:off x="10378440" y="4069080"/>
-            <a:ext cx="978408" cy="411480"/>
-          </a:xfrm>
-          <a:prstGeom prst="rect">
-            <a:avLst/>
-          </a:prstGeom>
-          <a:noFill/>
-          <a:ln/>
-        </p:spPr>
-        <p:txBody>
-          <a:bodyPr wrap="square" lIns="0" tIns="0" rIns="0" bIns="0" rtlCol="0" anchor="ctr"/>
-          <a:lstStyle/>
-          <a:p>
-            <a:pPr algn="r" indent="0" marL="0">
-              <a:buNone/>
-            </a:pPr>
-            <a:r>
-              <a:rPr lang="en-US" sz="2200" b="1" dirty="0">
-                <a:solidFill>
-                  <a:schemeClr val="accent2"/>
-                </a:solidFill>
-              </a:rPr>
-              <a:t>0,50</a:t>
-            </a:r>
-            <a:endParaRPr lang="en-US" sz="2200" dirty="0"/>
-          </a:p>
-        </p:txBody>
-      </p:sp>
-      <p:sp>
-        <p:nvSpPr>
-          <p:cNvPr id="23" name="Text 92"/>
-          <p:cNvSpPr txBox="1"/>
-          <p:nvPr/>
-        </p:nvSpPr>
-        <p:spPr>
-          <a:xfrm>
-            <a:off x="8503920" y="4617720"/>
-            <a:ext cx="2852928" cy="1371600"/>
-          </a:xfrm>
-          <a:prstGeom prst="rect">
-            <a:avLst/>
-          </a:prstGeom>
-          <a:noFill/>
-          <a:ln/>
-        </p:spPr>
-        <p:txBody>
-          <a:bodyPr wrap="square" lIns="0" tIns="0" rIns="0" bIns="0" rtlCol="0" anchor="t"/>
-          <a:lstStyle/>
-          <a:p>
-            <a:pPr indent="0" marL="0">
-              <a:buNone/>
-            </a:pPr>
-            <a:r>
-              <a:rPr lang="en-US" sz="1600" dirty="0">
-                <a:solidFill>
-                  <a:schemeClr val="tx2"/>
-                </a:solidFill>
-              </a:rPr>
-              <a:t>Качество верхушки списка: соответствует ограниченным возможностям аудитора.</a:t>
-            </a:r>
-            <a:endParaRPr lang="en-US" sz="1600" dirty="0"/>
+              <a:t>Товары 9,1 %, услуги 4,2 %. В Астане, Шымкенте и Алматы вдвое выше, чем в регионах</a:t>
+            </a:r>
+            <a:endParaRPr lang="en-US" sz="1400" dirty="0"/>
           </a:p>
         </p:txBody>
       </p:sp>
@@ -5355,6 +5780,1756 @@
                   <a:schemeClr val="tx1"/>
                 </a:solidFill>
               </a:rPr>
+              <a:t>Baseline: логистическая регрессия</a:t>
+            </a:r>
+            <a:endParaRPr lang="en-US" sz="3200" dirty="0"/>
+          </a:p>
+        </p:txBody>
+      </p:sp>
+      <p:sp>
+        <p:nvSpPr>
+          <p:cNvPr id="3" name="Card 99"/>
+          <p:cNvSpPr/>
+          <p:nvPr/>
+        </p:nvSpPr>
+        <p:spPr>
+          <a:xfrm>
+            <a:off x="548640" y="1463040"/>
+            <a:ext cx="5486400" cy="1042416"/>
+          </a:xfrm>
+          <a:prstGeom prst="roundRect">
+            <a:avLst>
+              <a:gd name="adj" fmla="val 7018"/>
+            </a:avLst>
+          </a:prstGeom>
+          <a:solidFill>
+            <a:schemeClr val="bg2"/>
+          </a:solidFill>
+          <a:ln/>
+        </p:spPr>
+      </p:sp>
+      <p:sp>
+        <p:nvSpPr>
+          <p:cNvPr id="4" name="Text 100"/>
+          <p:cNvSpPr txBox="1"/>
+          <p:nvPr/>
+        </p:nvSpPr>
+        <p:spPr>
+          <a:xfrm>
+            <a:off x="777240" y="1572768"/>
+            <a:ext cx="5029200" cy="320040"/>
+          </a:xfrm>
+          <a:prstGeom prst="rect">
+            <a:avLst/>
+          </a:prstGeom>
+          <a:noFill/>
+          <a:ln/>
+        </p:spPr>
+        <p:txBody>
+          <a:bodyPr wrap="square" lIns="0" tIns="0" rIns="0" bIns="0" rtlCol="0" anchor="t"/>
+          <a:lstStyle/>
+          <a:p>
+            <a:pPr indent="0" marL="0">
+              <a:buNone/>
+            </a:pPr>
+            <a:r>
+              <a:rPr lang="en-US" sz="1600" b="1" dirty="0">
+                <a:solidFill>
+                  <a:schemeClr val="tx1"/>
+                </a:solidFill>
+              </a:rPr>
+              <a:t>Предобработка</a:t>
+            </a:r>
+            <a:endParaRPr lang="en-US" sz="1600" dirty="0"/>
+          </a:p>
+        </p:txBody>
+      </p:sp>
+      <p:sp>
+        <p:nvSpPr>
+          <p:cNvPr id="5" name="Text 101"/>
+          <p:cNvSpPr txBox="1"/>
+          <p:nvPr/>
+        </p:nvSpPr>
+        <p:spPr>
+          <a:xfrm>
+            <a:off x="777240" y="1920240"/>
+            <a:ext cx="5029200" cy="512064"/>
+          </a:xfrm>
+          <a:prstGeom prst="rect">
+            <a:avLst/>
+          </a:prstGeom>
+          <a:noFill/>
+          <a:ln/>
+        </p:spPr>
+        <p:txBody>
+          <a:bodyPr wrap="square" lIns="0" tIns="0" rIns="0" bIns="0" rtlCol="0" anchor="t"/>
+          <a:lstStyle/>
+          <a:p>
+            <a:pPr indent="0" marL="0">
+              <a:buNone/>
+            </a:pPr>
+            <a:r>
+              <a:rPr lang="en-US" sz="1400" dirty="0">
+                <a:solidFill>
+                  <a:schemeClr val="tx2"/>
+                </a:solidFill>
+              </a:rPr>
+              <a:t>Медиана вместо пропусков + флаги пропуска, масштабирование, one-hot; обучается только на train</a:t>
+            </a:r>
+            <a:endParaRPr lang="en-US" sz="1400" dirty="0"/>
+          </a:p>
+        </p:txBody>
+      </p:sp>
+      <p:sp>
+        <p:nvSpPr>
+          <p:cNvPr id="6" name="Arrow 102"/>
+          <p:cNvSpPr/>
+          <p:nvPr/>
+        </p:nvSpPr>
+        <p:spPr>
+          <a:xfrm>
+            <a:off x="3154680" y="2532888"/>
+            <a:ext cx="274320" cy="201168"/>
+          </a:xfrm>
+          <a:prstGeom prst="downArrow">
+            <a:avLst/>
+          </a:prstGeom>
+          <a:solidFill>
+            <a:schemeClr val="accent5"/>
+          </a:solidFill>
+          <a:ln/>
+        </p:spPr>
+      </p:sp>
+      <p:sp>
+        <p:nvSpPr>
+          <p:cNvPr id="7" name="Card 103"/>
+          <p:cNvSpPr/>
+          <p:nvPr/>
+        </p:nvSpPr>
+        <p:spPr>
+          <a:xfrm>
+            <a:off x="548640" y="2761488"/>
+            <a:ext cx="5486400" cy="1042416"/>
+          </a:xfrm>
+          <a:prstGeom prst="roundRect">
+            <a:avLst>
+              <a:gd name="adj" fmla="val 7018"/>
+            </a:avLst>
+          </a:prstGeom>
+          <a:solidFill>
+            <a:schemeClr val="accent2"/>
+          </a:solidFill>
+          <a:ln/>
+        </p:spPr>
+      </p:sp>
+      <p:sp>
+        <p:nvSpPr>
+          <p:cNvPr id="8" name="Text 104"/>
+          <p:cNvSpPr txBox="1"/>
+          <p:nvPr/>
+        </p:nvSpPr>
+        <p:spPr>
+          <a:xfrm>
+            <a:off x="777240" y="2871216"/>
+            <a:ext cx="5029200" cy="320040"/>
+          </a:xfrm>
+          <a:prstGeom prst="rect">
+            <a:avLst/>
+          </a:prstGeom>
+          <a:noFill/>
+          <a:ln/>
+        </p:spPr>
+        <p:txBody>
+          <a:bodyPr wrap="square" lIns="0" tIns="0" rIns="0" bIns="0" rtlCol="0" anchor="t"/>
+          <a:lstStyle/>
+          <a:p>
+            <a:pPr indent="0" marL="0">
+              <a:buNone/>
+            </a:pPr>
+            <a:r>
+              <a:rPr lang="en-US" sz="1600" b="1" dirty="0">
+                <a:solidFill>
+                  <a:schemeClr val="bg1"/>
+                </a:solidFill>
+              </a:rPr>
+              <a:t>Логистическая регрессия</a:t>
+            </a:r>
+            <a:endParaRPr lang="en-US" sz="1600" dirty="0"/>
+          </a:p>
+        </p:txBody>
+      </p:sp>
+      <p:sp>
+        <p:nvSpPr>
+          <p:cNvPr id="9" name="Text 105"/>
+          <p:cNvSpPr txBox="1"/>
+          <p:nvPr/>
+        </p:nvSpPr>
+        <p:spPr>
+          <a:xfrm>
+            <a:off x="777240" y="3218688"/>
+            <a:ext cx="5029200" cy="512064"/>
+          </a:xfrm>
+          <a:prstGeom prst="rect">
+            <a:avLst/>
+          </a:prstGeom>
+          <a:noFill/>
+          <a:ln/>
+        </p:spPr>
+        <p:txBody>
+          <a:bodyPr wrap="square" lIns="0" tIns="0" rIns="0" bIns="0" rtlCol="0" anchor="t"/>
+          <a:lstStyle/>
+          <a:p>
+            <a:pPr indent="0" marL="0">
+              <a:buNone/>
+            </a:pPr>
+            <a:r>
+              <a:rPr lang="en-US" sz="1400" dirty="0">
+                <a:solidFill>
+                  <a:schemeClr val="bg1"/>
+                </a:solidFill>
+              </a:rPr>
+              <a:t>L2-штраф, C = 1, class_weight = balanced, solver lbfgs</a:t>
+            </a:r>
+            <a:endParaRPr lang="en-US" sz="1400" dirty="0"/>
+          </a:p>
+        </p:txBody>
+      </p:sp>
+      <p:sp>
+        <p:nvSpPr>
+          <p:cNvPr id="10" name="Arrow 106"/>
+          <p:cNvSpPr/>
+          <p:nvPr/>
+        </p:nvSpPr>
+        <p:spPr>
+          <a:xfrm>
+            <a:off x="3154680" y="3831336"/>
+            <a:ext cx="274320" cy="201168"/>
+          </a:xfrm>
+          <a:prstGeom prst="downArrow">
+            <a:avLst/>
+          </a:prstGeom>
+          <a:solidFill>
+            <a:schemeClr val="accent5"/>
+          </a:solidFill>
+          <a:ln/>
+        </p:spPr>
+      </p:sp>
+      <p:sp>
+        <p:nvSpPr>
+          <p:cNvPr id="11" name="Card 107"/>
+          <p:cNvSpPr/>
+          <p:nvPr/>
+        </p:nvSpPr>
+        <p:spPr>
+          <a:xfrm>
+            <a:off x="548640" y="4059936"/>
+            <a:ext cx="5486400" cy="1042416"/>
+          </a:xfrm>
+          <a:prstGeom prst="roundRect">
+            <a:avLst>
+              <a:gd name="adj" fmla="val 7018"/>
+            </a:avLst>
+          </a:prstGeom>
+          <a:solidFill>
+            <a:schemeClr val="bg2"/>
+          </a:solidFill>
+          <a:ln/>
+        </p:spPr>
+      </p:sp>
+      <p:sp>
+        <p:nvSpPr>
+          <p:cNvPr id="12" name="Text 108"/>
+          <p:cNvSpPr txBox="1"/>
+          <p:nvPr/>
+        </p:nvSpPr>
+        <p:spPr>
+          <a:xfrm>
+            <a:off x="777240" y="4169664"/>
+            <a:ext cx="5029200" cy="320040"/>
+          </a:xfrm>
+          <a:prstGeom prst="rect">
+            <a:avLst/>
+          </a:prstGeom>
+          <a:noFill/>
+          <a:ln/>
+        </p:spPr>
+        <p:txBody>
+          <a:bodyPr wrap="square" lIns="0" tIns="0" rIns="0" bIns="0" rtlCol="0" anchor="t"/>
+          <a:lstStyle/>
+          <a:p>
+            <a:pPr indent="0" marL="0">
+              <a:buNone/>
+            </a:pPr>
+            <a:r>
+              <a:rPr lang="en-US" sz="1600" b="1" dirty="0">
+                <a:solidFill>
+                  <a:schemeClr val="tx1"/>
+                </a:solidFill>
+              </a:rPr>
+              <a:t>Оценка риска 0–1</a:t>
+            </a:r>
+            <a:endParaRPr lang="en-US" sz="1600" dirty="0"/>
+          </a:p>
+        </p:txBody>
+      </p:sp>
+      <p:sp>
+        <p:nvSpPr>
+          <p:cNvPr id="13" name="Text 109"/>
+          <p:cNvSpPr txBox="1"/>
+          <p:nvPr/>
+        </p:nvSpPr>
+        <p:spPr>
+          <a:xfrm>
+            <a:off x="777240" y="4517136"/>
+            <a:ext cx="5029200" cy="512064"/>
+          </a:xfrm>
+          <a:prstGeom prst="rect">
+            <a:avLst/>
+          </a:prstGeom>
+          <a:noFill/>
+          <a:ln/>
+        </p:spPr>
+        <p:txBody>
+          <a:bodyPr wrap="square" lIns="0" tIns="0" rIns="0" bIns="0" rtlCol="0" anchor="t"/>
+          <a:lstStyle/>
+          <a:p>
+            <a:pPr indent="0" marL="0">
+              <a:buNone/>
+            </a:pPr>
+            <a:r>
+              <a:rPr lang="en-US" sz="1400" dirty="0">
+                <a:solidFill>
+                  <a:schemeClr val="tx2"/>
+                </a:solidFill>
+              </a:rPr>
+              <a:t>Ранжирует закупки; порог решения подобран на validation</a:t>
+            </a:r>
+            <a:endParaRPr lang="en-US" sz="1400" dirty="0"/>
+          </a:p>
+        </p:txBody>
+      </p:sp>
+      <p:sp>
+        <p:nvSpPr>
+          <p:cNvPr id="14" name="Text 110"/>
+          <p:cNvSpPr txBox="1"/>
+          <p:nvPr/>
+        </p:nvSpPr>
+        <p:spPr>
+          <a:xfrm>
+            <a:off x="548640" y="5349240"/>
+            <a:ext cx="5486400" cy="731520"/>
+          </a:xfrm>
+          <a:prstGeom prst="rect">
+            <a:avLst/>
+          </a:prstGeom>
+          <a:noFill/>
+          <a:ln/>
+        </p:spPr>
+        <p:txBody>
+          <a:bodyPr wrap="square" lIns="0" tIns="0" rIns="0" bIns="0" rtlCol="0" anchor="t"/>
+          <a:lstStyle/>
+          <a:p>
+            <a:pPr indent="0" marL="0">
+              <a:buNone/>
+            </a:pPr>
+            <a:r>
+              <a:rPr lang="en-US" sz="1400" b="1" dirty="0">
+                <a:solidFill>
+                  <a:schemeClr val="tx1"/>
+                </a:solidFill>
+              </a:rPr>
+              <a:t>Обучение: </a:t>
+            </a:r>
+            <a:pPr indent="0" marL="0">
+              <a:buNone/>
+            </a:pPr>
+            <a:r>
+              <a:rPr lang="en-US" sz="1400" dirty="0">
+                <a:solidFill>
+                  <a:schemeClr val="tx1"/>
+                </a:solidFill>
+              </a:rPr>
+              <a:t>266 294 закупки (январь–февраль) · 20 признаков → 52 входа · сошлась за 75 итераций · 1 секунда</a:t>
+            </a:r>
+            <a:endParaRPr lang="en-US" sz="1400" dirty="0"/>
+          </a:p>
+        </p:txBody>
+      </p:sp>
+      <p:sp>
+        <p:nvSpPr>
+          <p:cNvPr id="15" name="Text 111"/>
+          <p:cNvSpPr txBox="1"/>
+          <p:nvPr/>
+        </p:nvSpPr>
+        <p:spPr>
+          <a:xfrm>
+            <a:off x="6492240" y="1417320"/>
+            <a:ext cx="5120640" cy="365760"/>
+          </a:xfrm>
+          <a:prstGeom prst="rect">
+            <a:avLst/>
+          </a:prstGeom>
+          <a:noFill/>
+          <a:ln/>
+        </p:spPr>
+        <p:txBody>
+          <a:bodyPr wrap="square" lIns="0" tIns="0" rIns="0" bIns="0" rtlCol="0" anchor="t"/>
+          <a:lstStyle/>
+          <a:p>
+            <a:pPr indent="0" marL="0">
+              <a:buNone/>
+            </a:pPr>
+            <a:r>
+              <a:rPr lang="en-US" sz="2000" b="1" dirty="0">
+                <a:solidFill>
+                  <a:schemeClr val="tx1"/>
+                </a:solidFill>
+                <a:latin typeface="Georgia" pitchFamily="34" charset="0"/>
+                <a:ea typeface="Georgia" pitchFamily="34" charset="-122"/>
+                <a:cs typeface="Georgia" pitchFamily="34" charset="-120"/>
+              </a:rPr>
+              <a:t>Почему эта модель</a:t>
+            </a:r>
+            <a:endParaRPr lang="en-US" sz="2000" dirty="0"/>
+          </a:p>
+        </p:txBody>
+      </p:sp>
+      <p:sp>
+        <p:nvSpPr>
+          <p:cNvPr id="16" name="Badge 112"/>
+          <p:cNvSpPr/>
+          <p:nvPr/>
+        </p:nvSpPr>
+        <p:spPr>
+          <a:xfrm>
+            <a:off x="6492240" y="1965960"/>
+            <a:ext cx="384048" cy="384048"/>
+          </a:xfrm>
+          <a:prstGeom prst="ellipse">
+            <a:avLst/>
+          </a:prstGeom>
+          <a:solidFill>
+            <a:schemeClr val="accent1"/>
+          </a:solidFill>
+          <a:ln/>
+        </p:spPr>
+      </p:sp>
+      <p:sp>
+        <p:nvSpPr>
+          <p:cNvPr id="17" name="Text 113"/>
+          <p:cNvSpPr txBox="1"/>
+          <p:nvPr/>
+        </p:nvSpPr>
+        <p:spPr>
+          <a:xfrm>
+            <a:off x="6492240" y="1965960"/>
+            <a:ext cx="384048" cy="384048"/>
+          </a:xfrm>
+          <a:prstGeom prst="rect">
+            <a:avLst/>
+          </a:prstGeom>
+          <a:noFill/>
+          <a:ln/>
+        </p:spPr>
+        <p:txBody>
+          <a:bodyPr wrap="square" lIns="0" tIns="0" rIns="0" bIns="0" rtlCol="0" anchor="ctr"/>
+          <a:lstStyle/>
+          <a:p>
+            <a:pPr algn="ctr" indent="0" marL="0">
+              <a:buNone/>
+            </a:pPr>
+            <a:r>
+              <a:rPr lang="en-US" sz="1400" b="1" dirty="0">
+                <a:solidFill>
+                  <a:schemeClr val="bg1"/>
+                </a:solidFill>
+              </a:rPr>
+              <a:t>1</a:t>
+            </a:r>
+            <a:endParaRPr lang="en-US" sz="1400" dirty="0"/>
+          </a:p>
+        </p:txBody>
+      </p:sp>
+      <p:sp>
+        <p:nvSpPr>
+          <p:cNvPr id="18" name="Text 114"/>
+          <p:cNvSpPr txBox="1"/>
+          <p:nvPr/>
+        </p:nvSpPr>
+        <p:spPr>
+          <a:xfrm>
+            <a:off x="7040880" y="1938528"/>
+            <a:ext cx="4572000" cy="548640"/>
+          </a:xfrm>
+          <a:prstGeom prst="rect">
+            <a:avLst/>
+          </a:prstGeom>
+          <a:noFill/>
+          <a:ln/>
+        </p:spPr>
+        <p:txBody>
+          <a:bodyPr wrap="square" lIns="0" tIns="0" rIns="0" bIns="0" rtlCol="0" anchor="ctr"/>
+          <a:lstStyle/>
+          <a:p>
+            <a:pPr indent="0" marL="0">
+              <a:buNone/>
+            </a:pPr>
+            <a:r>
+              <a:rPr lang="en-US" sz="1400" dirty="0">
+                <a:solidFill>
+                  <a:schemeClr val="tx1"/>
+                </a:solidFill>
+              </a:rPr>
+              <a:t>Выдаёт вероятность, поэтому закупки можно ранжировать для проверки</a:t>
+            </a:r>
+            <a:endParaRPr lang="en-US" sz="1400" dirty="0"/>
+          </a:p>
+        </p:txBody>
+      </p:sp>
+      <p:sp>
+        <p:nvSpPr>
+          <p:cNvPr id="19" name="Badge 115"/>
+          <p:cNvSpPr/>
+          <p:nvPr/>
+        </p:nvSpPr>
+        <p:spPr>
+          <a:xfrm>
+            <a:off x="6492240" y="2679192"/>
+            <a:ext cx="384048" cy="384048"/>
+          </a:xfrm>
+          <a:prstGeom prst="ellipse">
+            <a:avLst/>
+          </a:prstGeom>
+          <a:solidFill>
+            <a:schemeClr val="accent1"/>
+          </a:solidFill>
+          <a:ln/>
+        </p:spPr>
+      </p:sp>
+      <p:sp>
+        <p:nvSpPr>
+          <p:cNvPr id="20" name="Text 116"/>
+          <p:cNvSpPr txBox="1"/>
+          <p:nvPr/>
+        </p:nvSpPr>
+        <p:spPr>
+          <a:xfrm>
+            <a:off x="6492240" y="2679192"/>
+            <a:ext cx="384048" cy="384048"/>
+          </a:xfrm>
+          <a:prstGeom prst="rect">
+            <a:avLst/>
+          </a:prstGeom>
+          <a:noFill/>
+          <a:ln/>
+        </p:spPr>
+        <p:txBody>
+          <a:bodyPr wrap="square" lIns="0" tIns="0" rIns="0" bIns="0" rtlCol="0" anchor="ctr"/>
+          <a:lstStyle/>
+          <a:p>
+            <a:pPr algn="ctr" indent="0" marL="0">
+              <a:buNone/>
+            </a:pPr>
+            <a:r>
+              <a:rPr lang="en-US" sz="1400" b="1" dirty="0">
+                <a:solidFill>
+                  <a:schemeClr val="bg1"/>
+                </a:solidFill>
+              </a:rPr>
+              <a:t>2</a:t>
+            </a:r>
+            <a:endParaRPr lang="en-US" sz="1400" dirty="0"/>
+          </a:p>
+        </p:txBody>
+      </p:sp>
+      <p:sp>
+        <p:nvSpPr>
+          <p:cNvPr id="21" name="Text 117"/>
+          <p:cNvSpPr txBox="1"/>
+          <p:nvPr/>
+        </p:nvSpPr>
+        <p:spPr>
+          <a:xfrm>
+            <a:off x="7040880" y="2651760"/>
+            <a:ext cx="4572000" cy="548640"/>
+          </a:xfrm>
+          <a:prstGeom prst="rect">
+            <a:avLst/>
+          </a:prstGeom>
+          <a:noFill/>
+          <a:ln/>
+        </p:spPr>
+        <p:txBody>
+          <a:bodyPr wrap="square" lIns="0" tIns="0" rIns="0" bIns="0" rtlCol="0" anchor="ctr"/>
+          <a:lstStyle/>
+          <a:p>
+            <a:pPr indent="0" marL="0">
+              <a:buNone/>
+            </a:pPr>
+            <a:r>
+              <a:rPr lang="en-US" sz="1400" dirty="0">
+                <a:solidFill>
+                  <a:schemeClr val="tx1"/>
+                </a:solidFill>
+              </a:rPr>
+              <a:t>Понятные коэффициенты: модель можно сверить с результатами EDA</a:t>
+            </a:r>
+            <a:endParaRPr lang="en-US" sz="1400" dirty="0"/>
+          </a:p>
+        </p:txBody>
+      </p:sp>
+      <p:sp>
+        <p:nvSpPr>
+          <p:cNvPr id="22" name="Badge 118"/>
+          <p:cNvSpPr/>
+          <p:nvPr/>
+        </p:nvSpPr>
+        <p:spPr>
+          <a:xfrm>
+            <a:off x="6492240" y="3392424"/>
+            <a:ext cx="384048" cy="384048"/>
+          </a:xfrm>
+          <a:prstGeom prst="ellipse">
+            <a:avLst/>
+          </a:prstGeom>
+          <a:solidFill>
+            <a:schemeClr val="accent1"/>
+          </a:solidFill>
+          <a:ln/>
+        </p:spPr>
+      </p:sp>
+      <p:sp>
+        <p:nvSpPr>
+          <p:cNvPr id="23" name="Text 119"/>
+          <p:cNvSpPr txBox="1"/>
+          <p:nvPr/>
+        </p:nvSpPr>
+        <p:spPr>
+          <a:xfrm>
+            <a:off x="6492240" y="3392424"/>
+            <a:ext cx="384048" cy="384048"/>
+          </a:xfrm>
+          <a:prstGeom prst="rect">
+            <a:avLst/>
+          </a:prstGeom>
+          <a:noFill/>
+          <a:ln/>
+        </p:spPr>
+        <p:txBody>
+          <a:bodyPr wrap="square" lIns="0" tIns="0" rIns="0" bIns="0" rtlCol="0" anchor="ctr"/>
+          <a:lstStyle/>
+          <a:p>
+            <a:pPr algn="ctr" indent="0" marL="0">
+              <a:buNone/>
+            </a:pPr>
+            <a:r>
+              <a:rPr lang="en-US" sz="1400" b="1" dirty="0">
+                <a:solidFill>
+                  <a:schemeClr val="bg1"/>
+                </a:solidFill>
+              </a:rPr>
+              <a:t>3</a:t>
+            </a:r>
+            <a:endParaRPr lang="en-US" sz="1400" dirty="0"/>
+          </a:p>
+        </p:txBody>
+      </p:sp>
+      <p:sp>
+        <p:nvSpPr>
+          <p:cNvPr id="24" name="Text 120"/>
+          <p:cNvSpPr txBox="1"/>
+          <p:nvPr/>
+        </p:nvSpPr>
+        <p:spPr>
+          <a:xfrm>
+            <a:off x="7040880" y="3364992"/>
+            <a:ext cx="4572000" cy="548640"/>
+          </a:xfrm>
+          <a:prstGeom prst="rect">
+            <a:avLst/>
+          </a:prstGeom>
+          <a:noFill/>
+          <a:ln/>
+        </p:spPr>
+        <p:txBody>
+          <a:bodyPr wrap="square" lIns="0" tIns="0" rIns="0" bIns="0" rtlCol="0" anchor="ctr"/>
+          <a:lstStyle/>
+          <a:p>
+            <a:pPr indent="0" marL="0">
+              <a:buNone/>
+            </a:pPr>
+            <a:r>
+              <a:rPr lang="en-US" sz="1400" dirty="0">
+                <a:solidFill>
+                  <a:schemeClr val="tx1"/>
+                </a:solidFill>
+              </a:rPr>
+              <a:t>Веса классов решают проблему дисбаланса 1 : 14 без ресэмплинга</a:t>
+            </a:r>
+            <a:endParaRPr lang="en-US" sz="1400" dirty="0"/>
+          </a:p>
+        </p:txBody>
+      </p:sp>
+      <p:sp>
+        <p:nvSpPr>
+          <p:cNvPr id="25" name="Badge 121"/>
+          <p:cNvSpPr/>
+          <p:nvPr/>
+        </p:nvSpPr>
+        <p:spPr>
+          <a:xfrm>
+            <a:off x="6492240" y="4105656"/>
+            <a:ext cx="384048" cy="384048"/>
+          </a:xfrm>
+          <a:prstGeom prst="ellipse">
+            <a:avLst/>
+          </a:prstGeom>
+          <a:solidFill>
+            <a:schemeClr val="accent1"/>
+          </a:solidFill>
+          <a:ln/>
+        </p:spPr>
+      </p:sp>
+      <p:sp>
+        <p:nvSpPr>
+          <p:cNvPr id="26" name="Text 122"/>
+          <p:cNvSpPr txBox="1"/>
+          <p:nvPr/>
+        </p:nvSpPr>
+        <p:spPr>
+          <a:xfrm>
+            <a:off x="6492240" y="4105656"/>
+            <a:ext cx="384048" cy="384048"/>
+          </a:xfrm>
+          <a:prstGeom prst="rect">
+            <a:avLst/>
+          </a:prstGeom>
+          <a:noFill/>
+          <a:ln/>
+        </p:spPr>
+        <p:txBody>
+          <a:bodyPr wrap="square" lIns="0" tIns="0" rIns="0" bIns="0" rtlCol="0" anchor="ctr"/>
+          <a:lstStyle/>
+          <a:p>
+            <a:pPr algn="ctr" indent="0" marL="0">
+              <a:buNone/>
+            </a:pPr>
+            <a:r>
+              <a:rPr lang="en-US" sz="1400" b="1" dirty="0">
+                <a:solidFill>
+                  <a:schemeClr val="bg1"/>
+                </a:solidFill>
+              </a:rPr>
+              <a:t>4</a:t>
+            </a:r>
+            <a:endParaRPr lang="en-US" sz="1400" dirty="0"/>
+          </a:p>
+        </p:txBody>
+      </p:sp>
+      <p:sp>
+        <p:nvSpPr>
+          <p:cNvPr id="27" name="Text 123"/>
+          <p:cNvSpPr txBox="1"/>
+          <p:nvPr/>
+        </p:nvSpPr>
+        <p:spPr>
+          <a:xfrm>
+            <a:off x="7040880" y="4078224"/>
+            <a:ext cx="4572000" cy="548640"/>
+          </a:xfrm>
+          <a:prstGeom prst="rect">
+            <a:avLst/>
+          </a:prstGeom>
+          <a:noFill/>
+          <a:ln/>
+        </p:spPr>
+        <p:txBody>
+          <a:bodyPr wrap="square" lIns="0" tIns="0" rIns="0" bIns="0" rtlCol="0" anchor="ctr"/>
+          <a:lstStyle/>
+          <a:p>
+            <a:pPr indent="0" marL="0">
+              <a:buNone/>
+            </a:pPr>
+            <a:r>
+              <a:rPr lang="en-US" sz="1400" dirty="0">
+                <a:solidFill>
+                  <a:schemeClr val="tx1"/>
+                </a:solidFill>
+              </a:rPr>
+              <a:t>Обучается за 1 с на 266 тыс. строк и работает с разреженным текстом</a:t>
+            </a:r>
+            <a:endParaRPr lang="en-US" sz="1400" dirty="0"/>
+          </a:p>
+        </p:txBody>
+      </p:sp>
+      <p:sp>
+        <p:nvSpPr>
+          <p:cNvPr id="28" name="Text 124"/>
+          <p:cNvSpPr txBox="1"/>
+          <p:nvPr/>
+        </p:nvSpPr>
+        <p:spPr>
+          <a:xfrm>
+            <a:off x="6492240" y="4892040"/>
+            <a:ext cx="5120640" cy="320040"/>
+          </a:xfrm>
+          <a:prstGeom prst="rect">
+            <a:avLst/>
+          </a:prstGeom>
+          <a:noFill/>
+          <a:ln/>
+        </p:spPr>
+        <p:txBody>
+          <a:bodyPr wrap="square" lIns="0" tIns="0" rIns="0" bIns="0" rtlCol="0" anchor="t"/>
+          <a:lstStyle/>
+          <a:p>
+            <a:pPr indent="0" marL="0">
+              <a:buNone/>
+            </a:pPr>
+            <a:r>
+              <a:rPr lang="en-US" sz="1600" b="1" dirty="0">
+                <a:solidFill>
+                  <a:schemeClr val="accent5"/>
+                </a:solidFill>
+              </a:rPr>
+              <a:t>Пока не базовая модель</a:t>
+            </a:r>
+            <a:endParaRPr lang="en-US" sz="1600" dirty="0"/>
+          </a:p>
+        </p:txBody>
+      </p:sp>
+      <p:sp>
+        <p:nvSpPr>
+          <p:cNvPr id="29" name="Text 125"/>
+          <p:cNvSpPr txBox="1"/>
+          <p:nvPr/>
+        </p:nvSpPr>
+        <p:spPr>
+          <a:xfrm>
+            <a:off x="6492240" y="5257800"/>
+            <a:ext cx="5120640" cy="914400"/>
+          </a:xfrm>
+          <a:prstGeom prst="rect">
+            <a:avLst/>
+          </a:prstGeom>
+          <a:noFill/>
+          <a:ln/>
+        </p:spPr>
+        <p:txBody>
+          <a:bodyPr wrap="square" lIns="0" tIns="0" rIns="0" bIns="0" rtlCol="0" anchor="t"/>
+          <a:lstStyle/>
+          <a:p>
+            <a:pPr indent="0" marL="0">
+              <a:buNone/>
+            </a:pPr>
+            <a:r>
+              <a:rPr lang="en-US" sz="1400" dirty="0">
+                <a:solidFill>
+                  <a:schemeClr val="tx2"/>
+                </a:solidFill>
+              </a:rPr>
+              <a:t>Градиентный бустинг и трансформер запланированы на A3: им нужна модель для сравнения. SVM и kNN не масштабируются на 266 тыс. строк. Наивный Байес: признаки коррелируют.</a:t>
+            </a:r>
+            <a:endParaRPr lang="en-US" sz="1400" dirty="0"/>
+          </a:p>
+        </p:txBody>
+      </p:sp>
+      <p:sp>
+        <p:nvSpPr>
+          <p:cNvPr id="25" name="Slide Number Placeholder 0"/>
+          <p:cNvSpPr>
+            <a:spLocks noGrp="1"/>
+          </p:cNvSpPr>
+          <p:nvPr>
+            <p:ph type="sldNum" sz="quarter" idx="4294967295"/>
+          </p:nvPr>
+        </p:nvSpPr>
+        <p:spPr>
+          <a:xfrm>
+            <a:off x="11064240" y="6419088"/>
+            <a:ext cx="576072" cy="274320"/>
+          </a:xfrm>
+          <a:prstGeom prst="rect">
+            <a:avLst/>
+          </a:prstGeom>
+          <a:extLst>
+            <a:ext uri="{C572A759-6A51-4108-AA02-DFA0A04FC94B}">
+              <ma14:wrappingTextBoxFlag xmlns:ma14="http://schemas.microsoft.com/office/mac/drawingml/2011/main" val="0"/>
+            </a:ext>
+          </a:extLst>
+        </p:spPr>
+        <p:txBody>
+          <a:bodyPr/>
+          <a:lstStyle>
+            <a:lvl1pPr>
+              <a:defRPr sz="1000">
+                <a:solidFill>
+                  <a:schemeClr val="accent5"/>
+                </a:solidFill>
+              </a:defRPr>
+            </a:lvl1pPr>
+          </a:lstStyle>
+          <a:p>
+            <a:pPr algn="r"/>
+            <a:fld id="{F7021451-1387-4CA6-816F-3879F97B5CBC}" type="slidenum">
+              <a:rPr b="0" lang="en-US"/>
+              <a:t>5</a:t>
+            </a:fld>
+            <a:endParaRPr lang="en-US"/>
+          </a:p>
+        </p:txBody>
+      </p:sp>
+    </p:spTree>
+  </p:cSld>
+  <p:clrMapOvr>
+    <a:masterClrMapping/>
+  </p:clrMapOvr>
+</p:sld>
+</file>
+
+<file path=ppt/slides/slide6.xml><?xml version="1.0" encoding="utf-8"?>
+<p:sld xmlns:a="http://schemas.openxmlformats.org/drawingml/2006/main" xmlns:r="http://schemas.openxmlformats.org/officeDocument/2006/relationships" xmlns:p="http://schemas.openxmlformats.org/presentationml/2006/main">
+  <p:cSld name="Slide 6">
+    <p:spTree>
+      <p:nvGrpSpPr>
+        <p:cNvPr id="1" name=""/>
+        <p:cNvGrpSpPr/>
+        <p:nvPr/>
+      </p:nvGrpSpPr>
+      <p:grpSpPr>
+        <a:xfrm>
+          <a:off x="0" y="0"/>
+          <a:ext cx="0" cy="0"/>
+          <a:chOff x="0" y="0"/>
+          <a:chExt cx="0" cy="0"/>
+        </a:xfrm>
+      </p:grpSpPr>
+      <p:sp>
+        <p:nvSpPr>
+          <p:cNvPr id="2" name="Text 0"/>
+          <p:cNvSpPr/>
+          <p:nvPr>
+            <p:ph idx="100" type="title" hasCustomPrompt="1"/>
+          </p:nvPr>
+        </p:nvSpPr>
+        <p:spPr>
+          <a:xfrm>
+            <a:off x="548640" y="365760"/>
+            <a:ext cx="11064240" cy="777240"/>
+          </a:xfrm>
+          <a:prstGeom prst="rect">
+            <a:avLst/>
+          </a:prstGeom>
+          <a:noFill/>
+          <a:ln/>
+        </p:spPr>
+        <p:txBody>
+          <a:bodyPr wrap="square" lIns="0" tIns="0" rIns="0" bIns="0" rtlCol="0" anchor="ctr"/>
+          <a:lstStyle/>
+          <a:p>
+            <a:pPr algn="l" indent="0" marL="0">
+              <a:buNone/>
+            </a:pPr>
+            <a:r>
+              <a:rPr lang="en-US" sz="3200" b="1" dirty="0">
+                <a:solidFill>
+                  <a:schemeClr val="tx1"/>
+                </a:solidFill>
+              </a:rPr>
+              <a:t>Метрики: почему accuracy не подходит</a:t>
+            </a:r>
+            <a:endParaRPr lang="en-US" sz="3200" dirty="0"/>
+          </a:p>
+        </p:txBody>
+      </p:sp>
+      <p:sp>
+        <p:nvSpPr>
+          <p:cNvPr id="3" name="Card 126"/>
+          <p:cNvSpPr/>
+          <p:nvPr/>
+        </p:nvSpPr>
+        <p:spPr>
+          <a:xfrm>
+            <a:off x="548640" y="1463040"/>
+            <a:ext cx="3931920" cy="4663440"/>
+          </a:xfrm>
+          <a:prstGeom prst="roundRect">
+            <a:avLst>
+              <a:gd name="adj" fmla="val 1860"/>
+            </a:avLst>
+          </a:prstGeom>
+          <a:solidFill>
+            <a:schemeClr val="bg2"/>
+          </a:solidFill>
+          <a:ln/>
+        </p:spPr>
+      </p:sp>
+      <p:sp>
+        <p:nvSpPr>
+          <p:cNvPr id="4" name="Text 127"/>
+          <p:cNvSpPr txBox="1"/>
+          <p:nvPr/>
+        </p:nvSpPr>
+        <p:spPr>
+          <a:xfrm>
+            <a:off x="822960" y="1737360"/>
+            <a:ext cx="3383280" cy="914400"/>
+          </a:xfrm>
+          <a:prstGeom prst="rect">
+            <a:avLst/>
+          </a:prstGeom>
+          <a:noFill/>
+          <a:ln/>
+        </p:spPr>
+        <p:txBody>
+          <a:bodyPr wrap="square" lIns="0" tIns="0" rIns="0" bIns="0" rtlCol="0" anchor="t"/>
+          <a:lstStyle/>
+          <a:p>
+            <a:pPr indent="0" marL="0">
+              <a:buNone/>
+            </a:pPr>
+            <a:r>
+              <a:rPr lang="en-US" sz="5400" b="1" dirty="0">
+                <a:solidFill>
+                  <a:schemeClr val="accent1"/>
+                </a:solidFill>
+              </a:rPr>
+              <a:t>93,4 %</a:t>
+            </a:r>
+            <a:endParaRPr lang="en-US" sz="5400" dirty="0"/>
+          </a:p>
+        </p:txBody>
+      </p:sp>
+      <p:sp>
+        <p:nvSpPr>
+          <p:cNvPr id="5" name="Text 128"/>
+          <p:cNvSpPr txBox="1"/>
+          <p:nvPr/>
+        </p:nvSpPr>
+        <p:spPr>
+          <a:xfrm>
+            <a:off x="822960" y="2743200"/>
+            <a:ext cx="3383280" cy="640080"/>
+          </a:xfrm>
+          <a:prstGeom prst="rect">
+            <a:avLst/>
+          </a:prstGeom>
+          <a:noFill/>
+          <a:ln/>
+        </p:spPr>
+        <p:txBody>
+          <a:bodyPr wrap="square" lIns="0" tIns="0" rIns="0" bIns="0" rtlCol="0" anchor="t"/>
+          <a:lstStyle/>
+          <a:p>
+            <a:pPr indent="0" marL="0">
+              <a:buNone/>
+            </a:pPr>
+            <a:r>
+              <a:rPr lang="en-US" sz="1600" dirty="0">
+                <a:solidFill>
+                  <a:schemeClr val="tx1"/>
+                </a:solidFill>
+              </a:rPr>
+              <a:t>accuracy у «модели», которая никого не помечает</a:t>
+            </a:r>
+            <a:endParaRPr lang="en-US" sz="1600" dirty="0"/>
+          </a:p>
+        </p:txBody>
+      </p:sp>
+      <p:sp>
+        <p:nvSpPr>
+          <p:cNvPr id="6" name="Text 129"/>
+          <p:cNvSpPr txBox="1"/>
+          <p:nvPr/>
+        </p:nvSpPr>
+        <p:spPr>
+          <a:xfrm>
+            <a:off x="822960" y="3520440"/>
+            <a:ext cx="3383280" cy="365760"/>
+          </a:xfrm>
+          <a:prstGeom prst="rect">
+            <a:avLst/>
+          </a:prstGeom>
+          <a:noFill/>
+          <a:ln/>
+        </p:spPr>
+        <p:txBody>
+          <a:bodyPr wrap="square" lIns="0" tIns="0" rIns="0" bIns="0" rtlCol="0" anchor="t"/>
+          <a:lstStyle/>
+          <a:p>
+            <a:pPr indent="0" marL="0">
+              <a:buNone/>
+            </a:pPr>
+            <a:r>
+              <a:rPr lang="en-US" sz="1600" b="1" dirty="0">
+                <a:solidFill>
+                  <a:schemeClr val="tx1"/>
+                </a:solidFill>
+              </a:rPr>
+              <a:t>…и не находит ни одного срыва</a:t>
+            </a:r>
+            <a:endParaRPr lang="en-US" sz="1600" dirty="0"/>
+          </a:p>
+        </p:txBody>
+      </p:sp>
+      <p:sp>
+        <p:nvSpPr>
+          <p:cNvPr id="7" name="Text 130"/>
+          <p:cNvSpPr txBox="1"/>
+          <p:nvPr/>
+        </p:nvSpPr>
+        <p:spPr>
+          <a:xfrm>
+            <a:off x="822960" y="4206240"/>
+            <a:ext cx="3383280" cy="1737360"/>
+          </a:xfrm>
+          <a:prstGeom prst="rect">
+            <a:avLst/>
+          </a:prstGeom>
+          <a:noFill/>
+          <a:ln/>
+        </p:spPr>
+        <p:txBody>
+          <a:bodyPr wrap="square" lIns="0" tIns="0" rIns="0" bIns="0" rtlCol="0" anchor="t"/>
+          <a:lstStyle/>
+          <a:p>
+            <a:pPr indent="0" marL="0">
+              <a:buNone/>
+            </a:pPr>
+            <a:r>
+              <a:rPr lang="en-US" sz="1600" dirty="0">
+                <a:solidFill>
+                  <a:schemeClr val="tx2"/>
+                </a:solidFill>
+              </a:rPr>
+              <a:t>При 6,6 % срывов accuracy поощряет бездействие. У полезных моделей она ниже, около 0,89, потому что они решаются помечать закупки.</a:t>
+            </a:r>
+            <a:endParaRPr lang="en-US" sz="1600" dirty="0"/>
+          </a:p>
+        </p:txBody>
+      </p:sp>
+      <p:sp>
+        <p:nvSpPr>
+          <p:cNvPr id="8" name="Card 131"/>
+          <p:cNvSpPr/>
+          <p:nvPr/>
+        </p:nvSpPr>
+        <p:spPr>
+          <a:xfrm>
+            <a:off x="4800600" y="1463040"/>
+            <a:ext cx="3310128" cy="2240280"/>
+          </a:xfrm>
+          <a:prstGeom prst="roundRect">
+            <a:avLst>
+              <a:gd name="adj" fmla="val 3265"/>
+            </a:avLst>
+          </a:prstGeom>
+          <a:solidFill>
+            <a:schemeClr val="bg2"/>
+          </a:solidFill>
+          <a:ln/>
+        </p:spPr>
+      </p:sp>
+      <p:sp>
+        <p:nvSpPr>
+          <p:cNvPr id="9" name="Text 132"/>
+          <p:cNvSpPr txBox="1"/>
+          <p:nvPr/>
+        </p:nvSpPr>
+        <p:spPr>
+          <a:xfrm>
+            <a:off x="5029200" y="1645920"/>
+            <a:ext cx="2011680" cy="411480"/>
+          </a:xfrm>
+          <a:prstGeom prst="rect">
+            <a:avLst/>
+          </a:prstGeom>
+          <a:noFill/>
+          <a:ln/>
+        </p:spPr>
+        <p:txBody>
+          <a:bodyPr wrap="square" lIns="0" tIns="0" rIns="0" bIns="0" rtlCol="0" anchor="ctr"/>
+          <a:lstStyle/>
+          <a:p>
+            <a:pPr indent="0" marL="0">
+              <a:buNone/>
+            </a:pPr>
+            <a:r>
+              <a:rPr lang="en-US" sz="1800" b="1" dirty="0">
+                <a:solidFill>
+                  <a:schemeClr val="tx1"/>
+                </a:solidFill>
+              </a:rPr>
+              <a:t>ROC-AUC</a:t>
+            </a:r>
+            <a:endParaRPr lang="en-US" sz="1800" dirty="0"/>
+          </a:p>
+        </p:txBody>
+      </p:sp>
+      <p:sp>
+        <p:nvSpPr>
+          <p:cNvPr id="10" name="Text 133"/>
+          <p:cNvSpPr txBox="1"/>
+          <p:nvPr/>
+        </p:nvSpPr>
+        <p:spPr>
+          <a:xfrm>
+            <a:off x="6903720" y="1645920"/>
+            <a:ext cx="978408" cy="411480"/>
+          </a:xfrm>
+          <a:prstGeom prst="rect">
+            <a:avLst/>
+          </a:prstGeom>
+          <a:noFill/>
+          <a:ln/>
+        </p:spPr>
+        <p:txBody>
+          <a:bodyPr wrap="square" lIns="0" tIns="0" rIns="0" bIns="0" rtlCol="0" anchor="ctr"/>
+          <a:lstStyle/>
+          <a:p>
+            <a:pPr algn="r" indent="0" marL="0">
+              <a:buNone/>
+            </a:pPr>
+            <a:r>
+              <a:rPr lang="en-US" sz="2200" b="1" dirty="0">
+                <a:solidFill>
+                  <a:schemeClr val="accent2"/>
+                </a:solidFill>
+              </a:rPr>
+              <a:t>0,79</a:t>
+            </a:r>
+            <a:endParaRPr lang="en-US" sz="2200" dirty="0"/>
+          </a:p>
+        </p:txBody>
+      </p:sp>
+      <p:sp>
+        <p:nvSpPr>
+          <p:cNvPr id="11" name="Text 134"/>
+          <p:cNvSpPr txBox="1"/>
+          <p:nvPr/>
+        </p:nvSpPr>
+        <p:spPr>
+          <a:xfrm>
+            <a:off x="5029200" y="2194560"/>
+            <a:ext cx="2852928" cy="1371600"/>
+          </a:xfrm>
+          <a:prstGeom prst="rect">
+            <a:avLst/>
+          </a:prstGeom>
+          <a:noFill/>
+          <a:ln/>
+        </p:spPr>
+        <p:txBody>
+          <a:bodyPr wrap="square" lIns="0" tIns="0" rIns="0" bIns="0" rtlCol="0" anchor="t"/>
+          <a:lstStyle/>
+          <a:p>
+            <a:pPr indent="0" marL="0">
+              <a:buNone/>
+            </a:pPr>
+            <a:r>
+              <a:rPr lang="en-US" sz="1600" dirty="0">
+                <a:solidFill>
+                  <a:schemeClr val="tx2"/>
+                </a:solidFill>
+              </a:rPr>
+              <a:t>Вероятность, что сорванный договор получит оценку выше успешного. Не зависит от порога и соотношения классов.</a:t>
+            </a:r>
+            <a:endParaRPr lang="en-US" sz="1600" dirty="0"/>
+          </a:p>
+        </p:txBody>
+      </p:sp>
+      <p:sp>
+        <p:nvSpPr>
+          <p:cNvPr id="12" name="Card 135"/>
+          <p:cNvSpPr/>
+          <p:nvPr/>
+        </p:nvSpPr>
+        <p:spPr>
+          <a:xfrm>
+            <a:off x="8275320" y="1463040"/>
+            <a:ext cx="3310128" cy="2240280"/>
+          </a:xfrm>
+          <a:prstGeom prst="roundRect">
+            <a:avLst>
+              <a:gd name="adj" fmla="val 3265"/>
+            </a:avLst>
+          </a:prstGeom>
+          <a:solidFill>
+            <a:schemeClr val="bg2"/>
+          </a:solidFill>
+          <a:ln/>
+        </p:spPr>
+      </p:sp>
+      <p:sp>
+        <p:nvSpPr>
+          <p:cNvPr id="13" name="Text 136"/>
+          <p:cNvSpPr txBox="1"/>
+          <p:nvPr/>
+        </p:nvSpPr>
+        <p:spPr>
+          <a:xfrm>
+            <a:off x="8503920" y="1645920"/>
+            <a:ext cx="2011680" cy="411480"/>
+          </a:xfrm>
+          <a:prstGeom prst="rect">
+            <a:avLst/>
+          </a:prstGeom>
+          <a:noFill/>
+          <a:ln/>
+        </p:spPr>
+        <p:txBody>
+          <a:bodyPr wrap="square" lIns="0" tIns="0" rIns="0" bIns="0" rtlCol="0" anchor="ctr"/>
+          <a:lstStyle/>
+          <a:p>
+            <a:pPr indent="0" marL="0">
+              <a:buNone/>
+            </a:pPr>
+            <a:r>
+              <a:rPr lang="en-US" sz="1800" b="1" dirty="0">
+                <a:solidFill>
+                  <a:schemeClr val="tx1"/>
+                </a:solidFill>
+              </a:rPr>
+              <a:t>PR-AUC</a:t>
+            </a:r>
+            <a:endParaRPr lang="en-US" sz="1800" dirty="0"/>
+          </a:p>
+        </p:txBody>
+      </p:sp>
+      <p:sp>
+        <p:nvSpPr>
+          <p:cNvPr id="14" name="Text 137"/>
+          <p:cNvSpPr txBox="1"/>
+          <p:nvPr/>
+        </p:nvSpPr>
+        <p:spPr>
+          <a:xfrm>
+            <a:off x="10378440" y="1645920"/>
+            <a:ext cx="978408" cy="411480"/>
+          </a:xfrm>
+          <a:prstGeom prst="rect">
+            <a:avLst/>
+          </a:prstGeom>
+          <a:noFill/>
+          <a:ln/>
+        </p:spPr>
+        <p:txBody>
+          <a:bodyPr wrap="square" lIns="0" tIns="0" rIns="0" bIns="0" rtlCol="0" anchor="ctr"/>
+          <a:lstStyle/>
+          <a:p>
+            <a:pPr algn="r" indent="0" marL="0">
+              <a:buNone/>
+            </a:pPr>
+            <a:r>
+              <a:rPr lang="en-US" sz="2200" b="1" dirty="0">
+                <a:solidFill>
+                  <a:schemeClr val="accent2"/>
+                </a:solidFill>
+              </a:rPr>
+              <a:t>0,26</a:t>
+            </a:r>
+            <a:endParaRPr lang="en-US" sz="2200" dirty="0"/>
+          </a:p>
+        </p:txBody>
+      </p:sp>
+      <p:sp>
+        <p:nvSpPr>
+          <p:cNvPr id="15" name="Text 138"/>
+          <p:cNvSpPr txBox="1"/>
+          <p:nvPr/>
+        </p:nvSpPr>
+        <p:spPr>
+          <a:xfrm>
+            <a:off x="8503920" y="2194560"/>
+            <a:ext cx="2852928" cy="1371600"/>
+          </a:xfrm>
+          <a:prstGeom prst="rect">
+            <a:avLst/>
+          </a:prstGeom>
+          <a:noFill/>
+          <a:ln/>
+        </p:spPr>
+        <p:txBody>
+          <a:bodyPr wrap="square" lIns="0" tIns="0" rIns="0" bIns="0" rtlCol="0" anchor="t"/>
+          <a:lstStyle/>
+          <a:p>
+            <a:pPr indent="0" marL="0">
+              <a:buNone/>
+            </a:pPr>
+            <a:r>
+              <a:rPr lang="en-US" sz="1600" dirty="0">
+                <a:solidFill>
+                  <a:schemeClr val="tx2"/>
+                </a:solidFill>
+              </a:rPr>
+              <a:t>Средняя точность по всем уровням полноты. Случайный уровень 0,066, у нас в 4 раза выше. Самая честная при дисбалансе.</a:t>
+            </a:r>
+            <a:endParaRPr lang="en-US" sz="1600" dirty="0"/>
+          </a:p>
+        </p:txBody>
+      </p:sp>
+      <p:sp>
+        <p:nvSpPr>
+          <p:cNvPr id="16" name="Card 139"/>
+          <p:cNvSpPr/>
+          <p:nvPr/>
+        </p:nvSpPr>
+        <p:spPr>
+          <a:xfrm>
+            <a:off x="4800600" y="3886200"/>
+            <a:ext cx="3310128" cy="2240280"/>
+          </a:xfrm>
+          <a:prstGeom prst="roundRect">
+            <a:avLst>
+              <a:gd name="adj" fmla="val 3265"/>
+            </a:avLst>
+          </a:prstGeom>
+          <a:solidFill>
+            <a:schemeClr val="bg2"/>
+          </a:solidFill>
+          <a:ln/>
+        </p:spPr>
+      </p:sp>
+      <p:sp>
+        <p:nvSpPr>
+          <p:cNvPr id="17" name="Text 140"/>
+          <p:cNvSpPr txBox="1"/>
+          <p:nvPr/>
+        </p:nvSpPr>
+        <p:spPr>
+          <a:xfrm>
+            <a:off x="5029200" y="4069080"/>
+            <a:ext cx="2011680" cy="411480"/>
+          </a:xfrm>
+          <a:prstGeom prst="rect">
+            <a:avLst/>
+          </a:prstGeom>
+          <a:noFill/>
+          <a:ln/>
+        </p:spPr>
+        <p:txBody>
+          <a:bodyPr wrap="square" lIns="0" tIns="0" rIns="0" bIns="0" rtlCol="0" anchor="ctr"/>
+          <a:lstStyle/>
+          <a:p>
+            <a:pPr indent="0" marL="0">
+              <a:buNone/>
+            </a:pPr>
+            <a:r>
+              <a:rPr lang="en-US" sz="1800" b="1" dirty="0">
+                <a:solidFill>
+                  <a:schemeClr val="tx1"/>
+                </a:solidFill>
+              </a:rPr>
+              <a:t>F1</a:t>
+            </a:r>
+            <a:endParaRPr lang="en-US" sz="1800" dirty="0"/>
+          </a:p>
+        </p:txBody>
+      </p:sp>
+      <p:sp>
+        <p:nvSpPr>
+          <p:cNvPr id="18" name="Text 141"/>
+          <p:cNvSpPr txBox="1"/>
+          <p:nvPr/>
+        </p:nvSpPr>
+        <p:spPr>
+          <a:xfrm>
+            <a:off x="6903720" y="4069080"/>
+            <a:ext cx="978408" cy="411480"/>
+          </a:xfrm>
+          <a:prstGeom prst="rect">
+            <a:avLst/>
+          </a:prstGeom>
+          <a:noFill/>
+          <a:ln/>
+        </p:spPr>
+        <p:txBody>
+          <a:bodyPr wrap="square" lIns="0" tIns="0" rIns="0" bIns="0" rtlCol="0" anchor="ctr"/>
+          <a:lstStyle/>
+          <a:p>
+            <a:pPr algn="r" indent="0" marL="0">
+              <a:buNone/>
+            </a:pPr>
+            <a:r>
+              <a:rPr lang="en-US" sz="2200" b="1" dirty="0">
+                <a:solidFill>
+                  <a:schemeClr val="accent2"/>
+                </a:solidFill>
+              </a:rPr>
+              <a:t>0,32</a:t>
+            </a:r>
+            <a:endParaRPr lang="en-US" sz="2200" dirty="0"/>
+          </a:p>
+        </p:txBody>
+      </p:sp>
+      <p:sp>
+        <p:nvSpPr>
+          <p:cNvPr id="19" name="Text 142"/>
+          <p:cNvSpPr txBox="1"/>
+          <p:nvPr/>
+        </p:nvSpPr>
+        <p:spPr>
+          <a:xfrm>
+            <a:off x="5029200" y="4617720"/>
+            <a:ext cx="2852928" cy="1371600"/>
+          </a:xfrm>
+          <a:prstGeom prst="rect">
+            <a:avLst/>
+          </a:prstGeom>
+          <a:noFill/>
+          <a:ln/>
+        </p:spPr>
+        <p:txBody>
+          <a:bodyPr wrap="square" lIns="0" tIns="0" rIns="0" bIns="0" rtlCol="0" anchor="t"/>
+          <a:lstStyle/>
+          <a:p>
+            <a:pPr indent="0" marL="0">
+              <a:buNone/>
+            </a:pPr>
+            <a:r>
+              <a:rPr lang="en-US" sz="1600" dirty="0">
+                <a:solidFill>
+                  <a:schemeClr val="tx2"/>
+                </a:solidFill>
+              </a:rPr>
+              <a:t>Баланс точности (0,26) и полноты (0,42) при одном пороге, подобранном только на validation.</a:t>
+            </a:r>
+            <a:endParaRPr lang="en-US" sz="1600" dirty="0"/>
+          </a:p>
+        </p:txBody>
+      </p:sp>
+      <p:sp>
+        <p:nvSpPr>
+          <p:cNvPr id="20" name="Card 143"/>
+          <p:cNvSpPr/>
+          <p:nvPr/>
+        </p:nvSpPr>
+        <p:spPr>
+          <a:xfrm>
+            <a:off x="8275320" y="3886200"/>
+            <a:ext cx="3310128" cy="2240280"/>
+          </a:xfrm>
+          <a:prstGeom prst="roundRect">
+            <a:avLst>
+              <a:gd name="adj" fmla="val 3265"/>
+            </a:avLst>
+          </a:prstGeom>
+          <a:solidFill>
+            <a:schemeClr val="bg2"/>
+          </a:solidFill>
+          <a:ln/>
+        </p:spPr>
+      </p:sp>
+      <p:sp>
+        <p:nvSpPr>
+          <p:cNvPr id="21" name="Text 144"/>
+          <p:cNvSpPr txBox="1"/>
+          <p:nvPr/>
+        </p:nvSpPr>
+        <p:spPr>
+          <a:xfrm>
+            <a:off x="8503920" y="4069080"/>
+            <a:ext cx="2011680" cy="411480"/>
+          </a:xfrm>
+          <a:prstGeom prst="rect">
+            <a:avLst/>
+          </a:prstGeom>
+          <a:noFill/>
+          <a:ln/>
+        </p:spPr>
+        <p:txBody>
+          <a:bodyPr wrap="square" lIns="0" tIns="0" rIns="0" bIns="0" rtlCol="0" anchor="ctr"/>
+          <a:lstStyle/>
+          <a:p>
+            <a:pPr indent="0" marL="0">
+              <a:buNone/>
+            </a:pPr>
+            <a:r>
+              <a:rPr lang="en-US" sz="1800" b="1" dirty="0">
+                <a:solidFill>
+                  <a:schemeClr val="tx1"/>
+                </a:solidFill>
+              </a:rPr>
+              <a:t>Precision@1 %</a:t>
+            </a:r>
+            <a:endParaRPr lang="en-US" sz="1800" dirty="0"/>
+          </a:p>
+        </p:txBody>
+      </p:sp>
+      <p:sp>
+        <p:nvSpPr>
+          <p:cNvPr id="22" name="Text 145"/>
+          <p:cNvSpPr txBox="1"/>
+          <p:nvPr/>
+        </p:nvSpPr>
+        <p:spPr>
+          <a:xfrm>
+            <a:off x="10378440" y="4069080"/>
+            <a:ext cx="978408" cy="411480"/>
+          </a:xfrm>
+          <a:prstGeom prst="rect">
+            <a:avLst/>
+          </a:prstGeom>
+          <a:noFill/>
+          <a:ln/>
+        </p:spPr>
+        <p:txBody>
+          <a:bodyPr wrap="square" lIns="0" tIns="0" rIns="0" bIns="0" rtlCol="0" anchor="ctr"/>
+          <a:lstStyle/>
+          <a:p>
+            <a:pPr algn="r" indent="0" marL="0">
+              <a:buNone/>
+            </a:pPr>
+            <a:r>
+              <a:rPr lang="en-US" sz="2200" b="1" dirty="0">
+                <a:solidFill>
+                  <a:schemeClr val="accent2"/>
+                </a:solidFill>
+              </a:rPr>
+              <a:t>0,50</a:t>
+            </a:r>
+            <a:endParaRPr lang="en-US" sz="2200" dirty="0"/>
+          </a:p>
+        </p:txBody>
+      </p:sp>
+      <p:sp>
+        <p:nvSpPr>
+          <p:cNvPr id="23" name="Text 146"/>
+          <p:cNvSpPr txBox="1"/>
+          <p:nvPr/>
+        </p:nvSpPr>
+        <p:spPr>
+          <a:xfrm>
+            <a:off x="8503920" y="4617720"/>
+            <a:ext cx="2852928" cy="1371600"/>
+          </a:xfrm>
+          <a:prstGeom prst="rect">
+            <a:avLst/>
+          </a:prstGeom>
+          <a:noFill/>
+          <a:ln/>
+        </p:spPr>
+        <p:txBody>
+          <a:bodyPr wrap="square" lIns="0" tIns="0" rIns="0" bIns="0" rtlCol="0" anchor="t"/>
+          <a:lstStyle/>
+          <a:p>
+            <a:pPr indent="0" marL="0">
+              <a:buNone/>
+            </a:pPr>
+            <a:r>
+              <a:rPr lang="en-US" sz="1600" dirty="0">
+                <a:solidFill>
+                  <a:schemeClr val="tx2"/>
+                </a:solidFill>
+              </a:rPr>
+              <a:t>Качество верхушки списка: соответствует ограниченным возможностям аудитора.</a:t>
+            </a:r>
+            <a:endParaRPr lang="en-US" sz="1600" dirty="0"/>
+          </a:p>
+        </p:txBody>
+      </p:sp>
+      <p:sp>
+        <p:nvSpPr>
+          <p:cNvPr id="25" name="Slide Number Placeholder 0"/>
+          <p:cNvSpPr>
+            <a:spLocks noGrp="1"/>
+          </p:cNvSpPr>
+          <p:nvPr>
+            <p:ph type="sldNum" sz="quarter" idx="4294967295"/>
+          </p:nvPr>
+        </p:nvSpPr>
+        <p:spPr>
+          <a:xfrm>
+            <a:off x="11064240" y="6419088"/>
+            <a:ext cx="576072" cy="274320"/>
+          </a:xfrm>
+          <a:prstGeom prst="rect">
+            <a:avLst/>
+          </a:prstGeom>
+          <a:extLst>
+            <a:ext uri="{C572A759-6A51-4108-AA02-DFA0A04FC94B}">
+              <ma14:wrappingTextBoxFlag xmlns:ma14="http://schemas.microsoft.com/office/mac/drawingml/2011/main" val="0"/>
+            </a:ext>
+          </a:extLst>
+        </p:spPr>
+        <p:txBody>
+          <a:bodyPr/>
+          <a:lstStyle>
+            <a:lvl1pPr>
+              <a:defRPr sz="1000">
+                <a:solidFill>
+                  <a:schemeClr val="accent5"/>
+                </a:solidFill>
+              </a:defRPr>
+            </a:lvl1pPr>
+          </a:lstStyle>
+          <a:p>
+            <a:pPr algn="r"/>
+            <a:fld id="{F7021451-1387-4CA6-816F-3879F97B5CBC}" type="slidenum">
+              <a:rPr b="0" lang="en-US"/>
+              <a:t>6</a:t>
+            </a:fld>
+            <a:endParaRPr lang="en-US"/>
+          </a:p>
+        </p:txBody>
+      </p:sp>
+    </p:spTree>
+  </p:cSld>
+  <p:clrMapOvr>
+    <a:masterClrMapping/>
+  </p:clrMapOvr>
+</p:sld>
+</file>
+
+<file path=ppt/slides/slide7.xml><?xml version="1.0" encoding="utf-8"?>
+<p:sld xmlns:a="http://schemas.openxmlformats.org/drawingml/2006/main" xmlns:r="http://schemas.openxmlformats.org/officeDocument/2006/relationships" xmlns:p="http://schemas.openxmlformats.org/presentationml/2006/main">
+  <p:cSld name="Slide 7">
+    <p:spTree>
+      <p:nvGrpSpPr>
+        <p:cNvPr id="1" name=""/>
+        <p:cNvGrpSpPr/>
+        <p:nvPr/>
+      </p:nvGrpSpPr>
+      <p:grpSpPr>
+        <a:xfrm>
+          <a:off x="0" y="0"/>
+          <a:ext cx="0" cy="0"/>
+          <a:chOff x="0" y="0"/>
+          <a:chExt cx="0" cy="0"/>
+        </a:xfrm>
+      </p:grpSpPr>
+      <p:sp>
+        <p:nvSpPr>
+          <p:cNvPr id="2" name="Text 0"/>
+          <p:cNvSpPr/>
+          <p:nvPr>
+            <p:ph idx="100" type="title" hasCustomPrompt="1"/>
+          </p:nvPr>
+        </p:nvSpPr>
+        <p:spPr>
+          <a:xfrm>
+            <a:off x="548640" y="365760"/>
+            <a:ext cx="11064240" cy="777240"/>
+          </a:xfrm>
+          <a:prstGeom prst="rect">
+            <a:avLst/>
+          </a:prstGeom>
+          <a:noFill/>
+          <a:ln/>
+        </p:spPr>
+        <p:txBody>
+          <a:bodyPr wrap="square" lIns="0" tIns="0" rIns="0" bIns="0" rtlCol="0" anchor="ctr"/>
+          <a:lstStyle/>
+          <a:p>
+            <a:pPr algn="l" indent="0" marL="0">
+              <a:buNone/>
+            </a:pPr>
+            <a:r>
+              <a:rPr lang="en-US" sz="3200" b="1" dirty="0">
+                <a:solidFill>
+                  <a:schemeClr val="tx1"/>
+                </a:solidFill>
+              </a:rPr>
               <a:t>Результаты: намного лучше случайного отбора</a:t>
             </a:r>
             <a:endParaRPr lang="en-US" sz="3200" dirty="0"/>
@@ -5363,7 +7538,7 @@
       </p:sp>
       <p:graphicFrame>
         <p:nvGraphicFramePr>
-          <p:cNvPr id="6" name="Results table"/>
+          <p:cNvPr id="8" name="Results table"/>
           <p:cNvGraphicFramePr>
             <a:graphicFrameLocks noGrp="1"/>
           </p:cNvGraphicFramePr>
@@ -7183,7 +9358,7 @@
       </p:graphicFrame>
       <p:sp>
         <p:nvSpPr>
-          <p:cNvPr id="4" name="Badge 93"/>
+          <p:cNvPr id="4" name="Badge 147"/>
           <p:cNvSpPr/>
           <p:nvPr/>
         </p:nvSpPr>
@@ -7203,7 +9378,7 @@
       </p:sp>
       <p:sp>
         <p:nvSpPr>
-          <p:cNvPr id="5" name="Text 94"/>
+          <p:cNvPr id="5" name="Text 148"/>
           <p:cNvSpPr txBox="1"/>
           <p:nvPr/>
         </p:nvSpPr>
@@ -7239,7 +9414,7 @@
       </p:sp>
       <p:sp>
         <p:nvSpPr>
-          <p:cNvPr id="6" name="Text 95"/>
+          <p:cNvPr id="6" name="Text 149"/>
           <p:cNvSpPr txBox="1"/>
           <p:nvPr/>
         </p:nvSpPr>
@@ -7275,7 +9450,7 @@
       </p:sp>
       <p:sp>
         <p:nvSpPr>
-          <p:cNvPr id="7" name="Badge 96"/>
+          <p:cNvPr id="7" name="Badge 150"/>
           <p:cNvSpPr/>
           <p:nvPr/>
         </p:nvSpPr>
@@ -7295,7 +9470,7 @@
       </p:sp>
       <p:sp>
         <p:nvSpPr>
-          <p:cNvPr id="8" name="Text 97"/>
+          <p:cNvPr id="8" name="Text 151"/>
           <p:cNvSpPr txBox="1"/>
           <p:nvPr/>
         </p:nvSpPr>
@@ -7331,7 +9506,7 @@
       </p:sp>
       <p:sp>
         <p:nvSpPr>
-          <p:cNvPr id="9" name="Text 98"/>
+          <p:cNvPr id="9" name="Text 152"/>
           <p:cNvSpPr txBox="1"/>
           <p:nvPr/>
         </p:nvSpPr>
@@ -7367,7 +9542,7 @@
       </p:sp>
       <p:sp>
         <p:nvSpPr>
-          <p:cNvPr id="10" name="Badge 99"/>
+          <p:cNvPr id="10" name="Badge 153"/>
           <p:cNvSpPr/>
           <p:nvPr/>
         </p:nvSpPr>
@@ -7387,7 +9562,7 @@
       </p:sp>
       <p:sp>
         <p:nvSpPr>
-          <p:cNvPr id="11" name="Text 100"/>
+          <p:cNvPr id="11" name="Text 154"/>
           <p:cNvSpPr txBox="1"/>
           <p:nvPr/>
         </p:nvSpPr>
@@ -7423,7 +9598,7 @@
       </p:sp>
       <p:sp>
         <p:nvSpPr>
-          <p:cNvPr id="12" name="Text 101"/>
+          <p:cNvPr id="12" name="Text 155"/>
           <p:cNvSpPr txBox="1"/>
           <p:nvPr/>
         </p:nvSpPr>
@@ -7483,7 +9658,7 @@
       </p:pic>
       <p:sp>
         <p:nvSpPr>
-          <p:cNvPr id="14" name="Card 102"/>
+          <p:cNvPr id="14" name="Card 156"/>
           <p:cNvSpPr/>
           <p:nvPr/>
         </p:nvSpPr>
@@ -7505,7 +9680,7 @@
       </p:sp>
       <p:sp>
         <p:nvSpPr>
-          <p:cNvPr id="15" name="Text 103"/>
+          <p:cNvPr id="15" name="Text 157"/>
           <p:cNvSpPr txBox="1"/>
           <p:nvPr/>
         </p:nvSpPr>
@@ -7592,7 +9767,7 @@
             <a:pPr algn="r"/>
             <a:fld id="{F7021451-1387-4CA6-816F-3879F97B5CBC}" type="slidenum">
               <a:rPr b="0" lang="en-US"/>
-              <a:t>5</a:t>
+              <a:t>7</a:t>
             </a:fld>
             <a:endParaRPr lang="en-US"/>
           </a:p>
@@ -7606,9 +9781,9 @@
 </p:sld>
 </file>
 
-<file path=ppt/slides/slide6.xml><?xml version="1.0" encoding="utf-8"?>
+<file path=ppt/slides/slide8.xml><?xml version="1.0" encoding="utf-8"?>
 <p:sld xmlns:a="http://schemas.openxmlformats.org/drawingml/2006/main" xmlns:r="http://schemas.openxmlformats.org/officeDocument/2006/relationships" xmlns:p="http://schemas.openxmlformats.org/presentationml/2006/main">
-  <p:cSld name="Slide 6">
+  <p:cSld name="Slide 8">
     <p:spTree>
       <p:nvGrpSpPr>
         <p:cNvPr id="1" name=""/>
@@ -7711,7 +9886,7 @@
       </p:pic>
       <p:sp>
         <p:nvSpPr>
-          <p:cNvPr id="5" name="Card 104"/>
+          <p:cNvPr id="5" name="Card 158"/>
           <p:cNvSpPr/>
           <p:nvPr/>
         </p:nvSpPr>
@@ -7733,7 +9908,7 @@
       </p:sp>
       <p:sp>
         <p:nvSpPr>
-          <p:cNvPr id="6" name="Text 105"/>
+          <p:cNvPr id="6" name="Text 159"/>
           <p:cNvSpPr txBox="1"/>
           <p:nvPr/>
         </p:nvSpPr>
@@ -7769,7 +9944,7 @@
       </p:sp>
       <p:sp>
         <p:nvSpPr>
-          <p:cNvPr id="7" name="Text 106"/>
+          <p:cNvPr id="7" name="Text 160"/>
           <p:cNvSpPr txBox="1"/>
           <p:nvPr/>
         </p:nvSpPr>
@@ -7805,7 +9980,7 @@
       </p:sp>
       <p:sp>
         <p:nvSpPr>
-          <p:cNvPr id="8" name="Card 107"/>
+          <p:cNvPr id="8" name="Card 161"/>
           <p:cNvSpPr/>
           <p:nvPr/>
         </p:nvSpPr>
@@ -7827,7 +10002,7 @@
       </p:sp>
       <p:sp>
         <p:nvSpPr>
-          <p:cNvPr id="9" name="Text 108"/>
+          <p:cNvPr id="9" name="Text 162"/>
           <p:cNvSpPr txBox="1"/>
           <p:nvPr/>
         </p:nvSpPr>
@@ -7863,7 +10038,7 @@
       </p:sp>
       <p:sp>
         <p:nvSpPr>
-          <p:cNvPr id="10" name="Text 109"/>
+          <p:cNvPr id="10" name="Text 163"/>
           <p:cNvSpPr txBox="1"/>
           <p:nvPr/>
         </p:nvSpPr>
@@ -7899,7 +10074,7 @@
       </p:sp>
       <p:sp>
         <p:nvSpPr>
-          <p:cNvPr id="11" name="Card 110"/>
+          <p:cNvPr id="11" name="Card 164"/>
           <p:cNvSpPr/>
           <p:nvPr/>
         </p:nvSpPr>
@@ -7921,7 +10096,7 @@
       </p:sp>
       <p:sp>
         <p:nvSpPr>
-          <p:cNvPr id="12" name="Text 111"/>
+          <p:cNvPr id="12" name="Text 165"/>
           <p:cNvSpPr txBox="1"/>
           <p:nvPr/>
         </p:nvSpPr>
@@ -7957,7 +10132,7 @@
       </p:sp>
       <p:sp>
         <p:nvSpPr>
-          <p:cNvPr id="13" name="Text 112"/>
+          <p:cNvPr id="13" name="Text 166"/>
           <p:cNvSpPr txBox="1"/>
           <p:nvPr/>
         </p:nvSpPr>
@@ -8030,7 +10205,7 @@
             <a:pPr algn="r"/>
             <a:fld id="{F7021451-1387-4CA6-816F-3879F97B5CBC}" type="slidenum">
               <a:rPr b="0" lang="en-US"/>
-              <a:t>6</a:t>
+              <a:t>8</a:t>
             </a:fld>
             <a:endParaRPr lang="en-US"/>
           </a:p>
@@ -8044,9 +10219,9 @@
 </p:sld>
 </file>
 
-<file path=ppt/slides/slide7.xml><?xml version="1.0" encoding="utf-8"?>
+<file path=ppt/slides/slide9.xml><?xml version="1.0" encoding="utf-8"?>
 <p:sld xmlns:a="http://schemas.openxmlformats.org/drawingml/2006/main" xmlns:r="http://schemas.openxmlformats.org/officeDocument/2006/relationships" xmlns:p="http://schemas.openxmlformats.org/presentationml/2006/main">
-  <p:cSld name="Slide 7">
+  <p:cSld name="Slide 9">
     <p:spTree>
       <p:nvGrpSpPr>
         <p:cNvPr id="1" name=""/>
@@ -8101,7 +10276,7 @@
       </p:sp>
       <p:sp>
         <p:nvSpPr>
-          <p:cNvPr id="3" name="Text 113"/>
+          <p:cNvPr id="3" name="Text 167"/>
           <p:cNvSpPr txBox="1"/>
           <p:nvPr/>
         </p:nvSpPr>
@@ -8137,7 +10312,7 @@
       </p:sp>
       <p:sp>
         <p:nvSpPr>
-          <p:cNvPr id="4" name="Text 114"/>
+          <p:cNvPr id="4" name="Text 168"/>
           <p:cNvSpPr txBox="1"/>
           <p:nvPr/>
         </p:nvSpPr>
@@ -8173,7 +10348,7 @@
       </p:sp>
       <p:sp>
         <p:nvSpPr>
-          <p:cNvPr id="5" name="Text 115"/>
+          <p:cNvPr id="5" name="Text 169"/>
           <p:cNvSpPr txBox="1"/>
           <p:nvPr/>
         </p:nvSpPr>
@@ -8209,7 +10384,7 @@
       </p:sp>
       <p:sp>
         <p:nvSpPr>
-          <p:cNvPr id="6" name="Text 116"/>
+          <p:cNvPr id="6" name="Text 170"/>
           <p:cNvSpPr txBox="1"/>
           <p:nvPr/>
         </p:nvSpPr>
@@ -8245,7 +10420,7 @@
       </p:sp>
       <p:sp>
         <p:nvSpPr>
-          <p:cNvPr id="7" name="Text 117"/>
+          <p:cNvPr id="7" name="Text 171"/>
           <p:cNvSpPr txBox="1"/>
           <p:nvPr/>
         </p:nvSpPr>
@@ -8281,7 +10456,7 @@
       </p:sp>
       <p:sp>
         <p:nvSpPr>
-          <p:cNvPr id="8" name="Text 118"/>
+          <p:cNvPr id="8" name="Text 172"/>
           <p:cNvSpPr txBox="1"/>
           <p:nvPr/>
         </p:nvSpPr>
@@ -8317,7 +10492,7 @@
       </p:sp>
       <p:sp>
         <p:nvSpPr>
-          <p:cNvPr id="9" name="Text 119"/>
+          <p:cNvPr id="9" name="Text 173"/>
           <p:cNvSpPr txBox="1"/>
           <p:nvPr/>
         </p:nvSpPr>
@@ -8353,7 +10528,7 @@
       </p:sp>
       <p:sp>
         <p:nvSpPr>
-          <p:cNvPr id="10" name="Text 120"/>
+          <p:cNvPr id="10" name="Text 174"/>
           <p:cNvSpPr txBox="1"/>
           <p:nvPr/>
         </p:nvSpPr>
@@ -8389,7 +10564,7 @@
       </p:sp>
       <p:sp>
         <p:nvSpPr>
-          <p:cNvPr id="11" name="Card 121"/>
+          <p:cNvPr id="11" name="Card 175"/>
           <p:cNvSpPr/>
           <p:nvPr/>
         </p:nvSpPr>
@@ -8411,7 +10586,7 @@
       </p:sp>
       <p:sp>
         <p:nvSpPr>
-          <p:cNvPr id="12" name="Text 122"/>
+          <p:cNvPr id="12" name="Text 176"/>
           <p:cNvSpPr txBox="1"/>
           <p:nvPr/>
         </p:nvSpPr>
@@ -8447,7 +10622,7 @@
       </p:sp>
       <p:sp>
         <p:nvSpPr>
-          <p:cNvPr id="13" name="Badge 123"/>
+          <p:cNvPr id="13" name="Badge 177"/>
           <p:cNvSpPr/>
           <p:nvPr/>
         </p:nvSpPr>
@@ -8467,7 +10642,7 @@
       </p:sp>
       <p:sp>
         <p:nvSpPr>
-          <p:cNvPr id="14" name="Text 124"/>
+          <p:cNvPr id="14" name="Text 178"/>
           <p:cNvSpPr txBox="1"/>
           <p:nvPr/>
         </p:nvSpPr>
@@ -8503,7 +10678,7 @@
       </p:sp>
       <p:sp>
         <p:nvSpPr>
-          <p:cNvPr id="15" name="Text 125"/>
+          <p:cNvPr id="15" name="Text 179"/>
           <p:cNvSpPr txBox="1"/>
           <p:nvPr/>
         </p:nvSpPr>
@@ -8539,7 +10714,7 @@
       </p:sp>
       <p:sp>
         <p:nvSpPr>
-          <p:cNvPr id="16" name="Badge 126"/>
+          <p:cNvPr id="16" name="Badge 180"/>
           <p:cNvSpPr/>
           <p:nvPr/>
         </p:nvSpPr>
@@ -8559,7 +10734,7 @@
       </p:sp>
       <p:sp>
         <p:nvSpPr>
-          <p:cNvPr id="17" name="Text 127"/>
+          <p:cNvPr id="17" name="Text 181"/>
           <p:cNvSpPr txBox="1"/>
           <p:nvPr/>
         </p:nvSpPr>
@@ -8595,7 +10770,7 @@
       </p:sp>
       <p:sp>
         <p:nvSpPr>
-          <p:cNvPr id="18" name="Text 128"/>
+          <p:cNvPr id="18" name="Text 182"/>
           <p:cNvSpPr txBox="1"/>
           <p:nvPr/>
         </p:nvSpPr>
@@ -8631,7 +10806,7 @@
       </p:sp>
       <p:sp>
         <p:nvSpPr>
-          <p:cNvPr id="19" name="Badge 129"/>
+          <p:cNvPr id="19" name="Badge 183"/>
           <p:cNvSpPr/>
           <p:nvPr/>
         </p:nvSpPr>
@@ -8651,7 +10826,7 @@
       </p:sp>
       <p:sp>
         <p:nvSpPr>
-          <p:cNvPr id="20" name="Text 130"/>
+          <p:cNvPr id="20" name="Text 184"/>
           <p:cNvSpPr txBox="1"/>
           <p:nvPr/>
         </p:nvSpPr>
@@ -8687,7 +10862,7 @@
       </p:sp>
       <p:sp>
         <p:nvSpPr>
-          <p:cNvPr id="21" name="Text 131"/>
+          <p:cNvPr id="21" name="Text 185"/>
           <p:cNvSpPr txBox="1"/>
           <p:nvPr/>
         </p:nvSpPr>
@@ -8723,7 +10898,7 @@
       </p:sp>
       <p:sp>
         <p:nvSpPr>
-          <p:cNvPr id="22" name="Badge 132"/>
+          <p:cNvPr id="22" name="Badge 186"/>
           <p:cNvSpPr/>
           <p:nvPr/>
         </p:nvSpPr>
@@ -8743,7 +10918,7 @@
       </p:sp>
       <p:sp>
         <p:nvSpPr>
-          <p:cNvPr id="23" name="Text 133"/>
+          <p:cNvPr id="23" name="Text 187"/>
           <p:cNvSpPr txBox="1"/>
           <p:nvPr/>
         </p:nvSpPr>
@@ -8779,7 +10954,7 @@
       </p:sp>
       <p:sp>
         <p:nvSpPr>
-          <p:cNvPr id="24" name="Text 134"/>
+          <p:cNvPr id="24" name="Text 188"/>
           <p:cNvSpPr txBox="1"/>
           <p:nvPr/>
         </p:nvSpPr>
@@ -8852,7 +11027,7 @@
             <a:pPr algn="r"/>
             <a:fld id="{F7021451-1387-4CA6-816F-3879F97B5CBC}" type="slidenum">
               <a:rPr b="0" lang="en-US"/>
-              <a:t>7</a:t>
+              <a:t>9</a:t>
             </a:fld>
             <a:endParaRPr lang="en-US"/>
           </a:p>

--- a/reports/midterm_slides_ru.pptx
+++ b/reports/midterm_slides_ru.pptx
@@ -14,9 +14,10 @@
     <p:sldId id="262" r:id="rId8"/>
     <p:sldId id="263" r:id="rId9"/>
     <p:sldId id="264" r:id="rId10"/>
+    <p:sldId id="265" r:id="rId11"/>
   </p:sldIdLst>
   <p:notesMasterIdLst>
-    <p:notesMasterId r:id="rId11"/>
+    <p:notesMasterId r:id="rId12"/>
   </p:notesMasterIdLst>
   <p:sldSz cx="12192000" cy="6858000"/>
   <p:notesSz cx="6858000" cy="12192000"/>
@@ -115,29 +116,30 @@
   <p:extLst>
     <p:ext uri="{521415D9-36F7-43E2-AB2F-B90AF26B5E84}">
       <p14:sectionLst xmlns:p14="http://schemas.microsoft.com/office/powerpoint/2010/main">
-        <p14:section name="Задача и данные" id="{b48d26bb-93d7-ac67-33d1-9d01d773ee4d}">
+        <p14:section name="Задача и данные" id="{6f05e9cd-5d82-f78f-757d-3fa8ac2b2509}">
           <p14:sldIdLst>
             <p14:sldId id="256"/>
             <p14:sldId id="257"/>
             <p14:sldId id="258"/>
             <p14:sldId id="259"/>
+            <p14:sldId id="260"/>
           </p14:sldIdLst>
         </p14:section>
-        <p14:section name="Базовая модель и метрики" id="{af40720f-ae4a-a9f8-42d7-a31365e27776}">
+        <p14:section name="Базовая модель и метрики" id="{413b931a-6b77-bde3-4cca-a4d834069ab2}">
           <p14:sldIdLst>
-            <p14:sldId id="260"/>
             <p14:sldId id="261"/>
+            <p14:sldId id="262"/>
           </p14:sldIdLst>
         </p14:section>
-        <p14:section name="Результаты" id="{081b6443-1efe-73d3-7b2b-e17144a4dbb2}">
+        <p14:section name="Результаты" id="{e6210f32-d2d4-6ad3-9fe8-6227b629f017}">
           <p14:sldIdLst>
-            <p14:sldId id="262"/>
             <p14:sldId id="263"/>
+            <p14:sldId id="264"/>
           </p14:sldIdLst>
         </p14:section>
-        <p14:section name="Выводы" id="{844fe2f7-9aa2-eb9c-0534-493d8775c8e1}">
+        <p14:section name="Выводы" id="{79032aac-b888-378d-096e-023b02181603}">
           <p14:sldIdLst>
-            <p14:sldId id="264"/>
+            <p14:sldId id="265"/>
           </p14:sldIdLst>
         </p14:section>
       </p14:sectionLst>
@@ -586,6 +588,94 @@
 </p:notes>
 </file>
 
+<file path=ppt/notesSlides/notesSlide10.xml><?xml version="1.0" encoding="utf-8"?>
+<p:notes xmlns:a="http://schemas.openxmlformats.org/drawingml/2006/main" xmlns:r="http://schemas.openxmlformats.org/officeDocument/2006/relationships" xmlns:p="http://schemas.openxmlformats.org/presentationml/2006/main">
+  <p:cSld>
+    <p:spTree>
+      <p:nvGrpSpPr>
+        <p:cNvPr id="1" name=""/>
+        <p:cNvGrpSpPr/>
+        <p:nvPr/>
+      </p:nvGrpSpPr>
+      <p:grpSpPr>
+        <a:xfrm>
+          <a:off x="0" y="0"/>
+          <a:ext cx="0" cy="0"/>
+          <a:chOff x="0" y="0"/>
+          <a:chExt cx="0" cy="0"/>
+        </a:xfrm>
+      </p:grpSpPr>
+      <p:sp>
+        <p:nvSpPr>
+          <p:cNvPr id="2" name="Slide Image Placeholder 1"/>
+          <p:cNvSpPr>
+            <a:spLocks noGrp="1" noRot="1" noChangeAspect="1"/>
+          </p:cNvSpPr>
+          <p:nvPr>
+            <p:ph type="sldImg"/>
+          </p:nvPr>
+        </p:nvSpPr>
+        <p:spPr/>
+      </p:sp>
+      <p:sp>
+        <p:nvSpPr>
+          <p:cNvPr id="3" name="Notes Placeholder 2"/>
+          <p:cNvSpPr>
+            <a:spLocks noGrp="1"/>
+          </p:cNvSpPr>
+          <p:nvPr>
+            <p:ph type="body" idx="1"/>
+          </p:nvPr>
+        </p:nvSpPr>
+        <p:spPr/>
+        <p:txBody>
+          <a:bodyPr/>
+          <a:lstStyle/>
+          <a:p>
+            <a:r>
+              <a:rPr lang="en-US" dirty="0"/>
+              <a:t>ВЫВОДЫ И СЛЕДУЮЩИЙ ЭТАП. Что показал первый эксперимент. Первое: информация, известная в момент выбора победителя, действительно предсказывает срыв договора; даже простая модель даёт ROC-AUC 0,79 на новых данных. Второе: это уже полезно на практике, список модели в 5 раз лучше случайной проверки. Третье: если считать срывом только однозначные случаи (одностороннее расторжение или незаключение), качество даже выше, 0,83, значит модель ловит настоящий сигнал, а не шум в разметке. Ограничения: модель линейная, данные только за один квартал, нет истории поставщика (её нельзя добавить без утечки данных), оценки не откалиброваны. Следующий этап, третье задание: 1) градиентный бустинг с подбором гиперпараметров; 2) калибровка вероятностей; 3) дообучение нейросети-трансформера на текстах лотов и объединение с табличной моделью; 4) проверка по сегментам, улучшилось ли качество именно там, где baseline слаб.</a:t>
+            </a:r>
+            <a:endParaRPr lang="en-US" dirty="0"/>
+          </a:p>
+        </p:txBody>
+      </p:sp>
+      <p:sp>
+        <p:nvSpPr>
+          <p:cNvPr id="4" name="Slide Number Placeholder 3"/>
+          <p:cNvSpPr>
+            <a:spLocks noGrp="1"/>
+          </p:cNvSpPr>
+          <p:nvPr>
+            <p:ph type="sldNum" sz="quarter" idx="10"/>
+          </p:nvPr>
+        </p:nvSpPr>
+        <p:spPr/>
+        <p:txBody>
+          <a:bodyPr/>
+          <a:lstStyle/>
+          <a:p>
+            <a:fld id="{F7021451-1387-4CA6-816F-3879F97B5CBC}" type="slidenum">
+              <a:rPr lang="en-US"/>
+              <a:t>10</a:t>
+            </a:fld>
+            <a:endParaRPr lang="en-US"/>
+          </a:p>
+        </p:txBody>
+      </p:sp>
+    </p:spTree>
+    <p:extLst>
+      <p:ext uri="{BB962C8B-B14F-4D97-AF65-F5344CB8AC3E}">
+        <p14:creationId xmlns:p14="http://schemas.microsoft.com/office/powerpoint/2010/main" val="1024086991"/>
+      </p:ext>
+    </p:extLst>
+  </p:cSld>
+  <p:clrMapOvr>
+    <a:masterClrMapping/>
+  </p:clrMapOvr>
+</p:notes>
+</file>
+
 <file path=ppt/notesSlides/notesSlide2.xml><?xml version="1.0" encoding="utf-8"?>
 <p:notes xmlns:a="http://schemas.openxmlformats.org/drawingml/2006/main" xmlns:r="http://schemas.openxmlformats.org/officeDocument/2006/relationships" xmlns:p="http://schemas.openxmlformats.org/presentationml/2006/main">
   <p:cSld>
@@ -896,7 +986,7 @@
           <a:p>
             <a:r>
               <a:rPr lang="en-US" dirty="0"/>
-              <a:t>BASELINE И ПОЧЕМУ ОН. Модель: логистическая регрессия с весами классов. Схема слева: сначала подготовка (пропуски заполняем медианой, числа приводим к одному масштабу, категории превращаем в столбцы из 0 и 1), потом сама модель, на выходе оценка риска от 0 до 1. Подготовка обучается только на train, чтобы не подглядывать в тест. Почему именно она: 1) выдаёт вероятность, значит закупки можно отсортировать по риску; 2) у каждого признака понятный коэффициент, можно проверить модель здравым смыслом; 3) веса классов решают проблему редких срывов: один срыв весит как 14 обычных договоров; 4) обучается за секунду. Почему не другие: бустинг и нейросеть сильнее, но их надо с чем-то сравнивать, это тема третьего задания. SVM и kNN слишком медленные на 266 тысячах строк. Наивный Байес предполагает независимые признаки, а у нас они сильно связаны.</a:t>
+              <a:t>КАКИЕ ПРИЗНАКИ ИСПОЛЬЗОВАЛИ. Признак это то, на что смотрит модель. Всего 20 признаков, и все они известны в момент выбора победителя. Первая группа, закупка и сроки, 7 признаков: сумма закупки, её берём в логарифме, потому что разброс от тысяч до миллиардов тенге; число лотов; способ закупки; предмет, то есть товар, работа или услуга; регион; сколько дней принимались заявки; сколько дней прошло от публикации до начала приёма. Вторая группа, конкуренция, 5 признаков: число участников; сколько заявок пришло на один лот; отношение лучшей цены к плановой, то есть скидка; разброс цен между заявками; и флаг, что предложений вообще не записано. Третья группа, организатор и особые условия, 8 признаков: сколько закупок этот организатор уже провёл раньше, и семь флагов да или нет: единый организатор, строительные работы, лёгкая промышленность, организации инвалидов, антидемпинговые меры, проектная документация, консультационные услуги. По типам: 9 числовых, 8 флагов и 3 категории: способ, предмет и регион. Категории превращаются в столбцы из нулей и единиц, поэтому на входе модели получается 52 числа. Какие важнее всего: я проверил на случайном лесе, перемешивая по одному признаку. Сильнее всего качество падает без суммы закупки, затем без способа закупки и предмета. Что не взяли: статус договора и даты исполнения, потому что это и есть ответ; реестр недобросовестных участников, потому что туда попадают уже после расторжения; историю срывов поставщика, потому что исходы его прошлых договоров на тот момент ещё не были известны. Это защита от утечки данных.</a:t>
             </a:r>
             <a:endParaRPr lang="en-US" dirty="0"/>
           </a:p>
@@ -984,7 +1074,7 @@
           <a:p>
             <a:r>
               <a:rPr lang="en-US" dirty="0"/>
-              <a:t>МЕТРИКИ. Сначала почему не accuracy, то есть не доля правильных ответов. Если всегда отвечать «не сорвётся», получится 93,4% правильных ответов, и при этом ни одного найденного срыва. Поэтому accuracy здесь бесполезна. Мы берём четыре метрики. ROC-AUC: вероятность, что сорванному договору модель поставит оценку выше, чем нормальному; 0,5 это случайность, 1 это идеал; у нас 0,79. PR-AUC: средняя точность по всем уровням полноты; случайный уровень равен доле срывов 0,066, у нас 0,26, то есть в 4 раза лучше; это самая честная метрика при редком классе. F1: баланс между точностью (сколько из помеченных действительно сорвались) и полнотой (сколько срывов мы нашли) при одном пороге; порог подбирали на валидации. Precision@1%: качество самой верхушки списка, потому что аудитор может проверить только малую часть. Числа справа это результат baseline на тесте.</a:t>
+              <a:t>BASELINE И ПОЧЕМУ ОН. Модель: логистическая регрессия с весами классов. Схема слева: сначала подготовка (пропуски заполняем медианой, числа приводим к одному масштабу, категории превращаем в столбцы из 0 и 1), потом сама модель, на выходе оценка риска от 0 до 1. Подготовка обучается только на train, чтобы не подглядывать в тест. Почему именно она: 1) выдаёт вероятность, значит закупки можно отсортировать по риску; 2) у каждого признака понятный коэффициент, можно проверить модель здравым смыслом; 3) веса классов решают проблему редких срывов: один срыв весит как 14 обычных договоров; 4) обучается за секунду. Почему не другие: бустинг и нейросеть сильнее, но их надо с чем-то сравнивать, это тема третьего задания. SVM и kNN слишком медленные на 266 тысячах строк. Наивный Байес предполагает независимые признаки, а у нас они сильно связаны.</a:t>
             </a:r>
             <a:endParaRPr lang="en-US" dirty="0"/>
           </a:p>
@@ -1072,7 +1162,7 @@
           <a:p>
             <a:r>
               <a:rPr lang="en-US" dirty="0"/>
-              <a:t>РЕЗУЛЬТАТЫ. Все цифры посчитаны на тесте, это вторая половина марта, модель этих закупок не видела. Строка Prior это отсутствие модели, уровень случайности. Baseline, логистическая регрессия: ROC-AUC 0,79, PR-AUC 0,26. Три вывода слева. Первое: результат устойчив, на валидации и на тесте почти одинаковые цифры, значит это не случайность одного периода. Второе: случайный лес на тех же признаках лучше, значит в данных есть нелинейные зависимости, которые линейная модель не ловит. Третье: текст названий лотов даёт небольшой прирост. График справа самый практичный: если аудитор проверит 5% закупок с самым высоким риском, он найдёт 26% всех срывов, а если 20%, то 60%. При случайном выборе было бы 5% и 20%. P@1% это точность в верхнем 1% списка, R@5% это доля срывов, найденных в верхних 5%.</a:t>
+              <a:t>МЕТРИКИ. Сначала почему не accuracy, то есть не доля правильных ответов. Если всегда отвечать «не сорвётся», получится 93,4% правильных ответов, и при этом ни одного найденного срыва. Поэтому accuracy здесь бесполезна. Мы берём четыре метрики. ROC-AUC: вероятность, что сорванному договору модель поставит оценку выше, чем нормальному; 0,5 это случайность, 1 это идеал; у нас 0,79. PR-AUC: средняя точность по всем уровням полноты; случайный уровень равен доле срывов 0,066, у нас 0,26, то есть в 4 раза лучше; это самая честная метрика при редком классе. F1: баланс между точностью (сколько из помеченных действительно сорвались) и полнотой (сколько срывов мы нашли) при одном пороге; порог подбирали на валидации. Precision@1%: качество самой верхушки списка, потому что аудитор может проверить только малую часть. Числа справа это результат baseline на тесте.</a:t>
             </a:r>
             <a:endParaRPr lang="en-US" dirty="0"/>
           </a:p>
@@ -1160,7 +1250,7 @@
           <a:p>
             <a:r>
               <a:rPr lang="en-US" dirty="0"/>
-              <a:t>ГДЕ МОДЕЛЬ ОШИБАЕТСЯ. Это честный разбор слабых мест. Левый график: качество ранжирования внутри каждого способа закупки. Внутри запроса ценовых предложений модель работает хорошо, 0,80. Внутри остальных способов почти случайно, около 0,5. То есть модель в основном научилась отличать один способ от другого и большие суммы от маленьких. Правый график: доля найденных срывов по сумме закупки. В самой дешёвой четверти модель не находит ничего, 0%, а в самой дорогой 64%. Линейная модель умеет говорить только «чем дороже, тем рискованнее» и не видит рискованные дешёвые закупки. Третье: оценки модели нельзя читать как вероятности. Из-за весов классов они завышены: средняя оценка 0,42 при реальной доле срывов 0,07. Для сортировки это не мешает, но показывать человеку «риск 70%» нельзя, нужна калибровка.</a:t>
+              <a:t>РЕЗУЛЬТАТЫ. Все цифры посчитаны на тесте, это вторая половина марта, модель этих закупок не видела. Строка Prior это отсутствие модели, уровень случайности. Baseline, логистическая регрессия: ROC-AUC 0,79, PR-AUC 0,26. Три вывода слева. Первое: результат устойчив, на валидации и на тесте почти одинаковые цифры, значит это не случайность одного периода. Второе: случайный лес на тех же признаках лучше, значит в данных есть нелинейные зависимости, которые линейная модель не ловит. Третье: текст названий лотов даёт небольшой прирост. График справа самый практичный: если аудитор проверит 5% закупок с самым высоким риском, он найдёт 26% всех срывов, а если 20%, то 60%. При случайном выборе было бы 5% и 20%. P@1% это точность в верхнем 1% списка, R@5% это доля срывов, найденных в верхних 5%.</a:t>
             </a:r>
             <a:endParaRPr lang="en-US" dirty="0"/>
           </a:p>
@@ -1248,7 +1338,7 @@
           <a:p>
             <a:r>
               <a:rPr lang="en-US" dirty="0"/>
-              <a:t>ВЫВОДЫ И СЛЕДУЮЩИЙ ЭТАП. Что показал первый эксперимент. Первое: информация, известная в момент выбора победителя, действительно предсказывает срыв договора; даже простая модель даёт ROC-AUC 0,79 на новых данных. Второе: это уже полезно на практике, список модели в 5 раз лучше случайной проверки. Третье: если считать срывом только однозначные случаи (одностороннее расторжение или незаключение), качество даже выше, 0,83, значит модель ловит настоящий сигнал, а не шум в разметке. Ограничения: модель линейная, данные только за один квартал, нет истории поставщика (её нельзя добавить без утечки данных), оценки не откалиброваны. Следующий этап, третье задание: 1) градиентный бустинг с подбором гиперпараметров; 2) калибровка вероятностей; 3) дообучение нейросети-трансформера на текстах лотов и объединение с табличной моделью; 4) проверка по сегментам, улучшилось ли качество именно там, где baseline слаб.</a:t>
+              <a:t>ГДЕ МОДЕЛЬ ОШИБАЕТСЯ. Это честный разбор слабых мест. Левый график: качество ранжирования внутри каждого способа закупки. Внутри запроса ценовых предложений модель работает хорошо, 0,80. Внутри остальных способов почти случайно, около 0,5. То есть модель в основном научилась отличать один способ от другого и большие суммы от маленьких. Правый график: доля найденных срывов по сумме закупки. В самой дешёвой четверти модель не находит ничего, 0%, а в самой дорогой 64%. Линейная модель умеет говорить только «чем дороже, тем рискованнее» и не видит рискованные дешёвые закупки. Третье: оценки модели нельзя читать как вероятности. Из-за весов классов они завышены: средняя оценка 0,42 при реальной доле срывов 0,07. Для сортировки это не мешает, но показывать человеку «риск 70%» нельзя, нужна калибровка.</a:t>
             </a:r>
             <a:endParaRPr lang="en-US" dirty="0"/>
           </a:p>
@@ -2586,6 +2676,828 @@
 </p:sld>
 </file>
 
+<file path=ppt/slides/slide10.xml><?xml version="1.0" encoding="utf-8"?>
+<p:sld xmlns:a="http://schemas.openxmlformats.org/drawingml/2006/main" xmlns:r="http://schemas.openxmlformats.org/officeDocument/2006/relationships" xmlns:p="http://schemas.openxmlformats.org/presentationml/2006/main">
+  <p:cSld name="Slide 10">
+    <p:spTree>
+      <p:nvGrpSpPr>
+        <p:cNvPr id="1" name=""/>
+        <p:cNvGrpSpPr/>
+        <p:nvPr/>
+      </p:nvGrpSpPr>
+      <p:grpSpPr>
+        <a:xfrm>
+          <a:off x="0" y="0"/>
+          <a:ext cx="0" cy="0"/>
+          <a:chOff x="0" y="0"/>
+          <a:chExt cx="0" cy="0"/>
+        </a:xfrm>
+      </p:grpSpPr>
+      <p:sp>
+        <p:nvSpPr>
+          <p:cNvPr id="2" name="Text 0"/>
+          <p:cNvSpPr/>
+          <p:nvPr>
+            <p:ph idx="100" type="title" hasCustomPrompt="1"/>
+          </p:nvPr>
+        </p:nvSpPr>
+        <p:spPr>
+          <a:xfrm>
+            <a:off x="548640" y="365760"/>
+            <a:ext cx="11064240" cy="777240"/>
+          </a:xfrm>
+          <a:prstGeom prst="rect">
+            <a:avLst/>
+          </a:prstGeom>
+          <a:noFill/>
+          <a:ln/>
+        </p:spPr>
+        <p:txBody>
+          <a:bodyPr wrap="square" lIns="0" tIns="0" rIns="0" bIns="0" rtlCol="0" anchor="ctr"/>
+          <a:lstStyle/>
+          <a:p>
+            <a:pPr algn="l" indent="0" marL="0">
+              <a:buNone/>
+            </a:pPr>
+            <a:r>
+              <a:rPr lang="en-US" sz="3200" b="1" dirty="0">
+                <a:solidFill>
+                  <a:schemeClr val="bg1"/>
+                </a:solidFill>
+              </a:rPr>
+              <a:t>Выводы и следующий этап</a:t>
+            </a:r>
+            <a:endParaRPr lang="en-US" sz="3200" dirty="0"/>
+          </a:p>
+        </p:txBody>
+      </p:sp>
+      <p:sp>
+        <p:nvSpPr>
+          <p:cNvPr id="3" name="Text 189"/>
+          <p:cNvSpPr txBox="1"/>
+          <p:nvPr/>
+        </p:nvSpPr>
+        <p:spPr>
+          <a:xfrm>
+            <a:off x="548640" y="1463040"/>
+            <a:ext cx="5577840" cy="274320"/>
+          </a:xfrm>
+          <a:prstGeom prst="rect">
+            <a:avLst/>
+          </a:prstGeom>
+          <a:noFill/>
+          <a:ln/>
+        </p:spPr>
+        <p:txBody>
+          <a:bodyPr wrap="square" lIns="0" tIns="0" rIns="0" bIns="0" rtlCol="0" anchor="t"/>
+          <a:lstStyle/>
+          <a:p>
+            <a:pPr indent="0" marL="0">
+              <a:buNone/>
+            </a:pPr>
+            <a:r>
+              <a:rPr lang="en-US" sz="1200" b="1" spc="300" kern="0" dirty="0">
+                <a:solidFill>
+                  <a:schemeClr val="accent1"/>
+                </a:solidFill>
+              </a:rPr>
+              <a:t>ЧТО ПОКАЗАЛ ПЕРВЫЙ ЭКСПЕРИМЕНТ</a:t>
+            </a:r>
+            <a:endParaRPr lang="en-US" sz="1200" dirty="0"/>
+          </a:p>
+        </p:txBody>
+      </p:sp>
+      <p:sp>
+        <p:nvSpPr>
+          <p:cNvPr id="4" name="Text 190"/>
+          <p:cNvSpPr txBox="1"/>
+          <p:nvPr/>
+        </p:nvSpPr>
+        <p:spPr>
+          <a:xfrm>
+            <a:off x="548640" y="1920240"/>
+            <a:ext cx="1463040" cy="822960"/>
+          </a:xfrm>
+          <a:prstGeom prst="rect">
+            <a:avLst/>
+          </a:prstGeom>
+          <a:noFill/>
+          <a:ln/>
+        </p:spPr>
+        <p:txBody>
+          <a:bodyPr wrap="square" lIns="0" tIns="0" rIns="0" bIns="0" rtlCol="0" anchor="ctr"/>
+          <a:lstStyle/>
+          <a:p>
+            <a:pPr indent="0" marL="0">
+              <a:buNone/>
+            </a:pPr>
+            <a:r>
+              <a:rPr lang="en-US" sz="4000" b="1" dirty="0">
+                <a:solidFill>
+                  <a:schemeClr val="bg1"/>
+                </a:solidFill>
+              </a:rPr>
+              <a:t>0,79</a:t>
+            </a:r>
+            <a:endParaRPr lang="en-US" sz="4000" dirty="0"/>
+          </a:p>
+        </p:txBody>
+      </p:sp>
+      <p:sp>
+        <p:nvSpPr>
+          <p:cNvPr id="5" name="Text 191"/>
+          <p:cNvSpPr txBox="1"/>
+          <p:nvPr/>
+        </p:nvSpPr>
+        <p:spPr>
+          <a:xfrm>
+            <a:off x="2103120" y="1920240"/>
+            <a:ext cx="4023360" cy="822960"/>
+          </a:xfrm>
+          <a:prstGeom prst="rect">
+            <a:avLst/>
+          </a:prstGeom>
+          <a:noFill/>
+          <a:ln/>
+        </p:spPr>
+        <p:txBody>
+          <a:bodyPr wrap="square" lIns="0" tIns="0" rIns="0" bIns="0" rtlCol="0" anchor="ctr"/>
+          <a:lstStyle/>
+          <a:p>
+            <a:pPr indent="0" marL="0">
+              <a:buNone/>
+            </a:pPr>
+            <a:r>
+              <a:rPr lang="en-US" sz="1400" dirty="0">
+                <a:solidFill>
+                  <a:schemeClr val="bg2"/>
+                </a:solidFill>
+              </a:rPr>
+              <a:t>ROC-AUC на новых мартовских данных: информация на момент выбора победителя предсказывает срыв договора</a:t>
+            </a:r>
+            <a:endParaRPr lang="en-US" sz="1400" dirty="0"/>
+          </a:p>
+        </p:txBody>
+      </p:sp>
+      <p:sp>
+        <p:nvSpPr>
+          <p:cNvPr id="6" name="Text 192"/>
+          <p:cNvSpPr txBox="1"/>
+          <p:nvPr/>
+        </p:nvSpPr>
+        <p:spPr>
+          <a:xfrm>
+            <a:off x="548640" y="3108960"/>
+            <a:ext cx="1463040" cy="822960"/>
+          </a:xfrm>
+          <a:prstGeom prst="rect">
+            <a:avLst/>
+          </a:prstGeom>
+          <a:noFill/>
+          <a:ln/>
+        </p:spPr>
+        <p:txBody>
+          <a:bodyPr wrap="square" lIns="0" tIns="0" rIns="0" bIns="0" rtlCol="0" anchor="ctr"/>
+          <a:lstStyle/>
+          <a:p>
+            <a:pPr indent="0" marL="0">
+              <a:buNone/>
+            </a:pPr>
+            <a:r>
+              <a:rPr lang="en-US" sz="4000" b="1" dirty="0">
+                <a:solidFill>
+                  <a:schemeClr val="bg1"/>
+                </a:solidFill>
+              </a:rPr>
+              <a:t>5×</a:t>
+            </a:r>
+            <a:endParaRPr lang="en-US" sz="4000" dirty="0"/>
+          </a:p>
+        </p:txBody>
+      </p:sp>
+      <p:sp>
+        <p:nvSpPr>
+          <p:cNvPr id="7" name="Text 193"/>
+          <p:cNvSpPr txBox="1"/>
+          <p:nvPr/>
+        </p:nvSpPr>
+        <p:spPr>
+          <a:xfrm>
+            <a:off x="2103120" y="3108960"/>
+            <a:ext cx="4023360" cy="822960"/>
+          </a:xfrm>
+          <a:prstGeom prst="rect">
+            <a:avLst/>
+          </a:prstGeom>
+          <a:noFill/>
+          <a:ln/>
+        </p:spPr>
+        <p:txBody>
+          <a:bodyPr wrap="square" lIns="0" tIns="0" rIns="0" bIns="0" rtlCol="0" anchor="ctr"/>
+          <a:lstStyle/>
+          <a:p>
+            <a:pPr indent="0" marL="0">
+              <a:buNone/>
+            </a:pPr>
+            <a:r>
+              <a:rPr lang="en-US" sz="1400" dirty="0">
+                <a:solidFill>
+                  <a:schemeClr val="bg2"/>
+                </a:solidFill>
+              </a:rPr>
+              <a:t>лучше случайной проверки: в верхних 5 % списка находится 26 % всех срывов</a:t>
+            </a:r>
+            <a:endParaRPr lang="en-US" sz="1400" dirty="0"/>
+          </a:p>
+        </p:txBody>
+      </p:sp>
+      <p:sp>
+        <p:nvSpPr>
+          <p:cNvPr id="8" name="Text 194"/>
+          <p:cNvSpPr txBox="1"/>
+          <p:nvPr/>
+        </p:nvSpPr>
+        <p:spPr>
+          <a:xfrm>
+            <a:off x="548640" y="4297680"/>
+            <a:ext cx="1463040" cy="822960"/>
+          </a:xfrm>
+          <a:prstGeom prst="rect">
+            <a:avLst/>
+          </a:prstGeom>
+          <a:noFill/>
+          <a:ln/>
+        </p:spPr>
+        <p:txBody>
+          <a:bodyPr wrap="square" lIns="0" tIns="0" rIns="0" bIns="0" rtlCol="0" anchor="ctr"/>
+          <a:lstStyle/>
+          <a:p>
+            <a:pPr indent="0" marL="0">
+              <a:buNone/>
+            </a:pPr>
+            <a:r>
+              <a:rPr lang="en-US" sz="4000" b="1" dirty="0">
+                <a:solidFill>
+                  <a:schemeClr val="bg1"/>
+                </a:solidFill>
+              </a:rPr>
+              <a:t>0,83</a:t>
+            </a:r>
+            <a:endParaRPr lang="en-US" sz="4000" dirty="0"/>
+          </a:p>
+        </p:txBody>
+      </p:sp>
+      <p:sp>
+        <p:nvSpPr>
+          <p:cNvPr id="9" name="Text 195"/>
+          <p:cNvSpPr txBox="1"/>
+          <p:nvPr/>
+        </p:nvSpPr>
+        <p:spPr>
+          <a:xfrm>
+            <a:off x="2103120" y="4297680"/>
+            <a:ext cx="4023360" cy="822960"/>
+          </a:xfrm>
+          <a:prstGeom prst="rect">
+            <a:avLst/>
+          </a:prstGeom>
+          <a:noFill/>
+          <a:ln/>
+        </p:spPr>
+        <p:txBody>
+          <a:bodyPr wrap="square" lIns="0" tIns="0" rIns="0" bIns="0" rtlCol="0" anchor="ctr"/>
+          <a:lstStyle/>
+          <a:p>
+            <a:pPr indent="0" marL="0">
+              <a:buNone/>
+            </a:pPr>
+            <a:r>
+              <a:rPr lang="en-US" sz="1400" dirty="0">
+                <a:solidFill>
+                  <a:schemeClr val="bg2"/>
+                </a:solidFill>
+              </a:rPr>
+              <a:t>ROC-AUC для строгой метки срыва: сигнал не является шумом разметки</a:t>
+            </a:r>
+            <a:endParaRPr lang="en-US" sz="1400" dirty="0"/>
+          </a:p>
+        </p:txBody>
+      </p:sp>
+      <p:sp>
+        <p:nvSpPr>
+          <p:cNvPr id="10" name="Text 196"/>
+          <p:cNvSpPr txBox="1"/>
+          <p:nvPr/>
+        </p:nvSpPr>
+        <p:spPr>
+          <a:xfrm>
+            <a:off x="548640" y="5532120"/>
+            <a:ext cx="5577840" cy="640080"/>
+          </a:xfrm>
+          <a:prstGeom prst="rect">
+            <a:avLst/>
+          </a:prstGeom>
+          <a:noFill/>
+          <a:ln/>
+        </p:spPr>
+        <p:txBody>
+          <a:bodyPr wrap="square" lIns="0" tIns="0" rIns="0" bIns="0" rtlCol="0" anchor="t"/>
+          <a:lstStyle/>
+          <a:p>
+            <a:pPr indent="0" marL="0">
+              <a:buNone/>
+            </a:pPr>
+            <a:r>
+              <a:rPr lang="en-US" sz="1400" i="1" dirty="0">
+                <a:solidFill>
+                  <a:schemeClr val="bg2"/>
+                </a:solidFill>
+              </a:rPr>
+              <a:t>Ограничения: линейная модель, один квартал данных, нет истории поставщиков, оценки не откалиброваны.</a:t>
+            </a:r>
+            <a:endParaRPr lang="en-US" sz="1400" dirty="0"/>
+          </a:p>
+        </p:txBody>
+      </p:sp>
+      <p:sp>
+        <p:nvSpPr>
+          <p:cNvPr id="11" name="Card 197"/>
+          <p:cNvSpPr/>
+          <p:nvPr/>
+        </p:nvSpPr>
+        <p:spPr>
+          <a:xfrm>
+            <a:off x="6583680" y="1463040"/>
+            <a:ext cx="5029200" cy="4709160"/>
+          </a:xfrm>
+          <a:prstGeom prst="roundRect">
+            <a:avLst>
+              <a:gd name="adj" fmla="val 1553"/>
+            </a:avLst>
+          </a:prstGeom>
+          <a:solidFill>
+            <a:schemeClr val="tx2"/>
+          </a:solidFill>
+          <a:ln/>
+        </p:spPr>
+      </p:sp>
+      <p:sp>
+        <p:nvSpPr>
+          <p:cNvPr id="12" name="Text 198"/>
+          <p:cNvSpPr txBox="1"/>
+          <p:nvPr/>
+        </p:nvSpPr>
+        <p:spPr>
+          <a:xfrm>
+            <a:off x="6858000" y="1691640"/>
+            <a:ext cx="4480560" cy="274320"/>
+          </a:xfrm>
+          <a:prstGeom prst="rect">
+            <a:avLst/>
+          </a:prstGeom>
+          <a:noFill/>
+          <a:ln/>
+        </p:spPr>
+        <p:txBody>
+          <a:bodyPr wrap="square" lIns="0" tIns="0" rIns="0" bIns="0" rtlCol="0" anchor="t"/>
+          <a:lstStyle/>
+          <a:p>
+            <a:pPr indent="0" marL="0">
+              <a:buNone/>
+            </a:pPr>
+            <a:r>
+              <a:rPr lang="en-US" sz="1200" b="1" spc="300" kern="0" dirty="0">
+                <a:solidFill>
+                  <a:schemeClr val="bg1"/>
+                </a:solidFill>
+              </a:rPr>
+              <a:t>СЛЕДУЮЩИЙ ЭТАП · ASSIGNMENT 3</a:t>
+            </a:r>
+            <a:endParaRPr lang="en-US" sz="1200" dirty="0"/>
+          </a:p>
+        </p:txBody>
+      </p:sp>
+      <p:sp>
+        <p:nvSpPr>
+          <p:cNvPr id="13" name="Badge 199"/>
+          <p:cNvSpPr/>
+          <p:nvPr/>
+        </p:nvSpPr>
+        <p:spPr>
+          <a:xfrm>
+            <a:off x="6858000" y="2331720"/>
+            <a:ext cx="384048" cy="384048"/>
+          </a:xfrm>
+          <a:prstGeom prst="ellipse">
+            <a:avLst/>
+          </a:prstGeom>
+          <a:solidFill>
+            <a:schemeClr val="accent1"/>
+          </a:solidFill>
+          <a:ln/>
+        </p:spPr>
+      </p:sp>
+      <p:sp>
+        <p:nvSpPr>
+          <p:cNvPr id="14" name="Text 200"/>
+          <p:cNvSpPr txBox="1"/>
+          <p:nvPr/>
+        </p:nvSpPr>
+        <p:spPr>
+          <a:xfrm>
+            <a:off x="6858000" y="2331720"/>
+            <a:ext cx="384048" cy="384048"/>
+          </a:xfrm>
+          <a:prstGeom prst="rect">
+            <a:avLst/>
+          </a:prstGeom>
+          <a:noFill/>
+          <a:ln/>
+        </p:spPr>
+        <p:txBody>
+          <a:bodyPr wrap="square" lIns="0" tIns="0" rIns="0" bIns="0" rtlCol="0" anchor="ctr"/>
+          <a:lstStyle/>
+          <a:p>
+            <a:pPr algn="ctr" indent="0" marL="0">
+              <a:buNone/>
+            </a:pPr>
+            <a:r>
+              <a:rPr lang="en-US" sz="1400" b="1" dirty="0">
+                <a:solidFill>
+                  <a:schemeClr val="bg1"/>
+                </a:solidFill>
+              </a:rPr>
+              <a:t>1</a:t>
+            </a:r>
+            <a:endParaRPr lang="en-US" sz="1400" dirty="0"/>
+          </a:p>
+        </p:txBody>
+      </p:sp>
+      <p:sp>
+        <p:nvSpPr>
+          <p:cNvPr id="15" name="Text 201"/>
+          <p:cNvSpPr txBox="1"/>
+          <p:nvPr/>
+        </p:nvSpPr>
+        <p:spPr>
+          <a:xfrm>
+            <a:off x="7406640" y="2240280"/>
+            <a:ext cx="3977640" cy="685800"/>
+          </a:xfrm>
+          <a:prstGeom prst="rect">
+            <a:avLst/>
+          </a:prstGeom>
+          <a:noFill/>
+          <a:ln/>
+        </p:spPr>
+        <p:txBody>
+          <a:bodyPr wrap="square" lIns="0" tIns="0" rIns="0" bIns="0" rtlCol="0" anchor="ctr"/>
+          <a:lstStyle/>
+          <a:p>
+            <a:pPr indent="0" marL="0">
+              <a:buNone/>
+            </a:pPr>
+            <a:r>
+              <a:rPr lang="en-US" sz="1400" dirty="0">
+                <a:solidFill>
+                  <a:schemeClr val="bg1"/>
+                </a:solidFill>
+              </a:rPr>
+              <a:t>Градиентный бустинг (LightGBM / CatBoost) с подбором гиперпараметров</a:t>
+            </a:r>
+            <a:endParaRPr lang="en-US" sz="1400" dirty="0"/>
+          </a:p>
+        </p:txBody>
+      </p:sp>
+      <p:sp>
+        <p:nvSpPr>
+          <p:cNvPr id="16" name="Badge 202"/>
+          <p:cNvSpPr/>
+          <p:nvPr/>
+        </p:nvSpPr>
+        <p:spPr>
+          <a:xfrm>
+            <a:off x="6858000" y="3264408"/>
+            <a:ext cx="384048" cy="384048"/>
+          </a:xfrm>
+          <a:prstGeom prst="ellipse">
+            <a:avLst/>
+          </a:prstGeom>
+          <a:solidFill>
+            <a:schemeClr val="accent1"/>
+          </a:solidFill>
+          <a:ln/>
+        </p:spPr>
+      </p:sp>
+      <p:sp>
+        <p:nvSpPr>
+          <p:cNvPr id="17" name="Text 203"/>
+          <p:cNvSpPr txBox="1"/>
+          <p:nvPr/>
+        </p:nvSpPr>
+        <p:spPr>
+          <a:xfrm>
+            <a:off x="6858000" y="3264408"/>
+            <a:ext cx="384048" cy="384048"/>
+          </a:xfrm>
+          <a:prstGeom prst="rect">
+            <a:avLst/>
+          </a:prstGeom>
+          <a:noFill/>
+          <a:ln/>
+        </p:spPr>
+        <p:txBody>
+          <a:bodyPr wrap="square" lIns="0" tIns="0" rIns="0" bIns="0" rtlCol="0" anchor="ctr"/>
+          <a:lstStyle/>
+          <a:p>
+            <a:pPr algn="ctr" indent="0" marL="0">
+              <a:buNone/>
+            </a:pPr>
+            <a:r>
+              <a:rPr lang="en-US" sz="1400" b="1" dirty="0">
+                <a:solidFill>
+                  <a:schemeClr val="bg1"/>
+                </a:solidFill>
+              </a:rPr>
+              <a:t>2</a:t>
+            </a:r>
+            <a:endParaRPr lang="en-US" sz="1400" dirty="0"/>
+          </a:p>
+        </p:txBody>
+      </p:sp>
+      <p:sp>
+        <p:nvSpPr>
+          <p:cNvPr id="18" name="Text 204"/>
+          <p:cNvSpPr txBox="1"/>
+          <p:nvPr/>
+        </p:nvSpPr>
+        <p:spPr>
+          <a:xfrm>
+            <a:off x="7406640" y="3172968"/>
+            <a:ext cx="3977640" cy="685800"/>
+          </a:xfrm>
+          <a:prstGeom prst="rect">
+            <a:avLst/>
+          </a:prstGeom>
+          <a:noFill/>
+          <a:ln/>
+        </p:spPr>
+        <p:txBody>
+          <a:bodyPr wrap="square" lIns="0" tIns="0" rIns="0" bIns="0" rtlCol="0" anchor="ctr"/>
+          <a:lstStyle/>
+          <a:p>
+            <a:pPr indent="0" marL="0">
+              <a:buNone/>
+            </a:pPr>
+            <a:r>
+              <a:rPr lang="en-US" sz="1400" dirty="0">
+                <a:solidFill>
+                  <a:schemeClr val="bg1"/>
+                </a:solidFill>
+              </a:rPr>
+              <a:t>Калибровка вероятностей для оценок риска</a:t>
+            </a:r>
+            <a:endParaRPr lang="en-US" sz="1400" dirty="0"/>
+          </a:p>
+        </p:txBody>
+      </p:sp>
+      <p:sp>
+        <p:nvSpPr>
+          <p:cNvPr id="19" name="Badge 205"/>
+          <p:cNvSpPr/>
+          <p:nvPr/>
+        </p:nvSpPr>
+        <p:spPr>
+          <a:xfrm>
+            <a:off x="6858000" y="4197096"/>
+            <a:ext cx="384048" cy="384048"/>
+          </a:xfrm>
+          <a:prstGeom prst="ellipse">
+            <a:avLst/>
+          </a:prstGeom>
+          <a:solidFill>
+            <a:schemeClr val="accent1"/>
+          </a:solidFill>
+          <a:ln/>
+        </p:spPr>
+      </p:sp>
+      <p:sp>
+        <p:nvSpPr>
+          <p:cNvPr id="20" name="Text 206"/>
+          <p:cNvSpPr txBox="1"/>
+          <p:nvPr/>
+        </p:nvSpPr>
+        <p:spPr>
+          <a:xfrm>
+            <a:off x="6858000" y="4197096"/>
+            <a:ext cx="384048" cy="384048"/>
+          </a:xfrm>
+          <a:prstGeom prst="rect">
+            <a:avLst/>
+          </a:prstGeom>
+          <a:noFill/>
+          <a:ln/>
+        </p:spPr>
+        <p:txBody>
+          <a:bodyPr wrap="square" lIns="0" tIns="0" rIns="0" bIns="0" rtlCol="0" anchor="ctr"/>
+          <a:lstStyle/>
+          <a:p>
+            <a:pPr algn="ctr" indent="0" marL="0">
+              <a:buNone/>
+            </a:pPr>
+            <a:r>
+              <a:rPr lang="en-US" sz="1400" b="1" dirty="0">
+                <a:solidFill>
+                  <a:schemeClr val="bg1"/>
+                </a:solidFill>
+              </a:rPr>
+              <a:t>3</a:t>
+            </a:r>
+            <a:endParaRPr lang="en-US" sz="1400" dirty="0"/>
+          </a:p>
+        </p:txBody>
+      </p:sp>
+      <p:sp>
+        <p:nvSpPr>
+          <p:cNvPr id="21" name="Text 207"/>
+          <p:cNvSpPr txBox="1"/>
+          <p:nvPr/>
+        </p:nvSpPr>
+        <p:spPr>
+          <a:xfrm>
+            <a:off x="7406640" y="4105656"/>
+            <a:ext cx="3977640" cy="685800"/>
+          </a:xfrm>
+          <a:prstGeom prst="rect">
+            <a:avLst/>
+          </a:prstGeom>
+          <a:noFill/>
+          <a:ln/>
+        </p:spPr>
+        <p:txBody>
+          <a:bodyPr wrap="square" lIns="0" tIns="0" rIns="0" bIns="0" rtlCol="0" anchor="ctr"/>
+          <a:lstStyle/>
+          <a:p>
+            <a:pPr indent="0" marL="0">
+              <a:buNone/>
+            </a:pPr>
+            <a:r>
+              <a:rPr lang="en-US" sz="1400" dirty="0">
+                <a:solidFill>
+                  <a:schemeClr val="bg1"/>
+                </a:solidFill>
+              </a:rPr>
+              <a:t>Дообученный мультиязычный трансформер на названиях лотов вместе с табличной моделью</a:t>
+            </a:r>
+            <a:endParaRPr lang="en-US" sz="1400" dirty="0"/>
+          </a:p>
+        </p:txBody>
+      </p:sp>
+      <p:sp>
+        <p:nvSpPr>
+          <p:cNvPr id="22" name="Badge 208"/>
+          <p:cNvSpPr/>
+          <p:nvPr/>
+        </p:nvSpPr>
+        <p:spPr>
+          <a:xfrm>
+            <a:off x="6858000" y="5129784"/>
+            <a:ext cx="384048" cy="384048"/>
+          </a:xfrm>
+          <a:prstGeom prst="ellipse">
+            <a:avLst/>
+          </a:prstGeom>
+          <a:solidFill>
+            <a:schemeClr val="accent1"/>
+          </a:solidFill>
+          <a:ln/>
+        </p:spPr>
+      </p:sp>
+      <p:sp>
+        <p:nvSpPr>
+          <p:cNvPr id="23" name="Text 209"/>
+          <p:cNvSpPr txBox="1"/>
+          <p:nvPr/>
+        </p:nvSpPr>
+        <p:spPr>
+          <a:xfrm>
+            <a:off x="6858000" y="5129784"/>
+            <a:ext cx="384048" cy="384048"/>
+          </a:xfrm>
+          <a:prstGeom prst="rect">
+            <a:avLst/>
+          </a:prstGeom>
+          <a:noFill/>
+          <a:ln/>
+        </p:spPr>
+        <p:txBody>
+          <a:bodyPr wrap="square" lIns="0" tIns="0" rIns="0" bIns="0" rtlCol="0" anchor="ctr"/>
+          <a:lstStyle/>
+          <a:p>
+            <a:pPr algn="ctr" indent="0" marL="0">
+              <a:buNone/>
+            </a:pPr>
+            <a:r>
+              <a:rPr lang="en-US" sz="1400" b="1" dirty="0">
+                <a:solidFill>
+                  <a:schemeClr val="bg1"/>
+                </a:solidFill>
+              </a:rPr>
+              <a:t>4</a:t>
+            </a:r>
+            <a:endParaRPr lang="en-US" sz="1400" dirty="0"/>
+          </a:p>
+        </p:txBody>
+      </p:sp>
+      <p:sp>
+        <p:nvSpPr>
+          <p:cNvPr id="24" name="Text 210"/>
+          <p:cNvSpPr txBox="1"/>
+          <p:nvPr/>
+        </p:nvSpPr>
+        <p:spPr>
+          <a:xfrm>
+            <a:off x="7406640" y="5038344"/>
+            <a:ext cx="3977640" cy="685800"/>
+          </a:xfrm>
+          <a:prstGeom prst="rect">
+            <a:avLst/>
+          </a:prstGeom>
+          <a:noFill/>
+          <a:ln/>
+        </p:spPr>
+        <p:txBody>
+          <a:bodyPr wrap="square" lIns="0" tIns="0" rIns="0" bIns="0" rtlCol="0" anchor="ctr"/>
+          <a:lstStyle/>
+          <a:p>
+            <a:pPr indent="0" marL="0">
+              <a:buNone/>
+            </a:pPr>
+            <a:r>
+              <a:rPr lang="en-US" sz="1400" dirty="0">
+                <a:solidFill>
+                  <a:schemeClr val="bg1"/>
+                </a:solidFill>
+              </a:rPr>
+              <a:t>Оценка по сегментам: способы, кроме запроса цен, и дешёвые закупки</a:t>
+            </a:r>
+            <a:endParaRPr lang="en-US" sz="1400" dirty="0"/>
+          </a:p>
+        </p:txBody>
+      </p:sp>
+      <p:sp>
+        <p:nvSpPr>
+          <p:cNvPr id="25" name="Slide Number Placeholder 0"/>
+          <p:cNvSpPr>
+            <a:spLocks noGrp="1"/>
+          </p:cNvSpPr>
+          <p:nvPr>
+            <p:ph type="sldNum" sz="quarter" idx="4294967295"/>
+          </p:nvPr>
+        </p:nvSpPr>
+        <p:spPr>
+          <a:xfrm>
+            <a:off x="11064240" y="6419088"/>
+            <a:ext cx="576072" cy="274320"/>
+          </a:xfrm>
+          <a:prstGeom prst="rect">
+            <a:avLst/>
+          </a:prstGeom>
+          <a:extLst>
+            <a:ext uri="{C572A759-6A51-4108-AA02-DFA0A04FC94B}">
+              <ma14:wrappingTextBoxFlag xmlns:ma14="http://schemas.microsoft.com/office/mac/drawingml/2011/main" val="0"/>
+            </a:ext>
+          </a:extLst>
+        </p:spPr>
+        <p:txBody>
+          <a:bodyPr/>
+          <a:lstStyle>
+            <a:lvl1pPr>
+              <a:defRPr sz="1000">
+                <a:solidFill>
+                  <a:schemeClr val="bg2"/>
+                </a:solidFill>
+              </a:defRPr>
+            </a:lvl1pPr>
+          </a:lstStyle>
+          <a:p>
+            <a:pPr algn="r"/>
+            <a:fld id="{F7021451-1387-4CA6-816F-3879F97B5CBC}" type="slidenum">
+              <a:rPr b="0" lang="en-US"/>
+              <a:t>10</a:t>
+            </a:fld>
+            <a:endParaRPr lang="en-US"/>
+          </a:p>
+        </p:txBody>
+      </p:sp>
+    </p:spTree>
+  </p:cSld>
+  <p:clrMapOvr>
+    <a:masterClrMapping/>
+  </p:clrMapOvr>
+</p:sld>
+</file>
+
 <file path=ppt/slides/slide2.xml><?xml version="1.0" encoding="utf-8"?>
 <p:sld xmlns:a="http://schemas.openxmlformats.org/drawingml/2006/main" xmlns:r="http://schemas.openxmlformats.org/officeDocument/2006/relationships" xmlns:p="http://schemas.openxmlformats.org/presentationml/2006/main">
   <p:cSld name="Slide 2">
@@ -5780,7 +6692,7 @@
                   <a:schemeClr val="tx1"/>
                 </a:solidFill>
               </a:rPr>
-              <a:t>Baseline: логистическая регрессия</a:t>
+              <a:t>Какие признаки использовали</a:t>
             </a:r>
             <a:endParaRPr lang="en-US" sz="3200" dirty="0"/>
           </a:p>
@@ -5788,18 +6700,54 @@
       </p:sp>
       <p:sp>
         <p:nvSpPr>
-          <p:cNvPr id="3" name="Card 99"/>
+          <p:cNvPr id="3" name="Text 99"/>
+          <p:cNvSpPr txBox="1"/>
+          <p:nvPr/>
+        </p:nvSpPr>
+        <p:spPr>
+          <a:xfrm>
+            <a:off x="548640" y="1371600"/>
+            <a:ext cx="11064240" cy="320040"/>
+          </a:xfrm>
+          <a:prstGeom prst="rect">
+            <a:avLst/>
+          </a:prstGeom>
+          <a:noFill/>
+          <a:ln/>
+        </p:spPr>
+        <p:txBody>
+          <a:bodyPr wrap="square" lIns="0" tIns="0" rIns="0" bIns="0" rtlCol="0" anchor="t"/>
+          <a:lstStyle/>
+          <a:p>
+            <a:pPr indent="0" marL="0">
+              <a:buNone/>
+            </a:pPr>
+            <a:r>
+              <a:rPr lang="en-US" sz="1400" dirty="0">
+                <a:solidFill>
+                  <a:schemeClr val="tx2"/>
+                </a:solidFill>
+              </a:rPr>
+              <a:t>20 признаков: 9 числовых, 8 флагов «да / нет» и 3 категории. Все известны в момент выбора победителя.</a:t>
+            </a:r>
+            <a:endParaRPr lang="en-US" sz="1400" dirty="0"/>
+          </a:p>
+        </p:txBody>
+      </p:sp>
+      <p:sp>
+        <p:nvSpPr>
+          <p:cNvPr id="4" name="Card 100"/>
           <p:cNvSpPr/>
           <p:nvPr/>
         </p:nvSpPr>
         <p:spPr>
           <a:xfrm>
-            <a:off x="548640" y="1463040"/>
-            <a:ext cx="5486400" cy="1042416"/>
+            <a:off x="548640" y="1874520"/>
+            <a:ext cx="3611880" cy="2880360"/>
           </a:xfrm>
           <a:prstGeom prst="roundRect">
             <a:avLst>
-              <a:gd name="adj" fmla="val 7018"/>
+              <a:gd name="adj" fmla="val 2540"/>
             </a:avLst>
           </a:prstGeom>
           <a:solidFill>
@@ -5810,111 +6758,17 @@
       </p:sp>
       <p:sp>
         <p:nvSpPr>
-          <p:cNvPr id="4" name="Text 100"/>
-          <p:cNvSpPr txBox="1"/>
-          <p:nvPr/>
-        </p:nvSpPr>
-        <p:spPr>
-          <a:xfrm>
-            <a:off x="777240" y="1572768"/>
-            <a:ext cx="5029200" cy="320040"/>
-          </a:xfrm>
-          <a:prstGeom prst="rect">
-            <a:avLst/>
-          </a:prstGeom>
-          <a:noFill/>
-          <a:ln/>
-        </p:spPr>
-        <p:txBody>
-          <a:bodyPr wrap="square" lIns="0" tIns="0" rIns="0" bIns="0" rtlCol="0" anchor="t"/>
-          <a:lstStyle/>
-          <a:p>
-            <a:pPr indent="0" marL="0">
-              <a:buNone/>
-            </a:pPr>
-            <a:r>
-              <a:rPr lang="en-US" sz="1600" b="1" dirty="0">
-                <a:solidFill>
-                  <a:schemeClr val="tx1"/>
-                </a:solidFill>
-              </a:rPr>
-              <a:t>Предобработка</a:t>
-            </a:r>
-            <a:endParaRPr lang="en-US" sz="1600" dirty="0"/>
-          </a:p>
-        </p:txBody>
-      </p:sp>
-      <p:sp>
-        <p:nvSpPr>
-          <p:cNvPr id="5" name="Text 101"/>
-          <p:cNvSpPr txBox="1"/>
-          <p:nvPr/>
-        </p:nvSpPr>
-        <p:spPr>
-          <a:xfrm>
-            <a:off x="777240" y="1920240"/>
-            <a:ext cx="5029200" cy="512064"/>
-          </a:xfrm>
-          <a:prstGeom prst="rect">
-            <a:avLst/>
-          </a:prstGeom>
-          <a:noFill/>
-          <a:ln/>
-        </p:spPr>
-        <p:txBody>
-          <a:bodyPr wrap="square" lIns="0" tIns="0" rIns="0" bIns="0" rtlCol="0" anchor="t"/>
-          <a:lstStyle/>
-          <a:p>
-            <a:pPr indent="0" marL="0">
-              <a:buNone/>
-            </a:pPr>
-            <a:r>
-              <a:rPr lang="en-US" sz="1400" dirty="0">
-                <a:solidFill>
-                  <a:schemeClr val="tx2"/>
-                </a:solidFill>
-              </a:rPr>
-              <a:t>Медиана вместо пропусков + флаги пропуска, масштабирование, one-hot; обучается только на train</a:t>
-            </a:r>
-            <a:endParaRPr lang="en-US" sz="1400" dirty="0"/>
-          </a:p>
-        </p:txBody>
-      </p:sp>
-      <p:sp>
-        <p:nvSpPr>
-          <p:cNvPr id="6" name="Arrow 102"/>
+          <p:cNvPr id="5" name="Badge 101"/>
           <p:cNvSpPr/>
           <p:nvPr/>
         </p:nvSpPr>
         <p:spPr>
           <a:xfrm>
-            <a:off x="3154680" y="2532888"/>
-            <a:ext cx="274320" cy="201168"/>
-          </a:xfrm>
-          <a:prstGeom prst="downArrow">
-            <a:avLst/>
-          </a:prstGeom>
-          <a:solidFill>
-            <a:schemeClr val="accent5"/>
-          </a:solidFill>
-          <a:ln/>
-        </p:spPr>
-      </p:sp>
-      <p:sp>
-        <p:nvSpPr>
-          <p:cNvPr id="7" name="Card 103"/>
-          <p:cNvSpPr/>
-          <p:nvPr/>
-        </p:nvSpPr>
-        <p:spPr>
-          <a:xfrm>
-            <a:off x="548640" y="2761488"/>
-            <a:ext cx="5486400" cy="1042416"/>
-          </a:xfrm>
-          <a:prstGeom prst="roundRect">
-            <a:avLst>
-              <a:gd name="adj" fmla="val 7018"/>
-            </a:avLst>
+            <a:off x="731520" y="2011680"/>
+            <a:ext cx="384048" cy="384048"/>
+          </a:xfrm>
+          <a:prstGeom prst="ellipse">
+            <a:avLst/>
           </a:prstGeom>
           <a:solidFill>
             <a:schemeClr val="accent2"/>
@@ -5924,14 +6778,86 @@
       </p:sp>
       <p:sp>
         <p:nvSpPr>
+          <p:cNvPr id="6" name="Text 102"/>
+          <p:cNvSpPr txBox="1"/>
+          <p:nvPr/>
+        </p:nvSpPr>
+        <p:spPr>
+          <a:xfrm>
+            <a:off x="731520" y="2011680"/>
+            <a:ext cx="384048" cy="384048"/>
+          </a:xfrm>
+          <a:prstGeom prst="rect">
+            <a:avLst/>
+          </a:prstGeom>
+          <a:noFill/>
+          <a:ln/>
+        </p:spPr>
+        <p:txBody>
+          <a:bodyPr wrap="square" lIns="0" tIns="0" rIns="0" bIns="0" rtlCol="0" anchor="ctr"/>
+          <a:lstStyle/>
+          <a:p>
+            <a:pPr algn="ctr" indent="0" marL="0">
+              <a:buNone/>
+            </a:pPr>
+            <a:r>
+              <a:rPr lang="en-US" sz="1400" b="1" dirty="0">
+                <a:solidFill>
+                  <a:schemeClr val="bg1"/>
+                </a:solidFill>
+              </a:rPr>
+              <a:t>7</a:t>
+            </a:r>
+            <a:endParaRPr lang="en-US" sz="1400" dirty="0"/>
+          </a:p>
+        </p:txBody>
+      </p:sp>
+      <p:sp>
+        <p:nvSpPr>
+          <p:cNvPr id="7" name="Text 103"/>
+          <p:cNvSpPr txBox="1"/>
+          <p:nvPr/>
+        </p:nvSpPr>
+        <p:spPr>
+          <a:xfrm>
+            <a:off x="1234440" y="2011680"/>
+            <a:ext cx="2788920" cy="384048"/>
+          </a:xfrm>
+          <a:prstGeom prst="rect">
+            <a:avLst/>
+          </a:prstGeom>
+          <a:noFill/>
+          <a:ln/>
+        </p:spPr>
+        <p:txBody>
+          <a:bodyPr wrap="square" lIns="0" tIns="0" rIns="0" bIns="0" rtlCol="0" anchor="ctr"/>
+          <a:lstStyle/>
+          <a:p>
+            <a:pPr indent="0" marL="0">
+              <a:buNone/>
+            </a:pPr>
+            <a:r>
+              <a:rPr lang="en-US" sz="1600" b="1" dirty="0">
+                <a:solidFill>
+                  <a:schemeClr val="tx1"/>
+                </a:solidFill>
+              </a:rPr>
+              <a:t>Закупка и сроки</a:t>
+            </a:r>
+            <a:endParaRPr lang="en-US" sz="1600" dirty="0"/>
+          </a:p>
+        </p:txBody>
+      </p:sp>
+      <p:sp>
+        <p:nvSpPr>
           <p:cNvPr id="8" name="Text 104"/>
           <p:cNvSpPr txBox="1"/>
           <p:nvPr/>
         </p:nvSpPr>
         <p:spPr>
           <a:xfrm>
-            <a:off x="777240" y="2871216"/>
-            <a:ext cx="5029200" cy="320040"/>
+            <a:off x="731520" y="2514600"/>
+            <a:ext cx="3246120" cy="2148840"/>
           </a:xfrm>
           <a:prstGeom prst="rect">
             <a:avLst/>
@@ -5943,91 +6869,147 @@
           <a:bodyPr wrap="square" lIns="0" tIns="0" rIns="0" bIns="0" rtlCol="0" anchor="t"/>
           <a:lstStyle/>
           <a:p>
-            <a:pPr indent="0" marL="0">
-              <a:buNone/>
-            </a:pPr>
-            <a:r>
-              <a:rPr lang="en-US" sz="1600" b="1" dirty="0">
-                <a:solidFill>
-                  <a:schemeClr val="bg1"/>
-                </a:solidFill>
-              </a:rPr>
-              <a:t>Логистическая регрессия</a:t>
-            </a:r>
-            <a:endParaRPr lang="en-US" sz="1600" dirty="0"/>
-          </a:p>
-        </p:txBody>
-      </p:sp>
-      <p:sp>
-        <p:nvSpPr>
-          <p:cNvPr id="9" name="Text 105"/>
-          <p:cNvSpPr txBox="1"/>
-          <p:nvPr/>
-        </p:nvSpPr>
-        <p:spPr>
-          <a:xfrm>
-            <a:off x="777240" y="3218688"/>
-            <a:ext cx="5029200" cy="512064"/>
-          </a:xfrm>
-          <a:prstGeom prst="rect">
-            <a:avLst/>
-          </a:prstGeom>
-          <a:noFill/>
-          <a:ln/>
-        </p:spPr>
-        <p:txBody>
-          <a:bodyPr wrap="square" lIns="0" tIns="0" rIns="0" bIns="0" rtlCol="0" anchor="t"/>
-          <a:lstStyle/>
-          <a:p>
-            <a:pPr indent="0" marL="0">
-              <a:buNone/>
+            <a:pPr marL="342900" indent="-342900">
+              <a:spcAft>
+                <a:spcPts val="200"/>
+              </a:spcAft>
+              <a:buSzPct val="100000"/>
+              <a:buChar char="•"/>
             </a:pPr>
             <a:r>
               <a:rPr lang="en-US" sz="1400" dirty="0">
                 <a:solidFill>
-                  <a:schemeClr val="bg1"/>
-                </a:solidFill>
-              </a:rPr>
-              <a:t>L2-штраф, C = 1, class_weight = balanced, solver lbfgs</a:t>
+                  <a:schemeClr val="tx2"/>
+                </a:solidFill>
+              </a:rPr>
+              <a:t>сумма закупки (в логарифме)</a:t>
             </a:r>
             <a:endParaRPr lang="en-US" sz="1400" dirty="0"/>
           </a:p>
-        </p:txBody>
-      </p:sp>
-      <p:sp>
-        <p:nvSpPr>
-          <p:cNvPr id="10" name="Arrow 106"/>
+          <a:p>
+            <a:pPr marL="342900" indent="-342900">
+              <a:spcAft>
+                <a:spcPts val="200"/>
+              </a:spcAft>
+              <a:buSzPct val="100000"/>
+              <a:buChar char="•"/>
+            </a:pPr>
+            <a:r>
+              <a:rPr lang="en-US" sz="1400" dirty="0">
+                <a:solidFill>
+                  <a:schemeClr val="tx2"/>
+                </a:solidFill>
+              </a:rPr>
+              <a:t>число лотов</a:t>
+            </a:r>
+            <a:endParaRPr lang="en-US" sz="1400" dirty="0"/>
+          </a:p>
+          <a:p>
+            <a:pPr marL="342900" indent="-342900">
+              <a:spcAft>
+                <a:spcPts val="200"/>
+              </a:spcAft>
+              <a:buSzPct val="100000"/>
+              <a:buChar char="•"/>
+            </a:pPr>
+            <a:r>
+              <a:rPr lang="en-US" sz="1400" dirty="0">
+                <a:solidFill>
+                  <a:schemeClr val="tx2"/>
+                </a:solidFill>
+              </a:rPr>
+              <a:t>способ закупки</a:t>
+            </a:r>
+            <a:endParaRPr lang="en-US" sz="1400" dirty="0"/>
+          </a:p>
+          <a:p>
+            <a:pPr marL="342900" indent="-342900">
+              <a:spcAft>
+                <a:spcPts val="200"/>
+              </a:spcAft>
+              <a:buSzPct val="100000"/>
+              <a:buChar char="•"/>
+            </a:pPr>
+            <a:r>
+              <a:rPr lang="en-US" sz="1400" dirty="0">
+                <a:solidFill>
+                  <a:schemeClr val="tx2"/>
+                </a:solidFill>
+              </a:rPr>
+              <a:t>предмет: товар, работа, услуга</a:t>
+            </a:r>
+            <a:endParaRPr lang="en-US" sz="1400" dirty="0"/>
+          </a:p>
+          <a:p>
+            <a:pPr marL="342900" indent="-342900">
+              <a:spcAft>
+                <a:spcPts val="200"/>
+              </a:spcAft>
+              <a:buSzPct val="100000"/>
+              <a:buChar char="•"/>
+            </a:pPr>
+            <a:r>
+              <a:rPr lang="en-US" sz="1400" dirty="0">
+                <a:solidFill>
+                  <a:schemeClr val="tx2"/>
+                </a:solidFill>
+              </a:rPr>
+              <a:t>регион</a:t>
+            </a:r>
+            <a:endParaRPr lang="en-US" sz="1400" dirty="0"/>
+          </a:p>
+          <a:p>
+            <a:pPr marL="342900" indent="-342900">
+              <a:spcAft>
+                <a:spcPts val="200"/>
+              </a:spcAft>
+              <a:buSzPct val="100000"/>
+              <a:buChar char="•"/>
+            </a:pPr>
+            <a:r>
+              <a:rPr lang="en-US" sz="1400" dirty="0">
+                <a:solidFill>
+                  <a:schemeClr val="tx2"/>
+                </a:solidFill>
+              </a:rPr>
+              <a:t>окно подачи заявок, дней</a:t>
+            </a:r>
+            <a:endParaRPr lang="en-US" sz="1400" dirty="0"/>
+          </a:p>
+          <a:p>
+            <a:pPr marL="342900" indent="-342900">
+              <a:spcAft>
+                <a:spcPts val="200"/>
+              </a:spcAft>
+              <a:buSzPct val="100000"/>
+              <a:buChar char="•"/>
+            </a:pPr>
+            <a:r>
+              <a:rPr lang="en-US" sz="1400" dirty="0">
+                <a:solidFill>
+                  <a:schemeClr val="tx2"/>
+                </a:solidFill>
+              </a:rPr>
+              <a:t>дней от публикации до начала приёма заявок</a:t>
+            </a:r>
+            <a:endParaRPr lang="en-US" sz="1400" dirty="0"/>
+          </a:p>
+        </p:txBody>
+      </p:sp>
+      <p:sp>
+        <p:nvSpPr>
+          <p:cNvPr id="9" name="Card 105"/>
           <p:cNvSpPr/>
           <p:nvPr/>
         </p:nvSpPr>
         <p:spPr>
           <a:xfrm>
-            <a:off x="3154680" y="3831336"/>
-            <a:ext cx="274320" cy="201168"/>
-          </a:xfrm>
-          <a:prstGeom prst="downArrow">
-            <a:avLst/>
-          </a:prstGeom>
-          <a:solidFill>
-            <a:schemeClr val="accent5"/>
-          </a:solidFill>
-          <a:ln/>
-        </p:spPr>
-      </p:sp>
-      <p:sp>
-        <p:nvSpPr>
-          <p:cNvPr id="11" name="Card 107"/>
-          <p:cNvSpPr/>
-          <p:nvPr/>
-        </p:nvSpPr>
-        <p:spPr>
-          <a:xfrm>
-            <a:off x="548640" y="4059936"/>
-            <a:ext cx="5486400" cy="1042416"/>
+            <a:off x="4297680" y="1874520"/>
+            <a:ext cx="3611880" cy="2880360"/>
           </a:xfrm>
           <a:prstGeom prst="roundRect">
             <a:avLst>
-              <a:gd name="adj" fmla="val 7018"/>
+              <a:gd name="adj" fmla="val 2540"/>
             </a:avLst>
           </a:prstGeom>
           <a:solidFill>
@@ -6038,14 +7020,106 @@
       </p:sp>
       <p:sp>
         <p:nvSpPr>
+          <p:cNvPr id="10" name="Badge 106"/>
+          <p:cNvSpPr/>
+          <p:nvPr/>
+        </p:nvSpPr>
+        <p:spPr>
+          <a:xfrm>
+            <a:off x="4480560" y="2011680"/>
+            <a:ext cx="384048" cy="384048"/>
+          </a:xfrm>
+          <a:prstGeom prst="ellipse">
+            <a:avLst/>
+          </a:prstGeom>
+          <a:solidFill>
+            <a:schemeClr val="accent2"/>
+          </a:solidFill>
+          <a:ln/>
+        </p:spPr>
+      </p:sp>
+      <p:sp>
+        <p:nvSpPr>
+          <p:cNvPr id="11" name="Text 107"/>
+          <p:cNvSpPr txBox="1"/>
+          <p:nvPr/>
+        </p:nvSpPr>
+        <p:spPr>
+          <a:xfrm>
+            <a:off x="4480560" y="2011680"/>
+            <a:ext cx="384048" cy="384048"/>
+          </a:xfrm>
+          <a:prstGeom prst="rect">
+            <a:avLst/>
+          </a:prstGeom>
+          <a:noFill/>
+          <a:ln/>
+        </p:spPr>
+        <p:txBody>
+          <a:bodyPr wrap="square" lIns="0" tIns="0" rIns="0" bIns="0" rtlCol="0" anchor="ctr"/>
+          <a:lstStyle/>
+          <a:p>
+            <a:pPr algn="ctr" indent="0" marL="0">
+              <a:buNone/>
+            </a:pPr>
+            <a:r>
+              <a:rPr lang="en-US" sz="1400" b="1" dirty="0">
+                <a:solidFill>
+                  <a:schemeClr val="bg1"/>
+                </a:solidFill>
+              </a:rPr>
+              <a:t>5</a:t>
+            </a:r>
+            <a:endParaRPr lang="en-US" sz="1400" dirty="0"/>
+          </a:p>
+        </p:txBody>
+      </p:sp>
+      <p:sp>
+        <p:nvSpPr>
           <p:cNvPr id="12" name="Text 108"/>
           <p:cNvSpPr txBox="1"/>
           <p:nvPr/>
         </p:nvSpPr>
         <p:spPr>
           <a:xfrm>
-            <a:off x="777240" y="4169664"/>
-            <a:ext cx="5029200" cy="320040"/>
+            <a:off x="4983480" y="2011680"/>
+            <a:ext cx="2788920" cy="384048"/>
+          </a:xfrm>
+          <a:prstGeom prst="rect">
+            <a:avLst/>
+          </a:prstGeom>
+          <a:noFill/>
+          <a:ln/>
+        </p:spPr>
+        <p:txBody>
+          <a:bodyPr wrap="square" lIns="0" tIns="0" rIns="0" bIns="0" rtlCol="0" anchor="ctr"/>
+          <a:lstStyle/>
+          <a:p>
+            <a:pPr indent="0" marL="0">
+              <a:buNone/>
+            </a:pPr>
+            <a:r>
+              <a:rPr lang="en-US" sz="1600" b="1" dirty="0">
+                <a:solidFill>
+                  <a:schemeClr val="tx1"/>
+                </a:solidFill>
+              </a:rPr>
+              <a:t>Конкуренция</a:t>
+            </a:r>
+            <a:endParaRPr lang="en-US" sz="1600" dirty="0"/>
+          </a:p>
+        </p:txBody>
+      </p:sp>
+      <p:sp>
+        <p:nvSpPr>
+          <p:cNvPr id="13" name="Text 109"/>
+          <p:cNvSpPr txBox="1"/>
+          <p:nvPr/>
+        </p:nvSpPr>
+        <p:spPr>
+          <a:xfrm>
+            <a:off x="4480560" y="2514600"/>
+            <a:ext cx="3246120" cy="2148840"/>
           </a:xfrm>
           <a:prstGeom prst="rect">
             <a:avLst/>
@@ -6057,6 +7131,196 @@
           <a:bodyPr wrap="square" lIns="0" tIns="0" rIns="0" bIns="0" rtlCol="0" anchor="t"/>
           <a:lstStyle/>
           <a:p>
+            <a:pPr marL="342900" indent="-342900">
+              <a:spcAft>
+                <a:spcPts val="200"/>
+              </a:spcAft>
+              <a:buSzPct val="100000"/>
+              <a:buChar char="•"/>
+            </a:pPr>
+            <a:r>
+              <a:rPr lang="en-US" sz="1400" dirty="0">
+                <a:solidFill>
+                  <a:schemeClr val="tx2"/>
+                </a:solidFill>
+              </a:rPr>
+              <a:t>число участников</a:t>
+            </a:r>
+            <a:endParaRPr lang="en-US" sz="1400" dirty="0"/>
+          </a:p>
+          <a:p>
+            <a:pPr marL="342900" indent="-342900">
+              <a:spcAft>
+                <a:spcPts val="200"/>
+              </a:spcAft>
+              <a:buSzPct val="100000"/>
+              <a:buChar char="•"/>
+            </a:pPr>
+            <a:r>
+              <a:rPr lang="en-US" sz="1400" dirty="0">
+                <a:solidFill>
+                  <a:schemeClr val="tx2"/>
+                </a:solidFill>
+              </a:rPr>
+              <a:t>заявок на один лот</a:t>
+            </a:r>
+            <a:endParaRPr lang="en-US" sz="1400" dirty="0"/>
+          </a:p>
+          <a:p>
+            <a:pPr marL="342900" indent="-342900">
+              <a:spcAft>
+                <a:spcPts val="200"/>
+              </a:spcAft>
+              <a:buSzPct val="100000"/>
+              <a:buChar char="•"/>
+            </a:pPr>
+            <a:r>
+              <a:rPr lang="en-US" sz="1400" dirty="0">
+                <a:solidFill>
+                  <a:schemeClr val="tx2"/>
+                </a:solidFill>
+              </a:rPr>
+              <a:t>лучшая цена к плановой (скидка)</a:t>
+            </a:r>
+            <a:endParaRPr lang="en-US" sz="1400" dirty="0"/>
+          </a:p>
+          <a:p>
+            <a:pPr marL="342900" indent="-342900">
+              <a:spcAft>
+                <a:spcPts val="200"/>
+              </a:spcAft>
+              <a:buSzPct val="100000"/>
+              <a:buChar char="•"/>
+            </a:pPr>
+            <a:r>
+              <a:rPr lang="en-US" sz="1400" dirty="0">
+                <a:solidFill>
+                  <a:schemeClr val="tx2"/>
+                </a:solidFill>
+              </a:rPr>
+              <a:t>разброс цен в заявках</a:t>
+            </a:r>
+            <a:endParaRPr lang="en-US" sz="1400" dirty="0"/>
+          </a:p>
+          <a:p>
+            <a:pPr marL="342900" indent="-342900">
+              <a:spcAft>
+                <a:spcPts val="200"/>
+              </a:spcAft>
+              <a:buSzPct val="100000"/>
+              <a:buChar char="•"/>
+            </a:pPr>
+            <a:r>
+              <a:rPr lang="en-US" sz="1400" dirty="0">
+                <a:solidFill>
+                  <a:schemeClr val="tx2"/>
+                </a:solidFill>
+              </a:rPr>
+              <a:t>флаг: предложений не записано</a:t>
+            </a:r>
+            <a:endParaRPr lang="en-US" sz="1400" dirty="0"/>
+          </a:p>
+        </p:txBody>
+      </p:sp>
+      <p:sp>
+        <p:nvSpPr>
+          <p:cNvPr id="14" name="Card 110"/>
+          <p:cNvSpPr/>
+          <p:nvPr/>
+        </p:nvSpPr>
+        <p:spPr>
+          <a:xfrm>
+            <a:off x="8046720" y="1874520"/>
+            <a:ext cx="3611880" cy="2880360"/>
+          </a:xfrm>
+          <a:prstGeom prst="roundRect">
+            <a:avLst>
+              <a:gd name="adj" fmla="val 2540"/>
+            </a:avLst>
+          </a:prstGeom>
+          <a:solidFill>
+            <a:schemeClr val="bg2"/>
+          </a:solidFill>
+          <a:ln/>
+        </p:spPr>
+      </p:sp>
+      <p:sp>
+        <p:nvSpPr>
+          <p:cNvPr id="15" name="Badge 111"/>
+          <p:cNvSpPr/>
+          <p:nvPr/>
+        </p:nvSpPr>
+        <p:spPr>
+          <a:xfrm>
+            <a:off x="8229600" y="2011680"/>
+            <a:ext cx="384048" cy="384048"/>
+          </a:xfrm>
+          <a:prstGeom prst="ellipse">
+            <a:avLst/>
+          </a:prstGeom>
+          <a:solidFill>
+            <a:schemeClr val="accent2"/>
+          </a:solidFill>
+          <a:ln/>
+        </p:spPr>
+      </p:sp>
+      <p:sp>
+        <p:nvSpPr>
+          <p:cNvPr id="16" name="Text 112"/>
+          <p:cNvSpPr txBox="1"/>
+          <p:nvPr/>
+        </p:nvSpPr>
+        <p:spPr>
+          <a:xfrm>
+            <a:off x="8229600" y="2011680"/>
+            <a:ext cx="384048" cy="384048"/>
+          </a:xfrm>
+          <a:prstGeom prst="rect">
+            <a:avLst/>
+          </a:prstGeom>
+          <a:noFill/>
+          <a:ln/>
+        </p:spPr>
+        <p:txBody>
+          <a:bodyPr wrap="square" lIns="0" tIns="0" rIns="0" bIns="0" rtlCol="0" anchor="ctr"/>
+          <a:lstStyle/>
+          <a:p>
+            <a:pPr algn="ctr" indent="0" marL="0">
+              <a:buNone/>
+            </a:pPr>
+            <a:r>
+              <a:rPr lang="en-US" sz="1400" b="1" dirty="0">
+                <a:solidFill>
+                  <a:schemeClr val="bg1"/>
+                </a:solidFill>
+              </a:rPr>
+              <a:t>8</a:t>
+            </a:r>
+            <a:endParaRPr lang="en-US" sz="1400" dirty="0"/>
+          </a:p>
+        </p:txBody>
+      </p:sp>
+      <p:sp>
+        <p:nvSpPr>
+          <p:cNvPr id="17" name="Text 113"/>
+          <p:cNvSpPr txBox="1"/>
+          <p:nvPr/>
+        </p:nvSpPr>
+        <p:spPr>
+          <a:xfrm>
+            <a:off x="8732520" y="2011680"/>
+            <a:ext cx="2788920" cy="384048"/>
+          </a:xfrm>
+          <a:prstGeom prst="rect">
+            <a:avLst/>
+          </a:prstGeom>
+          <a:noFill/>
+          <a:ln/>
+        </p:spPr>
+        <p:txBody>
+          <a:bodyPr wrap="square" lIns="0" tIns="0" rIns="0" bIns="0" rtlCol="0" anchor="ctr"/>
+          <a:lstStyle/>
+          <a:p>
             <a:pPr indent="0" marL="0">
               <a:buNone/>
             </a:pPr>
@@ -6066,7 +7330,7 @@
                   <a:schemeClr val="tx1"/>
                 </a:solidFill>
               </a:rPr>
-              <a:t>Оценка риска 0–1</a:t>
+              <a:t>Организатор и условия</a:t>
             </a:r>
             <a:endParaRPr lang="en-US" sz="1600" dirty="0"/>
           </a:p>
@@ -6074,14 +7338,14 @@
       </p:sp>
       <p:sp>
         <p:nvSpPr>
-          <p:cNvPr id="13" name="Text 109"/>
-          <p:cNvSpPr txBox="1"/>
-          <p:nvPr/>
-        </p:nvSpPr>
-        <p:spPr>
-          <a:xfrm>
-            <a:off x="777240" y="4517136"/>
-            <a:ext cx="5029200" cy="512064"/>
+          <p:cNvPr id="18" name="Text 114"/>
+          <p:cNvSpPr txBox="1"/>
+          <p:nvPr/>
+        </p:nvSpPr>
+        <p:spPr>
+          <a:xfrm>
+            <a:off x="8229600" y="2514600"/>
+            <a:ext cx="3246120" cy="2148840"/>
           </a:xfrm>
           <a:prstGeom prst="rect">
             <a:avLst/>
@@ -6093,8 +7357,12 @@
           <a:bodyPr wrap="square" lIns="0" tIns="0" rIns="0" bIns="0" rtlCol="0" anchor="t"/>
           <a:lstStyle/>
           <a:p>
-            <a:pPr indent="0" marL="0">
-              <a:buNone/>
+            <a:pPr marL="342900" indent="-342900">
+              <a:spcAft>
+                <a:spcPts val="200"/>
+              </a:spcAft>
+              <a:buSzPct val="100000"/>
+              <a:buChar char="•"/>
             </a:pPr>
             <a:r>
               <a:rPr lang="en-US" sz="1400" dirty="0">
@@ -6102,22 +7370,170 @@
                   <a:schemeClr val="tx2"/>
                 </a:solidFill>
               </a:rPr>
-              <a:t>Ранжирует закупки; порог решения подобран на validation</a:t>
+              <a:t>опыт организатора: число прошлых закупок</a:t>
             </a:r>
             <a:endParaRPr lang="en-US" sz="1400" dirty="0"/>
           </a:p>
-        </p:txBody>
-      </p:sp>
-      <p:sp>
-        <p:nvSpPr>
-          <p:cNvPr id="14" name="Text 110"/>
-          <p:cNvSpPr txBox="1"/>
-          <p:nvPr/>
-        </p:nvSpPr>
-        <p:spPr>
-          <a:xfrm>
-            <a:off x="548640" y="5349240"/>
-            <a:ext cx="5486400" cy="731520"/>
+          <a:p>
+            <a:pPr marL="342900" indent="-342900">
+              <a:spcAft>
+                <a:spcPts val="200"/>
+              </a:spcAft>
+              <a:buSzPct val="100000"/>
+              <a:buChar char="•"/>
+            </a:pPr>
+            <a:r>
+              <a:rPr lang="en-US" sz="1400" dirty="0">
+                <a:solidFill>
+                  <a:schemeClr val="tx2"/>
+                </a:solidFill>
+              </a:rPr>
+              <a:t>единый организатор</a:t>
+            </a:r>
+            <a:endParaRPr lang="en-US" sz="1400" dirty="0"/>
+          </a:p>
+          <a:p>
+            <a:pPr marL="342900" indent="-342900">
+              <a:spcAft>
+                <a:spcPts val="200"/>
+              </a:spcAft>
+              <a:buSzPct val="100000"/>
+              <a:buChar char="•"/>
+            </a:pPr>
+            <a:r>
+              <a:rPr lang="en-US" sz="1400" dirty="0">
+                <a:solidFill>
+                  <a:schemeClr val="tx2"/>
+                </a:solidFill>
+              </a:rPr>
+              <a:t>строительные работы</a:t>
+            </a:r>
+            <a:endParaRPr lang="en-US" sz="1400" dirty="0"/>
+          </a:p>
+          <a:p>
+            <a:pPr marL="342900" indent="-342900">
+              <a:spcAft>
+                <a:spcPts val="200"/>
+              </a:spcAft>
+              <a:buSzPct val="100000"/>
+              <a:buChar char="•"/>
+            </a:pPr>
+            <a:r>
+              <a:rPr lang="en-US" sz="1400" dirty="0">
+                <a:solidFill>
+                  <a:schemeClr val="tx2"/>
+                </a:solidFill>
+              </a:rPr>
+              <a:t>лёгкая промышленность</a:t>
+            </a:r>
+            <a:endParaRPr lang="en-US" sz="1400" dirty="0"/>
+          </a:p>
+          <a:p>
+            <a:pPr marL="342900" indent="-342900">
+              <a:spcAft>
+                <a:spcPts val="200"/>
+              </a:spcAft>
+              <a:buSzPct val="100000"/>
+              <a:buChar char="•"/>
+            </a:pPr>
+            <a:r>
+              <a:rPr lang="en-US" sz="1400" dirty="0">
+                <a:solidFill>
+                  <a:schemeClr val="tx2"/>
+                </a:solidFill>
+              </a:rPr>
+              <a:t>организации инвалидов</a:t>
+            </a:r>
+            <a:endParaRPr lang="en-US" sz="1400" dirty="0"/>
+          </a:p>
+          <a:p>
+            <a:pPr marL="342900" indent="-342900">
+              <a:spcAft>
+                <a:spcPts val="200"/>
+              </a:spcAft>
+              <a:buSzPct val="100000"/>
+              <a:buChar char="•"/>
+            </a:pPr>
+            <a:r>
+              <a:rPr lang="en-US" sz="1400" dirty="0">
+                <a:solidFill>
+                  <a:schemeClr val="tx2"/>
+                </a:solidFill>
+              </a:rPr>
+              <a:t>антидемпинговые меры</a:t>
+            </a:r>
+            <a:endParaRPr lang="en-US" sz="1400" dirty="0"/>
+          </a:p>
+          <a:p>
+            <a:pPr marL="342900" indent="-342900">
+              <a:spcAft>
+                <a:spcPts val="200"/>
+              </a:spcAft>
+              <a:buSzPct val="100000"/>
+              <a:buChar char="•"/>
+            </a:pPr>
+            <a:r>
+              <a:rPr lang="en-US" sz="1400" dirty="0">
+                <a:solidFill>
+                  <a:schemeClr val="tx2"/>
+                </a:solidFill>
+              </a:rPr>
+              <a:t>проектная документация</a:t>
+            </a:r>
+            <a:endParaRPr lang="en-US" sz="1400" dirty="0"/>
+          </a:p>
+          <a:p>
+            <a:pPr marL="342900" indent="-342900">
+              <a:spcAft>
+                <a:spcPts val="200"/>
+              </a:spcAft>
+              <a:buSzPct val="100000"/>
+              <a:buChar char="•"/>
+            </a:pPr>
+            <a:r>
+              <a:rPr lang="en-US" sz="1400" dirty="0">
+                <a:solidFill>
+                  <a:schemeClr val="tx2"/>
+                </a:solidFill>
+              </a:rPr>
+              <a:t>консультационные услуги</a:t>
+            </a:r>
+            <a:endParaRPr lang="en-US" sz="1400" dirty="0"/>
+          </a:p>
+        </p:txBody>
+      </p:sp>
+      <p:sp>
+        <p:nvSpPr>
+          <p:cNvPr id="19" name="Card 115"/>
+          <p:cNvSpPr/>
+          <p:nvPr/>
+        </p:nvSpPr>
+        <p:spPr>
+          <a:xfrm>
+            <a:off x="548640" y="4937760"/>
+            <a:ext cx="5440680" cy="1280160"/>
+          </a:xfrm>
+          <a:prstGeom prst="roundRect">
+            <a:avLst>
+              <a:gd name="adj" fmla="val 5714"/>
+            </a:avLst>
+          </a:prstGeom>
+          <a:solidFill>
+            <a:schemeClr val="accent6"/>
+          </a:solidFill>
+          <a:ln/>
+        </p:spPr>
+      </p:sp>
+      <p:sp>
+        <p:nvSpPr>
+          <p:cNvPr id="20" name="Text 116"/>
+          <p:cNvSpPr txBox="1"/>
+          <p:nvPr/>
+        </p:nvSpPr>
+        <p:spPr>
+          <a:xfrm>
+            <a:off x="777240" y="5047488"/>
+            <a:ext cx="4983480" cy="320040"/>
           </a:xfrm>
           <a:prstGeom prst="rect">
             <a:avLst/>
@@ -6133,23 +7549,48 @@
               <a:buNone/>
             </a:pPr>
             <a:r>
-              <a:rPr lang="en-US" sz="1400" b="1" dirty="0">
-                <a:solidFill>
-                  <a:schemeClr val="tx1"/>
-                </a:solidFill>
-              </a:rPr>
-              <a:t>Обучение: </a:t>
-            </a:r>
+              <a:rPr lang="en-US" sz="1600" b="1" dirty="0">
+                <a:solidFill>
+                  <a:schemeClr val="bg1"/>
+                </a:solidFill>
+              </a:rPr>
+              <a:t>Важнее всего для модели</a:t>
+            </a:r>
+            <a:endParaRPr lang="en-US" sz="1600" dirty="0"/>
+          </a:p>
+        </p:txBody>
+      </p:sp>
+      <p:sp>
+        <p:nvSpPr>
+          <p:cNvPr id="21" name="Text 117"/>
+          <p:cNvSpPr txBox="1"/>
+          <p:nvPr/>
+        </p:nvSpPr>
+        <p:spPr>
+          <a:xfrm>
+            <a:off x="777240" y="5413248"/>
+            <a:ext cx="4983480" cy="731520"/>
+          </a:xfrm>
+          <a:prstGeom prst="rect">
+            <a:avLst/>
+          </a:prstGeom>
+          <a:noFill/>
+          <a:ln/>
+        </p:spPr>
+        <p:txBody>
+          <a:bodyPr wrap="square" lIns="0" tIns="0" rIns="0" bIns="0" rtlCol="0" anchor="t"/>
+          <a:lstStyle/>
+          <a:p>
             <a:pPr indent="0" marL="0">
               <a:buNone/>
             </a:pPr>
             <a:r>
               <a:rPr lang="en-US" sz="1400" dirty="0">
                 <a:solidFill>
-                  <a:schemeClr val="tx1"/>
-                </a:solidFill>
-              </a:rPr>
-              <a:t>266 294 закупки (январь–февраль) · 20 признаков → 52 входа · сошлась за 75 итераций · 1 секунда</a:t>
+                  <a:schemeClr val="bg2"/>
+                </a:solidFill>
+              </a:rPr>
+              <a:t>Сумма закупки, способ закупки и предмет закупки. Без суммы качество падает сильнее всего.</a:t>
             </a:r>
             <a:endParaRPr lang="en-US" sz="1400" dirty="0"/>
           </a:p>
@@ -6157,14 +7598,36 @@
       </p:sp>
       <p:sp>
         <p:nvSpPr>
-          <p:cNvPr id="15" name="Text 111"/>
-          <p:cNvSpPr txBox="1"/>
-          <p:nvPr/>
-        </p:nvSpPr>
-        <p:spPr>
-          <a:xfrm>
-            <a:off x="6492240" y="1417320"/>
-            <a:ext cx="5120640" cy="365760"/>
+          <p:cNvPr id="22" name="Card 118"/>
+          <p:cNvSpPr/>
+          <p:nvPr/>
+        </p:nvSpPr>
+        <p:spPr>
+          <a:xfrm>
+            <a:off x="6172200" y="4937760"/>
+            <a:ext cx="5440680" cy="1280160"/>
+          </a:xfrm>
+          <a:prstGeom prst="roundRect">
+            <a:avLst>
+              <a:gd name="adj" fmla="val 5714"/>
+            </a:avLst>
+          </a:prstGeom>
+          <a:solidFill>
+            <a:schemeClr val="bg2"/>
+          </a:solidFill>
+          <a:ln/>
+        </p:spPr>
+      </p:sp>
+      <p:sp>
+        <p:nvSpPr>
+          <p:cNvPr id="23" name="Text 119"/>
+          <p:cNvSpPr txBox="1"/>
+          <p:nvPr/>
+        </p:nvSpPr>
+        <p:spPr>
+          <a:xfrm>
+            <a:off x="6400800" y="5047488"/>
+            <a:ext cx="4983480" cy="320040"/>
           </a:xfrm>
           <a:prstGeom prst="rect">
             <a:avLst/>
@@ -6180,95 +7643,36 @@
               <a:buNone/>
             </a:pPr>
             <a:r>
-              <a:rPr lang="en-US" sz="2000" b="1" dirty="0">
-                <a:solidFill>
-                  <a:schemeClr val="tx1"/>
-                </a:solidFill>
-                <a:latin typeface="Georgia" pitchFamily="34" charset="0"/>
-                <a:ea typeface="Georgia" pitchFamily="34" charset="-122"/>
-                <a:cs typeface="Georgia" pitchFamily="34" charset="-120"/>
-              </a:rPr>
-              <a:t>Почему эта модель</a:t>
-            </a:r>
-            <a:endParaRPr lang="en-US" sz="2000" dirty="0"/>
-          </a:p>
-        </p:txBody>
-      </p:sp>
-      <p:sp>
-        <p:nvSpPr>
-          <p:cNvPr id="16" name="Badge 112"/>
-          <p:cNvSpPr/>
-          <p:nvPr/>
-        </p:nvSpPr>
-        <p:spPr>
-          <a:xfrm>
-            <a:off x="6492240" y="1965960"/>
-            <a:ext cx="384048" cy="384048"/>
-          </a:xfrm>
-          <a:prstGeom prst="ellipse">
-            <a:avLst/>
-          </a:prstGeom>
-          <a:solidFill>
-            <a:schemeClr val="accent1"/>
-          </a:solidFill>
-          <a:ln/>
-        </p:spPr>
-      </p:sp>
-      <p:sp>
-        <p:nvSpPr>
-          <p:cNvPr id="17" name="Text 113"/>
-          <p:cNvSpPr txBox="1"/>
-          <p:nvPr/>
-        </p:nvSpPr>
-        <p:spPr>
-          <a:xfrm>
-            <a:off x="6492240" y="1965960"/>
-            <a:ext cx="384048" cy="384048"/>
-          </a:xfrm>
-          <a:prstGeom prst="rect">
-            <a:avLst/>
-          </a:prstGeom>
-          <a:noFill/>
-          <a:ln/>
-        </p:spPr>
-        <p:txBody>
-          <a:bodyPr wrap="square" lIns="0" tIns="0" rIns="0" bIns="0" rtlCol="0" anchor="ctr"/>
-          <a:lstStyle/>
-          <a:p>
-            <a:pPr algn="ctr" indent="0" marL="0">
-              <a:buNone/>
-            </a:pPr>
-            <a:r>
-              <a:rPr lang="en-US" sz="1400" b="1" dirty="0">
-                <a:solidFill>
-                  <a:schemeClr val="bg1"/>
-                </a:solidFill>
-              </a:rPr>
-              <a:t>1</a:t>
-            </a:r>
-            <a:endParaRPr lang="en-US" sz="1400" dirty="0"/>
-          </a:p>
-        </p:txBody>
-      </p:sp>
-      <p:sp>
-        <p:nvSpPr>
-          <p:cNvPr id="18" name="Text 114"/>
-          <p:cNvSpPr txBox="1"/>
-          <p:nvPr/>
-        </p:nvSpPr>
-        <p:spPr>
-          <a:xfrm>
-            <a:off x="7040880" y="1938528"/>
-            <a:ext cx="4572000" cy="548640"/>
-          </a:xfrm>
-          <a:prstGeom prst="rect">
-            <a:avLst/>
-          </a:prstGeom>
-          <a:noFill/>
-          <a:ln/>
-        </p:spPr>
-        <p:txBody>
-          <a:bodyPr wrap="square" lIns="0" tIns="0" rIns="0" bIns="0" rtlCol="0" anchor="ctr"/>
+              <a:rPr lang="en-US" sz="1600" b="1" dirty="0">
+                <a:solidFill>
+                  <a:schemeClr val="accent1"/>
+                </a:solidFill>
+              </a:rPr>
+              <a:t>Что не взяли, чтобы не было утечки</a:t>
+            </a:r>
+            <a:endParaRPr lang="en-US" sz="1600" dirty="0"/>
+          </a:p>
+        </p:txBody>
+      </p:sp>
+      <p:sp>
+        <p:nvSpPr>
+          <p:cNvPr id="24" name="Text 120"/>
+          <p:cNvSpPr txBox="1"/>
+          <p:nvPr/>
+        </p:nvSpPr>
+        <p:spPr>
+          <a:xfrm>
+            <a:off x="6400800" y="5413248"/>
+            <a:ext cx="4983480" cy="731520"/>
+          </a:xfrm>
+          <a:prstGeom prst="rect">
+            <a:avLst/>
+          </a:prstGeom>
+          <a:noFill/>
+          <a:ln/>
+        </p:spPr>
+        <p:txBody>
+          <a:bodyPr wrap="square" lIns="0" tIns="0" rIns="0" bIns="0" rtlCol="0" anchor="t"/>
           <a:lstStyle/>
           <a:p>
             <a:pPr indent="0" marL="0">
@@ -6277,358 +7681,10 @@
             <a:r>
               <a:rPr lang="en-US" sz="1400" dirty="0">
                 <a:solidFill>
-                  <a:schemeClr val="tx1"/>
-                </a:solidFill>
-              </a:rPr>
-              <a:t>Выдаёт вероятность, поэтому закупки можно ранжировать для проверки</a:t>
-            </a:r>
-            <a:endParaRPr lang="en-US" sz="1400" dirty="0"/>
-          </a:p>
-        </p:txBody>
-      </p:sp>
-      <p:sp>
-        <p:nvSpPr>
-          <p:cNvPr id="19" name="Badge 115"/>
-          <p:cNvSpPr/>
-          <p:nvPr/>
-        </p:nvSpPr>
-        <p:spPr>
-          <a:xfrm>
-            <a:off x="6492240" y="2679192"/>
-            <a:ext cx="384048" cy="384048"/>
-          </a:xfrm>
-          <a:prstGeom prst="ellipse">
-            <a:avLst/>
-          </a:prstGeom>
-          <a:solidFill>
-            <a:schemeClr val="accent1"/>
-          </a:solidFill>
-          <a:ln/>
-        </p:spPr>
-      </p:sp>
-      <p:sp>
-        <p:nvSpPr>
-          <p:cNvPr id="20" name="Text 116"/>
-          <p:cNvSpPr txBox="1"/>
-          <p:nvPr/>
-        </p:nvSpPr>
-        <p:spPr>
-          <a:xfrm>
-            <a:off x="6492240" y="2679192"/>
-            <a:ext cx="384048" cy="384048"/>
-          </a:xfrm>
-          <a:prstGeom prst="rect">
-            <a:avLst/>
-          </a:prstGeom>
-          <a:noFill/>
-          <a:ln/>
-        </p:spPr>
-        <p:txBody>
-          <a:bodyPr wrap="square" lIns="0" tIns="0" rIns="0" bIns="0" rtlCol="0" anchor="ctr"/>
-          <a:lstStyle/>
-          <a:p>
-            <a:pPr algn="ctr" indent="0" marL="0">
-              <a:buNone/>
-            </a:pPr>
-            <a:r>
-              <a:rPr lang="en-US" sz="1400" b="1" dirty="0">
-                <a:solidFill>
-                  <a:schemeClr val="bg1"/>
-                </a:solidFill>
-              </a:rPr>
-              <a:t>2</a:t>
-            </a:r>
-            <a:endParaRPr lang="en-US" sz="1400" dirty="0"/>
-          </a:p>
-        </p:txBody>
-      </p:sp>
-      <p:sp>
-        <p:nvSpPr>
-          <p:cNvPr id="21" name="Text 117"/>
-          <p:cNvSpPr txBox="1"/>
-          <p:nvPr/>
-        </p:nvSpPr>
-        <p:spPr>
-          <a:xfrm>
-            <a:off x="7040880" y="2651760"/>
-            <a:ext cx="4572000" cy="548640"/>
-          </a:xfrm>
-          <a:prstGeom prst="rect">
-            <a:avLst/>
-          </a:prstGeom>
-          <a:noFill/>
-          <a:ln/>
-        </p:spPr>
-        <p:txBody>
-          <a:bodyPr wrap="square" lIns="0" tIns="0" rIns="0" bIns="0" rtlCol="0" anchor="ctr"/>
-          <a:lstStyle/>
-          <a:p>
-            <a:pPr indent="0" marL="0">
-              <a:buNone/>
-            </a:pPr>
-            <a:r>
-              <a:rPr lang="en-US" sz="1400" dirty="0">
-                <a:solidFill>
-                  <a:schemeClr val="tx1"/>
-                </a:solidFill>
-              </a:rPr>
-              <a:t>Понятные коэффициенты: модель можно сверить с результатами EDA</a:t>
-            </a:r>
-            <a:endParaRPr lang="en-US" sz="1400" dirty="0"/>
-          </a:p>
-        </p:txBody>
-      </p:sp>
-      <p:sp>
-        <p:nvSpPr>
-          <p:cNvPr id="22" name="Badge 118"/>
-          <p:cNvSpPr/>
-          <p:nvPr/>
-        </p:nvSpPr>
-        <p:spPr>
-          <a:xfrm>
-            <a:off x="6492240" y="3392424"/>
-            <a:ext cx="384048" cy="384048"/>
-          </a:xfrm>
-          <a:prstGeom prst="ellipse">
-            <a:avLst/>
-          </a:prstGeom>
-          <a:solidFill>
-            <a:schemeClr val="accent1"/>
-          </a:solidFill>
-          <a:ln/>
-        </p:spPr>
-      </p:sp>
-      <p:sp>
-        <p:nvSpPr>
-          <p:cNvPr id="23" name="Text 119"/>
-          <p:cNvSpPr txBox="1"/>
-          <p:nvPr/>
-        </p:nvSpPr>
-        <p:spPr>
-          <a:xfrm>
-            <a:off x="6492240" y="3392424"/>
-            <a:ext cx="384048" cy="384048"/>
-          </a:xfrm>
-          <a:prstGeom prst="rect">
-            <a:avLst/>
-          </a:prstGeom>
-          <a:noFill/>
-          <a:ln/>
-        </p:spPr>
-        <p:txBody>
-          <a:bodyPr wrap="square" lIns="0" tIns="0" rIns="0" bIns="0" rtlCol="0" anchor="ctr"/>
-          <a:lstStyle/>
-          <a:p>
-            <a:pPr algn="ctr" indent="0" marL="0">
-              <a:buNone/>
-            </a:pPr>
-            <a:r>
-              <a:rPr lang="en-US" sz="1400" b="1" dirty="0">
-                <a:solidFill>
-                  <a:schemeClr val="bg1"/>
-                </a:solidFill>
-              </a:rPr>
-              <a:t>3</a:t>
-            </a:r>
-            <a:endParaRPr lang="en-US" sz="1400" dirty="0"/>
-          </a:p>
-        </p:txBody>
-      </p:sp>
-      <p:sp>
-        <p:nvSpPr>
-          <p:cNvPr id="24" name="Text 120"/>
-          <p:cNvSpPr txBox="1"/>
-          <p:nvPr/>
-        </p:nvSpPr>
-        <p:spPr>
-          <a:xfrm>
-            <a:off x="7040880" y="3364992"/>
-            <a:ext cx="4572000" cy="548640"/>
-          </a:xfrm>
-          <a:prstGeom prst="rect">
-            <a:avLst/>
-          </a:prstGeom>
-          <a:noFill/>
-          <a:ln/>
-        </p:spPr>
-        <p:txBody>
-          <a:bodyPr wrap="square" lIns="0" tIns="0" rIns="0" bIns="0" rtlCol="0" anchor="ctr"/>
-          <a:lstStyle/>
-          <a:p>
-            <a:pPr indent="0" marL="0">
-              <a:buNone/>
-            </a:pPr>
-            <a:r>
-              <a:rPr lang="en-US" sz="1400" dirty="0">
-                <a:solidFill>
-                  <a:schemeClr val="tx1"/>
-                </a:solidFill>
-              </a:rPr>
-              <a:t>Веса классов решают проблему дисбаланса 1 : 14 без ресэмплинга</a:t>
-            </a:r>
-            <a:endParaRPr lang="en-US" sz="1400" dirty="0"/>
-          </a:p>
-        </p:txBody>
-      </p:sp>
-      <p:sp>
-        <p:nvSpPr>
-          <p:cNvPr id="25" name="Badge 121"/>
-          <p:cNvSpPr/>
-          <p:nvPr/>
-        </p:nvSpPr>
-        <p:spPr>
-          <a:xfrm>
-            <a:off x="6492240" y="4105656"/>
-            <a:ext cx="384048" cy="384048"/>
-          </a:xfrm>
-          <a:prstGeom prst="ellipse">
-            <a:avLst/>
-          </a:prstGeom>
-          <a:solidFill>
-            <a:schemeClr val="accent1"/>
-          </a:solidFill>
-          <a:ln/>
-        </p:spPr>
-      </p:sp>
-      <p:sp>
-        <p:nvSpPr>
-          <p:cNvPr id="26" name="Text 122"/>
-          <p:cNvSpPr txBox="1"/>
-          <p:nvPr/>
-        </p:nvSpPr>
-        <p:spPr>
-          <a:xfrm>
-            <a:off x="6492240" y="4105656"/>
-            <a:ext cx="384048" cy="384048"/>
-          </a:xfrm>
-          <a:prstGeom prst="rect">
-            <a:avLst/>
-          </a:prstGeom>
-          <a:noFill/>
-          <a:ln/>
-        </p:spPr>
-        <p:txBody>
-          <a:bodyPr wrap="square" lIns="0" tIns="0" rIns="0" bIns="0" rtlCol="0" anchor="ctr"/>
-          <a:lstStyle/>
-          <a:p>
-            <a:pPr algn="ctr" indent="0" marL="0">
-              <a:buNone/>
-            </a:pPr>
-            <a:r>
-              <a:rPr lang="en-US" sz="1400" b="1" dirty="0">
-                <a:solidFill>
-                  <a:schemeClr val="bg1"/>
-                </a:solidFill>
-              </a:rPr>
-              <a:t>4</a:t>
-            </a:r>
-            <a:endParaRPr lang="en-US" sz="1400" dirty="0"/>
-          </a:p>
-        </p:txBody>
-      </p:sp>
-      <p:sp>
-        <p:nvSpPr>
-          <p:cNvPr id="27" name="Text 123"/>
-          <p:cNvSpPr txBox="1"/>
-          <p:nvPr/>
-        </p:nvSpPr>
-        <p:spPr>
-          <a:xfrm>
-            <a:off x="7040880" y="4078224"/>
-            <a:ext cx="4572000" cy="548640"/>
-          </a:xfrm>
-          <a:prstGeom prst="rect">
-            <a:avLst/>
-          </a:prstGeom>
-          <a:noFill/>
-          <a:ln/>
-        </p:spPr>
-        <p:txBody>
-          <a:bodyPr wrap="square" lIns="0" tIns="0" rIns="0" bIns="0" rtlCol="0" anchor="ctr"/>
-          <a:lstStyle/>
-          <a:p>
-            <a:pPr indent="0" marL="0">
-              <a:buNone/>
-            </a:pPr>
-            <a:r>
-              <a:rPr lang="en-US" sz="1400" dirty="0">
-                <a:solidFill>
-                  <a:schemeClr val="tx1"/>
-                </a:solidFill>
-              </a:rPr>
-              <a:t>Обучается за 1 с на 266 тыс. строк и работает с разреженным текстом</a:t>
-            </a:r>
-            <a:endParaRPr lang="en-US" sz="1400" dirty="0"/>
-          </a:p>
-        </p:txBody>
-      </p:sp>
-      <p:sp>
-        <p:nvSpPr>
-          <p:cNvPr id="28" name="Text 124"/>
-          <p:cNvSpPr txBox="1"/>
-          <p:nvPr/>
-        </p:nvSpPr>
-        <p:spPr>
-          <a:xfrm>
-            <a:off x="6492240" y="4892040"/>
-            <a:ext cx="5120640" cy="320040"/>
-          </a:xfrm>
-          <a:prstGeom prst="rect">
-            <a:avLst/>
-          </a:prstGeom>
-          <a:noFill/>
-          <a:ln/>
-        </p:spPr>
-        <p:txBody>
-          <a:bodyPr wrap="square" lIns="0" tIns="0" rIns="0" bIns="0" rtlCol="0" anchor="t"/>
-          <a:lstStyle/>
-          <a:p>
-            <a:pPr indent="0" marL="0">
-              <a:buNone/>
-            </a:pPr>
-            <a:r>
-              <a:rPr lang="en-US" sz="1600" b="1" dirty="0">
-                <a:solidFill>
-                  <a:schemeClr val="accent5"/>
-                </a:solidFill>
-              </a:rPr>
-              <a:t>Пока не базовая модель</a:t>
-            </a:r>
-            <a:endParaRPr lang="en-US" sz="1600" dirty="0"/>
-          </a:p>
-        </p:txBody>
-      </p:sp>
-      <p:sp>
-        <p:nvSpPr>
-          <p:cNvPr id="29" name="Text 125"/>
-          <p:cNvSpPr txBox="1"/>
-          <p:nvPr/>
-        </p:nvSpPr>
-        <p:spPr>
-          <a:xfrm>
-            <a:off x="6492240" y="5257800"/>
-            <a:ext cx="5120640" cy="914400"/>
-          </a:xfrm>
-          <a:prstGeom prst="rect">
-            <a:avLst/>
-          </a:prstGeom>
-          <a:noFill/>
-          <a:ln/>
-        </p:spPr>
-        <p:txBody>
-          <a:bodyPr wrap="square" lIns="0" tIns="0" rIns="0" bIns="0" rtlCol="0" anchor="t"/>
-          <a:lstStyle/>
-          <a:p>
-            <a:pPr indent="0" marL="0">
-              <a:buNone/>
-            </a:pPr>
-            <a:r>
-              <a:rPr lang="en-US" sz="1400" dirty="0">
-                <a:solidFill>
                   <a:schemeClr val="tx2"/>
                 </a:solidFill>
               </a:rPr>
-              <a:t>Градиентный бустинг и трансформер запланированы на A3: им нужна модель для сравнения. SVM и kNN не масштабируются на 266 тыс. строк. Наивный Байес: признаки коррелируют.</a:t>
+              <a:t>Статус и даты исполнения договора, реестр недобросовестных участников, историю срывов поставщика.</a:t>
             </a:r>
             <a:endParaRPr lang="en-US" sz="1400" dirty="0"/>
           </a:p>
@@ -6736,7 +7792,7 @@
                   <a:schemeClr val="tx1"/>
                 </a:solidFill>
               </a:rPr>
-              <a:t>Метрики: почему accuracy не подходит</a:t>
+              <a:t>Baseline: логистическая регрессия</a:t>
             </a:r>
             <a:endParaRPr lang="en-US" sz="3200" dirty="0"/>
           </a:p>
@@ -6744,18 +7800,18 @@
       </p:sp>
       <p:sp>
         <p:nvSpPr>
-          <p:cNvPr id="3" name="Card 126"/>
+          <p:cNvPr id="3" name="Card 121"/>
           <p:cNvSpPr/>
           <p:nvPr/>
         </p:nvSpPr>
         <p:spPr>
           <a:xfrm>
             <a:off x="548640" y="1463040"/>
-            <a:ext cx="3931920" cy="4663440"/>
+            <a:ext cx="5486400" cy="1042416"/>
           </a:xfrm>
           <a:prstGeom prst="roundRect">
             <a:avLst>
-              <a:gd name="adj" fmla="val 1860"/>
+              <a:gd name="adj" fmla="val 7018"/>
             </a:avLst>
           </a:prstGeom>
           <a:solidFill>
@@ -6766,14 +7822,14 @@
       </p:sp>
       <p:sp>
         <p:nvSpPr>
-          <p:cNvPr id="4" name="Text 127"/>
-          <p:cNvSpPr txBox="1"/>
-          <p:nvPr/>
-        </p:nvSpPr>
-        <p:spPr>
-          <a:xfrm>
-            <a:off x="822960" y="1737360"/>
-            <a:ext cx="3383280" cy="914400"/>
+          <p:cNvPr id="4" name="Text 122"/>
+          <p:cNvSpPr txBox="1"/>
+          <p:nvPr/>
+        </p:nvSpPr>
+        <p:spPr>
+          <a:xfrm>
+            <a:off x="777240" y="1572768"/>
+            <a:ext cx="5029200" cy="320040"/>
           </a:xfrm>
           <a:prstGeom prst="rect">
             <a:avLst/>
@@ -6789,27 +7845,27 @@
               <a:buNone/>
             </a:pPr>
             <a:r>
-              <a:rPr lang="en-US" sz="5400" b="1" dirty="0">
-                <a:solidFill>
-                  <a:schemeClr val="accent1"/>
-                </a:solidFill>
-              </a:rPr>
-              <a:t>93,4 %</a:t>
-            </a:r>
-            <a:endParaRPr lang="en-US" sz="5400" dirty="0"/>
-          </a:p>
-        </p:txBody>
-      </p:sp>
-      <p:sp>
-        <p:nvSpPr>
-          <p:cNvPr id="5" name="Text 128"/>
-          <p:cNvSpPr txBox="1"/>
-          <p:nvPr/>
-        </p:nvSpPr>
-        <p:spPr>
-          <a:xfrm>
-            <a:off x="822960" y="2743200"/>
-            <a:ext cx="3383280" cy="640080"/>
+              <a:rPr lang="en-US" sz="1600" b="1" dirty="0">
+                <a:solidFill>
+                  <a:schemeClr val="tx1"/>
+                </a:solidFill>
+              </a:rPr>
+              <a:t>Предобработка</a:t>
+            </a:r>
+            <a:endParaRPr lang="en-US" sz="1600" dirty="0"/>
+          </a:p>
+        </p:txBody>
+      </p:sp>
+      <p:sp>
+        <p:nvSpPr>
+          <p:cNvPr id="5" name="Text 123"/>
+          <p:cNvSpPr txBox="1"/>
+          <p:nvPr/>
+        </p:nvSpPr>
+        <p:spPr>
+          <a:xfrm>
+            <a:off x="777240" y="1920240"/>
+            <a:ext cx="5029200" cy="512064"/>
           </a:xfrm>
           <a:prstGeom prst="rect">
             <a:avLst/>
@@ -6825,103 +7881,165 @@
               <a:buNone/>
             </a:pPr>
             <a:r>
-              <a:rPr lang="en-US" sz="1600" dirty="0">
-                <a:solidFill>
-                  <a:schemeClr val="tx1"/>
-                </a:solidFill>
-              </a:rPr>
-              <a:t>accuracy у «модели», которая никого не помечает</a:t>
-            </a:r>
-            <a:endParaRPr lang="en-US" sz="1600" dirty="0"/>
-          </a:p>
-        </p:txBody>
-      </p:sp>
-      <p:sp>
-        <p:nvSpPr>
-          <p:cNvPr id="6" name="Text 129"/>
-          <p:cNvSpPr txBox="1"/>
-          <p:nvPr/>
-        </p:nvSpPr>
-        <p:spPr>
-          <a:xfrm>
-            <a:off x="822960" y="3520440"/>
-            <a:ext cx="3383280" cy="365760"/>
-          </a:xfrm>
-          <a:prstGeom prst="rect">
-            <a:avLst/>
-          </a:prstGeom>
-          <a:noFill/>
-          <a:ln/>
-        </p:spPr>
-        <p:txBody>
-          <a:bodyPr wrap="square" lIns="0" tIns="0" rIns="0" bIns="0" rtlCol="0" anchor="t"/>
-          <a:lstStyle/>
-          <a:p>
-            <a:pPr indent="0" marL="0">
-              <a:buNone/>
-            </a:pPr>
-            <a:r>
-              <a:rPr lang="en-US" sz="1600" b="1" dirty="0">
-                <a:solidFill>
-                  <a:schemeClr val="tx1"/>
-                </a:solidFill>
-              </a:rPr>
-              <a:t>…и не находит ни одного срыва</a:t>
-            </a:r>
-            <a:endParaRPr lang="en-US" sz="1600" dirty="0"/>
-          </a:p>
-        </p:txBody>
-      </p:sp>
-      <p:sp>
-        <p:nvSpPr>
-          <p:cNvPr id="7" name="Text 130"/>
-          <p:cNvSpPr txBox="1"/>
-          <p:nvPr/>
-        </p:nvSpPr>
-        <p:spPr>
-          <a:xfrm>
-            <a:off x="822960" y="4206240"/>
-            <a:ext cx="3383280" cy="1737360"/>
-          </a:xfrm>
-          <a:prstGeom prst="rect">
-            <a:avLst/>
-          </a:prstGeom>
-          <a:noFill/>
-          <a:ln/>
-        </p:spPr>
-        <p:txBody>
-          <a:bodyPr wrap="square" lIns="0" tIns="0" rIns="0" bIns="0" rtlCol="0" anchor="t"/>
-          <a:lstStyle/>
-          <a:p>
-            <a:pPr indent="0" marL="0">
-              <a:buNone/>
-            </a:pPr>
-            <a:r>
-              <a:rPr lang="en-US" sz="1600" dirty="0">
+              <a:rPr lang="en-US" sz="1400" dirty="0">
                 <a:solidFill>
                   <a:schemeClr val="tx2"/>
                 </a:solidFill>
               </a:rPr>
-              <a:t>При 6,6 % срывов accuracy поощряет бездействие. У полезных моделей она ниже, около 0,89, потому что они решаются помечать закупки.</a:t>
-            </a:r>
-            <a:endParaRPr lang="en-US" sz="1600" dirty="0"/>
-          </a:p>
-        </p:txBody>
-      </p:sp>
-      <p:sp>
-        <p:nvSpPr>
-          <p:cNvPr id="8" name="Card 131"/>
+              <a:t>Медиана вместо пропусков + флаги пропуска, масштабирование, one-hot; обучается только на train</a:t>
+            </a:r>
+            <a:endParaRPr lang="en-US" sz="1400" dirty="0"/>
+          </a:p>
+        </p:txBody>
+      </p:sp>
+      <p:sp>
+        <p:nvSpPr>
+          <p:cNvPr id="6" name="Arrow 124"/>
           <p:cNvSpPr/>
           <p:nvPr/>
         </p:nvSpPr>
         <p:spPr>
           <a:xfrm>
-            <a:off x="4800600" y="1463040"/>
-            <a:ext cx="3310128" cy="2240280"/>
+            <a:off x="3154680" y="2532888"/>
+            <a:ext cx="274320" cy="201168"/>
+          </a:xfrm>
+          <a:prstGeom prst="downArrow">
+            <a:avLst/>
+          </a:prstGeom>
+          <a:solidFill>
+            <a:schemeClr val="accent5"/>
+          </a:solidFill>
+          <a:ln/>
+        </p:spPr>
+      </p:sp>
+      <p:sp>
+        <p:nvSpPr>
+          <p:cNvPr id="7" name="Card 125"/>
+          <p:cNvSpPr/>
+          <p:nvPr/>
+        </p:nvSpPr>
+        <p:spPr>
+          <a:xfrm>
+            <a:off x="548640" y="2761488"/>
+            <a:ext cx="5486400" cy="1042416"/>
           </a:xfrm>
           <a:prstGeom prst="roundRect">
             <a:avLst>
-              <a:gd name="adj" fmla="val 3265"/>
+              <a:gd name="adj" fmla="val 7018"/>
+            </a:avLst>
+          </a:prstGeom>
+          <a:solidFill>
+            <a:schemeClr val="accent2"/>
+          </a:solidFill>
+          <a:ln/>
+        </p:spPr>
+      </p:sp>
+      <p:sp>
+        <p:nvSpPr>
+          <p:cNvPr id="8" name="Text 126"/>
+          <p:cNvSpPr txBox="1"/>
+          <p:nvPr/>
+        </p:nvSpPr>
+        <p:spPr>
+          <a:xfrm>
+            <a:off x="777240" y="2871216"/>
+            <a:ext cx="5029200" cy="320040"/>
+          </a:xfrm>
+          <a:prstGeom prst="rect">
+            <a:avLst/>
+          </a:prstGeom>
+          <a:noFill/>
+          <a:ln/>
+        </p:spPr>
+        <p:txBody>
+          <a:bodyPr wrap="square" lIns="0" tIns="0" rIns="0" bIns="0" rtlCol="0" anchor="t"/>
+          <a:lstStyle/>
+          <a:p>
+            <a:pPr indent="0" marL="0">
+              <a:buNone/>
+            </a:pPr>
+            <a:r>
+              <a:rPr lang="en-US" sz="1600" b="1" dirty="0">
+                <a:solidFill>
+                  <a:schemeClr val="bg1"/>
+                </a:solidFill>
+              </a:rPr>
+              <a:t>Логистическая регрессия</a:t>
+            </a:r>
+            <a:endParaRPr lang="en-US" sz="1600" dirty="0"/>
+          </a:p>
+        </p:txBody>
+      </p:sp>
+      <p:sp>
+        <p:nvSpPr>
+          <p:cNvPr id="9" name="Text 127"/>
+          <p:cNvSpPr txBox="1"/>
+          <p:nvPr/>
+        </p:nvSpPr>
+        <p:spPr>
+          <a:xfrm>
+            <a:off x="777240" y="3218688"/>
+            <a:ext cx="5029200" cy="512064"/>
+          </a:xfrm>
+          <a:prstGeom prst="rect">
+            <a:avLst/>
+          </a:prstGeom>
+          <a:noFill/>
+          <a:ln/>
+        </p:spPr>
+        <p:txBody>
+          <a:bodyPr wrap="square" lIns="0" tIns="0" rIns="0" bIns="0" rtlCol="0" anchor="t"/>
+          <a:lstStyle/>
+          <a:p>
+            <a:pPr indent="0" marL="0">
+              <a:buNone/>
+            </a:pPr>
+            <a:r>
+              <a:rPr lang="en-US" sz="1400" dirty="0">
+                <a:solidFill>
+                  <a:schemeClr val="bg1"/>
+                </a:solidFill>
+              </a:rPr>
+              <a:t>L2-штраф, C = 1, class_weight = balanced, solver lbfgs</a:t>
+            </a:r>
+            <a:endParaRPr lang="en-US" sz="1400" dirty="0"/>
+          </a:p>
+        </p:txBody>
+      </p:sp>
+      <p:sp>
+        <p:nvSpPr>
+          <p:cNvPr id="10" name="Arrow 128"/>
+          <p:cNvSpPr/>
+          <p:nvPr/>
+        </p:nvSpPr>
+        <p:spPr>
+          <a:xfrm>
+            <a:off x="3154680" y="3831336"/>
+            <a:ext cx="274320" cy="201168"/>
+          </a:xfrm>
+          <a:prstGeom prst="downArrow">
+            <a:avLst/>
+          </a:prstGeom>
+          <a:solidFill>
+            <a:schemeClr val="accent5"/>
+          </a:solidFill>
+          <a:ln/>
+        </p:spPr>
+      </p:sp>
+      <p:sp>
+        <p:nvSpPr>
+          <p:cNvPr id="11" name="Card 129"/>
+          <p:cNvSpPr/>
+          <p:nvPr/>
+        </p:nvSpPr>
+        <p:spPr>
+          <a:xfrm>
+            <a:off x="548640" y="4059936"/>
+            <a:ext cx="5486400" cy="1042416"/>
+          </a:xfrm>
+          <a:prstGeom prst="roundRect">
+            <a:avLst>
+              <a:gd name="adj" fmla="val 7018"/>
             </a:avLst>
           </a:prstGeom>
           <a:solidFill>
@@ -6932,14 +8050,192 @@
       </p:sp>
       <p:sp>
         <p:nvSpPr>
-          <p:cNvPr id="9" name="Text 132"/>
-          <p:cNvSpPr txBox="1"/>
-          <p:nvPr/>
-        </p:nvSpPr>
-        <p:spPr>
-          <a:xfrm>
-            <a:off x="5029200" y="1645920"/>
-            <a:ext cx="2011680" cy="411480"/>
+          <p:cNvPr id="12" name="Text 130"/>
+          <p:cNvSpPr txBox="1"/>
+          <p:nvPr/>
+        </p:nvSpPr>
+        <p:spPr>
+          <a:xfrm>
+            <a:off x="777240" y="4169664"/>
+            <a:ext cx="5029200" cy="320040"/>
+          </a:xfrm>
+          <a:prstGeom prst="rect">
+            <a:avLst/>
+          </a:prstGeom>
+          <a:noFill/>
+          <a:ln/>
+        </p:spPr>
+        <p:txBody>
+          <a:bodyPr wrap="square" lIns="0" tIns="0" rIns="0" bIns="0" rtlCol="0" anchor="t"/>
+          <a:lstStyle/>
+          <a:p>
+            <a:pPr indent="0" marL="0">
+              <a:buNone/>
+            </a:pPr>
+            <a:r>
+              <a:rPr lang="en-US" sz="1600" b="1" dirty="0">
+                <a:solidFill>
+                  <a:schemeClr val="tx1"/>
+                </a:solidFill>
+              </a:rPr>
+              <a:t>Оценка риска 0–1</a:t>
+            </a:r>
+            <a:endParaRPr lang="en-US" sz="1600" dirty="0"/>
+          </a:p>
+        </p:txBody>
+      </p:sp>
+      <p:sp>
+        <p:nvSpPr>
+          <p:cNvPr id="13" name="Text 131"/>
+          <p:cNvSpPr txBox="1"/>
+          <p:nvPr/>
+        </p:nvSpPr>
+        <p:spPr>
+          <a:xfrm>
+            <a:off x="777240" y="4517136"/>
+            <a:ext cx="5029200" cy="512064"/>
+          </a:xfrm>
+          <a:prstGeom prst="rect">
+            <a:avLst/>
+          </a:prstGeom>
+          <a:noFill/>
+          <a:ln/>
+        </p:spPr>
+        <p:txBody>
+          <a:bodyPr wrap="square" lIns="0" tIns="0" rIns="0" bIns="0" rtlCol="0" anchor="t"/>
+          <a:lstStyle/>
+          <a:p>
+            <a:pPr indent="0" marL="0">
+              <a:buNone/>
+            </a:pPr>
+            <a:r>
+              <a:rPr lang="en-US" sz="1400" dirty="0">
+                <a:solidFill>
+                  <a:schemeClr val="tx2"/>
+                </a:solidFill>
+              </a:rPr>
+              <a:t>Ранжирует закупки; порог решения подобран на validation</a:t>
+            </a:r>
+            <a:endParaRPr lang="en-US" sz="1400" dirty="0"/>
+          </a:p>
+        </p:txBody>
+      </p:sp>
+      <p:sp>
+        <p:nvSpPr>
+          <p:cNvPr id="14" name="Text 132"/>
+          <p:cNvSpPr txBox="1"/>
+          <p:nvPr/>
+        </p:nvSpPr>
+        <p:spPr>
+          <a:xfrm>
+            <a:off x="548640" y="5349240"/>
+            <a:ext cx="5486400" cy="731520"/>
+          </a:xfrm>
+          <a:prstGeom prst="rect">
+            <a:avLst/>
+          </a:prstGeom>
+          <a:noFill/>
+          <a:ln/>
+        </p:spPr>
+        <p:txBody>
+          <a:bodyPr wrap="square" lIns="0" tIns="0" rIns="0" bIns="0" rtlCol="0" anchor="t"/>
+          <a:lstStyle/>
+          <a:p>
+            <a:pPr indent="0" marL="0">
+              <a:buNone/>
+            </a:pPr>
+            <a:r>
+              <a:rPr lang="en-US" sz="1400" b="1" dirty="0">
+                <a:solidFill>
+                  <a:schemeClr val="tx1"/>
+                </a:solidFill>
+              </a:rPr>
+              <a:t>Обучение: </a:t>
+            </a:r>
+            <a:pPr indent="0" marL="0">
+              <a:buNone/>
+            </a:pPr>
+            <a:r>
+              <a:rPr lang="en-US" sz="1400" dirty="0">
+                <a:solidFill>
+                  <a:schemeClr val="tx1"/>
+                </a:solidFill>
+              </a:rPr>
+              <a:t>266 294 закупки (январь–февраль) · 20 признаков → 52 входа · сошлась за 75 итераций · 1 секунда</a:t>
+            </a:r>
+            <a:endParaRPr lang="en-US" sz="1400" dirty="0"/>
+          </a:p>
+        </p:txBody>
+      </p:sp>
+      <p:sp>
+        <p:nvSpPr>
+          <p:cNvPr id="15" name="Text 133"/>
+          <p:cNvSpPr txBox="1"/>
+          <p:nvPr/>
+        </p:nvSpPr>
+        <p:spPr>
+          <a:xfrm>
+            <a:off x="6492240" y="1417320"/>
+            <a:ext cx="5120640" cy="365760"/>
+          </a:xfrm>
+          <a:prstGeom prst="rect">
+            <a:avLst/>
+          </a:prstGeom>
+          <a:noFill/>
+          <a:ln/>
+        </p:spPr>
+        <p:txBody>
+          <a:bodyPr wrap="square" lIns="0" tIns="0" rIns="0" bIns="0" rtlCol="0" anchor="t"/>
+          <a:lstStyle/>
+          <a:p>
+            <a:pPr indent="0" marL="0">
+              <a:buNone/>
+            </a:pPr>
+            <a:r>
+              <a:rPr lang="en-US" sz="2000" b="1" dirty="0">
+                <a:solidFill>
+                  <a:schemeClr val="tx1"/>
+                </a:solidFill>
+                <a:latin typeface="Georgia" pitchFamily="34" charset="0"/>
+                <a:ea typeface="Georgia" pitchFamily="34" charset="-122"/>
+                <a:cs typeface="Georgia" pitchFamily="34" charset="-120"/>
+              </a:rPr>
+              <a:t>Почему эта модель</a:t>
+            </a:r>
+            <a:endParaRPr lang="en-US" sz="2000" dirty="0"/>
+          </a:p>
+        </p:txBody>
+      </p:sp>
+      <p:sp>
+        <p:nvSpPr>
+          <p:cNvPr id="16" name="Badge 134"/>
+          <p:cNvSpPr/>
+          <p:nvPr/>
+        </p:nvSpPr>
+        <p:spPr>
+          <a:xfrm>
+            <a:off x="6492240" y="1965960"/>
+            <a:ext cx="384048" cy="384048"/>
+          </a:xfrm>
+          <a:prstGeom prst="ellipse">
+            <a:avLst/>
+          </a:prstGeom>
+          <a:solidFill>
+            <a:schemeClr val="accent1"/>
+          </a:solidFill>
+          <a:ln/>
+        </p:spPr>
+      </p:sp>
+      <p:sp>
+        <p:nvSpPr>
+          <p:cNvPr id="17" name="Text 135"/>
+          <p:cNvSpPr txBox="1"/>
+          <p:nvPr/>
+        </p:nvSpPr>
+        <p:spPr>
+          <a:xfrm>
+            <a:off x="6492240" y="1965960"/>
+            <a:ext cx="384048" cy="384048"/>
           </a:xfrm>
           <a:prstGeom prst="rect">
             <a:avLst/>
@@ -6951,31 +8247,87 @@
           <a:bodyPr wrap="square" lIns="0" tIns="0" rIns="0" bIns="0" rtlCol="0" anchor="ctr"/>
           <a:lstStyle/>
           <a:p>
-            <a:pPr indent="0" marL="0">
-              <a:buNone/>
-            </a:pPr>
-            <a:r>
-              <a:rPr lang="en-US" sz="1800" b="1" dirty="0">
+            <a:pPr algn="ctr" indent="0" marL="0">
+              <a:buNone/>
+            </a:pPr>
+            <a:r>
+              <a:rPr lang="en-US" sz="1400" b="1" dirty="0">
+                <a:solidFill>
+                  <a:schemeClr val="bg1"/>
+                </a:solidFill>
+              </a:rPr>
+              <a:t>1</a:t>
+            </a:r>
+            <a:endParaRPr lang="en-US" sz="1400" dirty="0"/>
+          </a:p>
+        </p:txBody>
+      </p:sp>
+      <p:sp>
+        <p:nvSpPr>
+          <p:cNvPr id="18" name="Text 136"/>
+          <p:cNvSpPr txBox="1"/>
+          <p:nvPr/>
+        </p:nvSpPr>
+        <p:spPr>
+          <a:xfrm>
+            <a:off x="7040880" y="1938528"/>
+            <a:ext cx="4572000" cy="548640"/>
+          </a:xfrm>
+          <a:prstGeom prst="rect">
+            <a:avLst/>
+          </a:prstGeom>
+          <a:noFill/>
+          <a:ln/>
+        </p:spPr>
+        <p:txBody>
+          <a:bodyPr wrap="square" lIns="0" tIns="0" rIns="0" bIns="0" rtlCol="0" anchor="ctr"/>
+          <a:lstStyle/>
+          <a:p>
+            <a:pPr indent="0" marL="0">
+              <a:buNone/>
+            </a:pPr>
+            <a:r>
+              <a:rPr lang="en-US" sz="1400" dirty="0">
                 <a:solidFill>
                   <a:schemeClr val="tx1"/>
                 </a:solidFill>
               </a:rPr>
-              <a:t>ROC-AUC</a:t>
-            </a:r>
-            <a:endParaRPr lang="en-US" sz="1800" dirty="0"/>
-          </a:p>
-        </p:txBody>
-      </p:sp>
-      <p:sp>
-        <p:nvSpPr>
-          <p:cNvPr id="10" name="Text 133"/>
-          <p:cNvSpPr txBox="1"/>
-          <p:nvPr/>
-        </p:nvSpPr>
-        <p:spPr>
-          <a:xfrm>
-            <a:off x="6903720" y="1645920"/>
-            <a:ext cx="978408" cy="411480"/>
+              <a:t>Выдаёт вероятность, поэтому закупки можно ранжировать для проверки</a:t>
+            </a:r>
+            <a:endParaRPr lang="en-US" sz="1400" dirty="0"/>
+          </a:p>
+        </p:txBody>
+      </p:sp>
+      <p:sp>
+        <p:nvSpPr>
+          <p:cNvPr id="19" name="Badge 137"/>
+          <p:cNvSpPr/>
+          <p:nvPr/>
+        </p:nvSpPr>
+        <p:spPr>
+          <a:xfrm>
+            <a:off x="6492240" y="2679192"/>
+            <a:ext cx="384048" cy="384048"/>
+          </a:xfrm>
+          <a:prstGeom prst="ellipse">
+            <a:avLst/>
+          </a:prstGeom>
+          <a:solidFill>
+            <a:schemeClr val="accent1"/>
+          </a:solidFill>
+          <a:ln/>
+        </p:spPr>
+      </p:sp>
+      <p:sp>
+        <p:nvSpPr>
+          <p:cNvPr id="20" name="Text 138"/>
+          <p:cNvSpPr txBox="1"/>
+          <p:nvPr/>
+        </p:nvSpPr>
+        <p:spPr>
+          <a:xfrm>
+            <a:off x="6492240" y="2679192"/>
+            <a:ext cx="384048" cy="384048"/>
           </a:xfrm>
           <a:prstGeom prst="rect">
             <a:avLst/>
@@ -6987,31 +8339,251 @@
           <a:bodyPr wrap="square" lIns="0" tIns="0" rIns="0" bIns="0" rtlCol="0" anchor="ctr"/>
           <a:lstStyle/>
           <a:p>
-            <a:pPr algn="r" indent="0" marL="0">
-              <a:buNone/>
-            </a:pPr>
-            <a:r>
-              <a:rPr lang="en-US" sz="2200" b="1" dirty="0">
-                <a:solidFill>
-                  <a:schemeClr val="accent2"/>
-                </a:solidFill>
-              </a:rPr>
-              <a:t>0,79</a:t>
-            </a:r>
-            <a:endParaRPr lang="en-US" sz="2200" dirty="0"/>
-          </a:p>
-        </p:txBody>
-      </p:sp>
-      <p:sp>
-        <p:nvSpPr>
-          <p:cNvPr id="11" name="Text 134"/>
-          <p:cNvSpPr txBox="1"/>
-          <p:nvPr/>
-        </p:nvSpPr>
-        <p:spPr>
-          <a:xfrm>
-            <a:off x="5029200" y="2194560"/>
-            <a:ext cx="2852928" cy="1371600"/>
+            <a:pPr algn="ctr" indent="0" marL="0">
+              <a:buNone/>
+            </a:pPr>
+            <a:r>
+              <a:rPr lang="en-US" sz="1400" b="1" dirty="0">
+                <a:solidFill>
+                  <a:schemeClr val="bg1"/>
+                </a:solidFill>
+              </a:rPr>
+              <a:t>2</a:t>
+            </a:r>
+            <a:endParaRPr lang="en-US" sz="1400" dirty="0"/>
+          </a:p>
+        </p:txBody>
+      </p:sp>
+      <p:sp>
+        <p:nvSpPr>
+          <p:cNvPr id="21" name="Text 139"/>
+          <p:cNvSpPr txBox="1"/>
+          <p:nvPr/>
+        </p:nvSpPr>
+        <p:spPr>
+          <a:xfrm>
+            <a:off x="7040880" y="2651760"/>
+            <a:ext cx="4572000" cy="548640"/>
+          </a:xfrm>
+          <a:prstGeom prst="rect">
+            <a:avLst/>
+          </a:prstGeom>
+          <a:noFill/>
+          <a:ln/>
+        </p:spPr>
+        <p:txBody>
+          <a:bodyPr wrap="square" lIns="0" tIns="0" rIns="0" bIns="0" rtlCol="0" anchor="ctr"/>
+          <a:lstStyle/>
+          <a:p>
+            <a:pPr indent="0" marL="0">
+              <a:buNone/>
+            </a:pPr>
+            <a:r>
+              <a:rPr lang="en-US" sz="1400" dirty="0">
+                <a:solidFill>
+                  <a:schemeClr val="tx1"/>
+                </a:solidFill>
+              </a:rPr>
+              <a:t>Понятные коэффициенты: модель можно сверить с результатами EDA</a:t>
+            </a:r>
+            <a:endParaRPr lang="en-US" sz="1400" dirty="0"/>
+          </a:p>
+        </p:txBody>
+      </p:sp>
+      <p:sp>
+        <p:nvSpPr>
+          <p:cNvPr id="22" name="Badge 140"/>
+          <p:cNvSpPr/>
+          <p:nvPr/>
+        </p:nvSpPr>
+        <p:spPr>
+          <a:xfrm>
+            <a:off x="6492240" y="3392424"/>
+            <a:ext cx="384048" cy="384048"/>
+          </a:xfrm>
+          <a:prstGeom prst="ellipse">
+            <a:avLst/>
+          </a:prstGeom>
+          <a:solidFill>
+            <a:schemeClr val="accent1"/>
+          </a:solidFill>
+          <a:ln/>
+        </p:spPr>
+      </p:sp>
+      <p:sp>
+        <p:nvSpPr>
+          <p:cNvPr id="23" name="Text 141"/>
+          <p:cNvSpPr txBox="1"/>
+          <p:nvPr/>
+        </p:nvSpPr>
+        <p:spPr>
+          <a:xfrm>
+            <a:off x="6492240" y="3392424"/>
+            <a:ext cx="384048" cy="384048"/>
+          </a:xfrm>
+          <a:prstGeom prst="rect">
+            <a:avLst/>
+          </a:prstGeom>
+          <a:noFill/>
+          <a:ln/>
+        </p:spPr>
+        <p:txBody>
+          <a:bodyPr wrap="square" lIns="0" tIns="0" rIns="0" bIns="0" rtlCol="0" anchor="ctr"/>
+          <a:lstStyle/>
+          <a:p>
+            <a:pPr algn="ctr" indent="0" marL="0">
+              <a:buNone/>
+            </a:pPr>
+            <a:r>
+              <a:rPr lang="en-US" sz="1400" b="1" dirty="0">
+                <a:solidFill>
+                  <a:schemeClr val="bg1"/>
+                </a:solidFill>
+              </a:rPr>
+              <a:t>3</a:t>
+            </a:r>
+            <a:endParaRPr lang="en-US" sz="1400" dirty="0"/>
+          </a:p>
+        </p:txBody>
+      </p:sp>
+      <p:sp>
+        <p:nvSpPr>
+          <p:cNvPr id="24" name="Text 142"/>
+          <p:cNvSpPr txBox="1"/>
+          <p:nvPr/>
+        </p:nvSpPr>
+        <p:spPr>
+          <a:xfrm>
+            <a:off x="7040880" y="3364992"/>
+            <a:ext cx="4572000" cy="548640"/>
+          </a:xfrm>
+          <a:prstGeom prst="rect">
+            <a:avLst/>
+          </a:prstGeom>
+          <a:noFill/>
+          <a:ln/>
+        </p:spPr>
+        <p:txBody>
+          <a:bodyPr wrap="square" lIns="0" tIns="0" rIns="0" bIns="0" rtlCol="0" anchor="ctr"/>
+          <a:lstStyle/>
+          <a:p>
+            <a:pPr indent="0" marL="0">
+              <a:buNone/>
+            </a:pPr>
+            <a:r>
+              <a:rPr lang="en-US" sz="1400" dirty="0">
+                <a:solidFill>
+                  <a:schemeClr val="tx1"/>
+                </a:solidFill>
+              </a:rPr>
+              <a:t>Веса классов решают проблему дисбаланса 1 : 14 без ресэмплинга</a:t>
+            </a:r>
+            <a:endParaRPr lang="en-US" sz="1400" dirty="0"/>
+          </a:p>
+        </p:txBody>
+      </p:sp>
+      <p:sp>
+        <p:nvSpPr>
+          <p:cNvPr id="25" name="Badge 143"/>
+          <p:cNvSpPr/>
+          <p:nvPr/>
+        </p:nvSpPr>
+        <p:spPr>
+          <a:xfrm>
+            <a:off x="6492240" y="4105656"/>
+            <a:ext cx="384048" cy="384048"/>
+          </a:xfrm>
+          <a:prstGeom prst="ellipse">
+            <a:avLst/>
+          </a:prstGeom>
+          <a:solidFill>
+            <a:schemeClr val="accent1"/>
+          </a:solidFill>
+          <a:ln/>
+        </p:spPr>
+      </p:sp>
+      <p:sp>
+        <p:nvSpPr>
+          <p:cNvPr id="26" name="Text 144"/>
+          <p:cNvSpPr txBox="1"/>
+          <p:nvPr/>
+        </p:nvSpPr>
+        <p:spPr>
+          <a:xfrm>
+            <a:off x="6492240" y="4105656"/>
+            <a:ext cx="384048" cy="384048"/>
+          </a:xfrm>
+          <a:prstGeom prst="rect">
+            <a:avLst/>
+          </a:prstGeom>
+          <a:noFill/>
+          <a:ln/>
+        </p:spPr>
+        <p:txBody>
+          <a:bodyPr wrap="square" lIns="0" tIns="0" rIns="0" bIns="0" rtlCol="0" anchor="ctr"/>
+          <a:lstStyle/>
+          <a:p>
+            <a:pPr algn="ctr" indent="0" marL="0">
+              <a:buNone/>
+            </a:pPr>
+            <a:r>
+              <a:rPr lang="en-US" sz="1400" b="1" dirty="0">
+                <a:solidFill>
+                  <a:schemeClr val="bg1"/>
+                </a:solidFill>
+              </a:rPr>
+              <a:t>4</a:t>
+            </a:r>
+            <a:endParaRPr lang="en-US" sz="1400" dirty="0"/>
+          </a:p>
+        </p:txBody>
+      </p:sp>
+      <p:sp>
+        <p:nvSpPr>
+          <p:cNvPr id="27" name="Text 145"/>
+          <p:cNvSpPr txBox="1"/>
+          <p:nvPr/>
+        </p:nvSpPr>
+        <p:spPr>
+          <a:xfrm>
+            <a:off x="7040880" y="4078224"/>
+            <a:ext cx="4572000" cy="548640"/>
+          </a:xfrm>
+          <a:prstGeom prst="rect">
+            <a:avLst/>
+          </a:prstGeom>
+          <a:noFill/>
+          <a:ln/>
+        </p:spPr>
+        <p:txBody>
+          <a:bodyPr wrap="square" lIns="0" tIns="0" rIns="0" bIns="0" rtlCol="0" anchor="ctr"/>
+          <a:lstStyle/>
+          <a:p>
+            <a:pPr indent="0" marL="0">
+              <a:buNone/>
+            </a:pPr>
+            <a:r>
+              <a:rPr lang="en-US" sz="1400" dirty="0">
+                <a:solidFill>
+                  <a:schemeClr val="tx1"/>
+                </a:solidFill>
+              </a:rPr>
+              <a:t>Обучается за 1 с на 266 тыс. строк и работает с разреженным текстом</a:t>
+            </a:r>
+            <a:endParaRPr lang="en-US" sz="1400" dirty="0"/>
+          </a:p>
+        </p:txBody>
+      </p:sp>
+      <p:sp>
+        <p:nvSpPr>
+          <p:cNvPr id="28" name="Text 146"/>
+          <p:cNvSpPr txBox="1"/>
+          <p:nvPr/>
+        </p:nvSpPr>
+        <p:spPr>
+          <a:xfrm>
+            <a:off x="6492240" y="4892040"/>
+            <a:ext cx="5120640" cy="320040"/>
           </a:xfrm>
           <a:prstGeom prst="rect">
             <a:avLst/>
@@ -7027,404 +8599,50 @@
               <a:buNone/>
             </a:pPr>
             <a:r>
-              <a:rPr lang="en-US" sz="1600" dirty="0">
+              <a:rPr lang="en-US" sz="1600" b="1" dirty="0">
+                <a:solidFill>
+                  <a:schemeClr val="accent5"/>
+                </a:solidFill>
+              </a:rPr>
+              <a:t>Пока не базовая модель</a:t>
+            </a:r>
+            <a:endParaRPr lang="en-US" sz="1600" dirty="0"/>
+          </a:p>
+        </p:txBody>
+      </p:sp>
+      <p:sp>
+        <p:nvSpPr>
+          <p:cNvPr id="29" name="Text 147"/>
+          <p:cNvSpPr txBox="1"/>
+          <p:nvPr/>
+        </p:nvSpPr>
+        <p:spPr>
+          <a:xfrm>
+            <a:off x="6492240" y="5257800"/>
+            <a:ext cx="5120640" cy="914400"/>
+          </a:xfrm>
+          <a:prstGeom prst="rect">
+            <a:avLst/>
+          </a:prstGeom>
+          <a:noFill/>
+          <a:ln/>
+        </p:spPr>
+        <p:txBody>
+          <a:bodyPr wrap="square" lIns="0" tIns="0" rIns="0" bIns="0" rtlCol="0" anchor="t"/>
+          <a:lstStyle/>
+          <a:p>
+            <a:pPr indent="0" marL="0">
+              <a:buNone/>
+            </a:pPr>
+            <a:r>
+              <a:rPr lang="en-US" sz="1400" dirty="0">
                 <a:solidFill>
                   <a:schemeClr val="tx2"/>
                 </a:solidFill>
               </a:rPr>
-              <a:t>Вероятность, что сорванный договор получит оценку выше успешного. Не зависит от порога и соотношения классов.</a:t>
-            </a:r>
-            <a:endParaRPr lang="en-US" sz="1600" dirty="0"/>
-          </a:p>
-        </p:txBody>
-      </p:sp>
-      <p:sp>
-        <p:nvSpPr>
-          <p:cNvPr id="12" name="Card 135"/>
-          <p:cNvSpPr/>
-          <p:nvPr/>
-        </p:nvSpPr>
-        <p:spPr>
-          <a:xfrm>
-            <a:off x="8275320" y="1463040"/>
-            <a:ext cx="3310128" cy="2240280"/>
-          </a:xfrm>
-          <a:prstGeom prst="roundRect">
-            <a:avLst>
-              <a:gd name="adj" fmla="val 3265"/>
-            </a:avLst>
-          </a:prstGeom>
-          <a:solidFill>
-            <a:schemeClr val="bg2"/>
-          </a:solidFill>
-          <a:ln/>
-        </p:spPr>
-      </p:sp>
-      <p:sp>
-        <p:nvSpPr>
-          <p:cNvPr id="13" name="Text 136"/>
-          <p:cNvSpPr txBox="1"/>
-          <p:nvPr/>
-        </p:nvSpPr>
-        <p:spPr>
-          <a:xfrm>
-            <a:off x="8503920" y="1645920"/>
-            <a:ext cx="2011680" cy="411480"/>
-          </a:xfrm>
-          <a:prstGeom prst="rect">
-            <a:avLst/>
-          </a:prstGeom>
-          <a:noFill/>
-          <a:ln/>
-        </p:spPr>
-        <p:txBody>
-          <a:bodyPr wrap="square" lIns="0" tIns="0" rIns="0" bIns="0" rtlCol="0" anchor="ctr"/>
-          <a:lstStyle/>
-          <a:p>
-            <a:pPr indent="0" marL="0">
-              <a:buNone/>
-            </a:pPr>
-            <a:r>
-              <a:rPr lang="en-US" sz="1800" b="1" dirty="0">
-                <a:solidFill>
-                  <a:schemeClr val="tx1"/>
-                </a:solidFill>
-              </a:rPr>
-              <a:t>PR-AUC</a:t>
-            </a:r>
-            <a:endParaRPr lang="en-US" sz="1800" dirty="0"/>
-          </a:p>
-        </p:txBody>
-      </p:sp>
-      <p:sp>
-        <p:nvSpPr>
-          <p:cNvPr id="14" name="Text 137"/>
-          <p:cNvSpPr txBox="1"/>
-          <p:nvPr/>
-        </p:nvSpPr>
-        <p:spPr>
-          <a:xfrm>
-            <a:off x="10378440" y="1645920"/>
-            <a:ext cx="978408" cy="411480"/>
-          </a:xfrm>
-          <a:prstGeom prst="rect">
-            <a:avLst/>
-          </a:prstGeom>
-          <a:noFill/>
-          <a:ln/>
-        </p:spPr>
-        <p:txBody>
-          <a:bodyPr wrap="square" lIns="0" tIns="0" rIns="0" bIns="0" rtlCol="0" anchor="ctr"/>
-          <a:lstStyle/>
-          <a:p>
-            <a:pPr algn="r" indent="0" marL="0">
-              <a:buNone/>
-            </a:pPr>
-            <a:r>
-              <a:rPr lang="en-US" sz="2200" b="1" dirty="0">
-                <a:solidFill>
-                  <a:schemeClr val="accent2"/>
-                </a:solidFill>
-              </a:rPr>
-              <a:t>0,26</a:t>
-            </a:r>
-            <a:endParaRPr lang="en-US" sz="2200" dirty="0"/>
-          </a:p>
-        </p:txBody>
-      </p:sp>
-      <p:sp>
-        <p:nvSpPr>
-          <p:cNvPr id="15" name="Text 138"/>
-          <p:cNvSpPr txBox="1"/>
-          <p:nvPr/>
-        </p:nvSpPr>
-        <p:spPr>
-          <a:xfrm>
-            <a:off x="8503920" y="2194560"/>
-            <a:ext cx="2852928" cy="1371600"/>
-          </a:xfrm>
-          <a:prstGeom prst="rect">
-            <a:avLst/>
-          </a:prstGeom>
-          <a:noFill/>
-          <a:ln/>
-        </p:spPr>
-        <p:txBody>
-          <a:bodyPr wrap="square" lIns="0" tIns="0" rIns="0" bIns="0" rtlCol="0" anchor="t"/>
-          <a:lstStyle/>
-          <a:p>
-            <a:pPr indent="0" marL="0">
-              <a:buNone/>
-            </a:pPr>
-            <a:r>
-              <a:rPr lang="en-US" sz="1600" dirty="0">
-                <a:solidFill>
-                  <a:schemeClr val="tx2"/>
-                </a:solidFill>
-              </a:rPr>
-              <a:t>Средняя точность по всем уровням полноты. Случайный уровень 0,066, у нас в 4 раза выше. Самая честная при дисбалансе.</a:t>
-            </a:r>
-            <a:endParaRPr lang="en-US" sz="1600" dirty="0"/>
-          </a:p>
-        </p:txBody>
-      </p:sp>
-      <p:sp>
-        <p:nvSpPr>
-          <p:cNvPr id="16" name="Card 139"/>
-          <p:cNvSpPr/>
-          <p:nvPr/>
-        </p:nvSpPr>
-        <p:spPr>
-          <a:xfrm>
-            <a:off x="4800600" y="3886200"/>
-            <a:ext cx="3310128" cy="2240280"/>
-          </a:xfrm>
-          <a:prstGeom prst="roundRect">
-            <a:avLst>
-              <a:gd name="adj" fmla="val 3265"/>
-            </a:avLst>
-          </a:prstGeom>
-          <a:solidFill>
-            <a:schemeClr val="bg2"/>
-          </a:solidFill>
-          <a:ln/>
-        </p:spPr>
-      </p:sp>
-      <p:sp>
-        <p:nvSpPr>
-          <p:cNvPr id="17" name="Text 140"/>
-          <p:cNvSpPr txBox="1"/>
-          <p:nvPr/>
-        </p:nvSpPr>
-        <p:spPr>
-          <a:xfrm>
-            <a:off x="5029200" y="4069080"/>
-            <a:ext cx="2011680" cy="411480"/>
-          </a:xfrm>
-          <a:prstGeom prst="rect">
-            <a:avLst/>
-          </a:prstGeom>
-          <a:noFill/>
-          <a:ln/>
-        </p:spPr>
-        <p:txBody>
-          <a:bodyPr wrap="square" lIns="0" tIns="0" rIns="0" bIns="0" rtlCol="0" anchor="ctr"/>
-          <a:lstStyle/>
-          <a:p>
-            <a:pPr indent="0" marL="0">
-              <a:buNone/>
-            </a:pPr>
-            <a:r>
-              <a:rPr lang="en-US" sz="1800" b="1" dirty="0">
-                <a:solidFill>
-                  <a:schemeClr val="tx1"/>
-                </a:solidFill>
-              </a:rPr>
-              <a:t>F1</a:t>
-            </a:r>
-            <a:endParaRPr lang="en-US" sz="1800" dirty="0"/>
-          </a:p>
-        </p:txBody>
-      </p:sp>
-      <p:sp>
-        <p:nvSpPr>
-          <p:cNvPr id="18" name="Text 141"/>
-          <p:cNvSpPr txBox="1"/>
-          <p:nvPr/>
-        </p:nvSpPr>
-        <p:spPr>
-          <a:xfrm>
-            <a:off x="6903720" y="4069080"/>
-            <a:ext cx="978408" cy="411480"/>
-          </a:xfrm>
-          <a:prstGeom prst="rect">
-            <a:avLst/>
-          </a:prstGeom>
-          <a:noFill/>
-          <a:ln/>
-        </p:spPr>
-        <p:txBody>
-          <a:bodyPr wrap="square" lIns="0" tIns="0" rIns="0" bIns="0" rtlCol="0" anchor="ctr"/>
-          <a:lstStyle/>
-          <a:p>
-            <a:pPr algn="r" indent="0" marL="0">
-              <a:buNone/>
-            </a:pPr>
-            <a:r>
-              <a:rPr lang="en-US" sz="2200" b="1" dirty="0">
-                <a:solidFill>
-                  <a:schemeClr val="accent2"/>
-                </a:solidFill>
-              </a:rPr>
-              <a:t>0,32</a:t>
-            </a:r>
-            <a:endParaRPr lang="en-US" sz="2200" dirty="0"/>
-          </a:p>
-        </p:txBody>
-      </p:sp>
-      <p:sp>
-        <p:nvSpPr>
-          <p:cNvPr id="19" name="Text 142"/>
-          <p:cNvSpPr txBox="1"/>
-          <p:nvPr/>
-        </p:nvSpPr>
-        <p:spPr>
-          <a:xfrm>
-            <a:off x="5029200" y="4617720"/>
-            <a:ext cx="2852928" cy="1371600"/>
-          </a:xfrm>
-          <a:prstGeom prst="rect">
-            <a:avLst/>
-          </a:prstGeom>
-          <a:noFill/>
-          <a:ln/>
-        </p:spPr>
-        <p:txBody>
-          <a:bodyPr wrap="square" lIns="0" tIns="0" rIns="0" bIns="0" rtlCol="0" anchor="t"/>
-          <a:lstStyle/>
-          <a:p>
-            <a:pPr indent="0" marL="0">
-              <a:buNone/>
-            </a:pPr>
-            <a:r>
-              <a:rPr lang="en-US" sz="1600" dirty="0">
-                <a:solidFill>
-                  <a:schemeClr val="tx2"/>
-                </a:solidFill>
-              </a:rPr>
-              <a:t>Баланс точности (0,26) и полноты (0,42) при одном пороге, подобранном только на validation.</a:t>
-            </a:r>
-            <a:endParaRPr lang="en-US" sz="1600" dirty="0"/>
-          </a:p>
-        </p:txBody>
-      </p:sp>
-      <p:sp>
-        <p:nvSpPr>
-          <p:cNvPr id="20" name="Card 143"/>
-          <p:cNvSpPr/>
-          <p:nvPr/>
-        </p:nvSpPr>
-        <p:spPr>
-          <a:xfrm>
-            <a:off x="8275320" y="3886200"/>
-            <a:ext cx="3310128" cy="2240280"/>
-          </a:xfrm>
-          <a:prstGeom prst="roundRect">
-            <a:avLst>
-              <a:gd name="adj" fmla="val 3265"/>
-            </a:avLst>
-          </a:prstGeom>
-          <a:solidFill>
-            <a:schemeClr val="bg2"/>
-          </a:solidFill>
-          <a:ln/>
-        </p:spPr>
-      </p:sp>
-      <p:sp>
-        <p:nvSpPr>
-          <p:cNvPr id="21" name="Text 144"/>
-          <p:cNvSpPr txBox="1"/>
-          <p:nvPr/>
-        </p:nvSpPr>
-        <p:spPr>
-          <a:xfrm>
-            <a:off x="8503920" y="4069080"/>
-            <a:ext cx="2011680" cy="411480"/>
-          </a:xfrm>
-          <a:prstGeom prst="rect">
-            <a:avLst/>
-          </a:prstGeom>
-          <a:noFill/>
-          <a:ln/>
-        </p:spPr>
-        <p:txBody>
-          <a:bodyPr wrap="square" lIns="0" tIns="0" rIns="0" bIns="0" rtlCol="0" anchor="ctr"/>
-          <a:lstStyle/>
-          <a:p>
-            <a:pPr indent="0" marL="0">
-              <a:buNone/>
-            </a:pPr>
-            <a:r>
-              <a:rPr lang="en-US" sz="1800" b="1" dirty="0">
-                <a:solidFill>
-                  <a:schemeClr val="tx1"/>
-                </a:solidFill>
-              </a:rPr>
-              <a:t>Precision@1 %</a:t>
-            </a:r>
-            <a:endParaRPr lang="en-US" sz="1800" dirty="0"/>
-          </a:p>
-        </p:txBody>
-      </p:sp>
-      <p:sp>
-        <p:nvSpPr>
-          <p:cNvPr id="22" name="Text 145"/>
-          <p:cNvSpPr txBox="1"/>
-          <p:nvPr/>
-        </p:nvSpPr>
-        <p:spPr>
-          <a:xfrm>
-            <a:off x="10378440" y="4069080"/>
-            <a:ext cx="978408" cy="411480"/>
-          </a:xfrm>
-          <a:prstGeom prst="rect">
-            <a:avLst/>
-          </a:prstGeom>
-          <a:noFill/>
-          <a:ln/>
-        </p:spPr>
-        <p:txBody>
-          <a:bodyPr wrap="square" lIns="0" tIns="0" rIns="0" bIns="0" rtlCol="0" anchor="ctr"/>
-          <a:lstStyle/>
-          <a:p>
-            <a:pPr algn="r" indent="0" marL="0">
-              <a:buNone/>
-            </a:pPr>
-            <a:r>
-              <a:rPr lang="en-US" sz="2200" b="1" dirty="0">
-                <a:solidFill>
-                  <a:schemeClr val="accent2"/>
-                </a:solidFill>
-              </a:rPr>
-              <a:t>0,50</a:t>
-            </a:r>
-            <a:endParaRPr lang="en-US" sz="2200" dirty="0"/>
-          </a:p>
-        </p:txBody>
-      </p:sp>
-      <p:sp>
-        <p:nvSpPr>
-          <p:cNvPr id="23" name="Text 146"/>
-          <p:cNvSpPr txBox="1"/>
-          <p:nvPr/>
-        </p:nvSpPr>
-        <p:spPr>
-          <a:xfrm>
-            <a:off x="8503920" y="4617720"/>
-            <a:ext cx="2852928" cy="1371600"/>
-          </a:xfrm>
-          <a:prstGeom prst="rect">
-            <a:avLst/>
-          </a:prstGeom>
-          <a:noFill/>
-          <a:ln/>
-        </p:spPr>
-        <p:txBody>
-          <a:bodyPr wrap="square" lIns="0" tIns="0" rIns="0" bIns="0" rtlCol="0" anchor="t"/>
-          <a:lstStyle/>
-          <a:p>
-            <a:pPr indent="0" marL="0">
-              <a:buNone/>
-            </a:pPr>
-            <a:r>
-              <a:rPr lang="en-US" sz="1600" dirty="0">
-                <a:solidFill>
-                  <a:schemeClr val="tx2"/>
-                </a:solidFill>
-              </a:rPr>
-              <a:t>Качество верхушки списка: соответствует ограниченным возможностям аудитора.</a:t>
-            </a:r>
-            <a:endParaRPr lang="en-US" sz="1600" dirty="0"/>
+              <a:t>Градиентный бустинг и трансформер запланированы на A3: им нужна модель для сравнения. SVM и kNN не масштабируются на 266 тыс. строк. Наивный Байес: признаки коррелируют.</a:t>
+            </a:r>
+            <a:endParaRPr lang="en-US" sz="1400" dirty="0"/>
           </a:p>
         </p:txBody>
       </p:sp>
@@ -7530,6 +8748,800 @@
                   <a:schemeClr val="tx1"/>
                 </a:solidFill>
               </a:rPr>
+              <a:t>Метрики: почему accuracy не подходит</a:t>
+            </a:r>
+            <a:endParaRPr lang="en-US" sz="3200" dirty="0"/>
+          </a:p>
+        </p:txBody>
+      </p:sp>
+      <p:sp>
+        <p:nvSpPr>
+          <p:cNvPr id="3" name="Card 148"/>
+          <p:cNvSpPr/>
+          <p:nvPr/>
+        </p:nvSpPr>
+        <p:spPr>
+          <a:xfrm>
+            <a:off x="548640" y="1463040"/>
+            <a:ext cx="3931920" cy="4663440"/>
+          </a:xfrm>
+          <a:prstGeom prst="roundRect">
+            <a:avLst>
+              <a:gd name="adj" fmla="val 1860"/>
+            </a:avLst>
+          </a:prstGeom>
+          <a:solidFill>
+            <a:schemeClr val="bg2"/>
+          </a:solidFill>
+          <a:ln/>
+        </p:spPr>
+      </p:sp>
+      <p:sp>
+        <p:nvSpPr>
+          <p:cNvPr id="4" name="Text 149"/>
+          <p:cNvSpPr txBox="1"/>
+          <p:nvPr/>
+        </p:nvSpPr>
+        <p:spPr>
+          <a:xfrm>
+            <a:off x="822960" y="1737360"/>
+            <a:ext cx="3383280" cy="914400"/>
+          </a:xfrm>
+          <a:prstGeom prst="rect">
+            <a:avLst/>
+          </a:prstGeom>
+          <a:noFill/>
+          <a:ln/>
+        </p:spPr>
+        <p:txBody>
+          <a:bodyPr wrap="square" lIns="0" tIns="0" rIns="0" bIns="0" rtlCol="0" anchor="t"/>
+          <a:lstStyle/>
+          <a:p>
+            <a:pPr indent="0" marL="0">
+              <a:buNone/>
+            </a:pPr>
+            <a:r>
+              <a:rPr lang="en-US" sz="5400" b="1" dirty="0">
+                <a:solidFill>
+                  <a:schemeClr val="accent1"/>
+                </a:solidFill>
+              </a:rPr>
+              <a:t>93,4 %</a:t>
+            </a:r>
+            <a:endParaRPr lang="en-US" sz="5400" dirty="0"/>
+          </a:p>
+        </p:txBody>
+      </p:sp>
+      <p:sp>
+        <p:nvSpPr>
+          <p:cNvPr id="5" name="Text 150"/>
+          <p:cNvSpPr txBox="1"/>
+          <p:nvPr/>
+        </p:nvSpPr>
+        <p:spPr>
+          <a:xfrm>
+            <a:off x="822960" y="2743200"/>
+            <a:ext cx="3383280" cy="640080"/>
+          </a:xfrm>
+          <a:prstGeom prst="rect">
+            <a:avLst/>
+          </a:prstGeom>
+          <a:noFill/>
+          <a:ln/>
+        </p:spPr>
+        <p:txBody>
+          <a:bodyPr wrap="square" lIns="0" tIns="0" rIns="0" bIns="0" rtlCol="0" anchor="t"/>
+          <a:lstStyle/>
+          <a:p>
+            <a:pPr indent="0" marL="0">
+              <a:buNone/>
+            </a:pPr>
+            <a:r>
+              <a:rPr lang="en-US" sz="1600" dirty="0">
+                <a:solidFill>
+                  <a:schemeClr val="tx1"/>
+                </a:solidFill>
+              </a:rPr>
+              <a:t>accuracy у «модели», которая никого не помечает</a:t>
+            </a:r>
+            <a:endParaRPr lang="en-US" sz="1600" dirty="0"/>
+          </a:p>
+        </p:txBody>
+      </p:sp>
+      <p:sp>
+        <p:nvSpPr>
+          <p:cNvPr id="6" name="Text 151"/>
+          <p:cNvSpPr txBox="1"/>
+          <p:nvPr/>
+        </p:nvSpPr>
+        <p:spPr>
+          <a:xfrm>
+            <a:off x="822960" y="3520440"/>
+            <a:ext cx="3383280" cy="365760"/>
+          </a:xfrm>
+          <a:prstGeom prst="rect">
+            <a:avLst/>
+          </a:prstGeom>
+          <a:noFill/>
+          <a:ln/>
+        </p:spPr>
+        <p:txBody>
+          <a:bodyPr wrap="square" lIns="0" tIns="0" rIns="0" bIns="0" rtlCol="0" anchor="t"/>
+          <a:lstStyle/>
+          <a:p>
+            <a:pPr indent="0" marL="0">
+              <a:buNone/>
+            </a:pPr>
+            <a:r>
+              <a:rPr lang="en-US" sz="1600" b="1" dirty="0">
+                <a:solidFill>
+                  <a:schemeClr val="tx1"/>
+                </a:solidFill>
+              </a:rPr>
+              <a:t>…и не находит ни одного срыва</a:t>
+            </a:r>
+            <a:endParaRPr lang="en-US" sz="1600" dirty="0"/>
+          </a:p>
+        </p:txBody>
+      </p:sp>
+      <p:sp>
+        <p:nvSpPr>
+          <p:cNvPr id="7" name="Text 152"/>
+          <p:cNvSpPr txBox="1"/>
+          <p:nvPr/>
+        </p:nvSpPr>
+        <p:spPr>
+          <a:xfrm>
+            <a:off x="822960" y="4206240"/>
+            <a:ext cx="3383280" cy="1737360"/>
+          </a:xfrm>
+          <a:prstGeom prst="rect">
+            <a:avLst/>
+          </a:prstGeom>
+          <a:noFill/>
+          <a:ln/>
+        </p:spPr>
+        <p:txBody>
+          <a:bodyPr wrap="square" lIns="0" tIns="0" rIns="0" bIns="0" rtlCol="0" anchor="t"/>
+          <a:lstStyle/>
+          <a:p>
+            <a:pPr indent="0" marL="0">
+              <a:buNone/>
+            </a:pPr>
+            <a:r>
+              <a:rPr lang="en-US" sz="1600" dirty="0">
+                <a:solidFill>
+                  <a:schemeClr val="tx2"/>
+                </a:solidFill>
+              </a:rPr>
+              <a:t>При 6,6 % срывов accuracy поощряет бездействие. У полезных моделей она ниже, около 0,89, потому что они решаются помечать закупки.</a:t>
+            </a:r>
+            <a:endParaRPr lang="en-US" sz="1600" dirty="0"/>
+          </a:p>
+        </p:txBody>
+      </p:sp>
+      <p:sp>
+        <p:nvSpPr>
+          <p:cNvPr id="8" name="Card 153"/>
+          <p:cNvSpPr/>
+          <p:nvPr/>
+        </p:nvSpPr>
+        <p:spPr>
+          <a:xfrm>
+            <a:off x="4800600" y="1463040"/>
+            <a:ext cx="3310128" cy="2240280"/>
+          </a:xfrm>
+          <a:prstGeom prst="roundRect">
+            <a:avLst>
+              <a:gd name="adj" fmla="val 3265"/>
+            </a:avLst>
+          </a:prstGeom>
+          <a:solidFill>
+            <a:schemeClr val="bg2"/>
+          </a:solidFill>
+          <a:ln/>
+        </p:spPr>
+      </p:sp>
+      <p:sp>
+        <p:nvSpPr>
+          <p:cNvPr id="9" name="Text 154"/>
+          <p:cNvSpPr txBox="1"/>
+          <p:nvPr/>
+        </p:nvSpPr>
+        <p:spPr>
+          <a:xfrm>
+            <a:off x="5029200" y="1645920"/>
+            <a:ext cx="2011680" cy="411480"/>
+          </a:xfrm>
+          <a:prstGeom prst="rect">
+            <a:avLst/>
+          </a:prstGeom>
+          <a:noFill/>
+          <a:ln/>
+        </p:spPr>
+        <p:txBody>
+          <a:bodyPr wrap="square" lIns="0" tIns="0" rIns="0" bIns="0" rtlCol="0" anchor="ctr"/>
+          <a:lstStyle/>
+          <a:p>
+            <a:pPr indent="0" marL="0">
+              <a:buNone/>
+            </a:pPr>
+            <a:r>
+              <a:rPr lang="en-US" sz="1800" b="1" dirty="0">
+                <a:solidFill>
+                  <a:schemeClr val="tx1"/>
+                </a:solidFill>
+              </a:rPr>
+              <a:t>ROC-AUC</a:t>
+            </a:r>
+            <a:endParaRPr lang="en-US" sz="1800" dirty="0"/>
+          </a:p>
+        </p:txBody>
+      </p:sp>
+      <p:sp>
+        <p:nvSpPr>
+          <p:cNvPr id="10" name="Text 155"/>
+          <p:cNvSpPr txBox="1"/>
+          <p:nvPr/>
+        </p:nvSpPr>
+        <p:spPr>
+          <a:xfrm>
+            <a:off x="6903720" y="1645920"/>
+            <a:ext cx="978408" cy="411480"/>
+          </a:xfrm>
+          <a:prstGeom prst="rect">
+            <a:avLst/>
+          </a:prstGeom>
+          <a:noFill/>
+          <a:ln/>
+        </p:spPr>
+        <p:txBody>
+          <a:bodyPr wrap="square" lIns="0" tIns="0" rIns="0" bIns="0" rtlCol="0" anchor="ctr"/>
+          <a:lstStyle/>
+          <a:p>
+            <a:pPr algn="r" indent="0" marL="0">
+              <a:buNone/>
+            </a:pPr>
+            <a:r>
+              <a:rPr lang="en-US" sz="2200" b="1" dirty="0">
+                <a:solidFill>
+                  <a:schemeClr val="accent2"/>
+                </a:solidFill>
+              </a:rPr>
+              <a:t>0,79</a:t>
+            </a:r>
+            <a:endParaRPr lang="en-US" sz="2200" dirty="0"/>
+          </a:p>
+        </p:txBody>
+      </p:sp>
+      <p:sp>
+        <p:nvSpPr>
+          <p:cNvPr id="11" name="Text 156"/>
+          <p:cNvSpPr txBox="1"/>
+          <p:nvPr/>
+        </p:nvSpPr>
+        <p:spPr>
+          <a:xfrm>
+            <a:off x="5029200" y="2194560"/>
+            <a:ext cx="2852928" cy="1371600"/>
+          </a:xfrm>
+          <a:prstGeom prst="rect">
+            <a:avLst/>
+          </a:prstGeom>
+          <a:noFill/>
+          <a:ln/>
+        </p:spPr>
+        <p:txBody>
+          <a:bodyPr wrap="square" lIns="0" tIns="0" rIns="0" bIns="0" rtlCol="0" anchor="t"/>
+          <a:lstStyle/>
+          <a:p>
+            <a:pPr indent="0" marL="0">
+              <a:buNone/>
+            </a:pPr>
+            <a:r>
+              <a:rPr lang="en-US" sz="1600" dirty="0">
+                <a:solidFill>
+                  <a:schemeClr val="tx2"/>
+                </a:solidFill>
+              </a:rPr>
+              <a:t>Вероятность, что сорванный договор получит оценку выше успешного. Не зависит от порога и соотношения классов.</a:t>
+            </a:r>
+            <a:endParaRPr lang="en-US" sz="1600" dirty="0"/>
+          </a:p>
+        </p:txBody>
+      </p:sp>
+      <p:sp>
+        <p:nvSpPr>
+          <p:cNvPr id="12" name="Card 157"/>
+          <p:cNvSpPr/>
+          <p:nvPr/>
+        </p:nvSpPr>
+        <p:spPr>
+          <a:xfrm>
+            <a:off x="8275320" y="1463040"/>
+            <a:ext cx="3310128" cy="2240280"/>
+          </a:xfrm>
+          <a:prstGeom prst="roundRect">
+            <a:avLst>
+              <a:gd name="adj" fmla="val 3265"/>
+            </a:avLst>
+          </a:prstGeom>
+          <a:solidFill>
+            <a:schemeClr val="bg2"/>
+          </a:solidFill>
+          <a:ln/>
+        </p:spPr>
+      </p:sp>
+      <p:sp>
+        <p:nvSpPr>
+          <p:cNvPr id="13" name="Text 158"/>
+          <p:cNvSpPr txBox="1"/>
+          <p:nvPr/>
+        </p:nvSpPr>
+        <p:spPr>
+          <a:xfrm>
+            <a:off x="8503920" y="1645920"/>
+            <a:ext cx="2011680" cy="411480"/>
+          </a:xfrm>
+          <a:prstGeom prst="rect">
+            <a:avLst/>
+          </a:prstGeom>
+          <a:noFill/>
+          <a:ln/>
+        </p:spPr>
+        <p:txBody>
+          <a:bodyPr wrap="square" lIns="0" tIns="0" rIns="0" bIns="0" rtlCol="0" anchor="ctr"/>
+          <a:lstStyle/>
+          <a:p>
+            <a:pPr indent="0" marL="0">
+              <a:buNone/>
+            </a:pPr>
+            <a:r>
+              <a:rPr lang="en-US" sz="1800" b="1" dirty="0">
+                <a:solidFill>
+                  <a:schemeClr val="tx1"/>
+                </a:solidFill>
+              </a:rPr>
+              <a:t>PR-AUC</a:t>
+            </a:r>
+            <a:endParaRPr lang="en-US" sz="1800" dirty="0"/>
+          </a:p>
+        </p:txBody>
+      </p:sp>
+      <p:sp>
+        <p:nvSpPr>
+          <p:cNvPr id="14" name="Text 159"/>
+          <p:cNvSpPr txBox="1"/>
+          <p:nvPr/>
+        </p:nvSpPr>
+        <p:spPr>
+          <a:xfrm>
+            <a:off x="10378440" y="1645920"/>
+            <a:ext cx="978408" cy="411480"/>
+          </a:xfrm>
+          <a:prstGeom prst="rect">
+            <a:avLst/>
+          </a:prstGeom>
+          <a:noFill/>
+          <a:ln/>
+        </p:spPr>
+        <p:txBody>
+          <a:bodyPr wrap="square" lIns="0" tIns="0" rIns="0" bIns="0" rtlCol="0" anchor="ctr"/>
+          <a:lstStyle/>
+          <a:p>
+            <a:pPr algn="r" indent="0" marL="0">
+              <a:buNone/>
+            </a:pPr>
+            <a:r>
+              <a:rPr lang="en-US" sz="2200" b="1" dirty="0">
+                <a:solidFill>
+                  <a:schemeClr val="accent2"/>
+                </a:solidFill>
+              </a:rPr>
+              <a:t>0,26</a:t>
+            </a:r>
+            <a:endParaRPr lang="en-US" sz="2200" dirty="0"/>
+          </a:p>
+        </p:txBody>
+      </p:sp>
+      <p:sp>
+        <p:nvSpPr>
+          <p:cNvPr id="15" name="Text 160"/>
+          <p:cNvSpPr txBox="1"/>
+          <p:nvPr/>
+        </p:nvSpPr>
+        <p:spPr>
+          <a:xfrm>
+            <a:off x="8503920" y="2194560"/>
+            <a:ext cx="2852928" cy="1371600"/>
+          </a:xfrm>
+          <a:prstGeom prst="rect">
+            <a:avLst/>
+          </a:prstGeom>
+          <a:noFill/>
+          <a:ln/>
+        </p:spPr>
+        <p:txBody>
+          <a:bodyPr wrap="square" lIns="0" tIns="0" rIns="0" bIns="0" rtlCol="0" anchor="t"/>
+          <a:lstStyle/>
+          <a:p>
+            <a:pPr indent="0" marL="0">
+              <a:buNone/>
+            </a:pPr>
+            <a:r>
+              <a:rPr lang="en-US" sz="1600" dirty="0">
+                <a:solidFill>
+                  <a:schemeClr val="tx2"/>
+                </a:solidFill>
+              </a:rPr>
+              <a:t>Средняя точность по всем уровням полноты. Случайный уровень 0,066, у нас в 4 раза выше. Самая честная при дисбалансе.</a:t>
+            </a:r>
+            <a:endParaRPr lang="en-US" sz="1600" dirty="0"/>
+          </a:p>
+        </p:txBody>
+      </p:sp>
+      <p:sp>
+        <p:nvSpPr>
+          <p:cNvPr id="16" name="Card 161"/>
+          <p:cNvSpPr/>
+          <p:nvPr/>
+        </p:nvSpPr>
+        <p:spPr>
+          <a:xfrm>
+            <a:off x="4800600" y="3886200"/>
+            <a:ext cx="3310128" cy="2240280"/>
+          </a:xfrm>
+          <a:prstGeom prst="roundRect">
+            <a:avLst>
+              <a:gd name="adj" fmla="val 3265"/>
+            </a:avLst>
+          </a:prstGeom>
+          <a:solidFill>
+            <a:schemeClr val="bg2"/>
+          </a:solidFill>
+          <a:ln/>
+        </p:spPr>
+      </p:sp>
+      <p:sp>
+        <p:nvSpPr>
+          <p:cNvPr id="17" name="Text 162"/>
+          <p:cNvSpPr txBox="1"/>
+          <p:nvPr/>
+        </p:nvSpPr>
+        <p:spPr>
+          <a:xfrm>
+            <a:off x="5029200" y="4069080"/>
+            <a:ext cx="2011680" cy="411480"/>
+          </a:xfrm>
+          <a:prstGeom prst="rect">
+            <a:avLst/>
+          </a:prstGeom>
+          <a:noFill/>
+          <a:ln/>
+        </p:spPr>
+        <p:txBody>
+          <a:bodyPr wrap="square" lIns="0" tIns="0" rIns="0" bIns="0" rtlCol="0" anchor="ctr"/>
+          <a:lstStyle/>
+          <a:p>
+            <a:pPr indent="0" marL="0">
+              <a:buNone/>
+            </a:pPr>
+            <a:r>
+              <a:rPr lang="en-US" sz="1800" b="1" dirty="0">
+                <a:solidFill>
+                  <a:schemeClr val="tx1"/>
+                </a:solidFill>
+              </a:rPr>
+              <a:t>F1</a:t>
+            </a:r>
+            <a:endParaRPr lang="en-US" sz="1800" dirty="0"/>
+          </a:p>
+        </p:txBody>
+      </p:sp>
+      <p:sp>
+        <p:nvSpPr>
+          <p:cNvPr id="18" name="Text 163"/>
+          <p:cNvSpPr txBox="1"/>
+          <p:nvPr/>
+        </p:nvSpPr>
+        <p:spPr>
+          <a:xfrm>
+            <a:off x="6903720" y="4069080"/>
+            <a:ext cx="978408" cy="411480"/>
+          </a:xfrm>
+          <a:prstGeom prst="rect">
+            <a:avLst/>
+          </a:prstGeom>
+          <a:noFill/>
+          <a:ln/>
+        </p:spPr>
+        <p:txBody>
+          <a:bodyPr wrap="square" lIns="0" tIns="0" rIns="0" bIns="0" rtlCol="0" anchor="ctr"/>
+          <a:lstStyle/>
+          <a:p>
+            <a:pPr algn="r" indent="0" marL="0">
+              <a:buNone/>
+            </a:pPr>
+            <a:r>
+              <a:rPr lang="en-US" sz="2200" b="1" dirty="0">
+                <a:solidFill>
+                  <a:schemeClr val="accent2"/>
+                </a:solidFill>
+              </a:rPr>
+              <a:t>0,32</a:t>
+            </a:r>
+            <a:endParaRPr lang="en-US" sz="2200" dirty="0"/>
+          </a:p>
+        </p:txBody>
+      </p:sp>
+      <p:sp>
+        <p:nvSpPr>
+          <p:cNvPr id="19" name="Text 164"/>
+          <p:cNvSpPr txBox="1"/>
+          <p:nvPr/>
+        </p:nvSpPr>
+        <p:spPr>
+          <a:xfrm>
+            <a:off x="5029200" y="4617720"/>
+            <a:ext cx="2852928" cy="1371600"/>
+          </a:xfrm>
+          <a:prstGeom prst="rect">
+            <a:avLst/>
+          </a:prstGeom>
+          <a:noFill/>
+          <a:ln/>
+        </p:spPr>
+        <p:txBody>
+          <a:bodyPr wrap="square" lIns="0" tIns="0" rIns="0" bIns="0" rtlCol="0" anchor="t"/>
+          <a:lstStyle/>
+          <a:p>
+            <a:pPr indent="0" marL="0">
+              <a:buNone/>
+            </a:pPr>
+            <a:r>
+              <a:rPr lang="en-US" sz="1600" dirty="0">
+                <a:solidFill>
+                  <a:schemeClr val="tx2"/>
+                </a:solidFill>
+              </a:rPr>
+              <a:t>Баланс точности (0,26) и полноты (0,42) при одном пороге, подобранном только на validation.</a:t>
+            </a:r>
+            <a:endParaRPr lang="en-US" sz="1600" dirty="0"/>
+          </a:p>
+        </p:txBody>
+      </p:sp>
+      <p:sp>
+        <p:nvSpPr>
+          <p:cNvPr id="20" name="Card 165"/>
+          <p:cNvSpPr/>
+          <p:nvPr/>
+        </p:nvSpPr>
+        <p:spPr>
+          <a:xfrm>
+            <a:off x="8275320" y="3886200"/>
+            <a:ext cx="3310128" cy="2240280"/>
+          </a:xfrm>
+          <a:prstGeom prst="roundRect">
+            <a:avLst>
+              <a:gd name="adj" fmla="val 3265"/>
+            </a:avLst>
+          </a:prstGeom>
+          <a:solidFill>
+            <a:schemeClr val="bg2"/>
+          </a:solidFill>
+          <a:ln/>
+        </p:spPr>
+      </p:sp>
+      <p:sp>
+        <p:nvSpPr>
+          <p:cNvPr id="21" name="Text 166"/>
+          <p:cNvSpPr txBox="1"/>
+          <p:nvPr/>
+        </p:nvSpPr>
+        <p:spPr>
+          <a:xfrm>
+            <a:off x="8503920" y="4069080"/>
+            <a:ext cx="2011680" cy="411480"/>
+          </a:xfrm>
+          <a:prstGeom prst="rect">
+            <a:avLst/>
+          </a:prstGeom>
+          <a:noFill/>
+          <a:ln/>
+        </p:spPr>
+        <p:txBody>
+          <a:bodyPr wrap="square" lIns="0" tIns="0" rIns="0" bIns="0" rtlCol="0" anchor="ctr"/>
+          <a:lstStyle/>
+          <a:p>
+            <a:pPr indent="0" marL="0">
+              <a:buNone/>
+            </a:pPr>
+            <a:r>
+              <a:rPr lang="en-US" sz="1800" b="1" dirty="0">
+                <a:solidFill>
+                  <a:schemeClr val="tx1"/>
+                </a:solidFill>
+              </a:rPr>
+              <a:t>Precision@1 %</a:t>
+            </a:r>
+            <a:endParaRPr lang="en-US" sz="1800" dirty="0"/>
+          </a:p>
+        </p:txBody>
+      </p:sp>
+      <p:sp>
+        <p:nvSpPr>
+          <p:cNvPr id="22" name="Text 167"/>
+          <p:cNvSpPr txBox="1"/>
+          <p:nvPr/>
+        </p:nvSpPr>
+        <p:spPr>
+          <a:xfrm>
+            <a:off x="10378440" y="4069080"/>
+            <a:ext cx="978408" cy="411480"/>
+          </a:xfrm>
+          <a:prstGeom prst="rect">
+            <a:avLst/>
+          </a:prstGeom>
+          <a:noFill/>
+          <a:ln/>
+        </p:spPr>
+        <p:txBody>
+          <a:bodyPr wrap="square" lIns="0" tIns="0" rIns="0" bIns="0" rtlCol="0" anchor="ctr"/>
+          <a:lstStyle/>
+          <a:p>
+            <a:pPr algn="r" indent="0" marL="0">
+              <a:buNone/>
+            </a:pPr>
+            <a:r>
+              <a:rPr lang="en-US" sz="2200" b="1" dirty="0">
+                <a:solidFill>
+                  <a:schemeClr val="accent2"/>
+                </a:solidFill>
+              </a:rPr>
+              <a:t>0,50</a:t>
+            </a:r>
+            <a:endParaRPr lang="en-US" sz="2200" dirty="0"/>
+          </a:p>
+        </p:txBody>
+      </p:sp>
+      <p:sp>
+        <p:nvSpPr>
+          <p:cNvPr id="23" name="Text 168"/>
+          <p:cNvSpPr txBox="1"/>
+          <p:nvPr/>
+        </p:nvSpPr>
+        <p:spPr>
+          <a:xfrm>
+            <a:off x="8503920" y="4617720"/>
+            <a:ext cx="2852928" cy="1371600"/>
+          </a:xfrm>
+          <a:prstGeom prst="rect">
+            <a:avLst/>
+          </a:prstGeom>
+          <a:noFill/>
+          <a:ln/>
+        </p:spPr>
+        <p:txBody>
+          <a:bodyPr wrap="square" lIns="0" tIns="0" rIns="0" bIns="0" rtlCol="0" anchor="t"/>
+          <a:lstStyle/>
+          <a:p>
+            <a:pPr indent="0" marL="0">
+              <a:buNone/>
+            </a:pPr>
+            <a:r>
+              <a:rPr lang="en-US" sz="1600" dirty="0">
+                <a:solidFill>
+                  <a:schemeClr val="tx2"/>
+                </a:solidFill>
+              </a:rPr>
+              <a:t>Качество верхушки списка: соответствует ограниченным возможностям аудитора.</a:t>
+            </a:r>
+            <a:endParaRPr lang="en-US" sz="1600" dirty="0"/>
+          </a:p>
+        </p:txBody>
+      </p:sp>
+      <p:sp>
+        <p:nvSpPr>
+          <p:cNvPr id="25" name="Slide Number Placeholder 0"/>
+          <p:cNvSpPr>
+            <a:spLocks noGrp="1"/>
+          </p:cNvSpPr>
+          <p:nvPr>
+            <p:ph type="sldNum" sz="quarter" idx="4294967295"/>
+          </p:nvPr>
+        </p:nvSpPr>
+        <p:spPr>
+          <a:xfrm>
+            <a:off x="11064240" y="6419088"/>
+            <a:ext cx="576072" cy="274320"/>
+          </a:xfrm>
+          <a:prstGeom prst="rect">
+            <a:avLst/>
+          </a:prstGeom>
+          <a:extLst>
+            <a:ext uri="{C572A759-6A51-4108-AA02-DFA0A04FC94B}">
+              <ma14:wrappingTextBoxFlag xmlns:ma14="http://schemas.microsoft.com/office/mac/drawingml/2011/main" val="0"/>
+            </a:ext>
+          </a:extLst>
+        </p:spPr>
+        <p:txBody>
+          <a:bodyPr/>
+          <a:lstStyle>
+            <a:lvl1pPr>
+              <a:defRPr sz="1000">
+                <a:solidFill>
+                  <a:schemeClr val="accent5"/>
+                </a:solidFill>
+              </a:defRPr>
+            </a:lvl1pPr>
+          </a:lstStyle>
+          <a:p>
+            <a:pPr algn="r"/>
+            <a:fld id="{F7021451-1387-4CA6-816F-3879F97B5CBC}" type="slidenum">
+              <a:rPr b="0" lang="en-US"/>
+              <a:t>7</a:t>
+            </a:fld>
+            <a:endParaRPr lang="en-US"/>
+          </a:p>
+        </p:txBody>
+      </p:sp>
+    </p:spTree>
+  </p:cSld>
+  <p:clrMapOvr>
+    <a:masterClrMapping/>
+  </p:clrMapOvr>
+</p:sld>
+</file>
+
+<file path=ppt/slides/slide8.xml><?xml version="1.0" encoding="utf-8"?>
+<p:sld xmlns:a="http://schemas.openxmlformats.org/drawingml/2006/main" xmlns:r="http://schemas.openxmlformats.org/officeDocument/2006/relationships" xmlns:p="http://schemas.openxmlformats.org/presentationml/2006/main">
+  <p:cSld name="Slide 8">
+    <p:spTree>
+      <p:nvGrpSpPr>
+        <p:cNvPr id="1" name=""/>
+        <p:cNvGrpSpPr/>
+        <p:nvPr/>
+      </p:nvGrpSpPr>
+      <p:grpSpPr>
+        <a:xfrm>
+          <a:off x="0" y="0"/>
+          <a:ext cx="0" cy="0"/>
+          <a:chOff x="0" y="0"/>
+          <a:chExt cx="0" cy="0"/>
+        </a:xfrm>
+      </p:grpSpPr>
+      <p:sp>
+        <p:nvSpPr>
+          <p:cNvPr id="2" name="Text 0"/>
+          <p:cNvSpPr/>
+          <p:nvPr>
+            <p:ph idx="100" type="title" hasCustomPrompt="1"/>
+          </p:nvPr>
+        </p:nvSpPr>
+        <p:spPr>
+          <a:xfrm>
+            <a:off x="548640" y="365760"/>
+            <a:ext cx="11064240" cy="777240"/>
+          </a:xfrm>
+          <a:prstGeom prst="rect">
+            <a:avLst/>
+          </a:prstGeom>
+          <a:noFill/>
+          <a:ln/>
+        </p:spPr>
+        <p:txBody>
+          <a:bodyPr wrap="square" lIns="0" tIns="0" rIns="0" bIns="0" rtlCol="0" anchor="ctr"/>
+          <a:lstStyle/>
+          <a:p>
+            <a:pPr algn="l" indent="0" marL="0">
+              <a:buNone/>
+            </a:pPr>
+            <a:r>
+              <a:rPr lang="en-US" sz="3200" b="1" dirty="0">
+                <a:solidFill>
+                  <a:schemeClr val="tx1"/>
+                </a:solidFill>
+              </a:rPr>
               <a:t>Результаты: намного лучше случайного отбора</a:t>
             </a:r>
             <a:endParaRPr lang="en-US" sz="3200" dirty="0"/>
@@ -7538,7 +9550,7 @@
       </p:sp>
       <p:graphicFrame>
         <p:nvGraphicFramePr>
-          <p:cNvPr id="8" name="Results table"/>
+          <p:cNvPr id="9" name="Results table"/>
           <p:cNvGraphicFramePr>
             <a:graphicFrameLocks noGrp="1"/>
           </p:cNvGraphicFramePr>
@@ -9358,7 +11370,7 @@
       </p:graphicFrame>
       <p:sp>
         <p:nvSpPr>
-          <p:cNvPr id="4" name="Badge 147"/>
+          <p:cNvPr id="4" name="Badge 169"/>
           <p:cNvSpPr/>
           <p:nvPr/>
         </p:nvSpPr>
@@ -9378,7 +11390,7 @@
       </p:sp>
       <p:sp>
         <p:nvSpPr>
-          <p:cNvPr id="5" name="Text 148"/>
+          <p:cNvPr id="5" name="Text 170"/>
           <p:cNvSpPr txBox="1"/>
           <p:nvPr/>
         </p:nvSpPr>
@@ -9414,7 +11426,7 @@
       </p:sp>
       <p:sp>
         <p:nvSpPr>
-          <p:cNvPr id="6" name="Text 149"/>
+          <p:cNvPr id="6" name="Text 171"/>
           <p:cNvSpPr txBox="1"/>
           <p:nvPr/>
         </p:nvSpPr>
@@ -9450,7 +11462,7 @@
       </p:sp>
       <p:sp>
         <p:nvSpPr>
-          <p:cNvPr id="7" name="Badge 150"/>
+          <p:cNvPr id="7" name="Badge 172"/>
           <p:cNvSpPr/>
           <p:nvPr/>
         </p:nvSpPr>
@@ -9470,7 +11482,7 @@
       </p:sp>
       <p:sp>
         <p:nvSpPr>
-          <p:cNvPr id="8" name="Text 151"/>
+          <p:cNvPr id="8" name="Text 173"/>
           <p:cNvSpPr txBox="1"/>
           <p:nvPr/>
         </p:nvSpPr>
@@ -9506,7 +11518,7 @@
       </p:sp>
       <p:sp>
         <p:nvSpPr>
-          <p:cNvPr id="9" name="Text 152"/>
+          <p:cNvPr id="9" name="Text 174"/>
           <p:cNvSpPr txBox="1"/>
           <p:nvPr/>
         </p:nvSpPr>
@@ -9542,7 +11554,7 @@
       </p:sp>
       <p:sp>
         <p:nvSpPr>
-          <p:cNvPr id="10" name="Badge 153"/>
+          <p:cNvPr id="10" name="Badge 175"/>
           <p:cNvSpPr/>
           <p:nvPr/>
         </p:nvSpPr>
@@ -9562,7 +11574,7 @@
       </p:sp>
       <p:sp>
         <p:nvSpPr>
-          <p:cNvPr id="11" name="Text 154"/>
+          <p:cNvPr id="11" name="Text 176"/>
           <p:cNvSpPr txBox="1"/>
           <p:nvPr/>
         </p:nvSpPr>
@@ -9598,7 +11610,7 @@
       </p:sp>
       <p:sp>
         <p:nvSpPr>
-          <p:cNvPr id="12" name="Text 155"/>
+          <p:cNvPr id="12" name="Text 177"/>
           <p:cNvSpPr txBox="1"/>
           <p:nvPr/>
         </p:nvSpPr>
@@ -9658,7 +11670,7 @@
       </p:pic>
       <p:sp>
         <p:nvSpPr>
-          <p:cNvPr id="14" name="Card 156"/>
+          <p:cNvPr id="14" name="Card 178"/>
           <p:cNvSpPr/>
           <p:nvPr/>
         </p:nvSpPr>
@@ -9680,7 +11692,7 @@
       </p:sp>
       <p:sp>
         <p:nvSpPr>
-          <p:cNvPr id="15" name="Text 157"/>
+          <p:cNvPr id="15" name="Text 179"/>
           <p:cNvSpPr txBox="1"/>
           <p:nvPr/>
         </p:nvSpPr>
@@ -9723,444 +11735,6 @@
                 </a:solidFill>
               </a:rPr>
               <a:t>Топ-20 % → 60 %. Случайно: 5 % и 20 %</a:t>
-            </a:r>
-            <a:endParaRPr lang="en-US" sz="1400" dirty="0"/>
-          </a:p>
-        </p:txBody>
-      </p:sp>
-      <p:sp>
-        <p:nvSpPr>
-          <p:cNvPr id="25" name="Slide Number Placeholder 0"/>
-          <p:cNvSpPr>
-            <a:spLocks noGrp="1"/>
-          </p:cNvSpPr>
-          <p:nvPr>
-            <p:ph type="sldNum" sz="quarter" idx="4294967295"/>
-          </p:nvPr>
-        </p:nvSpPr>
-        <p:spPr>
-          <a:xfrm>
-            <a:off x="11064240" y="6419088"/>
-            <a:ext cx="576072" cy="274320"/>
-          </a:xfrm>
-          <a:prstGeom prst="rect">
-            <a:avLst/>
-          </a:prstGeom>
-          <a:extLst>
-            <a:ext uri="{C572A759-6A51-4108-AA02-DFA0A04FC94B}">
-              <ma14:wrappingTextBoxFlag xmlns:ma14="http://schemas.microsoft.com/office/mac/drawingml/2011/main" val="0"/>
-            </a:ext>
-          </a:extLst>
-        </p:spPr>
-        <p:txBody>
-          <a:bodyPr/>
-          <a:lstStyle>
-            <a:lvl1pPr>
-              <a:defRPr sz="1000">
-                <a:solidFill>
-                  <a:schemeClr val="accent5"/>
-                </a:solidFill>
-              </a:defRPr>
-            </a:lvl1pPr>
-          </a:lstStyle>
-          <a:p>
-            <a:pPr algn="r"/>
-            <a:fld id="{F7021451-1387-4CA6-816F-3879F97B5CBC}" type="slidenum">
-              <a:rPr b="0" lang="en-US"/>
-              <a:t>7</a:t>
-            </a:fld>
-            <a:endParaRPr lang="en-US"/>
-          </a:p>
-        </p:txBody>
-      </p:sp>
-    </p:spTree>
-  </p:cSld>
-  <p:clrMapOvr>
-    <a:masterClrMapping/>
-  </p:clrMapOvr>
-</p:sld>
-</file>
-
-<file path=ppt/slides/slide8.xml><?xml version="1.0" encoding="utf-8"?>
-<p:sld xmlns:a="http://schemas.openxmlformats.org/drawingml/2006/main" xmlns:r="http://schemas.openxmlformats.org/officeDocument/2006/relationships" xmlns:p="http://schemas.openxmlformats.org/presentationml/2006/main">
-  <p:cSld name="Slide 8">
-    <p:spTree>
-      <p:nvGrpSpPr>
-        <p:cNvPr id="1" name=""/>
-        <p:cNvGrpSpPr/>
-        <p:nvPr/>
-      </p:nvGrpSpPr>
-      <p:grpSpPr>
-        <a:xfrm>
-          <a:off x="0" y="0"/>
-          <a:ext cx="0" cy="0"/>
-          <a:chOff x="0" y="0"/>
-          <a:chExt cx="0" cy="0"/>
-        </a:xfrm>
-      </p:grpSpPr>
-      <p:sp>
-        <p:nvSpPr>
-          <p:cNvPr id="2" name="Text 0"/>
-          <p:cNvSpPr/>
-          <p:nvPr>
-            <p:ph idx="100" type="title" hasCustomPrompt="1"/>
-          </p:nvPr>
-        </p:nvSpPr>
-        <p:spPr>
-          <a:xfrm>
-            <a:off x="548640" y="365760"/>
-            <a:ext cx="11064240" cy="777240"/>
-          </a:xfrm>
-          <a:prstGeom prst="rect">
-            <a:avLst/>
-          </a:prstGeom>
-          <a:noFill/>
-          <a:ln/>
-        </p:spPr>
-        <p:txBody>
-          <a:bodyPr wrap="square" lIns="0" tIns="0" rIns="0" bIns="0" rtlCol="0" anchor="ctr"/>
-          <a:lstStyle/>
-          <a:p>
-            <a:pPr algn="l" indent="0" marL="0">
-              <a:buNone/>
-            </a:pPr>
-            <a:r>
-              <a:rPr lang="en-US" sz="3200" b="1" dirty="0">
-                <a:solidFill>
-                  <a:schemeClr val="tx1"/>
-                </a:solidFill>
-              </a:rPr>
-              <a:t>Где базовая модель ошибается</a:t>
-            </a:r>
-            <a:endParaRPr lang="en-US" sz="3200" dirty="0"/>
-          </a:p>
-        </p:txBody>
-      </p:sp>
-      <p:pic>
-        <p:nvPicPr>
-          <p:cNvPr id="3" name="Method chart" descr="ROC-AUC базовой модели внутри каждого способа закупки">    </p:cNvPr>
-          <p:cNvPicPr>
-            <a:picLocks noChangeAspect="1"/>
-          </p:cNvPicPr>
-          <p:nvPr/>
-        </p:nvPicPr>
-        <p:blipFill>
-          <a:blip r:embed="rId1"/>
-          <a:stretch>
-            <a:fillRect/>
-          </a:stretch>
-        </p:blipFill>
-        <p:spPr>
-          <a:xfrm>
-            <a:off x="548640" y="1325880"/>
-            <a:ext cx="6035040" cy="3429000"/>
-          </a:xfrm>
-          <a:prstGeom prst="rect">
-            <a:avLst/>
-          </a:prstGeom>
-        </p:spPr>
-      </p:pic>
-      <p:pic>
-        <p:nvPicPr>
-          <p:cNvPr id="4" name="Value chart" descr="Полнота базовой модели по четвертям суммы закупки">    </p:cNvPr>
-          <p:cNvPicPr>
-            <a:picLocks noChangeAspect="1"/>
-          </p:cNvPicPr>
-          <p:nvPr/>
-        </p:nvPicPr>
-        <p:blipFill>
-          <a:blip r:embed="rId2"/>
-          <a:stretch>
-            <a:fillRect/>
-          </a:stretch>
-        </p:blipFill>
-        <p:spPr>
-          <a:xfrm>
-            <a:off x="6858000" y="1325880"/>
-            <a:ext cx="4800600" cy="3429000"/>
-          </a:xfrm>
-          <a:prstGeom prst="rect">
-            <a:avLst/>
-          </a:prstGeom>
-        </p:spPr>
-      </p:pic>
-      <p:sp>
-        <p:nvSpPr>
-          <p:cNvPr id="5" name="Card 158"/>
-          <p:cNvSpPr/>
-          <p:nvPr/>
-        </p:nvSpPr>
-        <p:spPr>
-          <a:xfrm>
-            <a:off x="548640" y="4937760"/>
-            <a:ext cx="3611880" cy="1280160"/>
-          </a:xfrm>
-          <a:prstGeom prst="roundRect">
-            <a:avLst>
-              <a:gd name="adj" fmla="val 5714"/>
-            </a:avLst>
-          </a:prstGeom>
-          <a:solidFill>
-            <a:schemeClr val="bg2"/>
-          </a:solidFill>
-          <a:ln/>
-        </p:spPr>
-      </p:sp>
-      <p:sp>
-        <p:nvSpPr>
-          <p:cNvPr id="6" name="Text 159"/>
-          <p:cNvSpPr txBox="1"/>
-          <p:nvPr/>
-        </p:nvSpPr>
-        <p:spPr>
-          <a:xfrm>
-            <a:off x="731520" y="5029200"/>
-            <a:ext cx="3246120" cy="320040"/>
-          </a:xfrm>
-          <a:prstGeom prst="rect">
-            <a:avLst/>
-          </a:prstGeom>
-          <a:noFill/>
-          <a:ln/>
-        </p:spPr>
-        <p:txBody>
-          <a:bodyPr wrap="square" lIns="0" tIns="0" rIns="0" bIns="0" rtlCol="0" anchor="t"/>
-          <a:lstStyle/>
-          <a:p>
-            <a:pPr indent="0" marL="0">
-              <a:buNone/>
-            </a:pPr>
-            <a:r>
-              <a:rPr lang="en-US" sz="1600" b="1" dirty="0">
-                <a:solidFill>
-                  <a:schemeClr val="accent1"/>
-                </a:solidFill>
-              </a:rPr>
-              <a:t>Работает в одном способе</a:t>
-            </a:r>
-            <a:endParaRPr lang="en-US" sz="1600" dirty="0"/>
-          </a:p>
-        </p:txBody>
-      </p:sp>
-      <p:sp>
-        <p:nvSpPr>
-          <p:cNvPr id="7" name="Text 160"/>
-          <p:cNvSpPr txBox="1"/>
-          <p:nvPr/>
-        </p:nvSpPr>
-        <p:spPr>
-          <a:xfrm>
-            <a:off x="731520" y="5394960"/>
-            <a:ext cx="3246120" cy="777240"/>
-          </a:xfrm>
-          <a:prstGeom prst="rect">
-            <a:avLst/>
-          </a:prstGeom>
-          <a:noFill/>
-          <a:ln/>
-        </p:spPr>
-        <p:txBody>
-          <a:bodyPr wrap="square" lIns="0" tIns="0" rIns="0" bIns="0" rtlCol="0" anchor="t"/>
-          <a:lstStyle/>
-          <a:p>
-            <a:pPr indent="0" marL="0">
-              <a:buNone/>
-            </a:pPr>
-            <a:r>
-              <a:rPr lang="en-US" sz="1400" dirty="0">
-                <a:solidFill>
-                  <a:schemeClr val="tx2"/>
-                </a:solidFill>
-              </a:rPr>
-              <a:t>Хорошо ранжирует внутри запросов ценовых предложений (0,80), в малых видах конкурсов почти случайно</a:t>
-            </a:r>
-            <a:endParaRPr lang="en-US" sz="1400" dirty="0"/>
-          </a:p>
-        </p:txBody>
-      </p:sp>
-      <p:sp>
-        <p:nvSpPr>
-          <p:cNvPr id="8" name="Card 161"/>
-          <p:cNvSpPr/>
-          <p:nvPr/>
-        </p:nvSpPr>
-        <p:spPr>
-          <a:xfrm>
-            <a:off x="4297680" y="4937760"/>
-            <a:ext cx="3611880" cy="1280160"/>
-          </a:xfrm>
-          <a:prstGeom prst="roundRect">
-            <a:avLst>
-              <a:gd name="adj" fmla="val 5714"/>
-            </a:avLst>
-          </a:prstGeom>
-          <a:solidFill>
-            <a:schemeClr val="bg2"/>
-          </a:solidFill>
-          <a:ln/>
-        </p:spPr>
-      </p:sp>
-      <p:sp>
-        <p:nvSpPr>
-          <p:cNvPr id="9" name="Text 162"/>
-          <p:cNvSpPr txBox="1"/>
-          <p:nvPr/>
-        </p:nvSpPr>
-        <p:spPr>
-          <a:xfrm>
-            <a:off x="4480560" y="5029200"/>
-            <a:ext cx="3246120" cy="320040"/>
-          </a:xfrm>
-          <a:prstGeom prst="rect">
-            <a:avLst/>
-          </a:prstGeom>
-          <a:noFill/>
-          <a:ln/>
-        </p:spPr>
-        <p:txBody>
-          <a:bodyPr wrap="square" lIns="0" tIns="0" rIns="0" bIns="0" rtlCol="0" anchor="t"/>
-          <a:lstStyle/>
-          <a:p>
-            <a:pPr indent="0" marL="0">
-              <a:buNone/>
-            </a:pPr>
-            <a:r>
-              <a:rPr lang="en-US" sz="1600" b="1" dirty="0">
-                <a:solidFill>
-                  <a:schemeClr val="accent1"/>
-                </a:solidFill>
-              </a:rPr>
-              <a:t>Не видит дешёвые закупки</a:t>
-            </a:r>
-            <a:endParaRPr lang="en-US" sz="1600" dirty="0"/>
-          </a:p>
-        </p:txBody>
-      </p:sp>
-      <p:sp>
-        <p:nvSpPr>
-          <p:cNvPr id="10" name="Text 163"/>
-          <p:cNvSpPr txBox="1"/>
-          <p:nvPr/>
-        </p:nvSpPr>
-        <p:spPr>
-          <a:xfrm>
-            <a:off x="4480560" y="5394960"/>
-            <a:ext cx="3246120" cy="777240"/>
-          </a:xfrm>
-          <a:prstGeom prst="rect">
-            <a:avLst/>
-          </a:prstGeom>
-          <a:noFill/>
-          <a:ln/>
-        </p:spPr>
-        <p:txBody>
-          <a:bodyPr wrap="square" lIns="0" tIns="0" rIns="0" bIns="0" rtlCol="0" anchor="t"/>
-          <a:lstStyle/>
-          <a:p>
-            <a:pPr indent="0" marL="0">
-              <a:buNone/>
-            </a:pPr>
-            <a:r>
-              <a:rPr lang="en-US" sz="1400" dirty="0">
-                <a:solidFill>
-                  <a:schemeClr val="tx2"/>
-                </a:solidFill>
-              </a:rPr>
-              <a:t>В самой дешёвой четверти поймано 0 % срывов, в самой дорогой 64 %</a:t>
-            </a:r>
-            <a:endParaRPr lang="en-US" sz="1400" dirty="0"/>
-          </a:p>
-        </p:txBody>
-      </p:sp>
-      <p:sp>
-        <p:nvSpPr>
-          <p:cNvPr id="11" name="Card 164"/>
-          <p:cNvSpPr/>
-          <p:nvPr/>
-        </p:nvSpPr>
-        <p:spPr>
-          <a:xfrm>
-            <a:off x="8046720" y="4937760"/>
-            <a:ext cx="3611880" cy="1280160"/>
-          </a:xfrm>
-          <a:prstGeom prst="roundRect">
-            <a:avLst>
-              <a:gd name="adj" fmla="val 5714"/>
-            </a:avLst>
-          </a:prstGeom>
-          <a:solidFill>
-            <a:schemeClr val="bg2"/>
-          </a:solidFill>
-          <a:ln/>
-        </p:spPr>
-      </p:sp>
-      <p:sp>
-        <p:nvSpPr>
-          <p:cNvPr id="12" name="Text 165"/>
-          <p:cNvSpPr txBox="1"/>
-          <p:nvPr/>
-        </p:nvSpPr>
-        <p:spPr>
-          <a:xfrm>
-            <a:off x="8229600" y="5029200"/>
-            <a:ext cx="3246120" cy="320040"/>
-          </a:xfrm>
-          <a:prstGeom prst="rect">
-            <a:avLst/>
-          </a:prstGeom>
-          <a:noFill/>
-          <a:ln/>
-        </p:spPr>
-        <p:txBody>
-          <a:bodyPr wrap="square" lIns="0" tIns="0" rIns="0" bIns="0" rtlCol="0" anchor="t"/>
-          <a:lstStyle/>
-          <a:p>
-            <a:pPr indent="0" marL="0">
-              <a:buNone/>
-            </a:pPr>
-            <a:r>
-              <a:rPr lang="en-US" sz="1600" b="1" dirty="0">
-                <a:solidFill>
-                  <a:schemeClr val="accent1"/>
-                </a:solidFill>
-              </a:rPr>
-              <a:t>Оценки не вероятности</a:t>
-            </a:r>
-            <a:endParaRPr lang="en-US" sz="1600" dirty="0"/>
-          </a:p>
-        </p:txBody>
-      </p:sp>
-      <p:sp>
-        <p:nvSpPr>
-          <p:cNvPr id="13" name="Text 166"/>
-          <p:cNvSpPr txBox="1"/>
-          <p:nvPr/>
-        </p:nvSpPr>
-        <p:spPr>
-          <a:xfrm>
-            <a:off x="8229600" y="5394960"/>
-            <a:ext cx="3246120" cy="777240"/>
-          </a:xfrm>
-          <a:prstGeom prst="rect">
-            <a:avLst/>
-          </a:prstGeom>
-          <a:noFill/>
-          <a:ln/>
-        </p:spPr>
-        <p:txBody>
-          <a:bodyPr wrap="square" lIns="0" tIns="0" rIns="0" bIns="0" rtlCol="0" anchor="t"/>
-          <a:lstStyle/>
-          <a:p>
-            <a:pPr indent="0" marL="0">
-              <a:buNone/>
-            </a:pPr>
-            <a:r>
-              <a:rPr lang="en-US" sz="1400" dirty="0">
-                <a:solidFill>
-                  <a:schemeClr val="tx2"/>
-                </a:solidFill>
-              </a:rPr>
-              <a:t>Веса классов завышают их: средняя оценка 0,42 при реальной доле 0,07. Только для ранжирования</a:t>
             </a:r>
             <a:endParaRPr lang="en-US" sz="1400" dirty="0"/>
           </a:p>
@@ -10265,335 +11839,95 @@
             <a:r>
               <a:rPr lang="en-US" sz="3200" b="1" dirty="0">
                 <a:solidFill>
-                  <a:schemeClr val="bg1"/>
-                </a:solidFill>
-              </a:rPr>
-              <a:t>Выводы и следующий этап</a:t>
+                  <a:schemeClr val="tx1"/>
+                </a:solidFill>
+              </a:rPr>
+              <a:t>Где базовая модель ошибается</a:t>
             </a:r>
             <a:endParaRPr lang="en-US" sz="3200" dirty="0"/>
           </a:p>
         </p:txBody>
       </p:sp>
-      <p:sp>
-        <p:nvSpPr>
-          <p:cNvPr id="3" name="Text 167"/>
-          <p:cNvSpPr txBox="1"/>
-          <p:nvPr/>
-        </p:nvSpPr>
-        <p:spPr>
-          <a:xfrm>
-            <a:off x="548640" y="1463040"/>
-            <a:ext cx="5577840" cy="274320"/>
-          </a:xfrm>
-          <a:prstGeom prst="rect">
-            <a:avLst/>
-          </a:prstGeom>
-          <a:noFill/>
-          <a:ln/>
-        </p:spPr>
-        <p:txBody>
-          <a:bodyPr wrap="square" lIns="0" tIns="0" rIns="0" bIns="0" rtlCol="0" anchor="t"/>
-          <a:lstStyle/>
-          <a:p>
-            <a:pPr indent="0" marL="0">
-              <a:buNone/>
-            </a:pPr>
-            <a:r>
-              <a:rPr lang="en-US" sz="1200" b="1" spc="300" kern="0" dirty="0">
-                <a:solidFill>
-                  <a:schemeClr val="accent1"/>
-                </a:solidFill>
-              </a:rPr>
-              <a:t>ЧТО ПОКАЗАЛ ПЕРВЫЙ ЭКСПЕРИМЕНТ</a:t>
-            </a:r>
-            <a:endParaRPr lang="en-US" sz="1200" dirty="0"/>
-          </a:p>
-        </p:txBody>
-      </p:sp>
-      <p:sp>
-        <p:nvSpPr>
-          <p:cNvPr id="4" name="Text 168"/>
-          <p:cNvSpPr txBox="1"/>
-          <p:nvPr/>
-        </p:nvSpPr>
-        <p:spPr>
-          <a:xfrm>
-            <a:off x="548640" y="1920240"/>
-            <a:ext cx="1463040" cy="822960"/>
-          </a:xfrm>
-          <a:prstGeom prst="rect">
-            <a:avLst/>
-          </a:prstGeom>
-          <a:noFill/>
-          <a:ln/>
-        </p:spPr>
-        <p:txBody>
-          <a:bodyPr wrap="square" lIns="0" tIns="0" rIns="0" bIns="0" rtlCol="0" anchor="ctr"/>
-          <a:lstStyle/>
-          <a:p>
-            <a:pPr indent="0" marL="0">
-              <a:buNone/>
-            </a:pPr>
-            <a:r>
-              <a:rPr lang="en-US" sz="4000" b="1" dirty="0">
-                <a:solidFill>
-                  <a:schemeClr val="bg1"/>
-                </a:solidFill>
-              </a:rPr>
-              <a:t>0,79</a:t>
-            </a:r>
-            <a:endParaRPr lang="en-US" sz="4000" dirty="0"/>
-          </a:p>
-        </p:txBody>
-      </p:sp>
-      <p:sp>
-        <p:nvSpPr>
-          <p:cNvPr id="5" name="Text 169"/>
-          <p:cNvSpPr txBox="1"/>
-          <p:nvPr/>
-        </p:nvSpPr>
-        <p:spPr>
-          <a:xfrm>
-            <a:off x="2103120" y="1920240"/>
-            <a:ext cx="4023360" cy="822960"/>
-          </a:xfrm>
-          <a:prstGeom prst="rect">
-            <a:avLst/>
-          </a:prstGeom>
-          <a:noFill/>
-          <a:ln/>
-        </p:spPr>
-        <p:txBody>
-          <a:bodyPr wrap="square" lIns="0" tIns="0" rIns="0" bIns="0" rtlCol="0" anchor="ctr"/>
-          <a:lstStyle/>
-          <a:p>
-            <a:pPr indent="0" marL="0">
-              <a:buNone/>
-            </a:pPr>
-            <a:r>
-              <a:rPr lang="en-US" sz="1400" dirty="0">
-                <a:solidFill>
-                  <a:schemeClr val="bg2"/>
-                </a:solidFill>
-              </a:rPr>
-              <a:t>ROC-AUC на новых мартовских данных: информация на момент выбора победителя предсказывает срыв договора</a:t>
-            </a:r>
-            <a:endParaRPr lang="en-US" sz="1400" dirty="0"/>
-          </a:p>
-        </p:txBody>
-      </p:sp>
-      <p:sp>
-        <p:nvSpPr>
-          <p:cNvPr id="6" name="Text 170"/>
-          <p:cNvSpPr txBox="1"/>
-          <p:nvPr/>
-        </p:nvSpPr>
-        <p:spPr>
-          <a:xfrm>
-            <a:off x="548640" y="3108960"/>
-            <a:ext cx="1463040" cy="822960"/>
-          </a:xfrm>
-          <a:prstGeom prst="rect">
-            <a:avLst/>
-          </a:prstGeom>
-          <a:noFill/>
-          <a:ln/>
-        </p:spPr>
-        <p:txBody>
-          <a:bodyPr wrap="square" lIns="0" tIns="0" rIns="0" bIns="0" rtlCol="0" anchor="ctr"/>
-          <a:lstStyle/>
-          <a:p>
-            <a:pPr indent="0" marL="0">
-              <a:buNone/>
-            </a:pPr>
-            <a:r>
-              <a:rPr lang="en-US" sz="4000" b="1" dirty="0">
-                <a:solidFill>
-                  <a:schemeClr val="bg1"/>
-                </a:solidFill>
-              </a:rPr>
-              <a:t>5×</a:t>
-            </a:r>
-            <a:endParaRPr lang="en-US" sz="4000" dirty="0"/>
-          </a:p>
-        </p:txBody>
-      </p:sp>
-      <p:sp>
-        <p:nvSpPr>
-          <p:cNvPr id="7" name="Text 171"/>
-          <p:cNvSpPr txBox="1"/>
-          <p:nvPr/>
-        </p:nvSpPr>
-        <p:spPr>
-          <a:xfrm>
-            <a:off x="2103120" y="3108960"/>
-            <a:ext cx="4023360" cy="822960"/>
-          </a:xfrm>
-          <a:prstGeom prst="rect">
-            <a:avLst/>
-          </a:prstGeom>
-          <a:noFill/>
-          <a:ln/>
-        </p:spPr>
-        <p:txBody>
-          <a:bodyPr wrap="square" lIns="0" tIns="0" rIns="0" bIns="0" rtlCol="0" anchor="ctr"/>
-          <a:lstStyle/>
-          <a:p>
-            <a:pPr indent="0" marL="0">
-              <a:buNone/>
-            </a:pPr>
-            <a:r>
-              <a:rPr lang="en-US" sz="1400" dirty="0">
-                <a:solidFill>
-                  <a:schemeClr val="bg2"/>
-                </a:solidFill>
-              </a:rPr>
-              <a:t>лучше случайной проверки: в верхних 5 % списка находится 26 % всех срывов</a:t>
-            </a:r>
-            <a:endParaRPr lang="en-US" sz="1400" dirty="0"/>
-          </a:p>
-        </p:txBody>
-      </p:sp>
-      <p:sp>
-        <p:nvSpPr>
-          <p:cNvPr id="8" name="Text 172"/>
-          <p:cNvSpPr txBox="1"/>
-          <p:nvPr/>
-        </p:nvSpPr>
-        <p:spPr>
-          <a:xfrm>
-            <a:off x="548640" y="4297680"/>
-            <a:ext cx="1463040" cy="822960"/>
-          </a:xfrm>
-          <a:prstGeom prst="rect">
-            <a:avLst/>
-          </a:prstGeom>
-          <a:noFill/>
-          <a:ln/>
-        </p:spPr>
-        <p:txBody>
-          <a:bodyPr wrap="square" lIns="0" tIns="0" rIns="0" bIns="0" rtlCol="0" anchor="ctr"/>
-          <a:lstStyle/>
-          <a:p>
-            <a:pPr indent="0" marL="0">
-              <a:buNone/>
-            </a:pPr>
-            <a:r>
-              <a:rPr lang="en-US" sz="4000" b="1" dirty="0">
-                <a:solidFill>
-                  <a:schemeClr val="bg1"/>
-                </a:solidFill>
-              </a:rPr>
-              <a:t>0,83</a:t>
-            </a:r>
-            <a:endParaRPr lang="en-US" sz="4000" dirty="0"/>
-          </a:p>
-        </p:txBody>
-      </p:sp>
-      <p:sp>
-        <p:nvSpPr>
-          <p:cNvPr id="9" name="Text 173"/>
-          <p:cNvSpPr txBox="1"/>
-          <p:nvPr/>
-        </p:nvSpPr>
-        <p:spPr>
-          <a:xfrm>
-            <a:off x="2103120" y="4297680"/>
-            <a:ext cx="4023360" cy="822960"/>
-          </a:xfrm>
-          <a:prstGeom prst="rect">
-            <a:avLst/>
-          </a:prstGeom>
-          <a:noFill/>
-          <a:ln/>
-        </p:spPr>
-        <p:txBody>
-          <a:bodyPr wrap="square" lIns="0" tIns="0" rIns="0" bIns="0" rtlCol="0" anchor="ctr"/>
-          <a:lstStyle/>
-          <a:p>
-            <a:pPr indent="0" marL="0">
-              <a:buNone/>
-            </a:pPr>
-            <a:r>
-              <a:rPr lang="en-US" sz="1400" dirty="0">
-                <a:solidFill>
-                  <a:schemeClr val="bg2"/>
-                </a:solidFill>
-              </a:rPr>
-              <a:t>ROC-AUC для строгой метки срыва: сигнал не является шумом разметки</a:t>
-            </a:r>
-            <a:endParaRPr lang="en-US" sz="1400" dirty="0"/>
-          </a:p>
-        </p:txBody>
-      </p:sp>
-      <p:sp>
-        <p:nvSpPr>
-          <p:cNvPr id="10" name="Text 174"/>
-          <p:cNvSpPr txBox="1"/>
-          <p:nvPr/>
-        </p:nvSpPr>
-        <p:spPr>
-          <a:xfrm>
-            <a:off x="548640" y="5532120"/>
-            <a:ext cx="5577840" cy="640080"/>
-          </a:xfrm>
-          <a:prstGeom prst="rect">
-            <a:avLst/>
-          </a:prstGeom>
-          <a:noFill/>
-          <a:ln/>
-        </p:spPr>
-        <p:txBody>
-          <a:bodyPr wrap="square" lIns="0" tIns="0" rIns="0" bIns="0" rtlCol="0" anchor="t"/>
-          <a:lstStyle/>
-          <a:p>
-            <a:pPr indent="0" marL="0">
-              <a:buNone/>
-            </a:pPr>
-            <a:r>
-              <a:rPr lang="en-US" sz="1400" i="1" dirty="0">
-                <a:solidFill>
-                  <a:schemeClr val="bg2"/>
-                </a:solidFill>
-              </a:rPr>
-              <a:t>Ограничения: линейная модель, один квартал данных, нет истории поставщиков, оценки не откалиброваны.</a:t>
-            </a:r>
-            <a:endParaRPr lang="en-US" sz="1400" dirty="0"/>
-          </a:p>
-        </p:txBody>
-      </p:sp>
-      <p:sp>
-        <p:nvSpPr>
-          <p:cNvPr id="11" name="Card 175"/>
+      <p:pic>
+        <p:nvPicPr>
+          <p:cNvPr id="3" name="Method chart" descr="ROC-AUC базовой модели внутри каждого способа закупки">    </p:cNvPr>
+          <p:cNvPicPr>
+            <a:picLocks noChangeAspect="1"/>
+          </p:cNvPicPr>
+          <p:nvPr/>
+        </p:nvPicPr>
+        <p:blipFill>
+          <a:blip r:embed="rId1"/>
+          <a:stretch>
+            <a:fillRect/>
+          </a:stretch>
+        </p:blipFill>
+        <p:spPr>
+          <a:xfrm>
+            <a:off x="548640" y="1325880"/>
+            <a:ext cx="6035040" cy="3429000"/>
+          </a:xfrm>
+          <a:prstGeom prst="rect">
+            <a:avLst/>
+          </a:prstGeom>
+        </p:spPr>
+      </p:pic>
+      <p:pic>
+        <p:nvPicPr>
+          <p:cNvPr id="4" name="Value chart" descr="Полнота базовой модели по четвертям суммы закупки">    </p:cNvPr>
+          <p:cNvPicPr>
+            <a:picLocks noChangeAspect="1"/>
+          </p:cNvPicPr>
+          <p:nvPr/>
+        </p:nvPicPr>
+        <p:blipFill>
+          <a:blip r:embed="rId2"/>
+          <a:stretch>
+            <a:fillRect/>
+          </a:stretch>
+        </p:blipFill>
+        <p:spPr>
+          <a:xfrm>
+            <a:off x="6858000" y="1325880"/>
+            <a:ext cx="4800600" cy="3429000"/>
+          </a:xfrm>
+          <a:prstGeom prst="rect">
+            <a:avLst/>
+          </a:prstGeom>
+        </p:spPr>
+      </p:pic>
+      <p:sp>
+        <p:nvSpPr>
+          <p:cNvPr id="5" name="Card 180"/>
           <p:cNvSpPr/>
           <p:nvPr/>
         </p:nvSpPr>
         <p:spPr>
           <a:xfrm>
-            <a:off x="6583680" y="1463040"/>
-            <a:ext cx="5029200" cy="4709160"/>
+            <a:off x="548640" y="4937760"/>
+            <a:ext cx="3611880" cy="1280160"/>
           </a:xfrm>
           <a:prstGeom prst="roundRect">
             <a:avLst>
-              <a:gd name="adj" fmla="val 1553"/>
+              <a:gd name="adj" fmla="val 5714"/>
             </a:avLst>
           </a:prstGeom>
           <a:solidFill>
-            <a:schemeClr val="tx2"/>
+            <a:schemeClr val="bg2"/>
           </a:solidFill>
           <a:ln/>
         </p:spPr>
       </p:sp>
       <p:sp>
         <p:nvSpPr>
-          <p:cNvPr id="12" name="Text 176"/>
-          <p:cNvSpPr txBox="1"/>
-          <p:nvPr/>
-        </p:nvSpPr>
-        <p:spPr>
-          <a:xfrm>
-            <a:off x="6858000" y="1691640"/>
-            <a:ext cx="4480560" cy="274320"/>
+          <p:cNvPr id="6" name="Text 181"/>
+          <p:cNvSpPr txBox="1"/>
+          <p:nvPr/>
+        </p:nvSpPr>
+        <p:spPr>
+          <a:xfrm>
+            <a:off x="731520" y="5029200"/>
+            <a:ext cx="3246120" cy="320040"/>
           </a:xfrm>
           <a:prstGeom prst="rect">
             <a:avLst/>
@@ -10609,68 +11943,142 @@
               <a:buNone/>
             </a:pPr>
             <a:r>
-              <a:rPr lang="en-US" sz="1200" b="1" spc="300" kern="0" dirty="0">
-                <a:solidFill>
-                  <a:schemeClr val="bg1"/>
-                </a:solidFill>
-              </a:rPr>
-              <a:t>СЛЕДУЮЩИЙ ЭТАП · ASSIGNMENT 3</a:t>
-            </a:r>
-            <a:endParaRPr lang="en-US" sz="1200" dirty="0"/>
-          </a:p>
-        </p:txBody>
-      </p:sp>
-      <p:sp>
-        <p:nvSpPr>
-          <p:cNvPr id="13" name="Badge 177"/>
+              <a:rPr lang="en-US" sz="1600" b="1" dirty="0">
+                <a:solidFill>
+                  <a:schemeClr val="accent1"/>
+                </a:solidFill>
+              </a:rPr>
+              <a:t>Работает в одном способе</a:t>
+            </a:r>
+            <a:endParaRPr lang="en-US" sz="1600" dirty="0"/>
+          </a:p>
+        </p:txBody>
+      </p:sp>
+      <p:sp>
+        <p:nvSpPr>
+          <p:cNvPr id="7" name="Text 182"/>
+          <p:cNvSpPr txBox="1"/>
+          <p:nvPr/>
+        </p:nvSpPr>
+        <p:spPr>
+          <a:xfrm>
+            <a:off x="731520" y="5394960"/>
+            <a:ext cx="3246120" cy="777240"/>
+          </a:xfrm>
+          <a:prstGeom prst="rect">
+            <a:avLst/>
+          </a:prstGeom>
+          <a:noFill/>
+          <a:ln/>
+        </p:spPr>
+        <p:txBody>
+          <a:bodyPr wrap="square" lIns="0" tIns="0" rIns="0" bIns="0" rtlCol="0" anchor="t"/>
+          <a:lstStyle/>
+          <a:p>
+            <a:pPr indent="0" marL="0">
+              <a:buNone/>
+            </a:pPr>
+            <a:r>
+              <a:rPr lang="en-US" sz="1400" dirty="0">
+                <a:solidFill>
+                  <a:schemeClr val="tx2"/>
+                </a:solidFill>
+              </a:rPr>
+              <a:t>Хорошо ранжирует внутри запросов ценовых предложений (0,80), в малых видах конкурсов почти случайно</a:t>
+            </a:r>
+            <a:endParaRPr lang="en-US" sz="1400" dirty="0"/>
+          </a:p>
+        </p:txBody>
+      </p:sp>
+      <p:sp>
+        <p:nvSpPr>
+          <p:cNvPr id="8" name="Card 183"/>
           <p:cNvSpPr/>
           <p:nvPr/>
         </p:nvSpPr>
         <p:spPr>
           <a:xfrm>
-            <a:off x="6858000" y="2331720"/>
-            <a:ext cx="384048" cy="384048"/>
-          </a:xfrm>
-          <a:prstGeom prst="ellipse">
-            <a:avLst/>
+            <a:off x="4297680" y="4937760"/>
+            <a:ext cx="3611880" cy="1280160"/>
+          </a:xfrm>
+          <a:prstGeom prst="roundRect">
+            <a:avLst>
+              <a:gd name="adj" fmla="val 5714"/>
+            </a:avLst>
           </a:prstGeom>
           <a:solidFill>
-            <a:schemeClr val="accent1"/>
+            <a:schemeClr val="bg2"/>
           </a:solidFill>
           <a:ln/>
         </p:spPr>
       </p:sp>
       <p:sp>
         <p:nvSpPr>
-          <p:cNvPr id="14" name="Text 178"/>
-          <p:cNvSpPr txBox="1"/>
-          <p:nvPr/>
-        </p:nvSpPr>
-        <p:spPr>
-          <a:xfrm>
-            <a:off x="6858000" y="2331720"/>
-            <a:ext cx="384048" cy="384048"/>
-          </a:xfrm>
-          <a:prstGeom prst="rect">
-            <a:avLst/>
-          </a:prstGeom>
-          <a:noFill/>
-          <a:ln/>
-        </p:spPr>
-        <p:txBody>
-          <a:bodyPr wrap="square" lIns="0" tIns="0" rIns="0" bIns="0" rtlCol="0" anchor="ctr"/>
-          <a:lstStyle/>
-          <a:p>
-            <a:pPr algn="ctr" indent="0" marL="0">
-              <a:buNone/>
-            </a:pPr>
-            <a:r>
-              <a:rPr lang="en-US" sz="1400" b="1" dirty="0">
-                <a:solidFill>
-                  <a:schemeClr val="bg1"/>
-                </a:solidFill>
-              </a:rPr>
-              <a:t>1</a:t>
+          <p:cNvPr id="9" name="Text 184"/>
+          <p:cNvSpPr txBox="1"/>
+          <p:nvPr/>
+        </p:nvSpPr>
+        <p:spPr>
+          <a:xfrm>
+            <a:off x="4480560" y="5029200"/>
+            <a:ext cx="3246120" cy="320040"/>
+          </a:xfrm>
+          <a:prstGeom prst="rect">
+            <a:avLst/>
+          </a:prstGeom>
+          <a:noFill/>
+          <a:ln/>
+        </p:spPr>
+        <p:txBody>
+          <a:bodyPr wrap="square" lIns="0" tIns="0" rIns="0" bIns="0" rtlCol="0" anchor="t"/>
+          <a:lstStyle/>
+          <a:p>
+            <a:pPr indent="0" marL="0">
+              <a:buNone/>
+            </a:pPr>
+            <a:r>
+              <a:rPr lang="en-US" sz="1600" b="1" dirty="0">
+                <a:solidFill>
+                  <a:schemeClr val="accent1"/>
+                </a:solidFill>
+              </a:rPr>
+              <a:t>Не видит дешёвые закупки</a:t>
+            </a:r>
+            <a:endParaRPr lang="en-US" sz="1600" dirty="0"/>
+          </a:p>
+        </p:txBody>
+      </p:sp>
+      <p:sp>
+        <p:nvSpPr>
+          <p:cNvPr id="10" name="Text 185"/>
+          <p:cNvSpPr txBox="1"/>
+          <p:nvPr/>
+        </p:nvSpPr>
+        <p:spPr>
+          <a:xfrm>
+            <a:off x="4480560" y="5394960"/>
+            <a:ext cx="3246120" cy="777240"/>
+          </a:xfrm>
+          <a:prstGeom prst="rect">
+            <a:avLst/>
+          </a:prstGeom>
+          <a:noFill/>
+          <a:ln/>
+        </p:spPr>
+        <p:txBody>
+          <a:bodyPr wrap="square" lIns="0" tIns="0" rIns="0" bIns="0" rtlCol="0" anchor="t"/>
+          <a:lstStyle/>
+          <a:p>
+            <a:pPr indent="0" marL="0">
+              <a:buNone/>
+            </a:pPr>
+            <a:r>
+              <a:rPr lang="en-US" sz="1400" dirty="0">
+                <a:solidFill>
+                  <a:schemeClr val="tx2"/>
+                </a:solidFill>
+              </a:rPr>
+              <a:t>В самой дешёвой четверти поймано 0 % срывов, в самой дорогой 64 %</a:t>
             </a:r>
             <a:endParaRPr lang="en-US" sz="1400" dirty="0"/>
           </a:p>
@@ -10678,23 +12086,81 @@
       </p:sp>
       <p:sp>
         <p:nvSpPr>
-          <p:cNvPr id="15" name="Text 179"/>
-          <p:cNvSpPr txBox="1"/>
-          <p:nvPr/>
-        </p:nvSpPr>
-        <p:spPr>
-          <a:xfrm>
-            <a:off x="7406640" y="2240280"/>
-            <a:ext cx="3977640" cy="685800"/>
-          </a:xfrm>
-          <a:prstGeom prst="rect">
-            <a:avLst/>
-          </a:prstGeom>
-          <a:noFill/>
-          <a:ln/>
-        </p:spPr>
-        <p:txBody>
-          <a:bodyPr wrap="square" lIns="0" tIns="0" rIns="0" bIns="0" rtlCol="0" anchor="ctr"/>
+          <p:cNvPr id="11" name="Card 186"/>
+          <p:cNvSpPr/>
+          <p:nvPr/>
+        </p:nvSpPr>
+        <p:spPr>
+          <a:xfrm>
+            <a:off x="8046720" y="4937760"/>
+            <a:ext cx="3611880" cy="1280160"/>
+          </a:xfrm>
+          <a:prstGeom prst="roundRect">
+            <a:avLst>
+              <a:gd name="adj" fmla="val 5714"/>
+            </a:avLst>
+          </a:prstGeom>
+          <a:solidFill>
+            <a:schemeClr val="bg2"/>
+          </a:solidFill>
+          <a:ln/>
+        </p:spPr>
+      </p:sp>
+      <p:sp>
+        <p:nvSpPr>
+          <p:cNvPr id="12" name="Text 187"/>
+          <p:cNvSpPr txBox="1"/>
+          <p:nvPr/>
+        </p:nvSpPr>
+        <p:spPr>
+          <a:xfrm>
+            <a:off x="8229600" y="5029200"/>
+            <a:ext cx="3246120" cy="320040"/>
+          </a:xfrm>
+          <a:prstGeom prst="rect">
+            <a:avLst/>
+          </a:prstGeom>
+          <a:noFill/>
+          <a:ln/>
+        </p:spPr>
+        <p:txBody>
+          <a:bodyPr wrap="square" lIns="0" tIns="0" rIns="0" bIns="0" rtlCol="0" anchor="t"/>
+          <a:lstStyle/>
+          <a:p>
+            <a:pPr indent="0" marL="0">
+              <a:buNone/>
+            </a:pPr>
+            <a:r>
+              <a:rPr lang="en-US" sz="1600" b="1" dirty="0">
+                <a:solidFill>
+                  <a:schemeClr val="accent1"/>
+                </a:solidFill>
+              </a:rPr>
+              <a:t>Оценки не вероятности</a:t>
+            </a:r>
+            <a:endParaRPr lang="en-US" sz="1600" dirty="0"/>
+          </a:p>
+        </p:txBody>
+      </p:sp>
+      <p:sp>
+        <p:nvSpPr>
+          <p:cNvPr id="13" name="Text 188"/>
+          <p:cNvSpPr txBox="1"/>
+          <p:nvPr/>
+        </p:nvSpPr>
+        <p:spPr>
+          <a:xfrm>
+            <a:off x="8229600" y="5394960"/>
+            <a:ext cx="3246120" cy="777240"/>
+          </a:xfrm>
+          <a:prstGeom prst="rect">
+            <a:avLst/>
+          </a:prstGeom>
+          <a:noFill/>
+          <a:ln/>
+        </p:spPr>
+        <p:txBody>
+          <a:bodyPr wrap="square" lIns="0" tIns="0" rIns="0" bIns="0" rtlCol="0" anchor="t"/>
           <a:lstStyle/>
           <a:p>
             <a:pPr indent="0" marL="0">
@@ -10703,286 +12169,10 @@
             <a:r>
               <a:rPr lang="en-US" sz="1400" dirty="0">
                 <a:solidFill>
-                  <a:schemeClr val="bg1"/>
-                </a:solidFill>
-              </a:rPr>
-              <a:t>Градиентный бустинг (LightGBM / CatBoost) с подбором гиперпараметров</a:t>
-            </a:r>
-            <a:endParaRPr lang="en-US" sz="1400" dirty="0"/>
-          </a:p>
-        </p:txBody>
-      </p:sp>
-      <p:sp>
-        <p:nvSpPr>
-          <p:cNvPr id="16" name="Badge 180"/>
-          <p:cNvSpPr/>
-          <p:nvPr/>
-        </p:nvSpPr>
-        <p:spPr>
-          <a:xfrm>
-            <a:off x="6858000" y="3264408"/>
-            <a:ext cx="384048" cy="384048"/>
-          </a:xfrm>
-          <a:prstGeom prst="ellipse">
-            <a:avLst/>
-          </a:prstGeom>
-          <a:solidFill>
-            <a:schemeClr val="accent1"/>
-          </a:solidFill>
-          <a:ln/>
-        </p:spPr>
-      </p:sp>
-      <p:sp>
-        <p:nvSpPr>
-          <p:cNvPr id="17" name="Text 181"/>
-          <p:cNvSpPr txBox="1"/>
-          <p:nvPr/>
-        </p:nvSpPr>
-        <p:spPr>
-          <a:xfrm>
-            <a:off x="6858000" y="3264408"/>
-            <a:ext cx="384048" cy="384048"/>
-          </a:xfrm>
-          <a:prstGeom prst="rect">
-            <a:avLst/>
-          </a:prstGeom>
-          <a:noFill/>
-          <a:ln/>
-        </p:spPr>
-        <p:txBody>
-          <a:bodyPr wrap="square" lIns="0" tIns="0" rIns="0" bIns="0" rtlCol="0" anchor="ctr"/>
-          <a:lstStyle/>
-          <a:p>
-            <a:pPr algn="ctr" indent="0" marL="0">
-              <a:buNone/>
-            </a:pPr>
-            <a:r>
-              <a:rPr lang="en-US" sz="1400" b="1" dirty="0">
-                <a:solidFill>
-                  <a:schemeClr val="bg1"/>
-                </a:solidFill>
-              </a:rPr>
-              <a:t>2</a:t>
-            </a:r>
-            <a:endParaRPr lang="en-US" sz="1400" dirty="0"/>
-          </a:p>
-        </p:txBody>
-      </p:sp>
-      <p:sp>
-        <p:nvSpPr>
-          <p:cNvPr id="18" name="Text 182"/>
-          <p:cNvSpPr txBox="1"/>
-          <p:nvPr/>
-        </p:nvSpPr>
-        <p:spPr>
-          <a:xfrm>
-            <a:off x="7406640" y="3172968"/>
-            <a:ext cx="3977640" cy="685800"/>
-          </a:xfrm>
-          <a:prstGeom prst="rect">
-            <a:avLst/>
-          </a:prstGeom>
-          <a:noFill/>
-          <a:ln/>
-        </p:spPr>
-        <p:txBody>
-          <a:bodyPr wrap="square" lIns="0" tIns="0" rIns="0" bIns="0" rtlCol="0" anchor="ctr"/>
-          <a:lstStyle/>
-          <a:p>
-            <a:pPr indent="0" marL="0">
-              <a:buNone/>
-            </a:pPr>
-            <a:r>
-              <a:rPr lang="en-US" sz="1400" dirty="0">
-                <a:solidFill>
-                  <a:schemeClr val="bg1"/>
-                </a:solidFill>
-              </a:rPr>
-              <a:t>Калибровка вероятностей для оценок риска</a:t>
-            </a:r>
-            <a:endParaRPr lang="en-US" sz="1400" dirty="0"/>
-          </a:p>
-        </p:txBody>
-      </p:sp>
-      <p:sp>
-        <p:nvSpPr>
-          <p:cNvPr id="19" name="Badge 183"/>
-          <p:cNvSpPr/>
-          <p:nvPr/>
-        </p:nvSpPr>
-        <p:spPr>
-          <a:xfrm>
-            <a:off x="6858000" y="4197096"/>
-            <a:ext cx="384048" cy="384048"/>
-          </a:xfrm>
-          <a:prstGeom prst="ellipse">
-            <a:avLst/>
-          </a:prstGeom>
-          <a:solidFill>
-            <a:schemeClr val="accent1"/>
-          </a:solidFill>
-          <a:ln/>
-        </p:spPr>
-      </p:sp>
-      <p:sp>
-        <p:nvSpPr>
-          <p:cNvPr id="20" name="Text 184"/>
-          <p:cNvSpPr txBox="1"/>
-          <p:nvPr/>
-        </p:nvSpPr>
-        <p:spPr>
-          <a:xfrm>
-            <a:off x="6858000" y="4197096"/>
-            <a:ext cx="384048" cy="384048"/>
-          </a:xfrm>
-          <a:prstGeom prst="rect">
-            <a:avLst/>
-          </a:prstGeom>
-          <a:noFill/>
-          <a:ln/>
-        </p:spPr>
-        <p:txBody>
-          <a:bodyPr wrap="square" lIns="0" tIns="0" rIns="0" bIns="0" rtlCol="0" anchor="ctr"/>
-          <a:lstStyle/>
-          <a:p>
-            <a:pPr algn="ctr" indent="0" marL="0">
-              <a:buNone/>
-            </a:pPr>
-            <a:r>
-              <a:rPr lang="en-US" sz="1400" b="1" dirty="0">
-                <a:solidFill>
-                  <a:schemeClr val="bg1"/>
-                </a:solidFill>
-              </a:rPr>
-              <a:t>3</a:t>
-            </a:r>
-            <a:endParaRPr lang="en-US" sz="1400" dirty="0"/>
-          </a:p>
-        </p:txBody>
-      </p:sp>
-      <p:sp>
-        <p:nvSpPr>
-          <p:cNvPr id="21" name="Text 185"/>
-          <p:cNvSpPr txBox="1"/>
-          <p:nvPr/>
-        </p:nvSpPr>
-        <p:spPr>
-          <a:xfrm>
-            <a:off x="7406640" y="4105656"/>
-            <a:ext cx="3977640" cy="685800"/>
-          </a:xfrm>
-          <a:prstGeom prst="rect">
-            <a:avLst/>
-          </a:prstGeom>
-          <a:noFill/>
-          <a:ln/>
-        </p:spPr>
-        <p:txBody>
-          <a:bodyPr wrap="square" lIns="0" tIns="0" rIns="0" bIns="0" rtlCol="0" anchor="ctr"/>
-          <a:lstStyle/>
-          <a:p>
-            <a:pPr indent="0" marL="0">
-              <a:buNone/>
-            </a:pPr>
-            <a:r>
-              <a:rPr lang="en-US" sz="1400" dirty="0">
-                <a:solidFill>
-                  <a:schemeClr val="bg1"/>
-                </a:solidFill>
-              </a:rPr>
-              <a:t>Дообученный мультиязычный трансформер на названиях лотов вместе с табличной моделью</a:t>
-            </a:r>
-            <a:endParaRPr lang="en-US" sz="1400" dirty="0"/>
-          </a:p>
-        </p:txBody>
-      </p:sp>
-      <p:sp>
-        <p:nvSpPr>
-          <p:cNvPr id="22" name="Badge 186"/>
-          <p:cNvSpPr/>
-          <p:nvPr/>
-        </p:nvSpPr>
-        <p:spPr>
-          <a:xfrm>
-            <a:off x="6858000" y="5129784"/>
-            <a:ext cx="384048" cy="384048"/>
-          </a:xfrm>
-          <a:prstGeom prst="ellipse">
-            <a:avLst/>
-          </a:prstGeom>
-          <a:solidFill>
-            <a:schemeClr val="accent1"/>
-          </a:solidFill>
-          <a:ln/>
-        </p:spPr>
-      </p:sp>
-      <p:sp>
-        <p:nvSpPr>
-          <p:cNvPr id="23" name="Text 187"/>
-          <p:cNvSpPr txBox="1"/>
-          <p:nvPr/>
-        </p:nvSpPr>
-        <p:spPr>
-          <a:xfrm>
-            <a:off x="6858000" y="5129784"/>
-            <a:ext cx="384048" cy="384048"/>
-          </a:xfrm>
-          <a:prstGeom prst="rect">
-            <a:avLst/>
-          </a:prstGeom>
-          <a:noFill/>
-          <a:ln/>
-        </p:spPr>
-        <p:txBody>
-          <a:bodyPr wrap="square" lIns="0" tIns="0" rIns="0" bIns="0" rtlCol="0" anchor="ctr"/>
-          <a:lstStyle/>
-          <a:p>
-            <a:pPr algn="ctr" indent="0" marL="0">
-              <a:buNone/>
-            </a:pPr>
-            <a:r>
-              <a:rPr lang="en-US" sz="1400" b="1" dirty="0">
-                <a:solidFill>
-                  <a:schemeClr val="bg1"/>
-                </a:solidFill>
-              </a:rPr>
-              <a:t>4</a:t>
-            </a:r>
-            <a:endParaRPr lang="en-US" sz="1400" dirty="0"/>
-          </a:p>
-        </p:txBody>
-      </p:sp>
-      <p:sp>
-        <p:nvSpPr>
-          <p:cNvPr id="24" name="Text 188"/>
-          <p:cNvSpPr txBox="1"/>
-          <p:nvPr/>
-        </p:nvSpPr>
-        <p:spPr>
-          <a:xfrm>
-            <a:off x="7406640" y="5038344"/>
-            <a:ext cx="3977640" cy="685800"/>
-          </a:xfrm>
-          <a:prstGeom prst="rect">
-            <a:avLst/>
-          </a:prstGeom>
-          <a:noFill/>
-          <a:ln/>
-        </p:spPr>
-        <p:txBody>
-          <a:bodyPr wrap="square" lIns="0" tIns="0" rIns="0" bIns="0" rtlCol="0" anchor="ctr"/>
-          <a:lstStyle/>
-          <a:p>
-            <a:pPr indent="0" marL="0">
-              <a:buNone/>
-            </a:pPr>
-            <a:r>
-              <a:rPr lang="en-US" sz="1400" dirty="0">
-                <a:solidFill>
-                  <a:schemeClr val="bg1"/>
-                </a:solidFill>
-              </a:rPr>
-              <a:t>Оценка по сегментам: способы, кроме запроса цен, и дешёвые закупки</a:t>
+                  <a:schemeClr val="tx2"/>
+                </a:solidFill>
+              </a:rPr>
+              <a:t>Веса классов завышают их: средняя оценка 0,42 при реальной доле 0,07. Только для ранжирования</a:t>
             </a:r>
             <a:endParaRPr lang="en-US" sz="1400" dirty="0"/>
           </a:p>
@@ -11018,7 +12208,7 @@
             <a:lvl1pPr>
               <a:defRPr sz="1000">
                 <a:solidFill>
-                  <a:schemeClr val="bg2"/>
+                  <a:schemeClr val="accent5"/>
                 </a:solidFill>
               </a:defRPr>
             </a:lvl1pPr>
